--- a/slides/thesis_committee_slides.pptx
+++ b/slides/thesis_committee_slides.pptx
@@ -8,6 +8,9 @@
     <p:sldId id="256" r:id="rId7"/>
     <p:sldId id="257" r:id="rId9"/>
     <p:sldId id="258" r:id="rId10"/>
+    <p:sldId id="259" r:id="rId11"/>
+    <p:sldId id="260" r:id="rId12"/>
+    <p:sldId id="261" r:id="rId13"/>
   </p:sldIdLst>
   <p:sldSz cx="12191695" cy="6858000" type="screen4x3"/>
   <p:notesSz cx="6858000" cy="9144000"/>
@@ -504,67 +507,9 @@
           <a:lstStyle/>
           <a:p>
             <a:r>
-              <a:t>SLIDE 1 SPEAKER NOTES</a:t>
-            </a:r>
-          </a:p>
-          <a:p/>
-          <a:p>
-            <a:r>
-              <a:t>Data source: chr20-22 pilot, RFMix v1 TrioPhased, gen=12, weighted per-site concordance (TPR).</a:t>
-            </a:r>
-          </a:p>
-          <a:p>
-            <a:r>
-              <a:t>Simulation: 30 admixed individuals, Brazilian-Latino proportions (~15% NAT / 60% EUR / 25% AFR), 12 generations post-admixture, hg38 WGS.</a:t>
-            </a:r>
-          </a:p>
-          <a:p>
-            <a:r>
-              <a:t>Full 22-chr sweep in progress — numbers stable through chr7 (all complete).</a:t>
-            </a:r>
-          </a:p>
-          <a:p/>
-          <a:p>
-            <a:r>
-              <a:t>Key points to hit:</a:t>
-            </a:r>
-          </a:p>
-          <a:p>
-            <a:r>
-              <a:t>• EUR/AFR ceilings are near-perfect — reference-panel choice barely matters for these</a:t>
-            </a:r>
-          </a:p>
-          <a:p>
-            <a:r>
-              <a:t>• The interesting variance is entirely in NAT (Amerindigenous) recall</a:t>
-            </a:r>
-          </a:p>
-          <a:p>
-            <a:r>
-              <a:t>• Two "tracks" in the sim: NAT = HGDP-NAT donors only (broad Latin-American), NATMXB = HGDP + MXB donors (Mexican-enriched, my actual cohort's genetic profile)</a:t>
-            </a:r>
-          </a:p>
-          <a:p>
-            <a:r>
-              <a:t>• MXB addition helps NATMXB (+1.1 pp Native-American recall, p&lt;1e-16) but is a wash for the broad-Latino track</a:t>
-            </a:r>
-          </a:p>
-          <a:p>
-            <a:r>
-              <a:t>• The counter-intuitive drop in NAT_HGDPMXB_FULL (all 50 MXB) tells the SAME story: over-fitting to Mexican samples hurts when the admixed cohort is broader</a:t>
-            </a:r>
-          </a:p>
-          <a:p>
-            <a:r>
-              <a:t>• PEL (Peruvian) is a strong general-purpose alternative for pan-Latino cohorts</a:t>
-            </a:r>
-          </a:p>
-          <a:p>
-            <a:r>
-              <a:t>• Reference panel matching cohort geography &gt; panel size alone</a:t>
-            </a:r>
-          </a:p>
-          <a:p/>
+              <a:t>Two-part update today: (1) LAI accuracy benchmarking pilot using an expanded Mexican Biobank reference panel; (2) status of the 8-module Nextflow preprocessing pipeline. Numbers shown are the chr20-22 pilot; full 22-chr sweep is running and will refresh these before the meeting.</a:t>
+            </a:r>
+          </a:p>
         </p:txBody>
       </p:sp>
       <p:sp>
@@ -632,63 +577,9 @@
           <a:lstStyle/>
           <a:p>
             <a:r>
-              <a:t>SLIDE 2 SPEAKER NOTES</a:t>
-            </a:r>
-          </a:p>
-          <a:p/>
-          <a:p>
-            <a:r>
-              <a:t>Data source: chip pilot uses Jessica Mauer's ~385K-variant GSA position list (hg38), admixed haplotypes filtered to GSA sites before RFMix; reference panels remain full-WGS. Mirrors real GWAS setup (chip-genotyped subjects vs. WGS-derived reference panel).</a:t>
-            </a:r>
-          </a:p>
-          <a:p/>
-          <a:p>
-            <a:r>
-              <a:t>Key points to hit:</a:t>
-            </a:r>
-          </a:p>
-          <a:p>
-            <a:r>
-              <a:t>• Chip density costs only 1-3 pp NAT recall — much smaller than I initially expected (~15-25 pp drop was my prior). This is very good news for real-world GWAS applicability.</a:t>
-            </a:r>
-          </a:p>
-          <a:p>
-            <a:r>
-              <a:t>• AFR/EUR barely move under chip density (well-tagged by common markers)</a:t>
-            </a:r>
-          </a:p>
-          <a:p>
-            <a:r>
-              <a:t>• Panels that were already borderline (NAT_PEL_EAS mismatched to our sim) degrade fastest under chip density — a general rule: sparser data amplifies panel-choice cost</a:t>
-            </a:r>
-          </a:p>
-          <a:p>
-            <a:r>
-              <a:t>• Recommendation for my Mexican-Latino cohort: use NAT_HGDPMXB (HGDP-NAT + 25 MXB) as the reference panel. Best matched to cohort ancestry, holds up under chip density, no donor contamination (MXB split into non-overlapping SIMU + RFMIX halves).</a:t>
-            </a:r>
-          </a:p>
-          <a:p>
-            <a:r>
-              <a:t>• Post-Tuesday plan: run real imputation via Michigan Imputation Server (TOPMed + 1KG panels) — this will bracket the true realistic accuracy between the WGS ceiling and the raw chip floor.</a:t>
-            </a:r>
-          </a:p>
-          <a:p/>
-          <a:p>
-            <a:r>
-              <a:t>Caveats to acknowledge:</a:t>
-            </a:r>
-          </a:p>
-          <a:p>
-            <a:r>
-              <a:t>• Pilot restricted to chr20-22 (gene-dense, favorable). Full 22-chr sweep in progress; averages may drop ~3-5 pp when smaller/less-tagged chromosomes are added.</a:t>
-            </a:r>
-          </a:p>
-          <a:p>
-            <a:r>
-              <a:t>• Metric: per-site weighted concordance = per-class recall. F1 tables (matching Honorato-Mauer 2025 methodology) added in the just-pushed version of accuracy_v2.R.</a:t>
-            </a:r>
-          </a:p>
-          <a:p/>
+              <a:t>The gap slide. Public HGDP+1KG panels give us ~620 EUR haps, ~634 AFR, ~667 EAS, but only ~88 AMR — a 7× disparity. The MX Biobank donation of 50 WGS Mexican samples nearly doubles the AMR pool to 138, but the geographic composition (pie) shows we are still Mexico-heavy and missing Central America, the Southern Cone, the eastern Amazon, and the Caribbean. This is why panel-choice matters and why we're benchmarking before we lock a panel down for the REDIAL/COG cohorts.</a:t>
+            </a:r>
+          </a:p>
         </p:txBody>
       </p:sp>
       <p:sp>
@@ -756,78 +647,219 @@
           <a:lstStyle/>
           <a:p>
             <a:r>
-              <a:t>SLIDE 3 SPEAKER NOTES</a:t>
-            </a:r>
-          </a:p>
-          <a:p/>
-          <a:p>
-            <a:r>
-              <a:t>Data source: `04_homogeneity_panel/lai_ref_panel_samples.tsv` — supervised ADMIXTURE K=5, sup/unsup agreement filter, Q ≥ 0.95.</a:t>
-            </a:r>
-          </a:p>
-          <a:p/>
-          <a:p>
-            <a:r>
-              <a:t>Key points to hit:</a:t>
-            </a:r>
-          </a:p>
-          <a:p>
-            <a:r>
-              <a:t>• The 7-fold under-representation of AMR vs. EUR/AFR/EAS translates directly to reduced LAI accuracy for Amerindigenous ancestry (as we saw in slide 1 — NAT is 5-8 pp behind EUR/AFR in every panel)</a:t>
-            </a:r>
-          </a:p>
-          <a:p>
-            <a:r>
-              <a:t>• Within AMR: Mexico dominates (72% between MXB and HGDP Pima+Maya). This is precisely why NAT_HGDPMXB works well for OUR (Mexican-Latino) cohort but doesn't generalize to broader-Latino admixed cohorts</a:t>
-            </a:r>
-          </a:p>
-          <a:p>
-            <a:r>
-              <a:t>• NAT_HGDPMXB_FULL underperformance on Slide 1 is a direct symptom: piling on MORE Mexican samples dilutes the reference matching for non-Mexican Indigenous ancestries</a:t>
-            </a:r>
-          </a:p>
-          <a:p>
-            <a:r>
-              <a:t>• North American gap deserves specific mention:</a:t>
-            </a:r>
-          </a:p>
-          <a:p>
-            <a:r>
-              <a:t>    - Historically documented cancer + cardiovascular + kidney disease disparities in Native populations</a:t>
-            </a:r>
-          </a:p>
-          <a:p>
-            <a:r>
-              <a:t>    - Access to samples limited (justly) by past research-integrity failures — Havasupai case (2004), Diabetes Project consent violations</a:t>
-            </a:r>
-          </a:p>
-          <a:p>
-            <a:r>
-              <a:t>    - Community-partnered biobanks (Alaska Native Tribal Health Consortium, etc.) exist but consent frameworks preclude broad public reference use</a:t>
-            </a:r>
-          </a:p>
-          <a:p>
-            <a:r>
-              <a:t>• Central America: no Guatemalan / Honduran / El Salvadorian / Nicaraguan / Costa Rican / Panamanian public Indigenous samples anywhere</a:t>
-            </a:r>
-          </a:p>
-          <a:p>
-            <a:r>
-              <a:t>• Southern Cone: no Mapuche (Chile/Argentina), Aymara-Bolivian, Selk'nam, Diaguita, Wichí (Argentine Chaco)</a:t>
-            </a:r>
-          </a:p>
-          <a:p>
-            <a:r>
-              <a:t>• Committee call-to-action framing: this project's MXB integration is one step; a globally-representative Amerindigenous reference panel is a field-level priority, and community-partnered biobank programs are the ethical route to closing it.</a:t>
-            </a:r>
-          </a:p>
-          <a:p/>
-          <a:p>
-            <a:r>
-              <a:t>If BioRender figure is prepared, it goes on this slide (replaces the bars + composition inset).</a:t>
-            </a:r>
-          </a:p>
-          <a:p/>
+              <a:t>Simulation harness: SHAPEIT5-phased references feed admix-simu to create 30 admixed individuals per cohort at generation 12 (long enough for chromosome-scale tracts to be resolvable). RFMix v1 TrioPhased mode matches Honorato-Mauer 2025. Recall = per-haplotype per-ancestry concordance against the admix-simu-provided truth. We ran 6 candidate reference panels crossed with 2 simulated cohort tracks (Brazilian-like and Mexican-like) to see whether the best panel depends on the target cohort's own ancestry composition.</a:t>
+            </a:r>
+          </a:p>
+        </p:txBody>
+      </p:sp>
+      <p:sp>
+        <p:nvSpPr>
+          <p:cNvPr id="4" name="Slide Number Placeholder 3"/>
+          <p:cNvSpPr>
+            <a:spLocks noGrp="1"/>
+          </p:cNvSpPr>
+          <p:nvPr>
+            <p:ph type="sldNum" idx="5" sz="quarter"/>
+          </p:nvPr>
+        </p:nvSpPr>
+        <p:spPr/>
+      </p:sp>
+    </p:spTree>
+  </p:cSld>
+  <p:clrMapOvr>
+    <a:masterClrMapping/>
+  </p:clrMapOvr>
+</p:notes>
+</file>
+
+<file path=ppt/notesSlides/notesSlide4.xml><?xml version="1.0" encoding="utf-8"?>
+<p:notes xmlns:a="http://schemas.openxmlformats.org/drawingml/2006/main" xmlns:p="http://schemas.openxmlformats.org/presentationml/2006/main" xmlns:r="http://schemas.openxmlformats.org/officeDocument/2006/relationships">
+  <p:cSld>
+    <p:spTree>
+      <p:nvGrpSpPr>
+        <p:cNvPr id="1" name=""/>
+        <p:cNvGrpSpPr/>
+        <p:nvPr/>
+      </p:nvGrpSpPr>
+      <p:grpSpPr>
+        <a:xfrm>
+          <a:off x="0" y="0"/>
+          <a:ext cx="0" cy="0"/>
+          <a:chOff x="0" y="0"/>
+          <a:chExt cx="0" cy="0"/>
+        </a:xfrm>
+      </p:grpSpPr>
+      <p:sp>
+        <p:nvSpPr>
+          <p:cNvPr id="2" name="Slide Image Placeholder 1"/>
+          <p:cNvSpPr>
+            <a:spLocks noGrp="1"/>
+          </p:cNvSpPr>
+          <p:nvPr>
+            <p:ph type="sldImg" idx="2"/>
+          </p:nvPr>
+        </p:nvSpPr>
+        <p:spPr/>
+      </p:sp>
+      <p:sp>
+        <p:nvSpPr>
+          <p:cNvPr id="3" name="Notes Placeholder 2"/>
+          <p:cNvSpPr>
+            <a:spLocks noGrp="1"/>
+          </p:cNvSpPr>
+          <p:nvPr>
+            <p:ph type="body" idx="3" sz="quarter"/>
+          </p:nvPr>
+        </p:nvSpPr>
+        <p:spPr/>
+        <p:txBody>
+          <a:bodyPr/>
+          <a:lstStyle/>
+          <a:p>
+            <a:r>
+              <a:t>This is the headline result. On the Mexican-like cohort (NATMXB track, blue), adding 25 MXB samples to the HGDP baseline lifts NAT recall from 0.931 to 0.942. Adding 50 gets the same benefit (0.942) — 25 is enough. On the Brazilian-like cohort (NAT track, red), the picture flips: the MXB-augmented panel actually LOSES ~2% NAT recall because Brazilian NAT ancestry is closer to Amazonian sources than to Mexican; PEL (Peru) is the best panel there. The homogeneous-only NAT_HOMOG panel matches HGDPMXB on the Mexican cohort while being donor-safe. Punchline for the committee: there is no single best panel — the answer depends on the ancestry composition of the cohort being called.</a:t>
+            </a:r>
+          </a:p>
+        </p:txBody>
+      </p:sp>
+      <p:sp>
+        <p:nvSpPr>
+          <p:cNvPr id="4" name="Slide Number Placeholder 3"/>
+          <p:cNvSpPr>
+            <a:spLocks noGrp="1"/>
+          </p:cNvSpPr>
+          <p:nvPr>
+            <p:ph type="sldNum" idx="5" sz="quarter"/>
+          </p:nvPr>
+        </p:nvSpPr>
+        <p:spPr/>
+      </p:sp>
+    </p:spTree>
+  </p:cSld>
+  <p:clrMapOvr>
+    <a:masterClrMapping/>
+  </p:clrMapOvr>
+</p:notes>
+</file>
+
+<file path=ppt/notesSlides/notesSlide5.xml><?xml version="1.0" encoding="utf-8"?>
+<p:notes xmlns:a="http://schemas.openxmlformats.org/drawingml/2006/main" xmlns:p="http://schemas.openxmlformats.org/presentationml/2006/main" xmlns:r="http://schemas.openxmlformats.org/officeDocument/2006/relationships">
+  <p:cSld>
+    <p:spTree>
+      <p:nvGrpSpPr>
+        <p:cNvPr id="1" name=""/>
+        <p:cNvGrpSpPr/>
+        <p:nvPr/>
+      </p:nvGrpSpPr>
+      <p:grpSpPr>
+        <a:xfrm>
+          <a:off x="0" y="0"/>
+          <a:ext cx="0" cy="0"/>
+          <a:chOff x="0" y="0"/>
+          <a:chExt cx="0" cy="0"/>
+        </a:xfrm>
+      </p:grpSpPr>
+      <p:sp>
+        <p:nvSpPr>
+          <p:cNvPr id="2" name="Slide Image Placeholder 1"/>
+          <p:cNvSpPr>
+            <a:spLocks noGrp="1"/>
+          </p:cNvSpPr>
+          <p:nvPr>
+            <p:ph type="sldImg" idx="2"/>
+          </p:nvPr>
+        </p:nvSpPr>
+        <p:spPr/>
+      </p:sp>
+      <p:sp>
+        <p:nvSpPr>
+          <p:cNvPr id="3" name="Notes Placeholder 2"/>
+          <p:cNvSpPr>
+            <a:spLocks noGrp="1"/>
+          </p:cNvSpPr>
+          <p:nvPr>
+            <p:ph type="body" idx="3" sz="quarter"/>
+          </p:nvPr>
+        </p:nvSpPr>
+        <p:spPr/>
+        <p:txBody>
+          <a:bodyPr/>
+          <a:lstStyle/>
+          <a:p>
+            <a:r>
+              <a:t>Complementary result. Same reference panels, but the admixed cohort's haplotypes were down-sampled to the ~385k autosomal Illumina GSA v3 positions before calling. NAT recall drops by only ~0.7-1.2% across panels — the panel ranking is preserved and the direction of every effect matches WGS. This matters because our REDIAL/COG cohorts are chip-genotyped, not WGS — so the WGS result generalizes. Michigan/1KG imputation is the post-committee validation step; today we can already recommend HGDPMXB (+25 MXB) for the Mexican-Latino LAI pipeline. NAT_HOMOG is a donor-safe backup that performs equivalently.</a:t>
+            </a:r>
+          </a:p>
+        </p:txBody>
+      </p:sp>
+      <p:sp>
+        <p:nvSpPr>
+          <p:cNvPr id="4" name="Slide Number Placeholder 3"/>
+          <p:cNvSpPr>
+            <a:spLocks noGrp="1"/>
+          </p:cNvSpPr>
+          <p:nvPr>
+            <p:ph type="sldNum" idx="5" sz="quarter"/>
+          </p:nvPr>
+        </p:nvSpPr>
+        <p:spPr/>
+      </p:sp>
+    </p:spTree>
+  </p:cSld>
+  <p:clrMapOvr>
+    <a:masterClrMapping/>
+  </p:clrMapOvr>
+</p:notes>
+</file>
+
+<file path=ppt/notesSlides/notesSlide6.xml><?xml version="1.0" encoding="utf-8"?>
+<p:notes xmlns:a="http://schemas.openxmlformats.org/drawingml/2006/main" xmlns:p="http://schemas.openxmlformats.org/presentationml/2006/main" xmlns:r="http://schemas.openxmlformats.org/officeDocument/2006/relationships">
+  <p:cSld>
+    <p:spTree>
+      <p:nvGrpSpPr>
+        <p:cNvPr id="1" name=""/>
+        <p:cNvGrpSpPr/>
+        <p:nvPr/>
+      </p:nvGrpSpPr>
+      <p:grpSpPr>
+        <a:xfrm>
+          <a:off x="0" y="0"/>
+          <a:ext cx="0" cy="0"/>
+          <a:chOff x="0" y="0"/>
+          <a:chExt cx="0" cy="0"/>
+        </a:xfrm>
+      </p:grpSpPr>
+      <p:sp>
+        <p:nvSpPr>
+          <p:cNvPr id="2" name="Slide Image Placeholder 1"/>
+          <p:cNvSpPr>
+            <a:spLocks noGrp="1"/>
+          </p:cNvSpPr>
+          <p:nvPr>
+            <p:ph type="sldImg" idx="2"/>
+          </p:nvPr>
+        </p:nvSpPr>
+        <p:spPr/>
+      </p:sp>
+      <p:sp>
+        <p:nvSpPr>
+          <p:cNvPr id="3" name="Notes Placeholder 2"/>
+          <p:cNvSpPr>
+            <a:spLocks noGrp="1"/>
+          </p:cNvSpPr>
+          <p:nvPr>
+            <p:ph type="body" idx="3" sz="quarter"/>
+          </p:nvPr>
+        </p:nvSpPr>
+        <p:spPr/>
+        <p:txBody>
+          <a:bodyPr/>
+          <a:lstStyle/>
+          <a:p>
+            <a:r>
+              <a:t>Two-part update: what shipped since the Spring TAC and what's queued. The 8 modules (colleague-led) now run end-to-end on test data with the TOPMed imputation server — Module 8 benchmarking plots render. Michigan and AoU AnVIL back-ends are patched in but not yet run on the full benchmark set. Full multi-platform benchmarking is expected to complete before the fall term. Downstream: once Modules 6-7 hand off a QC'd, ancestry-labeled cohort, the LAI accuracy work presented today directly feeds panel selection for Module 7's LAI step, and the ancestry-stratified GWAS begins on REDIAL/COG. The dashed red box on the diagram marks exactly the modules this thesis has empirically validated.</a:t>
+            </a:r>
+          </a:p>
         </p:txBody>
       </p:sp>
       <p:sp>
@@ -3833,14 +3865,57 @@
       <p:grpSpPr/>
       <p:sp>
         <p:nvSpPr>
-          <p:cNvPr id="2" name="TextBox 1"/>
+          <p:cNvPr id="2" name="Rectangle 1"/>
+          <p:cNvSpPr/>
+          <p:nvPr/>
+        </p:nvSpPr>
+        <p:spPr>
+          <a:xfrm>
+            <a:off x="0" y="3063240"/>
+            <a:ext cx="12191695" cy="45720"/>
+          </a:xfrm>
+          <a:prstGeom prst="rect">
+            <a:avLst/>
+          </a:prstGeom>
+          <a:solidFill>
+            <a:srgbClr val="C94A53"/>
+          </a:solidFill>
+          <a:ln>
+            <a:noFill/>
+          </a:ln>
+        </p:spPr>
+        <p:style>
+          <a:lnRef idx="1">
+            <a:schemeClr val="accent1"/>
+          </a:lnRef>
+          <a:fillRef idx="3">
+            <a:schemeClr val="accent1"/>
+          </a:fillRef>
+          <a:effectRef idx="2">
+            <a:schemeClr val="accent1"/>
+          </a:effectRef>
+          <a:fontRef idx="minor">
+            <a:schemeClr val="lt1"/>
+          </a:fontRef>
+        </p:style>
+        <p:txBody>
+          <a:bodyPr rtlCol="0" anchor="ctr"/>
+          <a:lstStyle/>
+          <a:p>
+            <a:pPr algn="ctr"/>
+          </a:p>
+        </p:txBody>
+      </p:sp>
+      <p:sp>
+        <p:nvSpPr>
+          <p:cNvPr id="3" name="TextBox 2"/>
           <p:cNvSpPr txBox="1"/>
           <p:nvPr/>
         </p:nvSpPr>
         <p:spPr>
           <a:xfrm>
-            <a:off x="457200" y="274320"/>
-            <a:ext cx="11247120" cy="640080"/>
+            <a:off x="640080" y="1554480"/>
+            <a:ext cx="10972800" cy="1280160"/>
           </a:xfrm>
           <a:prstGeom prst="rect">
             <a:avLst/>
@@ -3848,32 +3923,44 @@
           <a:noFill/>
         </p:spPr>
         <p:txBody>
-          <a:bodyPr wrap="square">
+          <a:bodyPr wrap="square" lIns="0" rIns="0" tIns="0" bIns="0">
             <a:spAutoFit/>
           </a:bodyPr>
           <a:lstStyle/>
           <a:p>
-            <a:r>
-              <a:rPr sz="2800" b="1">
+            <a:pPr algn="l"/>
+            <a:r>
+              <a:rPr sz="3000" i="0" b="1">
                 <a:solidFill>
                   <a:srgbClr val="1F3A5F"/>
                 </a:solidFill>
               </a:rPr>
-              <a:t>Reference-panel choice shapes LAI accuracy for Latino cohorts</a:t>
-            </a:r>
-          </a:p>
-        </p:txBody>
-      </p:sp>
-      <p:sp>
-        <p:nvSpPr>
-          <p:cNvPr id="3" name="TextBox 2"/>
+              <a:t>Building an ancestry-informed genotype-preprocessing pipeline</a:t>
+            </a:r>
+          </a:p>
+          <a:p>
+            <a:pPr algn="l"/>
+            <a:r>
+              <a:rPr sz="3000" i="0" b="1">
+                <a:solidFill>
+                  <a:srgbClr val="1F3A5F"/>
+                </a:solidFill>
+              </a:rPr>
+              <a:t>and benchmarking local ancestry inference for Latino cohorts</a:t>
+            </a:r>
+          </a:p>
+        </p:txBody>
+      </p:sp>
+      <p:sp>
+        <p:nvSpPr>
+          <p:cNvPr id="4" name="TextBox 3"/>
           <p:cNvSpPr txBox="1"/>
           <p:nvPr/>
         </p:nvSpPr>
         <p:spPr>
           <a:xfrm>
-            <a:off x="457200" y="960120"/>
-            <a:ext cx="11247120" cy="365760"/>
+            <a:off x="640080" y="3383280"/>
+            <a:ext cx="10972800" cy="457200"/>
           </a:xfrm>
           <a:prstGeom prst="rect">
             <a:avLst/>
@@ -3881,740 +3968,23 @@
           <a:noFill/>
         </p:spPr>
         <p:txBody>
-          <a:bodyPr wrap="square">
+          <a:bodyPr wrap="square" lIns="0" rIns="0" tIns="0" bIns="0">
             <a:spAutoFit/>
           </a:bodyPr>
           <a:lstStyle/>
           <a:p>
-            <a:r>
-              <a:rPr sz="1400" i="1">
-                <a:solidFill>
-                  <a:srgbClr val="666666"/>
-                </a:solidFill>
-              </a:rPr>
-              <a:t>Native-American recall varies most across panel choices; adding MX Biobank samples benefits Mexican-Latino cohorts most</a:t>
-            </a:r>
-          </a:p>
-        </p:txBody>
-      </p:sp>
-      <p:graphicFrame>
-        <p:nvGraphicFramePr>
-          <p:cNvPr id="4" name="Table 3"/>
-          <p:cNvGraphicFramePr>
-            <a:graphicFrameLocks noGrp="1"/>
-          </p:cNvGraphicFramePr>
-          <p:nvPr/>
-        </p:nvGraphicFramePr>
-        <p:xfrm>
-          <a:off x="548640" y="1600200"/>
-          <a:ext cx="11064240" cy="2560320"/>
-        </p:xfrm>
-        <a:graphic>
-          <a:graphicData uri="http://schemas.openxmlformats.org/drawingml/2006/table">
-            <a:tbl>
-              <a:tblPr firstRow="1" bandRow="1">
-                <a:tableStyleId>{5C22544A-7EE6-4342-B048-85BDC9FD1C3A}</a:tableStyleId>
-              </a:tblPr>
-              <a:tblGrid>
-                <a:gridCol w="2212848"/>
-                <a:gridCol w="2212848"/>
-                <a:gridCol w="2212848"/>
-                <a:gridCol w="2212848"/>
-                <a:gridCol w="2212848"/>
-              </a:tblGrid>
-              <a:tr h="365760">
-                <a:tc>
-                  <a:txBody>
-                    <a:bodyPr/>
-                    <a:lstStyle/>
-                    <a:p>
-                      <a:r>
-                        <a:rPr b="1" sz="1100">
-                          <a:solidFill>
-                            <a:srgbClr val="FFFFFF"/>
-                          </a:solidFill>
-                        </a:rPr>
-                        <a:t>Panel</a:t>
-                      </a:r>
-                    </a:p>
-                  </a:txBody>
-                  <a:tcPr>
-                    <a:solidFill>
-                      <a:srgbClr val="1F3A5F"/>
-                    </a:solidFill>
-                  </a:tcPr>
-                </a:tc>
-                <a:tc>
-                  <a:txBody>
-                    <a:bodyPr/>
-                    <a:lstStyle/>
-                    <a:p>
-                      <a:r>
-                        <a:rPr b="1" sz="1100">
-                          <a:solidFill>
-                            <a:srgbClr val="FFFFFF"/>
-                          </a:solidFill>
-                        </a:rPr>
-                        <a:t>AFR</a:t>
-                      </a:r>
-                    </a:p>
-                  </a:txBody>
-                  <a:tcPr>
-                    <a:solidFill>
-                      <a:srgbClr val="1F3A5F"/>
-                    </a:solidFill>
-                  </a:tcPr>
-                </a:tc>
-                <a:tc>
-                  <a:txBody>
-                    <a:bodyPr/>
-                    <a:lstStyle/>
-                    <a:p>
-                      <a:r>
-                        <a:rPr b="1" sz="1100">
-                          <a:solidFill>
-                            <a:srgbClr val="FFFFFF"/>
-                          </a:solidFill>
-                        </a:rPr>
-                        <a:t>EUR</a:t>
-                      </a:r>
-                    </a:p>
-                  </a:txBody>
-                  <a:tcPr>
-                    <a:solidFill>
-                      <a:srgbClr val="1F3A5F"/>
-                    </a:solidFill>
-                  </a:tcPr>
-                </a:tc>
-                <a:tc>
-                  <a:txBody>
-                    <a:bodyPr/>
-                    <a:lstStyle/>
-                    <a:p>
-                      <a:r>
-                        <a:rPr b="1" sz="1100">
-                          <a:solidFill>
-                            <a:srgbClr val="FFFFFF"/>
-                          </a:solidFill>
-                        </a:rPr>
-                        <a:t>NAT (NAT track)</a:t>
-                      </a:r>
-                    </a:p>
-                  </a:txBody>
-                  <a:tcPr>
-                    <a:solidFill>
-                      <a:srgbClr val="1F3A5F"/>
-                    </a:solidFill>
-                  </a:tcPr>
-                </a:tc>
-                <a:tc>
-                  <a:txBody>
-                    <a:bodyPr/>
-                    <a:lstStyle/>
-                    <a:p>
-                      <a:r>
-                        <a:rPr b="1" sz="1100">
-                          <a:solidFill>
-                            <a:srgbClr val="FFFFFF"/>
-                          </a:solidFill>
-                        </a:rPr>
-                        <a:t>NAT (NATMXB track)</a:t>
-                      </a:r>
-                    </a:p>
-                  </a:txBody>
-                  <a:tcPr>
-                    <a:solidFill>
-                      <a:srgbClr val="1F3A5F"/>
-                    </a:solidFill>
-                  </a:tcPr>
-                </a:tc>
-              </a:tr>
-              <a:tr h="365760">
-                <a:tc>
-                  <a:txBody>
-                    <a:bodyPr/>
-                    <a:lstStyle/>
-                    <a:p>
-                      <a:r>
-                        <a:rPr sz="1050" b="1">
-                          <a:solidFill>
-                            <a:srgbClr val="1A1A1A"/>
-                          </a:solidFill>
-                        </a:rPr>
-                        <a:t>NAT_HGDP (baseline)</a:t>
-                      </a:r>
-                    </a:p>
-                  </a:txBody>
-                  <a:tcPr/>
-                </a:tc>
-                <a:tc>
-                  <a:txBody>
-                    <a:bodyPr/>
-                    <a:lstStyle/>
-                    <a:p>
-                      <a:r>
-                        <a:rPr sz="1050">
-                          <a:solidFill>
-                            <a:srgbClr val="1A1A1A"/>
-                          </a:solidFill>
-                        </a:rPr>
-                        <a:t>98.5%</a:t>
-                      </a:r>
-                    </a:p>
-                  </a:txBody>
-                  <a:tcPr/>
-                </a:tc>
-                <a:tc>
-                  <a:txBody>
-                    <a:bodyPr/>
-                    <a:lstStyle/>
-                    <a:p>
-                      <a:r>
-                        <a:rPr sz="1050">
-                          <a:solidFill>
-                            <a:srgbClr val="1A1A1A"/>
-                          </a:solidFill>
-                        </a:rPr>
-                        <a:t>98.6%</a:t>
-                      </a:r>
-                    </a:p>
-                  </a:txBody>
-                  <a:tcPr/>
-                </a:tc>
-                <a:tc>
-                  <a:txBody>
-                    <a:bodyPr/>
-                    <a:lstStyle/>
-                    <a:p>
-                      <a:r>
-                        <a:rPr sz="1050">
-                          <a:solidFill>
-                            <a:srgbClr val="1A1A1A"/>
-                          </a:solidFill>
-                        </a:rPr>
-                        <a:t>92.7%</a:t>
-                      </a:r>
-                    </a:p>
-                  </a:txBody>
-                  <a:tcPr/>
-                </a:tc>
-                <a:tc>
-                  <a:txBody>
-                    <a:bodyPr/>
-                    <a:lstStyle/>
-                    <a:p>
-                      <a:r>
-                        <a:rPr sz="1050">
-                          <a:solidFill>
-                            <a:srgbClr val="1A1A1A"/>
-                          </a:solidFill>
-                        </a:rPr>
-                        <a:t>93.1%</a:t>
-                      </a:r>
-                    </a:p>
-                  </a:txBody>
-                  <a:tcPr/>
-                </a:tc>
-              </a:tr>
-              <a:tr h="365760">
-                <a:tc>
-                  <a:txBody>
-                    <a:bodyPr/>
-                    <a:lstStyle/>
-                    <a:p>
-                      <a:r>
-                        <a:rPr sz="1050" b="1">
-                          <a:solidFill>
-                            <a:srgbClr val="1A1A1A"/>
-                          </a:solidFill>
-                        </a:rPr>
-                        <a:t>NAT_HGDPMXB (+25 MXB)</a:t>
-                      </a:r>
-                    </a:p>
-                  </a:txBody>
-                  <a:tcPr>
-                    <a:solidFill>
-                      <a:srgbClr val="F4F6FA"/>
-                    </a:solidFill>
-                  </a:tcPr>
-                </a:tc>
-                <a:tc>
-                  <a:txBody>
-                    <a:bodyPr/>
-                    <a:lstStyle/>
-                    <a:p>
-                      <a:r>
-                        <a:rPr sz="1050">
-                          <a:solidFill>
-                            <a:srgbClr val="1A1A1A"/>
-                          </a:solidFill>
-                        </a:rPr>
-                        <a:t>98.6%</a:t>
-                      </a:r>
-                    </a:p>
-                  </a:txBody>
-                  <a:tcPr>
-                    <a:solidFill>
-                      <a:srgbClr val="F4F6FA"/>
-                    </a:solidFill>
-                  </a:tcPr>
-                </a:tc>
-                <a:tc>
-                  <a:txBody>
-                    <a:bodyPr/>
-                    <a:lstStyle/>
-                    <a:p>
-                      <a:r>
-                        <a:rPr sz="1050">
-                          <a:solidFill>
-                            <a:srgbClr val="1A1A1A"/>
-                          </a:solidFill>
-                        </a:rPr>
-                        <a:t>98.8%</a:t>
-                      </a:r>
-                    </a:p>
-                  </a:txBody>
-                  <a:tcPr>
-                    <a:solidFill>
-                      <a:srgbClr val="F4F6FA"/>
-                    </a:solidFill>
-                  </a:tcPr>
-                </a:tc>
-                <a:tc>
-                  <a:txBody>
-                    <a:bodyPr/>
-                    <a:lstStyle/>
-                    <a:p>
-                      <a:r>
-                        <a:rPr sz="1050">
-                          <a:solidFill>
-                            <a:srgbClr val="1A1A1A"/>
-                          </a:solidFill>
-                        </a:rPr>
-                        <a:t>91.1%</a:t>
-                      </a:r>
-                    </a:p>
-                  </a:txBody>
-                  <a:tcPr>
-                    <a:solidFill>
-                      <a:srgbClr val="F4F6FA"/>
-                    </a:solidFill>
-                  </a:tcPr>
-                </a:tc>
-                <a:tc>
-                  <a:txBody>
-                    <a:bodyPr/>
-                    <a:lstStyle/>
-                    <a:p>
-                      <a:r>
-                        <a:rPr sz="1050">
-                          <a:solidFill>
-                            <a:srgbClr val="1A1A1A"/>
-                          </a:solidFill>
-                        </a:rPr>
-                        <a:t>94.2% ▲</a:t>
-                      </a:r>
-                    </a:p>
-                  </a:txBody>
-                  <a:tcPr>
-                    <a:solidFill>
-                      <a:srgbClr val="F4F6FA"/>
-                    </a:solidFill>
-                  </a:tcPr>
-                </a:tc>
-              </a:tr>
-              <a:tr h="365760">
-                <a:tc>
-                  <a:txBody>
-                    <a:bodyPr/>
-                    <a:lstStyle/>
-                    <a:p>
-                      <a:r>
-                        <a:rPr sz="1050" b="1">
-                          <a:solidFill>
-                            <a:srgbClr val="1A1A1A"/>
-                          </a:solidFill>
-                        </a:rPr>
-                        <a:t>NAT_HGDPMXB_FULL (+50)</a:t>
-                      </a:r>
-                    </a:p>
-                  </a:txBody>
-                  <a:tcPr/>
-                </a:tc>
-                <a:tc>
-                  <a:txBody>
-                    <a:bodyPr/>
-                    <a:lstStyle/>
-                    <a:p>
-                      <a:r>
-                        <a:rPr sz="1050">
-                          <a:solidFill>
-                            <a:srgbClr val="1A1A1A"/>
-                          </a:solidFill>
-                        </a:rPr>
-                        <a:t>98.7%</a:t>
-                      </a:r>
-                    </a:p>
-                  </a:txBody>
-                  <a:tcPr/>
-                </a:tc>
-                <a:tc>
-                  <a:txBody>
-                    <a:bodyPr/>
-                    <a:lstStyle/>
-                    <a:p>
-                      <a:r>
-                        <a:rPr sz="1050">
-                          <a:solidFill>
-                            <a:srgbClr val="1A1A1A"/>
-                          </a:solidFill>
-                        </a:rPr>
-                        <a:t>98.9%</a:t>
-                      </a:r>
-                    </a:p>
-                  </a:txBody>
-                  <a:tcPr/>
-                </a:tc>
-                <a:tc>
-                  <a:txBody>
-                    <a:bodyPr/>
-                    <a:lstStyle/>
-                    <a:p>
-                      <a:r>
-                        <a:rPr sz="1050">
-                          <a:solidFill>
-                            <a:srgbClr val="1A1A1A"/>
-                          </a:solidFill>
-                        </a:rPr>
-                        <a:t>88.2% ▼</a:t>
-                      </a:r>
-                    </a:p>
-                  </a:txBody>
-                  <a:tcPr/>
-                </a:tc>
-                <a:tc>
-                  <a:txBody>
-                    <a:bodyPr/>
-                    <a:lstStyle/>
-                    <a:p>
-                      <a:r>
-                        <a:rPr sz="1050">
-                          <a:solidFill>
-                            <a:srgbClr val="1A1A1A"/>
-                          </a:solidFill>
-                        </a:rPr>
-                        <a:t>—</a:t>
-                      </a:r>
-                    </a:p>
-                  </a:txBody>
-                  <a:tcPr/>
-                </a:tc>
-              </a:tr>
-              <a:tr h="365760">
-                <a:tc>
-                  <a:txBody>
-                    <a:bodyPr/>
-                    <a:lstStyle/>
-                    <a:p>
-                      <a:r>
-                        <a:rPr sz="1050" b="1">
-                          <a:solidFill>
-                            <a:srgbClr val="1A1A1A"/>
-                          </a:solidFill>
-                        </a:rPr>
-                        <a:t>NAT_HOMOG (Q ≥ 0.95)</a:t>
-                      </a:r>
-                    </a:p>
-                  </a:txBody>
-                  <a:tcPr>
-                    <a:solidFill>
-                      <a:srgbClr val="F4F6FA"/>
-                    </a:solidFill>
-                  </a:tcPr>
-                </a:tc>
-                <a:tc>
-                  <a:txBody>
-                    <a:bodyPr/>
-                    <a:lstStyle/>
-                    <a:p>
-                      <a:r>
-                        <a:rPr sz="1050">
-                          <a:solidFill>
-                            <a:srgbClr val="1A1A1A"/>
-                          </a:solidFill>
-                        </a:rPr>
-                        <a:t>98.7%</a:t>
-                      </a:r>
-                    </a:p>
-                  </a:txBody>
-                  <a:tcPr>
-                    <a:solidFill>
-                      <a:srgbClr val="F4F6FA"/>
-                    </a:solidFill>
-                  </a:tcPr>
-                </a:tc>
-                <a:tc>
-                  <a:txBody>
-                    <a:bodyPr/>
-                    <a:lstStyle/>
-                    <a:p>
-                      <a:r>
-                        <a:rPr sz="1050">
-                          <a:solidFill>
-                            <a:srgbClr val="1A1A1A"/>
-                          </a:solidFill>
-                        </a:rPr>
-                        <a:t>98.8%</a:t>
-                      </a:r>
-                    </a:p>
-                  </a:txBody>
-                  <a:tcPr>
-                    <a:solidFill>
-                      <a:srgbClr val="F4F6FA"/>
-                    </a:solidFill>
-                  </a:tcPr>
-                </a:tc>
-                <a:tc>
-                  <a:txBody>
-                    <a:bodyPr/>
-                    <a:lstStyle/>
-                    <a:p>
-                      <a:r>
-                        <a:rPr sz="1050">
-                          <a:solidFill>
-                            <a:srgbClr val="1A1A1A"/>
-                          </a:solidFill>
-                        </a:rPr>
-                        <a:t>91.2%</a:t>
-                      </a:r>
-                    </a:p>
-                  </a:txBody>
-                  <a:tcPr>
-                    <a:solidFill>
-                      <a:srgbClr val="F4F6FA"/>
-                    </a:solidFill>
-                  </a:tcPr>
-                </a:tc>
-                <a:tc>
-                  <a:txBody>
-                    <a:bodyPr/>
-                    <a:lstStyle/>
-                    <a:p>
-                      <a:r>
-                        <a:rPr sz="1050">
-                          <a:solidFill>
-                            <a:srgbClr val="1A1A1A"/>
-                          </a:solidFill>
-                        </a:rPr>
-                        <a:t>94.1% ▲</a:t>
-                      </a:r>
-                    </a:p>
-                  </a:txBody>
-                  <a:tcPr>
-                    <a:solidFill>
-                      <a:srgbClr val="F4F6FA"/>
-                    </a:solidFill>
-                  </a:tcPr>
-                </a:tc>
-              </a:tr>
-              <a:tr h="365760">
-                <a:tc>
-                  <a:txBody>
-                    <a:bodyPr/>
-                    <a:lstStyle/>
-                    <a:p>
-                      <a:r>
-                        <a:rPr sz="1050" b="1">
-                          <a:solidFill>
-                            <a:srgbClr val="1A1A1A"/>
-                          </a:solidFill>
-                        </a:rPr>
-                        <a:t>NAT_PEL</a:t>
-                      </a:r>
-                    </a:p>
-                  </a:txBody>
-                  <a:tcPr/>
-                </a:tc>
-                <a:tc>
-                  <a:txBody>
-                    <a:bodyPr/>
-                    <a:lstStyle/>
-                    <a:p>
-                      <a:r>
-                        <a:rPr sz="1050">
-                          <a:solidFill>
-                            <a:srgbClr val="1A1A1A"/>
-                          </a:solidFill>
-                        </a:rPr>
-                        <a:t>98.7%</a:t>
-                      </a:r>
-                    </a:p>
-                  </a:txBody>
-                  <a:tcPr/>
-                </a:tc>
-                <a:tc>
-                  <a:txBody>
-                    <a:bodyPr/>
-                    <a:lstStyle/>
-                    <a:p>
-                      <a:r>
-                        <a:rPr sz="1050">
-                          <a:solidFill>
-                            <a:srgbClr val="1A1A1A"/>
-                          </a:solidFill>
-                        </a:rPr>
-                        <a:t>98.6%</a:t>
-                      </a:r>
-                    </a:p>
-                  </a:txBody>
-                  <a:tcPr/>
-                </a:tc>
-                <a:tc>
-                  <a:txBody>
-                    <a:bodyPr/>
-                    <a:lstStyle/>
-                    <a:p>
-                      <a:r>
-                        <a:rPr sz="1050">
-                          <a:solidFill>
-                            <a:srgbClr val="1A1A1A"/>
-                          </a:solidFill>
-                        </a:rPr>
-                        <a:t>92.9%</a:t>
-                      </a:r>
-                    </a:p>
-                  </a:txBody>
-                  <a:tcPr/>
-                </a:tc>
-                <a:tc>
-                  <a:txBody>
-                    <a:bodyPr/>
-                    <a:lstStyle/>
-                    <a:p>
-                      <a:r>
-                        <a:rPr sz="1050">
-                          <a:solidFill>
-                            <a:srgbClr val="1A1A1A"/>
-                          </a:solidFill>
-                        </a:rPr>
-                        <a:t>93.1%</a:t>
-                      </a:r>
-                    </a:p>
-                  </a:txBody>
-                  <a:tcPr/>
-                </a:tc>
-              </a:tr>
-              <a:tr h="365760">
-                <a:tc>
-                  <a:txBody>
-                    <a:bodyPr/>
-                    <a:lstStyle/>
-                    <a:p>
-                      <a:r>
-                        <a:rPr sz="1050" b="1">
-                          <a:solidFill>
-                            <a:srgbClr val="1A1A1A"/>
-                          </a:solidFill>
-                        </a:rPr>
-                        <a:t>NAT_PEL_EAS</a:t>
-                      </a:r>
-                    </a:p>
-                  </a:txBody>
-                  <a:tcPr>
-                    <a:solidFill>
-                      <a:srgbClr val="F4F6FA"/>
-                    </a:solidFill>
-                  </a:tcPr>
-                </a:tc>
-                <a:tc>
-                  <a:txBody>
-                    <a:bodyPr/>
-                    <a:lstStyle/>
-                    <a:p>
-                      <a:r>
-                        <a:rPr sz="1050">
-                          <a:solidFill>
-                            <a:srgbClr val="1A1A1A"/>
-                          </a:solidFill>
-                        </a:rPr>
-                        <a:t>99.0%</a:t>
-                      </a:r>
-                    </a:p>
-                  </a:txBody>
-                  <a:tcPr>
-                    <a:solidFill>
-                      <a:srgbClr val="F4F6FA"/>
-                    </a:solidFill>
-                  </a:tcPr>
-                </a:tc>
-                <a:tc>
-                  <a:txBody>
-                    <a:bodyPr/>
-                    <a:lstStyle/>
-                    <a:p>
-                      <a:r>
-                        <a:rPr sz="1050">
-                          <a:solidFill>
-                            <a:srgbClr val="1A1A1A"/>
-                          </a:solidFill>
-                        </a:rPr>
-                        <a:t>98.3%</a:t>
-                      </a:r>
-                    </a:p>
-                  </a:txBody>
-                  <a:tcPr>
-                    <a:solidFill>
-                      <a:srgbClr val="F4F6FA"/>
-                    </a:solidFill>
-                  </a:tcPr>
-                </a:tc>
-                <a:tc>
-                  <a:txBody>
-                    <a:bodyPr/>
-                    <a:lstStyle/>
-                    <a:p>
-                      <a:r>
-                        <a:rPr sz="1050">
-                          <a:solidFill>
-                            <a:srgbClr val="1A1A1A"/>
-                          </a:solidFill>
-                        </a:rPr>
-                        <a:t>91.7%</a:t>
-                      </a:r>
-                    </a:p>
-                  </a:txBody>
-                  <a:tcPr>
-                    <a:solidFill>
-                      <a:srgbClr val="F4F6FA"/>
-                    </a:solidFill>
-                  </a:tcPr>
-                </a:tc>
-                <a:tc>
-                  <a:txBody>
-                    <a:bodyPr/>
-                    <a:lstStyle/>
-                    <a:p>
-                      <a:r>
-                        <a:rPr sz="1050">
-                          <a:solidFill>
-                            <a:srgbClr val="1A1A1A"/>
-                          </a:solidFill>
-                        </a:rPr>
-                        <a:t>92.9%</a:t>
-                      </a:r>
-                    </a:p>
-                  </a:txBody>
-                  <a:tcPr>
-                    <a:solidFill>
-                      <a:srgbClr val="F4F6FA"/>
-                    </a:solidFill>
-                  </a:tcPr>
-                </a:tc>
-              </a:tr>
-            </a:tbl>
-          </a:graphicData>
-        </a:graphic>
-      </p:graphicFrame>
+            <a:pPr algn="l"/>
+            <a:r>
+              <a:rPr sz="1600" i="0" b="0">
+                <a:solidFill>
+                  <a:srgbClr val="1A1A1A"/>
+                </a:solidFill>
+              </a:rPr>
+              <a:t>Christina Magyar  ·  GS4 Thesis Committee Update</a:t>
+            </a:r>
+          </a:p>
+        </p:txBody>
+      </p:sp>
       <p:sp>
         <p:nvSpPr>
           <p:cNvPr id="5" name="TextBox 4"/>
@@ -4623,8 +3993,8 @@
         </p:nvSpPr>
         <p:spPr>
           <a:xfrm>
-            <a:off x="548640" y="4297680"/>
-            <a:ext cx="11064240" cy="5029200"/>
+            <a:off x="640080" y="3886200"/>
+            <a:ext cx="10972800" cy="365760"/>
           </a:xfrm>
           <a:prstGeom prst="rect">
             <a:avLst/>
@@ -4632,68 +4002,98 @@
           <a:noFill/>
         </p:spPr>
         <p:txBody>
-          <a:bodyPr wrap="square">
+          <a:bodyPr wrap="square" lIns="0" rIns="0" tIns="0" bIns="0">
             <a:spAutoFit/>
           </a:bodyPr>
           <a:lstStyle/>
           <a:p>
-            <a:pPr>
-              <a:spcAft>
-                <a:spcPts val="600"/>
-              </a:spcAft>
-            </a:pPr>
-            <a:r>
-              <a:rPr sz="1500" b="1">
+            <a:pPr algn="l"/>
+            <a:r>
+              <a:rPr sz="1200" i="1" b="0">
+                <a:solidFill>
+                  <a:srgbClr val="666666"/>
+                </a:solidFill>
+              </a:rPr>
+              <a:t>August 2026  ·  BCM MSTP · Genetics and Genomics</a:t>
+            </a:r>
+          </a:p>
+        </p:txBody>
+      </p:sp>
+      <p:sp>
+        <p:nvSpPr>
+          <p:cNvPr id="6" name="TextBox 5"/>
+          <p:cNvSpPr txBox="1"/>
+          <p:nvPr/>
+        </p:nvSpPr>
+        <p:spPr>
+          <a:xfrm>
+            <a:off x="640080" y="4754880"/>
+            <a:ext cx="10972800" cy="320040"/>
+          </a:xfrm>
+          <a:prstGeom prst="rect">
+            <a:avLst/>
+          </a:prstGeom>
+          <a:noFill/>
+        </p:spPr>
+        <p:txBody>
+          <a:bodyPr wrap="square" lIns="0" rIns="0" tIns="0" bIns="0">
+            <a:spAutoFit/>
+          </a:bodyPr>
+          <a:lstStyle/>
+          <a:p>
+            <a:pPr algn="l"/>
+            <a:r>
+              <a:rPr sz="1000" i="0" b="1">
+                <a:solidFill>
+                  <a:srgbClr val="666666"/>
+                </a:solidFill>
+              </a:rPr>
+              <a:t>Advisors</a:t>
+            </a:r>
+          </a:p>
+        </p:txBody>
+      </p:sp>
+      <p:sp>
+        <p:nvSpPr>
+          <p:cNvPr id="7" name="TextBox 6"/>
+          <p:cNvSpPr txBox="1"/>
+          <p:nvPr/>
+        </p:nvSpPr>
+        <p:spPr>
+          <a:xfrm>
+            <a:off x="640080" y="5074920"/>
+            <a:ext cx="10972800" cy="822960"/>
+          </a:xfrm>
+          <a:prstGeom prst="rect">
+            <a:avLst/>
+          </a:prstGeom>
+          <a:noFill/>
+        </p:spPr>
+        <p:txBody>
+          <a:bodyPr wrap="square" lIns="0" rIns="0" tIns="0" bIns="0">
+            <a:spAutoFit/>
+          </a:bodyPr>
+          <a:lstStyle/>
+          <a:p>
+            <a:pPr algn="l"/>
+            <a:r>
+              <a:rPr sz="1300" i="0" b="0">
                 <a:solidFill>
                   <a:srgbClr val="1A1A1A"/>
                 </a:solidFill>
               </a:rPr>
-              <a:t>AFR and EUR recall are robust across all panels (~98–99%) — Native-American is the LAI bottleneck for Latinos</a:t>
-            </a:r>
-          </a:p>
-          <a:p>
-            <a:pPr>
-              <a:spcAft>
-                <a:spcPts val="600"/>
-              </a:spcAft>
-            </a:pPr>
-            <a:r>
-              <a:rPr sz="1500" b="1">
+              <a:t>Philip J. Lupo, PhD  (Thesis advisor)</a:t>
+            </a:r>
+          </a:p>
+          <a:p>
+            <a:pPr algn="l"/>
+            <a:r>
+              <a:rPr sz="1300" i="0" b="0">
                 <a:solidFill>
                   <a:srgbClr val="1A1A1A"/>
                 </a:solidFill>
               </a:rPr>
-              <a:t>For Mexican-Latino cohorts (NATMXB track), NAT_HGDPMXB is best: 94.2% NAT recall (+1.1 pp over HGDP baseline)</a:t>
-            </a:r>
-          </a:p>
-          <a:p>
-            <a:pPr>
-              <a:spcAft>
-                <a:spcPts val="600"/>
-              </a:spcAft>
-            </a:pPr>
-            <a:r>
-              <a:rPr sz="1500" b="1">
-                <a:solidFill>
-                  <a:srgbClr val="1A1A1A"/>
-                </a:solidFill>
-              </a:rPr>
-              <a:t>For pan–Latin-American cohorts (NAT track), NAT_PEL wins at 92.9% — MXB alone doesn't help unmatched admixed samples</a:t>
-            </a:r>
-          </a:p>
-          <a:p>
-            <a:pPr>
-              <a:spcAft>
-                <a:spcPts val="600"/>
-              </a:spcAft>
-            </a:pPr>
-            <a:r>
-              <a:rPr sz="1500" b="1">
-                <a:solidFill>
-                  <a:srgbClr val="1A1A1A"/>
-                </a:solidFill>
-              </a:rPr>
-              <a:t>NAT_HGDPMXB_FULL underperforms — over-representing one region dilutes panel matching for diverse Latino admixtures</a:t>
+              <a:t>Elizabeth Atkinson, PhD  (Local advisor)</a:t>
             </a:r>
           </a:p>
         </p:txBody>
@@ -4724,8 +4124,8 @@
         </p:nvSpPr>
         <p:spPr>
           <a:xfrm>
-            <a:off x="457200" y="274320"/>
-            <a:ext cx="11247120" cy="640080"/>
+            <a:off x="502920" y="292608"/>
+            <a:ext cx="11155680" cy="822960"/>
           </a:xfrm>
           <a:prstGeom prst="rect">
             <a:avLst/>
@@ -4739,12 +4139,12 @@
           <a:lstStyle/>
           <a:p>
             <a:r>
-              <a:rPr sz="2800" b="1">
+              <a:rPr sz="2400" b="1">
                 <a:solidFill>
                   <a:srgbClr val="1F3A5F"/>
                 </a:solidFill>
               </a:rPr>
-              <a:t>Chip-density LAI is robust; MX Biobank is optimal for Mexican-Latino GWAS</a:t>
+              <a:t>Public Amerindigenous references are ~7× smaller than other continents.</a:t>
             </a:r>
           </a:p>
         </p:txBody>
@@ -4757,8 +4157,8 @@
         </p:nvSpPr>
         <p:spPr>
           <a:xfrm>
-            <a:off x="457200" y="960120"/>
-            <a:ext cx="11247120" cy="365760"/>
+            <a:off x="502920" y="1051560"/>
+            <a:ext cx="11155680" cy="365760"/>
           </a:xfrm>
           <a:prstGeom prst="rect">
             <a:avLst/>
@@ -4766,604 +4166,47 @@
           <a:noFill/>
         </p:spPr>
         <p:txBody>
-          <a:bodyPr wrap="square">
+          <a:bodyPr wrap="square" lIns="0" rIns="0" tIns="0" bIns="0">
             <a:spAutoFit/>
           </a:bodyPr>
           <a:lstStyle/>
           <a:p>
-            <a:r>
-              <a:rPr sz="1400" i="1">
+            <a:pPr algn="l"/>
+            <a:r>
+              <a:rPr sz="1200" i="1" b="0">
                 <a:solidFill>
                   <a:srgbClr val="666666"/>
                 </a:solidFill>
               </a:rPr>
-              <a:t>GSA v3 chip loses only ~1–3 percentage points vs full WGS — real GWAS accuracy tracks the WGS ceiling</a:t>
-            </a:r>
-          </a:p>
-        </p:txBody>
-      </p:sp>
-      <p:graphicFrame>
-        <p:nvGraphicFramePr>
-          <p:cNvPr id="4" name="Table 3"/>
-          <p:cNvGraphicFramePr>
-            <a:graphicFrameLocks noGrp="1"/>
-          </p:cNvGraphicFramePr>
+              <a:t>HGDP + 1000 Genomes reference haplotypes, by continental group</a:t>
+            </a:r>
+          </a:p>
+        </p:txBody>
+      </p:sp>
+      <p:pic>
+        <p:nvPicPr>
+          <p:cNvPr id="4" name="Picture 3" descr="fig_amr_disparity.png"/>
+          <p:cNvPicPr>
+            <a:picLocks noChangeAspect="1"/>
+          </p:cNvPicPr>
           <p:nvPr/>
-        </p:nvGraphicFramePr>
-        <p:xfrm>
-          <a:off x="548640" y="1600200"/>
-          <a:ext cx="11064240" cy="2560320"/>
-        </p:xfrm>
-        <a:graphic>
-          <a:graphicData uri="http://schemas.openxmlformats.org/drawingml/2006/table">
-            <a:tbl>
-              <a:tblPr firstRow="1" bandRow="1">
-                <a:tableStyleId>{5C22544A-7EE6-4342-B048-85BDC9FD1C3A}</a:tableStyleId>
-              </a:tblPr>
-              <a:tblGrid>
-                <a:gridCol w="2766060"/>
-                <a:gridCol w="2766060"/>
-                <a:gridCol w="2766060"/>
-                <a:gridCol w="2766060"/>
-              </a:tblGrid>
-              <a:tr h="365760">
-                <a:tc>
-                  <a:txBody>
-                    <a:bodyPr/>
-                    <a:lstStyle/>
-                    <a:p>
-                      <a:r>
-                        <a:rPr b="1" sz="1100">
-                          <a:solidFill>
-                            <a:srgbClr val="FFFFFF"/>
-                          </a:solidFill>
-                        </a:rPr>
-                        <a:t>Panel</a:t>
-                      </a:r>
-                    </a:p>
-                  </a:txBody>
-                  <a:tcPr>
-                    <a:solidFill>
-                      <a:srgbClr val="1F3A5F"/>
-                    </a:solidFill>
-                  </a:tcPr>
-                </a:tc>
-                <a:tc>
-                  <a:txBody>
-                    <a:bodyPr/>
-                    <a:lstStyle/>
-                    <a:p>
-                      <a:r>
-                        <a:rPr b="1" sz="1100">
-                          <a:solidFill>
-                            <a:srgbClr val="FFFFFF"/>
-                          </a:solidFill>
-                        </a:rPr>
-                        <a:t>WGS NAT recall</a:t>
-                      </a:r>
-                    </a:p>
-                  </a:txBody>
-                  <a:tcPr>
-                    <a:solidFill>
-                      <a:srgbClr val="1F3A5F"/>
-                    </a:solidFill>
-                  </a:tcPr>
-                </a:tc>
-                <a:tc>
-                  <a:txBody>
-                    <a:bodyPr/>
-                    <a:lstStyle/>
-                    <a:p>
-                      <a:r>
-                        <a:rPr b="1" sz="1100">
-                          <a:solidFill>
-                            <a:srgbClr val="FFFFFF"/>
-                          </a:solidFill>
-                        </a:rPr>
-                        <a:t>GSA chip NAT recall</a:t>
-                      </a:r>
-                    </a:p>
-                  </a:txBody>
-                  <a:tcPr>
-                    <a:solidFill>
-                      <a:srgbClr val="1F3A5F"/>
-                    </a:solidFill>
-                  </a:tcPr>
-                </a:tc>
-                <a:tc>
-                  <a:txBody>
-                    <a:bodyPr/>
-                    <a:lstStyle/>
-                    <a:p>
-                      <a:r>
-                        <a:rPr b="1" sz="1100">
-                          <a:solidFill>
-                            <a:srgbClr val="FFFFFF"/>
-                          </a:solidFill>
-                        </a:rPr>
-                        <a:t>Δ (chip cost)</a:t>
-                      </a:r>
-                    </a:p>
-                  </a:txBody>
-                  <a:tcPr>
-                    <a:solidFill>
-                      <a:srgbClr val="1F3A5F"/>
-                    </a:solidFill>
-                  </a:tcPr>
-                </a:tc>
-              </a:tr>
-              <a:tr h="365760">
-                <a:tc>
-                  <a:txBody>
-                    <a:bodyPr/>
-                    <a:lstStyle/>
-                    <a:p>
-                      <a:r>
-                        <a:rPr sz="1050" b="1">
-                          <a:solidFill>
-                            <a:srgbClr val="1A1A1A"/>
-                          </a:solidFill>
-                        </a:rPr>
-                        <a:t>NAT_HGDP (baseline)</a:t>
-                      </a:r>
-                    </a:p>
-                  </a:txBody>
-                  <a:tcPr/>
-                </a:tc>
-                <a:tc>
-                  <a:txBody>
-                    <a:bodyPr/>
-                    <a:lstStyle/>
-                    <a:p>
-                      <a:r>
-                        <a:rPr sz="1050">
-                          <a:solidFill>
-                            <a:srgbClr val="1A1A1A"/>
-                          </a:solidFill>
-                        </a:rPr>
-                        <a:t>92.7%</a:t>
-                      </a:r>
-                    </a:p>
-                  </a:txBody>
-                  <a:tcPr/>
-                </a:tc>
-                <a:tc>
-                  <a:txBody>
-                    <a:bodyPr/>
-                    <a:lstStyle/>
-                    <a:p>
-                      <a:r>
-                        <a:rPr sz="1050">
-                          <a:solidFill>
-                            <a:srgbClr val="1A1A1A"/>
-                          </a:solidFill>
-                        </a:rPr>
-                        <a:t>91.1%</a:t>
-                      </a:r>
-                    </a:p>
-                  </a:txBody>
-                  <a:tcPr/>
-                </a:tc>
-                <a:tc>
-                  <a:txBody>
-                    <a:bodyPr/>
-                    <a:lstStyle/>
-                    <a:p>
-                      <a:r>
-                        <a:rPr sz="1050">
-                          <a:solidFill>
-                            <a:srgbClr val="1A1A1A"/>
-                          </a:solidFill>
-                        </a:rPr>
-                        <a:t>−1.6 pp</a:t>
-                      </a:r>
-                    </a:p>
-                  </a:txBody>
-                  <a:tcPr/>
-                </a:tc>
-              </a:tr>
-              <a:tr h="365760">
-                <a:tc>
-                  <a:txBody>
-                    <a:bodyPr/>
-                    <a:lstStyle/>
-                    <a:p>
-                      <a:r>
-                        <a:rPr sz="1050" b="1">
-                          <a:solidFill>
-                            <a:srgbClr val="1A1A1A"/>
-                          </a:solidFill>
-                        </a:rPr>
-                        <a:t>NAT_HGDPMXB (+25 MXB)</a:t>
-                      </a:r>
-                    </a:p>
-                  </a:txBody>
-                  <a:tcPr>
-                    <a:solidFill>
-                      <a:srgbClr val="F4F6FA"/>
-                    </a:solidFill>
-                  </a:tcPr>
-                </a:tc>
-                <a:tc>
-                  <a:txBody>
-                    <a:bodyPr/>
-                    <a:lstStyle/>
-                    <a:p>
-                      <a:r>
-                        <a:rPr sz="1050">
-                          <a:solidFill>
-                            <a:srgbClr val="1A1A1A"/>
-                          </a:solidFill>
-                        </a:rPr>
-                        <a:t>91.1%</a:t>
-                      </a:r>
-                    </a:p>
-                  </a:txBody>
-                  <a:tcPr>
-                    <a:solidFill>
-                      <a:srgbClr val="F4F6FA"/>
-                    </a:solidFill>
-                  </a:tcPr>
-                </a:tc>
-                <a:tc>
-                  <a:txBody>
-                    <a:bodyPr/>
-                    <a:lstStyle/>
-                    <a:p>
-                      <a:r>
-                        <a:rPr sz="1050">
-                          <a:solidFill>
-                            <a:srgbClr val="1A1A1A"/>
-                          </a:solidFill>
-                        </a:rPr>
-                        <a:t>89.9%</a:t>
-                      </a:r>
-                    </a:p>
-                  </a:txBody>
-                  <a:tcPr>
-                    <a:solidFill>
-                      <a:srgbClr val="F4F6FA"/>
-                    </a:solidFill>
-                  </a:tcPr>
-                </a:tc>
-                <a:tc>
-                  <a:txBody>
-                    <a:bodyPr/>
-                    <a:lstStyle/>
-                    <a:p>
-                      <a:r>
-                        <a:rPr sz="1050">
-                          <a:solidFill>
-                            <a:srgbClr val="1A1A1A"/>
-                          </a:solidFill>
-                        </a:rPr>
-                        <a:t>−1.2 pp</a:t>
-                      </a:r>
-                    </a:p>
-                  </a:txBody>
-                  <a:tcPr>
-                    <a:solidFill>
-                      <a:srgbClr val="F4F6FA"/>
-                    </a:solidFill>
-                  </a:tcPr>
-                </a:tc>
-              </a:tr>
-              <a:tr h="365760">
-                <a:tc>
-                  <a:txBody>
-                    <a:bodyPr/>
-                    <a:lstStyle/>
-                    <a:p>
-                      <a:r>
-                        <a:rPr sz="1050" b="1">
-                          <a:solidFill>
-                            <a:srgbClr val="1A1A1A"/>
-                          </a:solidFill>
-                        </a:rPr>
-                        <a:t>NAT_HGDPMXB_FULL (+50)</a:t>
-                      </a:r>
-                    </a:p>
-                  </a:txBody>
-                  <a:tcPr/>
-                </a:tc>
-                <a:tc>
-                  <a:txBody>
-                    <a:bodyPr/>
-                    <a:lstStyle/>
-                    <a:p>
-                      <a:r>
-                        <a:rPr sz="1050">
-                          <a:solidFill>
-                            <a:srgbClr val="1A1A1A"/>
-                          </a:solidFill>
-                        </a:rPr>
-                        <a:t>88.2%</a:t>
-                      </a:r>
-                    </a:p>
-                  </a:txBody>
-                  <a:tcPr/>
-                </a:tc>
-                <a:tc>
-                  <a:txBody>
-                    <a:bodyPr/>
-                    <a:lstStyle/>
-                    <a:p>
-                      <a:r>
-                        <a:rPr sz="1050">
-                          <a:solidFill>
-                            <a:srgbClr val="1A1A1A"/>
-                          </a:solidFill>
-                        </a:rPr>
-                        <a:t>89.4%</a:t>
-                      </a:r>
-                    </a:p>
-                  </a:txBody>
-                  <a:tcPr/>
-                </a:tc>
-                <a:tc>
-                  <a:txBody>
-                    <a:bodyPr/>
-                    <a:lstStyle/>
-                    <a:p>
-                      <a:r>
-                        <a:rPr sz="1050">
-                          <a:solidFill>
-                            <a:srgbClr val="1A1A1A"/>
-                          </a:solidFill>
-                        </a:rPr>
-                        <a:t>−1.4 pp</a:t>
-                      </a:r>
-                    </a:p>
-                  </a:txBody>
-                  <a:tcPr/>
-                </a:tc>
-              </a:tr>
-              <a:tr h="365760">
-                <a:tc>
-                  <a:txBody>
-                    <a:bodyPr/>
-                    <a:lstStyle/>
-                    <a:p>
-                      <a:r>
-                        <a:rPr sz="1050" b="1">
-                          <a:solidFill>
-                            <a:srgbClr val="1A1A1A"/>
-                          </a:solidFill>
-                        </a:rPr>
-                        <a:t>NAT_HOMOG (Q ≥ 0.95)</a:t>
-                      </a:r>
-                    </a:p>
-                  </a:txBody>
-                  <a:tcPr>
-                    <a:solidFill>
-                      <a:srgbClr val="F4F6FA"/>
-                    </a:solidFill>
-                  </a:tcPr>
-                </a:tc>
-                <a:tc>
-                  <a:txBody>
-                    <a:bodyPr/>
-                    <a:lstStyle/>
-                    <a:p>
-                      <a:r>
-                        <a:rPr sz="1050">
-                          <a:solidFill>
-                            <a:srgbClr val="1A1A1A"/>
-                          </a:solidFill>
-                        </a:rPr>
-                        <a:t>91.2%</a:t>
-                      </a:r>
-                    </a:p>
-                  </a:txBody>
-                  <a:tcPr>
-                    <a:solidFill>
-                      <a:srgbClr val="F4F6FA"/>
-                    </a:solidFill>
-                  </a:tcPr>
-                </a:tc>
-                <a:tc>
-                  <a:txBody>
-                    <a:bodyPr/>
-                    <a:lstStyle/>
-                    <a:p>
-                      <a:r>
-                        <a:rPr sz="1050">
-                          <a:solidFill>
-                            <a:srgbClr val="1A1A1A"/>
-                          </a:solidFill>
-                        </a:rPr>
-                        <a:t>TBD</a:t>
-                      </a:r>
-                    </a:p>
-                  </a:txBody>
-                  <a:tcPr>
-                    <a:solidFill>
-                      <a:srgbClr val="F4F6FA"/>
-                    </a:solidFill>
-                  </a:tcPr>
-                </a:tc>
-                <a:tc>
-                  <a:txBody>
-                    <a:bodyPr/>
-                    <a:lstStyle/>
-                    <a:p>
-                      <a:r>
-                        <a:rPr sz="1050">
-                          <a:solidFill>
-                            <a:srgbClr val="1A1A1A"/>
-                          </a:solidFill>
-                        </a:rPr>
-                        <a:t>—</a:t>
-                      </a:r>
-                    </a:p>
-                  </a:txBody>
-                  <a:tcPr>
-                    <a:solidFill>
-                      <a:srgbClr val="F4F6FA"/>
-                    </a:solidFill>
-                  </a:tcPr>
-                </a:tc>
-              </a:tr>
-              <a:tr h="365760">
-                <a:tc>
-                  <a:txBody>
-                    <a:bodyPr/>
-                    <a:lstStyle/>
-                    <a:p>
-                      <a:r>
-                        <a:rPr sz="1050" b="1">
-                          <a:solidFill>
-                            <a:srgbClr val="1A1A1A"/>
-                          </a:solidFill>
-                        </a:rPr>
-                        <a:t>NAT_PEL</a:t>
-                      </a:r>
-                    </a:p>
-                  </a:txBody>
-                  <a:tcPr/>
-                </a:tc>
-                <a:tc>
-                  <a:txBody>
-                    <a:bodyPr/>
-                    <a:lstStyle/>
-                    <a:p>
-                      <a:r>
-                        <a:rPr sz="1050">
-                          <a:solidFill>
-                            <a:srgbClr val="1A1A1A"/>
-                          </a:solidFill>
-                        </a:rPr>
-                        <a:t>92.9%</a:t>
-                      </a:r>
-                    </a:p>
-                  </a:txBody>
-                  <a:tcPr/>
-                </a:tc>
-                <a:tc>
-                  <a:txBody>
-                    <a:bodyPr/>
-                    <a:lstStyle/>
-                    <a:p>
-                      <a:r>
-                        <a:rPr sz="1050">
-                          <a:solidFill>
-                            <a:srgbClr val="1A1A1A"/>
-                          </a:solidFill>
-                        </a:rPr>
-                        <a:t>91.0%</a:t>
-                      </a:r>
-                    </a:p>
-                  </a:txBody>
-                  <a:tcPr/>
-                </a:tc>
-                <a:tc>
-                  <a:txBody>
-                    <a:bodyPr/>
-                    <a:lstStyle/>
-                    <a:p>
-                      <a:r>
-                        <a:rPr sz="1050">
-                          <a:solidFill>
-                            <a:srgbClr val="1A1A1A"/>
-                          </a:solidFill>
-                        </a:rPr>
-                        <a:t>−1.9 pp</a:t>
-                      </a:r>
-                    </a:p>
-                  </a:txBody>
-                  <a:tcPr/>
-                </a:tc>
-              </a:tr>
-              <a:tr h="365760">
-                <a:tc>
-                  <a:txBody>
-                    <a:bodyPr/>
-                    <a:lstStyle/>
-                    <a:p>
-                      <a:r>
-                        <a:rPr sz="1050" b="1">
-                          <a:solidFill>
-                            <a:srgbClr val="1A1A1A"/>
-                          </a:solidFill>
-                        </a:rPr>
-                        <a:t>NAT_PEL_EAS</a:t>
-                      </a:r>
-                    </a:p>
-                  </a:txBody>
-                  <a:tcPr>
-                    <a:solidFill>
-                      <a:srgbClr val="F4F6FA"/>
-                    </a:solidFill>
-                  </a:tcPr>
-                </a:tc>
-                <a:tc>
-                  <a:txBody>
-                    <a:bodyPr/>
-                    <a:lstStyle/>
-                    <a:p>
-                      <a:r>
-                        <a:rPr sz="1050">
-                          <a:solidFill>
-                            <a:srgbClr val="1A1A1A"/>
-                          </a:solidFill>
-                        </a:rPr>
-                        <a:t>91.7%</a:t>
-                      </a:r>
-                    </a:p>
-                  </a:txBody>
-                  <a:tcPr>
-                    <a:solidFill>
-                      <a:srgbClr val="F4F6FA"/>
-                    </a:solidFill>
-                  </a:tcPr>
-                </a:tc>
-                <a:tc>
-                  <a:txBody>
-                    <a:bodyPr/>
-                    <a:lstStyle/>
-                    <a:p>
-                      <a:r>
-                        <a:rPr sz="1050">
-                          <a:solidFill>
-                            <a:srgbClr val="1A1A1A"/>
-                          </a:solidFill>
-                        </a:rPr>
-                        <a:t>88.3%</a:t>
-                      </a:r>
-                    </a:p>
-                  </a:txBody>
-                  <a:tcPr>
-                    <a:solidFill>
-                      <a:srgbClr val="F4F6FA"/>
-                    </a:solidFill>
-                  </a:tcPr>
-                </a:tc>
-                <a:tc>
-                  <a:txBody>
-                    <a:bodyPr/>
-                    <a:lstStyle/>
-                    <a:p>
-                      <a:r>
-                        <a:rPr sz="1050">
-                          <a:solidFill>
-                            <a:srgbClr val="1A1A1A"/>
-                          </a:solidFill>
-                        </a:rPr>
-                        <a:t>−3.4 pp</a:t>
-                      </a:r>
-                    </a:p>
-                  </a:txBody>
-                  <a:tcPr>
-                    <a:solidFill>
-                      <a:srgbClr val="F4F6FA"/>
-                    </a:solidFill>
-                  </a:tcPr>
-                </a:tc>
-              </a:tr>
-            </a:tbl>
-          </a:graphicData>
-        </a:graphic>
-      </p:graphicFrame>
+        </p:nvPicPr>
+        <p:blipFill>
+          <a:blip r:embed="rId2"/>
+          <a:stretch>
+            <a:fillRect/>
+          </a:stretch>
+        </p:blipFill>
+        <p:spPr>
+          <a:xfrm>
+            <a:off x="365760" y="1508760"/>
+            <a:ext cx="11430000" cy="4321954"/>
+          </a:xfrm>
+          <a:prstGeom prst="rect">
+            <a:avLst/>
+          </a:prstGeom>
+        </p:spPr>
+      </p:pic>
       <p:sp>
         <p:nvSpPr>
           <p:cNvPr id="5" name="TextBox 4"/>
@@ -5372,8 +4215,8 @@
         </p:nvSpPr>
         <p:spPr>
           <a:xfrm>
-            <a:off x="548640" y="4297680"/>
-            <a:ext cx="11064240" cy="5029200"/>
+            <a:off x="502920" y="6080760"/>
+            <a:ext cx="11155680" cy="411480"/>
           </a:xfrm>
           <a:prstGeom prst="rect">
             <a:avLst/>
@@ -5381,83 +4224,87 @@
           <a:noFill/>
         </p:spPr>
         <p:txBody>
-          <a:bodyPr wrap="square">
+          <a:bodyPr wrap="square" lIns="0" rIns="0" tIns="0" bIns="0">
             <a:spAutoFit/>
           </a:bodyPr>
           <a:lstStyle/>
           <a:p>
-            <a:pPr>
-              <a:spcAft>
-                <a:spcPts val="600"/>
-              </a:spcAft>
-            </a:pPr>
-            <a:r>
-              <a:rPr sz="1500" b="1">
+            <a:pPr algn="l"/>
+            <a:r>
+              <a:rPr sz="1100" i="0" b="0">
                 <a:solidFill>
                   <a:srgbClr val="1A1A1A"/>
                 </a:solidFill>
               </a:rPr>
-              <a:t>Chip-density penalty is small (1–3 pp NAT recall); AFR/EUR essentially unchanged (~1 pp) — imputed GWAS results should closely match the WGS ceiling</a:t>
-            </a:r>
-          </a:p>
-          <a:p>
-            <a:pPr>
-              <a:spcAft>
-                <a:spcPts val="600"/>
-              </a:spcAft>
-            </a:pPr>
-            <a:r>
-              <a:rPr sz="1500" b="1">
-                <a:solidFill>
-                  <a:srgbClr val="1A1A1A"/>
-                </a:solidFill>
-              </a:rPr>
-              <a:t>Most-mismatched panel (NAT_PEL_EAS) suffers most under chip density — panel-cohort matching matters MORE when marker set is sparse</a:t>
-            </a:r>
-          </a:p>
-          <a:p>
-            <a:pPr>
-              <a:spcAft>
-                <a:spcPts val="600"/>
-              </a:spcAft>
-            </a:pPr>
-            <a:r>
-              <a:rPr sz="1500" b="1">
-                <a:solidFill>
-                  <a:srgbClr val="1A1A1A"/>
-                </a:solidFill>
-              </a:rPr>
-              <a:t>For our Mexican-Latino GWAS cohort: NAT_HGDPMXB gives 94.2% WGS / ~93% chip NAT recall — the recommended reference panel</a:t>
-            </a:r>
-          </a:p>
-          <a:p>
-            <a:pPr>
-              <a:spcAft>
-                <a:spcPts val="600"/>
-              </a:spcAft>
-            </a:pPr>
-            <a:r>
-              <a:rPr sz="1500" b="1">
-                <a:solidFill>
-                  <a:srgbClr val="1A1A1A"/>
-                </a:solidFill>
-              </a:rPr>
-              <a:t>MXB samples are withheld between simulation and inference (25 SIMU / 25 RFMix split) — no donor contamination</a:t>
-            </a:r>
-          </a:p>
-          <a:p>
-            <a:pPr>
-              <a:spcAft>
-                <a:spcPts val="600"/>
-              </a:spcAft>
-            </a:pPr>
-            <a:r>
-              <a:rPr sz="1500" b="1">
-                <a:solidFill>
-                  <a:srgbClr val="1A1A1A"/>
-                </a:solidFill>
-              </a:rPr>
-              <a:t>Next: real Michigan/TOPMed imputation pilot for a true worst-case anchor (post-committee)</a:t>
+              <a:t>Adding 50 MX Biobank WGS samples raises AMR to 138 haps — still leaves Central America, Southern Cone, Amazon, Caribbean underrepresented.</a:t>
+            </a:r>
+          </a:p>
+        </p:txBody>
+      </p:sp>
+      <p:sp>
+        <p:nvSpPr>
+          <p:cNvPr id="6" name="TextBox 5"/>
+          <p:cNvSpPr txBox="1"/>
+          <p:nvPr/>
+        </p:nvSpPr>
+        <p:spPr>
+          <a:xfrm>
+            <a:off x="502920" y="6537960"/>
+            <a:ext cx="7315200" cy="274320"/>
+          </a:xfrm>
+          <a:prstGeom prst="rect">
+            <a:avLst/>
+          </a:prstGeom>
+          <a:noFill/>
+        </p:spPr>
+        <p:txBody>
+          <a:bodyPr wrap="square" lIns="0" rIns="0" tIns="0" bIns="0">
+            <a:spAutoFit/>
+          </a:bodyPr>
+          <a:lstStyle/>
+          <a:p>
+            <a:pPr algn="l"/>
+            <a:r>
+              <a:rPr sz="900" i="0" b="0">
+                <a:solidFill>
+                  <a:srgbClr val="666666"/>
+                </a:solidFill>
+              </a:rPr>
+              <a:t>Christina Magyar  ·  Thesis committee, Aug 2026  ·  Motivation</a:t>
+            </a:r>
+          </a:p>
+        </p:txBody>
+      </p:sp>
+      <p:sp>
+        <p:nvSpPr>
+          <p:cNvPr id="7" name="TextBox 6"/>
+          <p:cNvSpPr txBox="1"/>
+          <p:nvPr/>
+        </p:nvSpPr>
+        <p:spPr>
+          <a:xfrm>
+            <a:off x="11338560" y="6537960"/>
+            <a:ext cx="548640" cy="274320"/>
+          </a:xfrm>
+          <a:prstGeom prst="rect">
+            <a:avLst/>
+          </a:prstGeom>
+          <a:noFill/>
+        </p:spPr>
+        <p:txBody>
+          <a:bodyPr wrap="square" lIns="0" rIns="0" tIns="0" bIns="0">
+            <a:spAutoFit/>
+          </a:bodyPr>
+          <a:lstStyle/>
+          <a:p>
+            <a:pPr algn="r"/>
+            <a:r>
+              <a:rPr sz="900" i="0" b="0">
+                <a:solidFill>
+                  <a:srgbClr val="666666"/>
+                </a:solidFill>
+              </a:rPr>
+              <a:t>2 / 6</a:t>
             </a:r>
           </a:p>
         </p:txBody>
@@ -5488,8 +4335,8 @@
         </p:nvSpPr>
         <p:spPr>
           <a:xfrm>
-            <a:off x="457200" y="274320"/>
-            <a:ext cx="11247120" cy="640080"/>
+            <a:off x="502920" y="292608"/>
+            <a:ext cx="11155680" cy="822960"/>
           </a:xfrm>
           <a:prstGeom prst="rect">
             <a:avLst/>
@@ -5503,97 +4350,37 @@
           <a:lstStyle/>
           <a:p>
             <a:r>
-              <a:rPr sz="2800" b="1">
+              <a:rPr sz="2400" b="1">
                 <a:solidFill>
                   <a:srgbClr val="1F3A5F"/>
                 </a:solidFill>
               </a:rPr>
-              <a:t>Public Amerindigenous reference samples: severe geographic and numeric disparity</a:t>
-            </a:r>
-          </a:p>
-        </p:txBody>
-      </p:sp>
-      <p:sp>
-        <p:nvSpPr>
-          <p:cNvPr id="3" name="TextBox 2"/>
-          <p:cNvSpPr txBox="1"/>
-          <p:nvPr/>
-        </p:nvSpPr>
-        <p:spPr>
-          <a:xfrm>
-            <a:off x="457200" y="960120"/>
-            <a:ext cx="11247120" cy="365760"/>
-          </a:xfrm>
-          <a:prstGeom prst="rect">
-            <a:avLst/>
-          </a:prstGeom>
-          <a:noFill/>
-        </p:spPr>
-        <p:txBody>
-          <a:bodyPr wrap="square">
-            <a:spAutoFit/>
-          </a:bodyPr>
-          <a:lstStyle/>
-          <a:p>
-            <a:r>
-              <a:rPr sz="1400" i="1">
-                <a:solidFill>
-                  <a:srgbClr val="666666"/>
-                </a:solidFill>
-              </a:rPr>
-              <a:t>AMR is 7× under-represented vs. other super-populations; within AMR, 72% of samples come from Mexico</a:t>
-            </a:r>
-          </a:p>
-        </p:txBody>
-      </p:sp>
-      <p:sp>
-        <p:nvSpPr>
-          <p:cNvPr id="4" name="TextBox 3"/>
-          <p:cNvSpPr txBox="1"/>
-          <p:nvPr/>
-        </p:nvSpPr>
-        <p:spPr>
-          <a:xfrm>
-            <a:off x="731520" y="1600200"/>
-            <a:ext cx="548640" cy="320040"/>
-          </a:xfrm>
-          <a:prstGeom prst="rect">
-            <a:avLst/>
-          </a:prstGeom>
-          <a:noFill/>
-        </p:spPr>
-        <p:txBody>
-          <a:bodyPr wrap="none">
-            <a:spAutoFit/>
-          </a:bodyPr>
-          <a:lstStyle/>
-          <a:p>
-            <a:r>
-              <a:rPr sz="1300" b="1"/>
-              <a:t>EAS</a:t>
-            </a:r>
-          </a:p>
-        </p:txBody>
-      </p:sp>
-      <p:sp>
-        <p:nvSpPr>
-          <p:cNvPr id="5" name="Rectangle 4"/>
+              <a:t>We simulated admixed cohorts to measure per-hap LAI recall.</a:t>
+            </a:r>
+          </a:p>
+        </p:txBody>
+      </p:sp>
+      <p:sp>
+        <p:nvSpPr>
+          <p:cNvPr id="3" name="Rounded Rectangle 2"/>
           <p:cNvSpPr/>
           <p:nvPr/>
         </p:nvSpPr>
         <p:spPr>
           <a:xfrm>
-            <a:off x="1371600" y="1627632"/>
-            <a:ext cx="5663401" cy="265176"/>
-          </a:xfrm>
-          <a:prstGeom prst="rect">
+            <a:off x="449427" y="1920240"/>
+            <a:ext cx="2148840" cy="1920240"/>
+          </a:xfrm>
+          <a:prstGeom prst="roundRect">
             <a:avLst/>
           </a:prstGeom>
           <a:solidFill>
-            <a:srgbClr val="8B5CF6"/>
+            <a:srgbClr val="EEE9E0"/>
           </a:solidFill>
-          <a:ln>
-            <a:noFill/>
+          <a:ln w="6350">
+            <a:solidFill>
+              <a:srgbClr val="666666"/>
+            </a:solidFill>
           </a:ln>
         </p:spPr>
         <p:style>
@@ -5611,87 +4398,66 @@
           </a:fontRef>
         </p:style>
         <p:txBody>
-          <a:bodyPr rtlCol="0" anchor="ctr"/>
+          <a:bodyPr rtlCol="0" anchor="ctr" wrap="square" tIns="80000" lIns="60000" rIns="60000"/>
           <a:lstStyle/>
           <a:p>
             <a:pPr algn="ctr"/>
-          </a:p>
-        </p:txBody>
-      </p:sp>
-      <p:sp>
-        <p:nvSpPr>
-          <p:cNvPr id="6" name="TextBox 5"/>
-          <p:cNvSpPr txBox="1"/>
-          <p:nvPr/>
-        </p:nvSpPr>
-        <p:spPr>
-          <a:xfrm>
-            <a:off x="7126441" y="1600200"/>
-            <a:ext cx="2011680" cy="320040"/>
-          </a:xfrm>
-          <a:prstGeom prst="rect">
-            <a:avLst/>
-          </a:prstGeom>
-          <a:noFill/>
-        </p:spPr>
-        <p:txBody>
-          <a:bodyPr wrap="none">
-            <a:spAutoFit/>
-          </a:bodyPr>
-          <a:lstStyle/>
-          <a:p>
-            <a:r>
-              <a:rPr sz="1200"/>
-              <a:t>n = 667</a:t>
-            </a:r>
-          </a:p>
-        </p:txBody>
-      </p:sp>
-      <p:sp>
-        <p:nvSpPr>
-          <p:cNvPr id="7" name="TextBox 6"/>
-          <p:cNvSpPr txBox="1"/>
-          <p:nvPr/>
-        </p:nvSpPr>
-        <p:spPr>
-          <a:xfrm>
-            <a:off x="731520" y="2011680"/>
-            <a:ext cx="548640" cy="320040"/>
-          </a:xfrm>
-          <a:prstGeom prst="rect">
-            <a:avLst/>
-          </a:prstGeom>
-          <a:noFill/>
-        </p:spPr>
-        <p:txBody>
-          <a:bodyPr wrap="none">
-            <a:spAutoFit/>
-          </a:bodyPr>
-          <a:lstStyle/>
-          <a:p>
-            <a:r>
-              <a:rPr sz="1300" b="1"/>
-              <a:t>AFR</a:t>
-            </a:r>
-          </a:p>
-        </p:txBody>
-      </p:sp>
-      <p:sp>
-        <p:nvSpPr>
-          <p:cNvPr id="8" name="Rectangle 7"/>
+            <a:r>
+              <a:rPr sz="1300" b="1">
+                <a:solidFill>
+                  <a:srgbClr val="1F3A5F"/>
+                </a:solidFill>
+              </a:rPr>
+              <a:t>Reference haps</a:t>
+            </a:r>
+          </a:p>
+          <a:p>
+            <a:pPr algn="ctr"/>
+            <a:r>
+              <a:rPr sz="1000">
+                <a:solidFill>
+                  <a:srgbClr val="1A1A1A"/>
+                </a:solidFill>
+              </a:rPr>
+              <a:t>HGDP + 1KG</a:t>
+            </a:r>
+            <a:br/>
+            <a:r>
+              <a:rPr sz="1000">
+                <a:solidFill>
+                  <a:srgbClr val="1A1A1A"/>
+                </a:solidFill>
+              </a:rPr>
+              <a:t>+ 50 MXB WGS</a:t>
+            </a:r>
+            <a:br/>
+            <a:r>
+              <a:rPr sz="1000">
+                <a:solidFill>
+                  <a:srgbClr val="1A1A1A"/>
+                </a:solidFill>
+              </a:rPr>
+              <a:t>(6 panel combos)</a:t>
+            </a:r>
+          </a:p>
+        </p:txBody>
+      </p:sp>
+      <p:sp>
+        <p:nvSpPr>
+          <p:cNvPr id="4" name="Right Arrow 3"/>
           <p:cNvSpPr/>
           <p:nvPr/>
         </p:nvSpPr>
         <p:spPr>
           <a:xfrm>
-            <a:off x="1371600" y="2039112"/>
-            <a:ext cx="5383203" cy="265176"/>
-          </a:xfrm>
-          <a:prstGeom prst="rect">
+            <a:off x="2602839" y="2761488"/>
+            <a:ext cx="128015" cy="256032"/>
+          </a:xfrm>
+          <a:prstGeom prst="rightArrow">
             <a:avLst/>
           </a:prstGeom>
           <a:solidFill>
-            <a:srgbClr val="10B981"/>
+            <a:srgbClr val="666666"/>
           </a:solidFill>
           <a:ln>
             <a:noFill/>
@@ -5721,81 +4487,25 @@
       </p:sp>
       <p:sp>
         <p:nvSpPr>
-          <p:cNvPr id="9" name="TextBox 8"/>
-          <p:cNvSpPr txBox="1"/>
-          <p:nvPr/>
-        </p:nvSpPr>
-        <p:spPr>
-          <a:xfrm>
-            <a:off x="6846243" y="2011680"/>
-            <a:ext cx="2011680" cy="320040"/>
-          </a:xfrm>
-          <a:prstGeom prst="rect">
-            <a:avLst/>
-          </a:prstGeom>
-          <a:noFill/>
-        </p:spPr>
-        <p:txBody>
-          <a:bodyPr wrap="none">
-            <a:spAutoFit/>
-          </a:bodyPr>
-          <a:lstStyle/>
-          <a:p>
-            <a:r>
-              <a:rPr sz="1200"/>
-              <a:t>n = 634</a:t>
-            </a:r>
-          </a:p>
-        </p:txBody>
-      </p:sp>
-      <p:sp>
-        <p:nvSpPr>
-          <p:cNvPr id="10" name="TextBox 9"/>
-          <p:cNvSpPr txBox="1"/>
-          <p:nvPr/>
-        </p:nvSpPr>
-        <p:spPr>
-          <a:xfrm>
-            <a:off x="731520" y="2423160"/>
-            <a:ext cx="548640" cy="320040"/>
-          </a:xfrm>
-          <a:prstGeom prst="rect">
-            <a:avLst/>
-          </a:prstGeom>
-          <a:noFill/>
-        </p:spPr>
-        <p:txBody>
-          <a:bodyPr wrap="none">
-            <a:spAutoFit/>
-          </a:bodyPr>
-          <a:lstStyle/>
-          <a:p>
-            <a:r>
-              <a:rPr sz="1300" b="1"/>
-              <a:t>EUR</a:t>
-            </a:r>
-          </a:p>
-        </p:txBody>
-      </p:sp>
-      <p:sp>
-        <p:nvSpPr>
-          <p:cNvPr id="11" name="Rectangle 10"/>
+          <p:cNvPr id="5" name="Rounded Rectangle 4"/>
           <p:cNvSpPr/>
           <p:nvPr/>
         </p:nvSpPr>
         <p:spPr>
           <a:xfrm>
-            <a:off x="1371600" y="2450591"/>
-            <a:ext cx="5264331" cy="265176"/>
-          </a:xfrm>
-          <a:prstGeom prst="rect">
+            <a:off x="2735427" y="1920240"/>
+            <a:ext cx="2148840" cy="1920240"/>
+          </a:xfrm>
+          <a:prstGeom prst="roundRect">
             <a:avLst/>
           </a:prstGeom>
           <a:solidFill>
-            <a:srgbClr val="3B82F6"/>
+            <a:srgbClr val="EEE9E0"/>
           </a:solidFill>
-          <a:ln>
-            <a:noFill/>
+          <a:ln w="6350">
+            <a:solidFill>
+              <a:srgbClr val="666666"/>
+            </a:solidFill>
           </a:ln>
         </p:spPr>
         <p:style>
@@ -5813,87 +4523,57 @@
           </a:fontRef>
         </p:style>
         <p:txBody>
-          <a:bodyPr rtlCol="0" anchor="ctr"/>
+          <a:bodyPr rtlCol="0" anchor="ctr" wrap="square" tIns="80000" lIns="60000" rIns="60000"/>
           <a:lstStyle/>
           <a:p>
             <a:pPr algn="ctr"/>
-          </a:p>
-        </p:txBody>
-      </p:sp>
-      <p:sp>
-        <p:nvSpPr>
-          <p:cNvPr id="12" name="TextBox 11"/>
-          <p:cNvSpPr txBox="1"/>
-          <p:nvPr/>
-        </p:nvSpPr>
-        <p:spPr>
-          <a:xfrm>
-            <a:off x="6727371" y="2423160"/>
-            <a:ext cx="2011680" cy="320040"/>
-          </a:xfrm>
-          <a:prstGeom prst="rect">
-            <a:avLst/>
-          </a:prstGeom>
-          <a:noFill/>
-        </p:spPr>
-        <p:txBody>
-          <a:bodyPr wrap="none">
-            <a:spAutoFit/>
-          </a:bodyPr>
-          <a:lstStyle/>
-          <a:p>
-            <a:r>
-              <a:rPr sz="1200"/>
-              <a:t>n = 620</a:t>
-            </a:r>
-          </a:p>
-        </p:txBody>
-      </p:sp>
-      <p:sp>
-        <p:nvSpPr>
-          <p:cNvPr id="13" name="TextBox 12"/>
-          <p:cNvSpPr txBox="1"/>
-          <p:nvPr/>
-        </p:nvSpPr>
-        <p:spPr>
-          <a:xfrm>
-            <a:off x="731520" y="2834639"/>
-            <a:ext cx="548640" cy="320040"/>
-          </a:xfrm>
-          <a:prstGeom prst="rect">
-            <a:avLst/>
-          </a:prstGeom>
-          <a:noFill/>
-        </p:spPr>
-        <p:txBody>
-          <a:bodyPr wrap="none">
-            <a:spAutoFit/>
-          </a:bodyPr>
-          <a:lstStyle/>
-          <a:p>
-            <a:r>
-              <a:rPr sz="1300" b="1"/>
-              <a:t>SAS</a:t>
-            </a:r>
-          </a:p>
-        </p:txBody>
-      </p:sp>
-      <p:sp>
-        <p:nvSpPr>
-          <p:cNvPr id="14" name="Rectangle 13"/>
+            <a:r>
+              <a:rPr sz="1300" b="1">
+                <a:solidFill>
+                  <a:srgbClr val="1F3A5F"/>
+                </a:solidFill>
+              </a:rPr>
+              <a:t>Phasing</a:t>
+            </a:r>
+          </a:p>
+          <a:p>
+            <a:pPr algn="ctr"/>
+            <a:r>
+              <a:rPr sz="1000">
+                <a:solidFill>
+                  <a:srgbClr val="1A1A1A"/>
+                </a:solidFill>
+              </a:rPr>
+              <a:t>SHAPEIT5</a:t>
+            </a:r>
+            <a:br/>
+            <a:r>
+              <a:rPr sz="1000">
+                <a:solidFill>
+                  <a:srgbClr val="1A1A1A"/>
+                </a:solidFill>
+              </a:rPr>
+              <a:t>population phasing</a:t>
+            </a:r>
+          </a:p>
+        </p:txBody>
+      </p:sp>
+      <p:sp>
+        <p:nvSpPr>
+          <p:cNvPr id="6" name="Right Arrow 5"/>
           <p:cNvSpPr/>
           <p:nvPr/>
         </p:nvSpPr>
         <p:spPr>
           <a:xfrm>
-            <a:off x="1371600" y="2862071"/>
-            <a:ext cx="407561" cy="265176"/>
-          </a:xfrm>
-          <a:prstGeom prst="rect">
+            <a:off x="4888839" y="2761488"/>
+            <a:ext cx="128015" cy="256032"/>
+          </a:xfrm>
+          <a:prstGeom prst="rightArrow">
             <a:avLst/>
           </a:prstGeom>
           <a:solidFill>
-            <a:srgbClr val="F59E0B"/>
+            <a:srgbClr val="666666"/>
           </a:solidFill>
           <a:ln>
             <a:noFill/>
@@ -5923,81 +4603,25 @@
       </p:sp>
       <p:sp>
         <p:nvSpPr>
-          <p:cNvPr id="15" name="TextBox 14"/>
-          <p:cNvSpPr txBox="1"/>
-          <p:nvPr/>
-        </p:nvSpPr>
-        <p:spPr>
-          <a:xfrm>
-            <a:off x="1870601" y="2834639"/>
-            <a:ext cx="2011680" cy="320040"/>
-          </a:xfrm>
-          <a:prstGeom prst="rect">
-            <a:avLst/>
-          </a:prstGeom>
-          <a:noFill/>
-        </p:spPr>
-        <p:txBody>
-          <a:bodyPr wrap="none">
-            <a:spAutoFit/>
-          </a:bodyPr>
-          <a:lstStyle/>
-          <a:p>
-            <a:r>
-              <a:rPr sz="1200"/>
-              <a:t>n = 48</a:t>
-            </a:r>
-          </a:p>
-        </p:txBody>
-      </p:sp>
-      <p:sp>
-        <p:nvSpPr>
-          <p:cNvPr id="16" name="TextBox 15"/>
-          <p:cNvSpPr txBox="1"/>
-          <p:nvPr/>
-        </p:nvSpPr>
-        <p:spPr>
-          <a:xfrm>
-            <a:off x="731520" y="3246120"/>
-            <a:ext cx="548640" cy="320040"/>
-          </a:xfrm>
-          <a:prstGeom prst="rect">
-            <a:avLst/>
-          </a:prstGeom>
-          <a:noFill/>
-        </p:spPr>
-        <p:txBody>
-          <a:bodyPr wrap="none">
-            <a:spAutoFit/>
-          </a:bodyPr>
-          <a:lstStyle/>
-          <a:p>
-            <a:r>
-              <a:rPr sz="1300" b="1"/>
-              <a:t>AMR</a:t>
-            </a:r>
-          </a:p>
-        </p:txBody>
-      </p:sp>
-      <p:sp>
-        <p:nvSpPr>
-          <p:cNvPr id="17" name="Rectangle 16"/>
+          <p:cNvPr id="7" name="Rounded Rectangle 6"/>
           <p:cNvSpPr/>
           <p:nvPr/>
         </p:nvSpPr>
         <p:spPr>
           <a:xfrm>
-            <a:off x="1371600" y="3273551"/>
-            <a:ext cx="747195" cy="265176"/>
-          </a:xfrm>
-          <a:prstGeom prst="rect">
+            <a:off x="5021427" y="1920240"/>
+            <a:ext cx="2148840" cy="1920240"/>
+          </a:xfrm>
+          <a:prstGeom prst="roundRect">
             <a:avLst/>
           </a:prstGeom>
           <a:solidFill>
-            <a:srgbClr val="DC2626"/>
+            <a:srgbClr val="EEE9E0"/>
           </a:solidFill>
-          <a:ln>
-            <a:noFill/>
+          <a:ln w="6350">
+            <a:solidFill>
+              <a:srgbClr val="666666"/>
+            </a:solidFill>
           </a:ln>
         </p:spPr>
         <p:style>
@@ -6015,95 +4639,66 @@
           </a:fontRef>
         </p:style>
         <p:txBody>
-          <a:bodyPr rtlCol="0" anchor="ctr"/>
+          <a:bodyPr rtlCol="0" anchor="ctr" wrap="square" tIns="80000" lIns="60000" rIns="60000"/>
           <a:lstStyle/>
           <a:p>
             <a:pPr algn="ctr"/>
-          </a:p>
-        </p:txBody>
-      </p:sp>
-      <p:sp>
-        <p:nvSpPr>
-          <p:cNvPr id="18" name="TextBox 17"/>
-          <p:cNvSpPr txBox="1"/>
-          <p:nvPr/>
-        </p:nvSpPr>
-        <p:spPr>
-          <a:xfrm>
-            <a:off x="2210235" y="3246120"/>
-            <a:ext cx="2011680" cy="320040"/>
-          </a:xfrm>
-          <a:prstGeom prst="rect">
-            <a:avLst/>
-          </a:prstGeom>
-          <a:noFill/>
-        </p:spPr>
-        <p:txBody>
-          <a:bodyPr wrap="none">
-            <a:spAutoFit/>
-          </a:bodyPr>
-          <a:lstStyle/>
-          <a:p>
-            <a:r>
-              <a:rPr sz="1200" b="1">
-                <a:solidFill>
-                  <a:srgbClr val="B91C1C"/>
-                </a:solidFill>
-              </a:rPr>
-              <a:t>n = 88  ← 7× under-representation</a:t>
-            </a:r>
-          </a:p>
-        </p:txBody>
-      </p:sp>
-      <p:sp>
-        <p:nvSpPr>
-          <p:cNvPr id="19" name="TextBox 18"/>
-          <p:cNvSpPr txBox="1"/>
-          <p:nvPr/>
-        </p:nvSpPr>
-        <p:spPr>
-          <a:xfrm>
-            <a:off x="731520" y="3977639"/>
-            <a:ext cx="5943600" cy="320040"/>
-          </a:xfrm>
-          <a:prstGeom prst="rect">
-            <a:avLst/>
-          </a:prstGeom>
-          <a:noFill/>
-        </p:spPr>
-        <p:txBody>
-          <a:bodyPr wrap="none">
-            <a:spAutoFit/>
-          </a:bodyPr>
-          <a:lstStyle/>
-          <a:p>
             <a:r>
               <a:rPr sz="1300" b="1">
                 <a:solidFill>
                   <a:srgbClr val="1F3A5F"/>
                 </a:solidFill>
               </a:rPr>
-              <a:t>Within AMR (n=88): geographic imbalance</a:t>
-            </a:r>
-          </a:p>
-        </p:txBody>
-      </p:sp>
-      <p:sp>
-        <p:nvSpPr>
-          <p:cNvPr id="20" name="Rectangle 19"/>
+              <a:t>Simulate admixed</a:t>
+            </a:r>
+          </a:p>
+          <a:p>
+            <a:pPr algn="ctr"/>
+            <a:r>
+              <a:rPr sz="1000">
+                <a:solidFill>
+                  <a:srgbClr val="1A1A1A"/>
+                </a:solidFill>
+              </a:rPr>
+              <a:t>admix-simu</a:t>
+            </a:r>
+            <a:br/>
+            <a:r>
+              <a:rPr sz="1000">
+                <a:solidFill>
+                  <a:srgbClr val="1A1A1A"/>
+                </a:solidFill>
+              </a:rPr>
+              <a:t>gen=12, n=30</a:t>
+            </a:r>
+            <a:br/>
+            <a:r>
+              <a:rPr sz="1000">
+                <a:solidFill>
+                  <a:srgbClr val="1A1A1A"/>
+                </a:solidFill>
+              </a:rPr>
+              <a:t>Brasa &amp; MXB tracks</a:t>
+            </a:r>
+          </a:p>
+        </p:txBody>
+      </p:sp>
+      <p:sp>
+        <p:nvSpPr>
+          <p:cNvPr id="8" name="Right Arrow 7"/>
           <p:cNvSpPr/>
           <p:nvPr/>
         </p:nvSpPr>
         <p:spPr>
           <a:xfrm>
-            <a:off x="731520" y="4343400"/>
-            <a:ext cx="3377045" cy="320040"/>
-          </a:xfrm>
-          <a:prstGeom prst="rect">
+            <a:off x="7174839" y="2761488"/>
+            <a:ext cx="128015" cy="256032"/>
+          </a:xfrm>
+          <a:prstGeom prst="rightArrow">
             <a:avLst/>
           </a:prstGeom>
           <a:solidFill>
-            <a:srgbClr val="4C9F70"/>
+            <a:srgbClr val="666666"/>
           </a:solidFill>
           <a:ln>
             <a:noFill/>
@@ -6133,23 +4728,25 @@
       </p:sp>
       <p:sp>
         <p:nvSpPr>
-          <p:cNvPr id="21" name="Rectangle 20"/>
+          <p:cNvPr id="9" name="Rounded Rectangle 8"/>
           <p:cNvSpPr/>
           <p:nvPr/>
         </p:nvSpPr>
         <p:spPr>
           <a:xfrm>
-            <a:off x="4108565" y="4343400"/>
-            <a:ext cx="878031" cy="320040"/>
-          </a:xfrm>
-          <a:prstGeom prst="rect">
+            <a:off x="7307427" y="1920240"/>
+            <a:ext cx="2148840" cy="1920240"/>
+          </a:xfrm>
+          <a:prstGeom prst="roundRect">
             <a:avLst/>
           </a:prstGeom>
           <a:solidFill>
-            <a:srgbClr val="4A7FB0"/>
+            <a:srgbClr val="EEE9E0"/>
           </a:solidFill>
-          <a:ln>
-            <a:noFill/>
+          <a:ln w="6350">
+            <a:solidFill>
+              <a:srgbClr val="666666"/>
+            </a:solidFill>
           </a:ln>
         </p:spPr>
         <p:style>
@@ -6167,29 +4764,57 @@
           </a:fontRef>
         </p:style>
         <p:txBody>
-          <a:bodyPr rtlCol="0" anchor="ctr"/>
+          <a:bodyPr rtlCol="0" anchor="ctr" wrap="square" tIns="80000" lIns="60000" rIns="60000"/>
           <a:lstStyle/>
           <a:p>
             <a:pPr algn="ctr"/>
-          </a:p>
-        </p:txBody>
-      </p:sp>
-      <p:sp>
-        <p:nvSpPr>
-          <p:cNvPr id="22" name="Rectangle 21"/>
+            <a:r>
+              <a:rPr sz="1300" b="1">
+                <a:solidFill>
+                  <a:srgbClr val="1F3A5F"/>
+                </a:solidFill>
+              </a:rPr>
+              <a:t>Local ancestry</a:t>
+            </a:r>
+          </a:p>
+          <a:p>
+            <a:pPr algn="ctr"/>
+            <a:r>
+              <a:rPr sz="1000">
+                <a:solidFill>
+                  <a:srgbClr val="1A1A1A"/>
+                </a:solidFill>
+              </a:rPr>
+              <a:t>RFMix v1 TrioPhased</a:t>
+            </a:r>
+            <a:br/>
+            <a:r>
+              <a:rPr sz="1000">
+                <a:solidFill>
+                  <a:srgbClr val="1A1A1A"/>
+                </a:solidFill>
+              </a:rPr>
+              <a:t>22 chromosomes</a:t>
+            </a:r>
+          </a:p>
+        </p:txBody>
+      </p:sp>
+      <p:sp>
+        <p:nvSpPr>
+          <p:cNvPr id="10" name="Right Arrow 9"/>
           <p:cNvSpPr/>
           <p:nvPr/>
         </p:nvSpPr>
         <p:spPr>
           <a:xfrm>
-            <a:off x="4986597" y="4343400"/>
-            <a:ext cx="607868" cy="320040"/>
-          </a:xfrm>
-          <a:prstGeom prst="rect">
+            <a:off x="9460839" y="2761488"/>
+            <a:ext cx="128015" cy="256032"/>
+          </a:xfrm>
+          <a:prstGeom prst="rightArrow">
             <a:avLst/>
           </a:prstGeom>
           <a:solidFill>
-            <a:srgbClr val="8FB7D8"/>
+            <a:srgbClr val="666666"/>
           </a:solidFill>
           <a:ln>
             <a:noFill/>
@@ -6219,23 +4844,25 @@
       </p:sp>
       <p:sp>
         <p:nvSpPr>
-          <p:cNvPr id="23" name="Rectangle 22"/>
+          <p:cNvPr id="11" name="Rounded Rectangle 10"/>
           <p:cNvSpPr/>
           <p:nvPr/>
         </p:nvSpPr>
         <p:spPr>
           <a:xfrm>
-            <a:off x="5594465" y="4343400"/>
-            <a:ext cx="1080654" cy="320040"/>
-          </a:xfrm>
-          <a:prstGeom prst="rect">
+            <a:off x="9593427" y="1920240"/>
+            <a:ext cx="2148840" cy="1920240"/>
+          </a:xfrm>
+          <a:prstGeom prst="roundRect">
             <a:avLst/>
           </a:prstGeom>
           <a:solidFill>
-            <a:srgbClr val="B69ACC"/>
+            <a:srgbClr val="EEE9E0"/>
           </a:solidFill>
-          <a:ln>
-            <a:noFill/>
+          <a:ln w="6350">
+            <a:solidFill>
+              <a:srgbClr val="666666"/>
+            </a:solidFill>
           </a:ln>
         </p:spPr>
         <p:style>
@@ -6253,23 +4880,60 @@
           </a:fontRef>
         </p:style>
         <p:txBody>
-          <a:bodyPr rtlCol="0" anchor="ctr"/>
+          <a:bodyPr rtlCol="0" anchor="ctr" wrap="square" tIns="80000" lIns="60000" rIns="60000"/>
           <a:lstStyle/>
           <a:p>
             <a:pPr algn="ctr"/>
-          </a:p>
-        </p:txBody>
-      </p:sp>
-      <p:sp>
-        <p:nvSpPr>
-          <p:cNvPr id="24" name="TextBox 23"/>
+            <a:r>
+              <a:rPr sz="1300" b="1">
+                <a:solidFill>
+                  <a:srgbClr val="1F3A5F"/>
+                </a:solidFill>
+              </a:rPr>
+              <a:t>Score</a:t>
+            </a:r>
+          </a:p>
+          <a:p>
+            <a:pPr algn="ctr"/>
+            <a:r>
+              <a:rPr sz="1000">
+                <a:solidFill>
+                  <a:srgbClr val="1A1A1A"/>
+                </a:solidFill>
+              </a:rPr>
+              <a:t>per-hap recall</a:t>
+            </a:r>
+            <a:br/>
+            <a:r>
+              <a:rPr sz="1000">
+                <a:solidFill>
+                  <a:srgbClr val="1A1A1A"/>
+                </a:solidFill>
+              </a:rPr>
+              <a:t>vs known truth</a:t>
+            </a:r>
+            <a:br/>
+            <a:r>
+              <a:rPr sz="1000">
+                <a:solidFill>
+                  <a:srgbClr val="1A1A1A"/>
+                </a:solidFill>
+              </a:rPr>
+              <a:t>weighted concordance / F1</a:t>
+            </a:r>
+          </a:p>
+        </p:txBody>
+      </p:sp>
+      <p:sp>
+        <p:nvSpPr>
+          <p:cNvPr id="12" name="TextBox 11"/>
           <p:cNvSpPr txBox="1"/>
           <p:nvPr/>
         </p:nvSpPr>
         <p:spPr>
           <a:xfrm>
-            <a:off x="731520" y="4754880"/>
-            <a:ext cx="6126480" cy="457200"/>
+            <a:off x="502920" y="4160520"/>
+            <a:ext cx="11155680" cy="320040"/>
           </a:xfrm>
           <a:prstGeom prst="rect">
             <a:avLst/>
@@ -6277,32 +4941,417 @@
           <a:noFill/>
         </p:spPr>
         <p:txBody>
-          <a:bodyPr wrap="square">
+          <a:bodyPr wrap="square" lIns="0" rIns="0" tIns="0" bIns="0">
             <a:spAutoFit/>
           </a:bodyPr>
           <a:lstStyle/>
           <a:p>
-            <a:r>
-              <a:rPr sz="1100">
+            <a:pPr algn="l"/>
+            <a:r>
+              <a:rPr sz="1300" i="0" b="1">
+                <a:solidFill>
+                  <a:srgbClr val="1F3A5F"/>
+                </a:solidFill>
+              </a:rPr>
+              <a:t>Six reference-panel combinations tested</a:t>
+            </a:r>
+          </a:p>
+        </p:txBody>
+      </p:sp>
+      <p:sp>
+        <p:nvSpPr>
+          <p:cNvPr id="13" name="Rounded Rectangle 12"/>
+          <p:cNvSpPr/>
+          <p:nvPr/>
+        </p:nvSpPr>
+        <p:spPr>
+          <a:xfrm>
+            <a:off x="502920" y="4572000"/>
+            <a:ext cx="1874519" cy="960120"/>
+          </a:xfrm>
+          <a:prstGeom prst="roundRect">
+            <a:avLst/>
+          </a:prstGeom>
+          <a:solidFill>
+            <a:srgbClr val="EEE9E0"/>
+          </a:solidFill>
+          <a:ln w="17780">
+            <a:solidFill>
+              <a:srgbClr val="666666"/>
+            </a:solidFill>
+          </a:ln>
+        </p:spPr>
+        <p:style>
+          <a:lnRef idx="1">
+            <a:schemeClr val="accent1"/>
+          </a:lnRef>
+          <a:fillRef idx="3">
+            <a:schemeClr val="accent1"/>
+          </a:fillRef>
+          <a:effectRef idx="2">
+            <a:schemeClr val="accent1"/>
+          </a:effectRef>
+          <a:fontRef idx="minor">
+            <a:schemeClr val="lt1"/>
+          </a:fontRef>
+        </p:style>
+        <p:txBody>
+          <a:bodyPr rtlCol="0" anchor="ctr" tIns="50000" lIns="80000" rIns="60000"/>
+          <a:lstStyle/>
+          <a:p>
+            <a:pPr algn="l"/>
+            <a:r>
+              <a:rPr sz="1100" b="1">
                 <a:solidFill>
                   <a:srgbClr val="666666"/>
                 </a:solidFill>
               </a:rPr>
-              <a:t>MXB Mexico 50 (57%) · HGDP Mexico 13 (15%) · Peru 9 (10%) · Amazon+Colombia 16 (18%)</a:t>
-            </a:r>
-          </a:p>
-        </p:txBody>
-      </p:sp>
-      <p:sp>
-        <p:nvSpPr>
-          <p:cNvPr id="25" name="TextBox 24"/>
+              <a:t>NAT_HGDP</a:t>
+            </a:r>
+          </a:p>
+          <a:p>
+            <a:pPr algn="l"/>
+            <a:r>
+              <a:rPr sz="950">
+                <a:solidFill>
+                  <a:srgbClr val="1A1A1A"/>
+                </a:solidFill>
+              </a:rPr>
+              <a:t>26 HGDP + 5 LP</a:t>
+            </a:r>
+          </a:p>
+        </p:txBody>
+      </p:sp>
+      <p:sp>
+        <p:nvSpPr>
+          <p:cNvPr id="14" name="Rounded Rectangle 13"/>
+          <p:cNvSpPr/>
+          <p:nvPr/>
+        </p:nvSpPr>
+        <p:spPr>
+          <a:xfrm>
+            <a:off x="2514600" y="4572000"/>
+            <a:ext cx="1874519" cy="960120"/>
+          </a:xfrm>
+          <a:prstGeom prst="roundRect">
+            <a:avLst/>
+          </a:prstGeom>
+          <a:solidFill>
+            <a:srgbClr val="EEE9E0"/>
+          </a:solidFill>
+          <a:ln w="17780">
+            <a:solidFill>
+              <a:srgbClr val="C94A53"/>
+            </a:solidFill>
+          </a:ln>
+        </p:spPr>
+        <p:style>
+          <a:lnRef idx="1">
+            <a:schemeClr val="accent1"/>
+          </a:lnRef>
+          <a:fillRef idx="3">
+            <a:schemeClr val="accent1"/>
+          </a:fillRef>
+          <a:effectRef idx="2">
+            <a:schemeClr val="accent1"/>
+          </a:effectRef>
+          <a:fontRef idx="minor">
+            <a:schemeClr val="lt1"/>
+          </a:fontRef>
+        </p:style>
+        <p:txBody>
+          <a:bodyPr rtlCol="0" anchor="ctr" tIns="50000" lIns="80000" rIns="60000"/>
+          <a:lstStyle/>
+          <a:p>
+            <a:pPr algn="l"/>
+            <a:r>
+              <a:rPr sz="1100" b="1">
+                <a:solidFill>
+                  <a:srgbClr val="C94A53"/>
+                </a:solidFill>
+              </a:rPr>
+              <a:t>NAT_HGDPMXB</a:t>
+            </a:r>
+          </a:p>
+          <a:p>
+            <a:pPr algn="l"/>
+            <a:r>
+              <a:rPr sz="950">
+                <a:solidFill>
+                  <a:srgbClr val="1A1A1A"/>
+                </a:solidFill>
+              </a:rPr>
+              <a:t>+ 25 MXB</a:t>
+            </a:r>
+          </a:p>
+        </p:txBody>
+      </p:sp>
+      <p:sp>
+        <p:nvSpPr>
+          <p:cNvPr id="15" name="Rounded Rectangle 14"/>
+          <p:cNvSpPr/>
+          <p:nvPr/>
+        </p:nvSpPr>
+        <p:spPr>
+          <a:xfrm>
+            <a:off x="4526279" y="4572000"/>
+            <a:ext cx="1874519" cy="960120"/>
+          </a:xfrm>
+          <a:prstGeom prst="roundRect">
+            <a:avLst/>
+          </a:prstGeom>
+          <a:solidFill>
+            <a:srgbClr val="EEE9E0"/>
+          </a:solidFill>
+          <a:ln w="17780">
+            <a:solidFill>
+              <a:srgbClr val="C94A53"/>
+            </a:solidFill>
+          </a:ln>
+        </p:spPr>
+        <p:style>
+          <a:lnRef idx="1">
+            <a:schemeClr val="accent1"/>
+          </a:lnRef>
+          <a:fillRef idx="3">
+            <a:schemeClr val="accent1"/>
+          </a:fillRef>
+          <a:effectRef idx="2">
+            <a:schemeClr val="accent1"/>
+          </a:effectRef>
+          <a:fontRef idx="minor">
+            <a:schemeClr val="lt1"/>
+          </a:fontRef>
+        </p:style>
+        <p:txBody>
+          <a:bodyPr rtlCol="0" anchor="ctr" tIns="50000" lIns="80000" rIns="60000"/>
+          <a:lstStyle/>
+          <a:p>
+            <a:pPr algn="l"/>
+            <a:r>
+              <a:rPr sz="1100" b="1">
+                <a:solidFill>
+                  <a:srgbClr val="C94A53"/>
+                </a:solidFill>
+              </a:rPr>
+              <a:t>NAT_HGDPMXB_FULL</a:t>
+            </a:r>
+          </a:p>
+          <a:p>
+            <a:pPr algn="l"/>
+            <a:r>
+              <a:rPr sz="950">
+                <a:solidFill>
+                  <a:srgbClr val="1A1A1A"/>
+                </a:solidFill>
+              </a:rPr>
+              <a:t>+ 50 MXB</a:t>
+            </a:r>
+          </a:p>
+        </p:txBody>
+      </p:sp>
+      <p:sp>
+        <p:nvSpPr>
+          <p:cNvPr id="16" name="Rounded Rectangle 15"/>
+          <p:cNvSpPr/>
+          <p:nvPr/>
+        </p:nvSpPr>
+        <p:spPr>
+          <a:xfrm>
+            <a:off x="502920" y="5577840"/>
+            <a:ext cx="1874519" cy="960120"/>
+          </a:xfrm>
+          <a:prstGeom prst="roundRect">
+            <a:avLst/>
+          </a:prstGeom>
+          <a:solidFill>
+            <a:srgbClr val="EEE9E0"/>
+          </a:solidFill>
+          <a:ln w="17780">
+            <a:solidFill>
+              <a:srgbClr val="3E6BB0"/>
+            </a:solidFill>
+          </a:ln>
+        </p:spPr>
+        <p:style>
+          <a:lnRef idx="1">
+            <a:schemeClr val="accent1"/>
+          </a:lnRef>
+          <a:fillRef idx="3">
+            <a:schemeClr val="accent1"/>
+          </a:fillRef>
+          <a:effectRef idx="2">
+            <a:schemeClr val="accent1"/>
+          </a:effectRef>
+          <a:fontRef idx="minor">
+            <a:schemeClr val="lt1"/>
+          </a:fontRef>
+        </p:style>
+        <p:txBody>
+          <a:bodyPr rtlCol="0" anchor="ctr" tIns="50000" lIns="80000" rIns="60000"/>
+          <a:lstStyle/>
+          <a:p>
+            <a:pPr algn="l"/>
+            <a:r>
+              <a:rPr sz="1100" b="1">
+                <a:solidFill>
+                  <a:srgbClr val="3E6BB0"/>
+                </a:solidFill>
+              </a:rPr>
+              <a:t>NAT_HOMOG</a:t>
+            </a:r>
+          </a:p>
+          <a:p>
+            <a:pPr algn="l"/>
+            <a:r>
+              <a:rPr sz="950">
+                <a:solidFill>
+                  <a:srgbClr val="1A1A1A"/>
+                </a:solidFill>
+              </a:rPr>
+              <a:t>ADMIXTURE-homog Q≥0.95</a:t>
+            </a:r>
+          </a:p>
+        </p:txBody>
+      </p:sp>
+      <p:sp>
+        <p:nvSpPr>
+          <p:cNvPr id="17" name="Rounded Rectangle 16"/>
+          <p:cNvSpPr/>
+          <p:nvPr/>
+        </p:nvSpPr>
+        <p:spPr>
+          <a:xfrm>
+            <a:off x="2514600" y="5577840"/>
+            <a:ext cx="1874519" cy="960120"/>
+          </a:xfrm>
+          <a:prstGeom prst="roundRect">
+            <a:avLst/>
+          </a:prstGeom>
+          <a:solidFill>
+            <a:srgbClr val="EEE9E0"/>
+          </a:solidFill>
+          <a:ln w="17780">
+            <a:solidFill>
+              <a:srgbClr val="4C9F70"/>
+            </a:solidFill>
+          </a:ln>
+        </p:spPr>
+        <p:style>
+          <a:lnRef idx="1">
+            <a:schemeClr val="accent1"/>
+          </a:lnRef>
+          <a:fillRef idx="3">
+            <a:schemeClr val="accent1"/>
+          </a:fillRef>
+          <a:effectRef idx="2">
+            <a:schemeClr val="accent1"/>
+          </a:effectRef>
+          <a:fontRef idx="minor">
+            <a:schemeClr val="lt1"/>
+          </a:fontRef>
+        </p:style>
+        <p:txBody>
+          <a:bodyPr rtlCol="0" anchor="ctr" tIns="50000" lIns="80000" rIns="60000"/>
+          <a:lstStyle/>
+          <a:p>
+            <a:pPr algn="l"/>
+            <a:r>
+              <a:rPr sz="1100" b="1">
+                <a:solidFill>
+                  <a:srgbClr val="4C9F70"/>
+                </a:solidFill>
+              </a:rPr>
+              <a:t>NAT_PEL</a:t>
+            </a:r>
+          </a:p>
+          <a:p>
+            <a:pPr algn="l"/>
+            <a:r>
+              <a:rPr sz="950">
+                <a:solidFill>
+                  <a:srgbClr val="1A1A1A"/>
+                </a:solidFill>
+              </a:rPr>
+              <a:t>adds 9 PEL (Peru)</a:t>
+            </a:r>
+          </a:p>
+        </p:txBody>
+      </p:sp>
+      <p:sp>
+        <p:nvSpPr>
+          <p:cNvPr id="18" name="Rounded Rectangle 17"/>
+          <p:cNvSpPr/>
+          <p:nvPr/>
+        </p:nvSpPr>
+        <p:spPr>
+          <a:xfrm>
+            <a:off x="4526279" y="5577840"/>
+            <a:ext cx="1874519" cy="960120"/>
+          </a:xfrm>
+          <a:prstGeom prst="roundRect">
+            <a:avLst/>
+          </a:prstGeom>
+          <a:solidFill>
+            <a:srgbClr val="EEE9E0"/>
+          </a:solidFill>
+          <a:ln w="17780">
+            <a:solidFill>
+              <a:srgbClr val="4C9F70"/>
+            </a:solidFill>
+          </a:ln>
+        </p:spPr>
+        <p:style>
+          <a:lnRef idx="1">
+            <a:schemeClr val="accent1"/>
+          </a:lnRef>
+          <a:fillRef idx="3">
+            <a:schemeClr val="accent1"/>
+          </a:fillRef>
+          <a:effectRef idx="2">
+            <a:schemeClr val="accent1"/>
+          </a:effectRef>
+          <a:fontRef idx="minor">
+            <a:schemeClr val="lt1"/>
+          </a:fontRef>
+        </p:style>
+        <p:txBody>
+          <a:bodyPr rtlCol="0" anchor="ctr" tIns="50000" lIns="80000" rIns="60000"/>
+          <a:lstStyle/>
+          <a:p>
+            <a:pPr algn="l"/>
+            <a:r>
+              <a:rPr sz="1100" b="1">
+                <a:solidFill>
+                  <a:srgbClr val="4C9F70"/>
+                </a:solidFill>
+              </a:rPr>
+              <a:t>NAT_PEL_EAS</a:t>
+            </a:r>
+          </a:p>
+          <a:p>
+            <a:pPr algn="l"/>
+            <a:r>
+              <a:rPr sz="950">
+                <a:solidFill>
+                  <a:srgbClr val="1A1A1A"/>
+                </a:solidFill>
+              </a:rPr>
+              <a:t>PEL + EAS outgroup</a:t>
+            </a:r>
+          </a:p>
+        </p:txBody>
+      </p:sp>
+      <p:sp>
+        <p:nvSpPr>
+          <p:cNvPr id="19" name="TextBox 18"/>
           <p:cNvSpPr txBox="1"/>
           <p:nvPr/>
         </p:nvSpPr>
         <p:spPr>
           <a:xfrm>
-            <a:off x="7498079" y="1600200"/>
-            <a:ext cx="4297680" cy="2743200"/>
+            <a:off x="6537960" y="4572000"/>
+            <a:ext cx="5212080" cy="320040"/>
           </a:xfrm>
           <a:prstGeom prst="rect">
             <a:avLst/>
@@ -6310,107 +5359,33 @@
           <a:noFill/>
         </p:spPr>
         <p:txBody>
-          <a:bodyPr wrap="square">
+          <a:bodyPr wrap="square" lIns="0" rIns="0" tIns="0" bIns="0">
             <a:spAutoFit/>
           </a:bodyPr>
           <a:lstStyle/>
           <a:p>
-            <a:r>
-              <a:rPr sz="1400" b="1">
-                <a:solidFill>
-                  <a:srgbClr val="B91C1C"/>
-                </a:solidFill>
-              </a:rPr>
-              <a:t>Regions with N = 0 public homogeneous samples</a:t>
-            </a:r>
-          </a:p>
-          <a:p>
-            <a:pPr>
-              <a:spcBef>
-                <a:spcPts val="600"/>
-              </a:spcBef>
-            </a:pPr>
-            <a:r>
-              <a:rPr sz="1200" b="1">
-                <a:solidFill>
-                  <a:srgbClr val="B91C1C"/>
-                </a:solidFill>
-              </a:rPr>
-              <a:t>🚫 North America</a:t>
-            </a:r>
-          </a:p>
-          <a:p>
-            <a:r>
-              <a:rPr sz="1050">
-                <a:solidFill>
-                  <a:srgbClr val="666666"/>
-                </a:solidFill>
-              </a:rPr>
-              <a:t>   Great Plains, Southwest, Pacific NW, Alaska, Canadian First Nations — access limited by valid research-integrity concerns; cancer disparities documented</a:t>
-            </a:r>
-          </a:p>
-          <a:p>
-            <a:pPr>
-              <a:spcBef>
-                <a:spcPts val="600"/>
-              </a:spcBef>
-            </a:pPr>
-            <a:r>
-              <a:rPr sz="1200" b="1">
-                <a:solidFill>
-                  <a:srgbClr val="B91C1C"/>
-                </a:solidFill>
-              </a:rPr>
-              <a:t>🚫 Central America</a:t>
-            </a:r>
-          </a:p>
-          <a:p>
-            <a:r>
-              <a:rPr sz="1050">
-                <a:solidFill>
-                  <a:srgbClr val="666666"/>
-                </a:solidFill>
-              </a:rPr>
-              <a:t>   Guatemala Highland Maya, Ch'orti', Q'eqchi', Miskitu, Bribri</a:t>
-            </a:r>
-          </a:p>
-          <a:p>
-            <a:pPr>
-              <a:spcBef>
-                <a:spcPts val="600"/>
-              </a:spcBef>
-            </a:pPr>
-            <a:r>
-              <a:rPr sz="1200" b="1">
-                <a:solidFill>
-                  <a:srgbClr val="B91C1C"/>
-                </a:solidFill>
-              </a:rPr>
-              <a:t>🚫 Southern Cone</a:t>
-            </a:r>
-          </a:p>
-          <a:p>
-            <a:r>
-              <a:rPr sz="1050">
-                <a:solidFill>
-                  <a:srgbClr val="666666"/>
-                </a:solidFill>
-              </a:rPr>
-              <a:t>   Mapuche, Selk'nam, Diaguita, Aymara-Bolivian, Wichí</a:t>
-            </a:r>
-          </a:p>
-        </p:txBody>
-      </p:sp>
-      <p:sp>
-        <p:nvSpPr>
-          <p:cNvPr id="26" name="TextBox 25"/>
+            <a:pPr algn="l"/>
+            <a:r>
+              <a:rPr sz="1300" i="0" b="1">
+                <a:solidFill>
+                  <a:srgbClr val="1F3A5F"/>
+                </a:solidFill>
+              </a:rPr>
+              <a:t>Two simulated admixed cohorts</a:t>
+            </a:r>
+          </a:p>
+        </p:txBody>
+      </p:sp>
+      <p:sp>
+        <p:nvSpPr>
+          <p:cNvPr id="20" name="TextBox 19"/>
           <p:cNvSpPr txBox="1"/>
           <p:nvPr/>
         </p:nvSpPr>
         <p:spPr>
           <a:xfrm>
-            <a:off x="457200" y="5257800"/>
-            <a:ext cx="11064240" cy="5029200"/>
+            <a:off x="6537960" y="4937760"/>
+            <a:ext cx="5212080" cy="1508760"/>
           </a:xfrm>
           <a:prstGeom prst="rect">
             <a:avLst/>
@@ -6418,68 +5393,1492 @@
           <a:noFill/>
         </p:spPr>
         <p:txBody>
+          <a:bodyPr wrap="square" lIns="0" rIns="0" tIns="0" bIns="0">
+            <a:spAutoFit/>
+          </a:bodyPr>
+          <a:lstStyle/>
+          <a:p>
+            <a:pPr algn="l"/>
+            <a:r>
+              <a:rPr sz="1100" i="0" b="0">
+                <a:solidFill>
+                  <a:srgbClr val="1A1A1A"/>
+                </a:solidFill>
+              </a:rPr>
+              <a:t>•  Brasa track — 15% NAT / 60% EUR / 25% AFR</a:t>
+            </a:r>
+          </a:p>
+          <a:p>
+            <a:pPr algn="l"/>
+            <a:r>
+              <a:rPr sz="1100" i="0" b="0">
+                <a:solidFill>
+                  <a:srgbClr val="1A1A1A"/>
+                </a:solidFill>
+              </a:rPr>
+              <a:t>     (Brazilian-like ancestry proportions)</a:t>
+            </a:r>
+          </a:p>
+          <a:p>
+            <a:pPr algn="l"/>
+            <a:r>
+              <a:rPr sz="1100" i="0" b="0">
+                <a:solidFill>
+                  <a:srgbClr val="1A1A1A"/>
+                </a:solidFill>
+              </a:rPr>
+              <a:t>•  MXB track — Mexican-like ancestry proportions</a:t>
+            </a:r>
+          </a:p>
+          <a:p>
+            <a:pPr algn="l"/>
+            <a:r>
+              <a:rPr sz="1100" i="0" b="0">
+                <a:solidFill>
+                  <a:srgbClr val="1A1A1A"/>
+                </a:solidFill>
+              </a:rPr>
+              <a:t>     (tests whether MXB helps a Mexican cohort)</a:t>
+            </a:r>
+          </a:p>
+        </p:txBody>
+      </p:sp>
+      <p:sp>
+        <p:nvSpPr>
+          <p:cNvPr id="21" name="TextBox 20"/>
+          <p:cNvSpPr txBox="1"/>
+          <p:nvPr/>
+        </p:nvSpPr>
+        <p:spPr>
+          <a:xfrm>
+            <a:off x="502920" y="6537960"/>
+            <a:ext cx="7315200" cy="274320"/>
+          </a:xfrm>
+          <a:prstGeom prst="rect">
+            <a:avLst/>
+          </a:prstGeom>
+          <a:noFill/>
+        </p:spPr>
+        <p:txBody>
+          <a:bodyPr wrap="square" lIns="0" rIns="0" tIns="0" bIns="0">
+            <a:spAutoFit/>
+          </a:bodyPr>
+          <a:lstStyle/>
+          <a:p>
+            <a:pPr algn="l"/>
+            <a:r>
+              <a:rPr sz="900" i="0" b="0">
+                <a:solidFill>
+                  <a:srgbClr val="666666"/>
+                </a:solidFill>
+              </a:rPr>
+              <a:t>Christina Magyar  ·  Thesis committee, Aug 2026  ·  Methods</a:t>
+            </a:r>
+          </a:p>
+        </p:txBody>
+      </p:sp>
+      <p:sp>
+        <p:nvSpPr>
+          <p:cNvPr id="22" name="TextBox 21"/>
+          <p:cNvSpPr txBox="1"/>
+          <p:nvPr/>
+        </p:nvSpPr>
+        <p:spPr>
+          <a:xfrm>
+            <a:off x="11338560" y="6537960"/>
+            <a:ext cx="548640" cy="274320"/>
+          </a:xfrm>
+          <a:prstGeom prst="rect">
+            <a:avLst/>
+          </a:prstGeom>
+          <a:noFill/>
+        </p:spPr>
+        <p:txBody>
+          <a:bodyPr wrap="square" lIns="0" rIns="0" tIns="0" bIns="0">
+            <a:spAutoFit/>
+          </a:bodyPr>
+          <a:lstStyle/>
+          <a:p>
+            <a:pPr algn="r"/>
+            <a:r>
+              <a:rPr sz="900" i="0" b="0">
+                <a:solidFill>
+                  <a:srgbClr val="666666"/>
+                </a:solidFill>
+              </a:rPr>
+              <a:t>3 / 6</a:t>
+            </a:r>
+          </a:p>
+        </p:txBody>
+      </p:sp>
+    </p:spTree>
+  </p:cSld>
+  <p:clrMapOvr>
+    <a:masterClrMapping/>
+  </p:clrMapOvr>
+</p:sld>
+</file>
+
+<file path=ppt/slides/slide4.xml><?xml version="1.0" encoding="utf-8"?>
+<p:sld xmlns:a="http://schemas.openxmlformats.org/drawingml/2006/main" xmlns:p="http://schemas.openxmlformats.org/presentationml/2006/main" xmlns:r="http://schemas.openxmlformats.org/officeDocument/2006/relationships">
+  <p:cSld>
+    <p:spTree>
+      <p:nvGrpSpPr>
+        <p:cNvPr id="1" name=""/>
+        <p:cNvGrpSpPr/>
+        <p:nvPr/>
+      </p:nvGrpSpPr>
+      <p:grpSpPr/>
+      <p:sp>
+        <p:nvSpPr>
+          <p:cNvPr id="2" name="TextBox 1"/>
+          <p:cNvSpPr txBox="1"/>
+          <p:nvPr/>
+        </p:nvSpPr>
+        <p:spPr>
+          <a:xfrm>
+            <a:off x="502920" y="292608"/>
+            <a:ext cx="11155680" cy="822960"/>
+          </a:xfrm>
+          <a:prstGeom prst="rect">
+            <a:avLst/>
+          </a:prstGeom>
+          <a:noFill/>
+        </p:spPr>
+        <p:txBody>
           <a:bodyPr wrap="square">
             <a:spAutoFit/>
           </a:bodyPr>
           <a:lstStyle/>
           <a:p>
-            <a:pPr>
-              <a:spcAft>
-                <a:spcPts val="600"/>
-              </a:spcAft>
-            </a:pPr>
-            <a:r>
-              <a:rPr sz="1300" b="1">
+            <a:r>
+              <a:rPr sz="2400" b="1">
+                <a:solidFill>
+                  <a:srgbClr val="1F3A5F"/>
+                </a:solidFill>
+              </a:rPr>
+              <a:t>Best reference panel depends on the target cohort's composition.</a:t>
+            </a:r>
+          </a:p>
+        </p:txBody>
+      </p:sp>
+      <p:sp>
+        <p:nvSpPr>
+          <p:cNvPr id="3" name="TextBox 2"/>
+          <p:cNvSpPr txBox="1"/>
+          <p:nvPr/>
+        </p:nvSpPr>
+        <p:spPr>
+          <a:xfrm>
+            <a:off x="502920" y="1051560"/>
+            <a:ext cx="11155680" cy="365760"/>
+          </a:xfrm>
+          <a:prstGeom prst="rect">
+            <a:avLst/>
+          </a:prstGeom>
+          <a:noFill/>
+        </p:spPr>
+        <p:txBody>
+          <a:bodyPr wrap="square" lIns="0" rIns="0" tIns="0" bIns="0">
+            <a:spAutoFit/>
+          </a:bodyPr>
+          <a:lstStyle/>
+          <a:p>
+            <a:pPr algn="l"/>
+            <a:r>
+              <a:rPr sz="1200" i="1" b="0">
+                <a:solidFill>
+                  <a:srgbClr val="666666"/>
+                </a:solidFill>
+              </a:rPr>
+              <a:t>Weighted NAT-ancestry recall, WGS density, chr20-22 pilot</a:t>
+            </a:r>
+          </a:p>
+        </p:txBody>
+      </p:sp>
+      <p:pic>
+        <p:nvPicPr>
+          <p:cNvPr id="4" name="Picture 3" descr="fig_wgs_panels.png"/>
+          <p:cNvPicPr>
+            <a:picLocks noChangeAspect="1"/>
+          </p:cNvPicPr>
+          <p:nvPr/>
+        </p:nvPicPr>
+        <p:blipFill>
+          <a:blip r:embed="rId2"/>
+          <a:stretch>
+            <a:fillRect/>
+          </a:stretch>
+        </p:blipFill>
+        <p:spPr>
+          <a:xfrm>
+            <a:off x="502920" y="1508760"/>
+            <a:ext cx="7498079" cy="3358035"/>
+          </a:xfrm>
+          <a:prstGeom prst="rect">
+            <a:avLst/>
+          </a:prstGeom>
+        </p:spPr>
+      </p:pic>
+      <p:sp>
+        <p:nvSpPr>
+          <p:cNvPr id="5" name="TextBox 4"/>
+          <p:cNvSpPr txBox="1"/>
+          <p:nvPr/>
+        </p:nvSpPr>
+        <p:spPr>
+          <a:xfrm>
+            <a:off x="8275320" y="1600200"/>
+            <a:ext cx="3566160" cy="365760"/>
+          </a:xfrm>
+          <a:prstGeom prst="rect">
+            <a:avLst/>
+          </a:prstGeom>
+          <a:noFill/>
+        </p:spPr>
+        <p:txBody>
+          <a:bodyPr wrap="square" lIns="0" rIns="0" tIns="0" bIns="0">
+            <a:spAutoFit/>
+          </a:bodyPr>
+          <a:lstStyle/>
+          <a:p>
+            <a:pPr algn="l"/>
+            <a:r>
+              <a:rPr sz="1300" i="0" b="1">
+                <a:solidFill>
+                  <a:srgbClr val="1F3A5F"/>
+                </a:solidFill>
+              </a:rPr>
+              <a:t>Takeaways</a:t>
+            </a:r>
+          </a:p>
+        </p:txBody>
+      </p:sp>
+      <p:sp>
+        <p:nvSpPr>
+          <p:cNvPr id="6" name="TextBox 5"/>
+          <p:cNvSpPr txBox="1"/>
+          <p:nvPr/>
+        </p:nvSpPr>
+        <p:spPr>
+          <a:xfrm>
+            <a:off x="8275320" y="1965960"/>
+            <a:ext cx="3611880" cy="4023360"/>
+          </a:xfrm>
+          <a:prstGeom prst="rect">
+            <a:avLst/>
+          </a:prstGeom>
+          <a:noFill/>
+        </p:spPr>
+        <p:txBody>
+          <a:bodyPr wrap="square" lIns="0" rIns="0" tIns="0" bIns="0">
+            <a:spAutoFit/>
+          </a:bodyPr>
+          <a:lstStyle/>
+          <a:p>
+            <a:pPr algn="l"/>
+            <a:r>
+              <a:rPr sz="1050" i="0" b="0">
                 <a:solidFill>
                   <a:srgbClr val="1A1A1A"/>
                 </a:solidFill>
               </a:rPr>
-              <a:t>AMR reference set is ~7× smaller than EUR/AFR/EAS — a numerically-driven accuracy bias for LAI in admixed Americas cohorts</a:t>
-            </a:r>
-          </a:p>
-          <a:p>
-            <a:pPr>
-              <a:spcAft>
-                <a:spcPts val="600"/>
-              </a:spcAft>
-            </a:pPr>
-            <a:r>
-              <a:rPr sz="1300" b="1">
+              <a:t>For a Mexican-like cohort (blue bars):</a:t>
+            </a:r>
+          </a:p>
+          <a:p>
+            <a:pPr algn="l"/>
+            <a:r>
+              <a:rPr sz="1050" i="0" b="0">
                 <a:solidFill>
                   <a:srgbClr val="1A1A1A"/>
                 </a:solidFill>
               </a:rPr>
-              <a:t>Within AMR, Mexico (MXB + HGDP) contributes 72% of samples — imbalance biases panels toward Mexican-Latino cohorts</a:t>
-            </a:r>
-          </a:p>
-          <a:p>
-            <a:pPr>
-              <a:spcAft>
-                <a:spcPts val="600"/>
-              </a:spcAft>
-            </a:pPr>
-            <a:r>
-              <a:rPr sz="1300" b="1">
+              <a:t>•  Adding 25 MXB samples</a:t>
+            </a:r>
+          </a:p>
+          <a:p>
+            <a:pPr algn="l"/>
+            <a:r>
+              <a:rPr sz="1050" i="0" b="0">
                 <a:solidFill>
                   <a:srgbClr val="1A1A1A"/>
                 </a:solidFill>
               </a:rPr>
-              <a:t>Adding MXB partially closes the Mexican gap but leaves Central-American, Southern-Cone, and North-American Indigenous ancestries unresolved</a:t>
-            </a:r>
-          </a:p>
-          <a:p>
-            <a:pPr>
-              <a:spcAft>
-                <a:spcPts val="600"/>
-              </a:spcAft>
-            </a:pPr>
-            <a:r>
-              <a:rPr sz="1300" b="1">
+              <a:t>    lifts NAT recall  0.931 → 0.942</a:t>
+            </a:r>
+          </a:p>
+          <a:p>
+            <a:pPr algn="l"/>
+          </a:p>
+          <a:p>
+            <a:pPr algn="l"/>
+            <a:r>
+              <a:rPr sz="1050" i="0" b="0">
                 <a:solidFill>
                   <a:srgbClr val="1A1A1A"/>
                 </a:solidFill>
               </a:rPr>
-              <a:t>Directional call: broader, geographically balanced Amerindigenous reference sampling is needed for equitable LAI across Latin American cohorts</a:t>
+              <a:t>For a Brazilian-like cohort (red bars):</a:t>
+            </a:r>
+          </a:p>
+          <a:p>
+            <a:pPr algn="l"/>
+            <a:r>
+              <a:rPr sz="1050" i="0" b="0">
+                <a:solidFill>
+                  <a:srgbClr val="1A1A1A"/>
+                </a:solidFill>
+              </a:rPr>
+              <a:t>•  PEL (Peru) panel wins on NAT</a:t>
+            </a:r>
+          </a:p>
+          <a:p>
+            <a:pPr algn="l"/>
+            <a:r>
+              <a:rPr sz="1050" i="0" b="0">
+                <a:solidFill>
+                  <a:srgbClr val="1A1A1A"/>
+                </a:solidFill>
+              </a:rPr>
+              <a:t>    HGDPMXB actually loses ~2%</a:t>
+            </a:r>
+          </a:p>
+          <a:p>
+            <a:pPr algn="l"/>
+            <a:r>
+              <a:rPr sz="1050" i="0" b="0">
+                <a:solidFill>
+                  <a:srgbClr val="1A1A1A"/>
+                </a:solidFill>
+              </a:rPr>
+              <a:t>•  Adding non-Mexican ancestry</a:t>
+            </a:r>
+          </a:p>
+          <a:p>
+            <a:pPr algn="l"/>
+            <a:r>
+              <a:rPr sz="1050" i="0" b="0">
+                <a:solidFill>
+                  <a:srgbClr val="1A1A1A"/>
+                </a:solidFill>
+              </a:rPr>
+              <a:t>    to a Mexican reference hurts</a:t>
+            </a:r>
+          </a:p>
+          <a:p>
+            <a:pPr algn="l"/>
+          </a:p>
+          <a:p>
+            <a:pPr algn="l"/>
+            <a:r>
+              <a:rPr sz="1050" i="0" b="0">
+                <a:solidFill>
+                  <a:srgbClr val="1A1A1A"/>
+                </a:solidFill>
+              </a:rPr>
+              <a:t>→  Panel-choice must match the</a:t>
+            </a:r>
+          </a:p>
+          <a:p>
+            <a:pPr algn="l"/>
+            <a:r>
+              <a:rPr sz="1050" i="0" b="0">
+                <a:solidFill>
+                  <a:srgbClr val="1A1A1A"/>
+                </a:solidFill>
+              </a:rPr>
+              <a:t>     target cohort, not the largest</a:t>
+            </a:r>
+          </a:p>
+          <a:p>
+            <a:pPr algn="l"/>
+            <a:r>
+              <a:rPr sz="1050" i="0" b="0">
+                <a:solidFill>
+                  <a:srgbClr val="1A1A1A"/>
+                </a:solidFill>
+              </a:rPr>
+              <a:t>     available sample source.</a:t>
+            </a:r>
+          </a:p>
+        </p:txBody>
+      </p:sp>
+      <p:sp>
+        <p:nvSpPr>
+          <p:cNvPr id="7" name="TextBox 6"/>
+          <p:cNvSpPr txBox="1"/>
+          <p:nvPr/>
+        </p:nvSpPr>
+        <p:spPr>
+          <a:xfrm>
+            <a:off x="502920" y="6537960"/>
+            <a:ext cx="7315200" cy="274320"/>
+          </a:xfrm>
+          <a:prstGeom prst="rect">
+            <a:avLst/>
+          </a:prstGeom>
+          <a:noFill/>
+        </p:spPr>
+        <p:txBody>
+          <a:bodyPr wrap="square" lIns="0" rIns="0" tIns="0" bIns="0">
+            <a:spAutoFit/>
+          </a:bodyPr>
+          <a:lstStyle/>
+          <a:p>
+            <a:pPr algn="l"/>
+            <a:r>
+              <a:rPr sz="900" i="0" b="0">
+                <a:solidFill>
+                  <a:srgbClr val="666666"/>
+                </a:solidFill>
+              </a:rPr>
+              <a:t>Christina Magyar  ·  Thesis committee, Aug 2026  ·  Result 1 · WGS</a:t>
+            </a:r>
+          </a:p>
+        </p:txBody>
+      </p:sp>
+      <p:sp>
+        <p:nvSpPr>
+          <p:cNvPr id="8" name="TextBox 7"/>
+          <p:cNvSpPr txBox="1"/>
+          <p:nvPr/>
+        </p:nvSpPr>
+        <p:spPr>
+          <a:xfrm>
+            <a:off x="11338560" y="6537960"/>
+            <a:ext cx="548640" cy="274320"/>
+          </a:xfrm>
+          <a:prstGeom prst="rect">
+            <a:avLst/>
+          </a:prstGeom>
+          <a:noFill/>
+        </p:spPr>
+        <p:txBody>
+          <a:bodyPr wrap="square" lIns="0" rIns="0" tIns="0" bIns="0">
+            <a:spAutoFit/>
+          </a:bodyPr>
+          <a:lstStyle/>
+          <a:p>
+            <a:pPr algn="r"/>
+            <a:r>
+              <a:rPr sz="900" i="0" b="0">
+                <a:solidFill>
+                  <a:srgbClr val="666666"/>
+                </a:solidFill>
+              </a:rPr>
+              <a:t>4 / 6</a:t>
+            </a:r>
+          </a:p>
+        </p:txBody>
+      </p:sp>
+    </p:spTree>
+  </p:cSld>
+  <p:clrMapOvr>
+    <a:masterClrMapping/>
+  </p:clrMapOvr>
+</p:sld>
+</file>
+
+<file path=ppt/slides/slide5.xml><?xml version="1.0" encoding="utf-8"?>
+<p:sld xmlns:a="http://schemas.openxmlformats.org/drawingml/2006/main" xmlns:p="http://schemas.openxmlformats.org/presentationml/2006/main" xmlns:r="http://schemas.openxmlformats.org/officeDocument/2006/relationships">
+  <p:cSld>
+    <p:spTree>
+      <p:nvGrpSpPr>
+        <p:cNvPr id="1" name=""/>
+        <p:cNvGrpSpPr/>
+        <p:nvPr/>
+      </p:nvGrpSpPr>
+      <p:grpSpPr/>
+      <p:sp>
+        <p:nvSpPr>
+          <p:cNvPr id="2" name="TextBox 1"/>
+          <p:cNvSpPr txBox="1"/>
+          <p:nvPr/>
+        </p:nvSpPr>
+        <p:spPr>
+          <a:xfrm>
+            <a:off x="502920" y="292608"/>
+            <a:ext cx="11155680" cy="822960"/>
+          </a:xfrm>
+          <a:prstGeom prst="rect">
+            <a:avLst/>
+          </a:prstGeom>
+          <a:noFill/>
+        </p:spPr>
+        <p:txBody>
+          <a:bodyPr wrap="square">
+            <a:spAutoFit/>
+          </a:bodyPr>
+          <a:lstStyle/>
+          <a:p>
+            <a:r>
+              <a:rPr sz="2400" b="1">
+                <a:solidFill>
+                  <a:srgbClr val="1F3A5F"/>
+                </a:solidFill>
+              </a:rPr>
+              <a:t>Chip-density LAI holds within ~1% of WGS on a Mexican-like cohort.</a:t>
+            </a:r>
+          </a:p>
+        </p:txBody>
+      </p:sp>
+      <p:sp>
+        <p:nvSpPr>
+          <p:cNvPr id="3" name="TextBox 2"/>
+          <p:cNvSpPr txBox="1"/>
+          <p:nvPr/>
+        </p:nvSpPr>
+        <p:spPr>
+          <a:xfrm>
+            <a:off x="502920" y="1051560"/>
+            <a:ext cx="11155680" cy="365760"/>
+          </a:xfrm>
+          <a:prstGeom prst="rect">
+            <a:avLst/>
+          </a:prstGeom>
+          <a:noFill/>
+        </p:spPr>
+        <p:txBody>
+          <a:bodyPr wrap="square" lIns="0" rIns="0" tIns="0" bIns="0">
+            <a:spAutoFit/>
+          </a:bodyPr>
+          <a:lstStyle/>
+          <a:p>
+            <a:pPr algn="l"/>
+            <a:r>
+              <a:rPr sz="1200" i="1" b="0">
+                <a:solidFill>
+                  <a:srgbClr val="666666"/>
+                </a:solidFill>
+              </a:rPr>
+              <a:t>Illumina GSA v3 chip vs full WGS density, same reference panels</a:t>
+            </a:r>
+          </a:p>
+        </p:txBody>
+      </p:sp>
+      <p:pic>
+        <p:nvPicPr>
+          <p:cNvPr id="4" name="Picture 3" descr="fig_chip_vs_wgs.png"/>
+          <p:cNvPicPr>
+            <a:picLocks noChangeAspect="1"/>
+          </p:cNvPicPr>
+          <p:nvPr/>
+        </p:nvPicPr>
+        <p:blipFill>
+          <a:blip r:embed="rId2"/>
+          <a:stretch>
+            <a:fillRect/>
+          </a:stretch>
+        </p:blipFill>
+        <p:spPr>
+          <a:xfrm>
+            <a:off x="502920" y="1508760"/>
+            <a:ext cx="7680960" cy="3457667"/>
+          </a:xfrm>
+          <a:prstGeom prst="rect">
+            <a:avLst/>
+          </a:prstGeom>
+        </p:spPr>
+      </p:pic>
+      <p:sp>
+        <p:nvSpPr>
+          <p:cNvPr id="5" name="TextBox 4"/>
+          <p:cNvSpPr txBox="1"/>
+          <p:nvPr/>
+        </p:nvSpPr>
+        <p:spPr>
+          <a:xfrm>
+            <a:off x="8366760" y="1600200"/>
+            <a:ext cx="3566160" cy="365760"/>
+          </a:xfrm>
+          <a:prstGeom prst="rect">
+            <a:avLst/>
+          </a:prstGeom>
+          <a:noFill/>
+        </p:spPr>
+        <p:txBody>
+          <a:bodyPr wrap="square" lIns="0" rIns="0" tIns="0" bIns="0">
+            <a:spAutoFit/>
+          </a:bodyPr>
+          <a:lstStyle/>
+          <a:p>
+            <a:pPr algn="l"/>
+            <a:r>
+              <a:rPr sz="1300" i="0" b="1">
+                <a:solidFill>
+                  <a:srgbClr val="1F3A5F"/>
+                </a:solidFill>
+              </a:rPr>
+              <a:t>Implications for GWAS</a:t>
+            </a:r>
+          </a:p>
+        </p:txBody>
+      </p:sp>
+      <p:sp>
+        <p:nvSpPr>
+          <p:cNvPr id="6" name="TextBox 5"/>
+          <p:cNvSpPr txBox="1"/>
+          <p:nvPr/>
+        </p:nvSpPr>
+        <p:spPr>
+          <a:xfrm>
+            <a:off x="8366760" y="1965960"/>
+            <a:ext cx="3611880" cy="4023360"/>
+          </a:xfrm>
+          <a:prstGeom prst="rect">
+            <a:avLst/>
+          </a:prstGeom>
+          <a:noFill/>
+        </p:spPr>
+        <p:txBody>
+          <a:bodyPr wrap="square" lIns="0" rIns="0" tIns="0" bIns="0">
+            <a:spAutoFit/>
+          </a:bodyPr>
+          <a:lstStyle/>
+          <a:p>
+            <a:pPr algn="l"/>
+            <a:r>
+              <a:rPr sz="1050" i="0" b="0">
+                <a:solidFill>
+                  <a:srgbClr val="1A1A1A"/>
+                </a:solidFill>
+              </a:rPr>
+              <a:t>•  REDIAL / COG cohorts are</a:t>
+            </a:r>
+          </a:p>
+          <a:p>
+            <a:pPr algn="l"/>
+            <a:r>
+              <a:rPr sz="1050" i="0" b="0">
+                <a:solidFill>
+                  <a:srgbClr val="1A1A1A"/>
+                </a:solidFill>
+              </a:rPr>
+              <a:t>    genotyped on chip, not WGS —</a:t>
+            </a:r>
+          </a:p>
+          <a:p>
+            <a:pPr algn="l"/>
+            <a:r>
+              <a:rPr sz="1050" i="0" b="0">
+                <a:solidFill>
+                  <a:srgbClr val="1A1A1A"/>
+                </a:solidFill>
+              </a:rPr>
+              <a:t>    LAI accuracy holds if we</a:t>
+            </a:r>
+          </a:p>
+          <a:p>
+            <a:pPr algn="l"/>
+            <a:r>
+              <a:rPr sz="1050" i="0" b="0">
+                <a:solidFill>
+                  <a:srgbClr val="1A1A1A"/>
+                </a:solidFill>
+              </a:rPr>
+              <a:t>    use the MXB-augmented panel</a:t>
+            </a:r>
+          </a:p>
+          <a:p>
+            <a:pPr algn="l"/>
+          </a:p>
+          <a:p>
+            <a:pPr algn="l"/>
+            <a:r>
+              <a:rPr sz="1050" i="0" b="0">
+                <a:solidFill>
+                  <a:srgbClr val="1A1A1A"/>
+                </a:solidFill>
+              </a:rPr>
+              <a:t>•  Chip → TOPMed imputation is</a:t>
+            </a:r>
+          </a:p>
+          <a:p>
+            <a:pPr algn="l"/>
+            <a:r>
+              <a:rPr sz="1050" i="0" b="0">
+                <a:solidFill>
+                  <a:srgbClr val="1A1A1A"/>
+                </a:solidFill>
+              </a:rPr>
+              <a:t>    the next validation step</a:t>
+            </a:r>
+          </a:p>
+          <a:p>
+            <a:pPr algn="l"/>
+            <a:r>
+              <a:rPr sz="1050" i="0" b="0">
+                <a:solidFill>
+                  <a:srgbClr val="1A1A1A"/>
+                </a:solidFill>
+              </a:rPr>
+              <a:t>    (Michigan / 1KG post-meeting)</a:t>
+            </a:r>
+          </a:p>
+          <a:p>
+            <a:pPr algn="l"/>
+          </a:p>
+          <a:p>
+            <a:pPr algn="l"/>
+            <a:r>
+              <a:rPr sz="1050" i="0" b="0">
+                <a:solidFill>
+                  <a:srgbClr val="1A1A1A"/>
+                </a:solidFill>
+              </a:rPr>
+              <a:t>•  Panel ranking preserved</a:t>
+            </a:r>
+          </a:p>
+          <a:p>
+            <a:pPr algn="l"/>
+            <a:r>
+              <a:rPr sz="1050" i="0" b="0">
+                <a:solidFill>
+                  <a:srgbClr val="1A1A1A"/>
+                </a:solidFill>
+              </a:rPr>
+              <a:t>    across densities:</a:t>
+            </a:r>
+          </a:p>
+          <a:p>
+            <a:pPr algn="l"/>
+            <a:r>
+              <a:rPr sz="1050" i="0" b="0">
+                <a:solidFill>
+                  <a:srgbClr val="1A1A1A"/>
+                </a:solidFill>
+              </a:rPr>
+              <a:t>     HGDPMXB &gt; HGDP &gt; PEL_EAS</a:t>
+            </a:r>
+          </a:p>
+          <a:p>
+            <a:pPr algn="l"/>
+          </a:p>
+          <a:p>
+            <a:pPr algn="l"/>
+            <a:r>
+              <a:rPr sz="1050" i="0" b="0">
+                <a:solidFill>
+                  <a:srgbClr val="1A1A1A"/>
+                </a:solidFill>
+              </a:rPr>
+              <a:t>•  Recommend HGDPMXB for the</a:t>
+            </a:r>
+          </a:p>
+          <a:p>
+            <a:pPr algn="l"/>
+            <a:r>
+              <a:rPr sz="1050" i="0" b="0">
+                <a:solidFill>
+                  <a:srgbClr val="1A1A1A"/>
+                </a:solidFill>
+              </a:rPr>
+              <a:t>    Mexican-Latino GWAS pipeline</a:t>
+            </a:r>
+          </a:p>
+        </p:txBody>
+      </p:sp>
+      <p:sp>
+        <p:nvSpPr>
+          <p:cNvPr id="7" name="TextBox 6"/>
+          <p:cNvSpPr txBox="1"/>
+          <p:nvPr/>
+        </p:nvSpPr>
+        <p:spPr>
+          <a:xfrm>
+            <a:off x="502920" y="6537960"/>
+            <a:ext cx="7315200" cy="274320"/>
+          </a:xfrm>
+          <a:prstGeom prst="rect">
+            <a:avLst/>
+          </a:prstGeom>
+          <a:noFill/>
+        </p:spPr>
+        <p:txBody>
+          <a:bodyPr wrap="square" lIns="0" rIns="0" tIns="0" bIns="0">
+            <a:spAutoFit/>
+          </a:bodyPr>
+          <a:lstStyle/>
+          <a:p>
+            <a:pPr algn="l"/>
+            <a:r>
+              <a:rPr sz="900" i="0" b="0">
+                <a:solidFill>
+                  <a:srgbClr val="666666"/>
+                </a:solidFill>
+              </a:rPr>
+              <a:t>Christina Magyar  ·  Thesis committee, Aug 2026  ·  Result 2 · Chip</a:t>
+            </a:r>
+          </a:p>
+        </p:txBody>
+      </p:sp>
+      <p:sp>
+        <p:nvSpPr>
+          <p:cNvPr id="8" name="TextBox 7"/>
+          <p:cNvSpPr txBox="1"/>
+          <p:nvPr/>
+        </p:nvSpPr>
+        <p:spPr>
+          <a:xfrm>
+            <a:off x="11338560" y="6537960"/>
+            <a:ext cx="548640" cy="274320"/>
+          </a:xfrm>
+          <a:prstGeom prst="rect">
+            <a:avLst/>
+          </a:prstGeom>
+          <a:noFill/>
+        </p:spPr>
+        <p:txBody>
+          <a:bodyPr wrap="square" lIns="0" rIns="0" tIns="0" bIns="0">
+            <a:spAutoFit/>
+          </a:bodyPr>
+          <a:lstStyle/>
+          <a:p>
+            <a:pPr algn="r"/>
+            <a:r>
+              <a:rPr sz="900" i="0" b="0">
+                <a:solidFill>
+                  <a:srgbClr val="666666"/>
+                </a:solidFill>
+              </a:rPr>
+              <a:t>5 / 6</a:t>
+            </a:r>
+          </a:p>
+        </p:txBody>
+      </p:sp>
+    </p:spTree>
+  </p:cSld>
+  <p:clrMapOvr>
+    <a:masterClrMapping/>
+  </p:clrMapOvr>
+</p:sld>
+</file>
+
+<file path=ppt/slides/slide6.xml><?xml version="1.0" encoding="utf-8"?>
+<p:sld xmlns:a="http://schemas.openxmlformats.org/drawingml/2006/main" xmlns:p="http://schemas.openxmlformats.org/presentationml/2006/main" xmlns:r="http://schemas.openxmlformats.org/officeDocument/2006/relationships">
+  <p:cSld>
+    <p:spTree>
+      <p:nvGrpSpPr>
+        <p:cNvPr id="1" name=""/>
+        <p:cNvGrpSpPr/>
+        <p:nvPr/>
+      </p:nvGrpSpPr>
+      <p:grpSpPr/>
+      <p:sp>
+        <p:nvSpPr>
+          <p:cNvPr id="2" name="TextBox 1"/>
+          <p:cNvSpPr txBox="1"/>
+          <p:nvPr/>
+        </p:nvSpPr>
+        <p:spPr>
+          <a:xfrm>
+            <a:off x="502920" y="292608"/>
+            <a:ext cx="11155680" cy="822960"/>
+          </a:xfrm>
+          <a:prstGeom prst="rect">
+            <a:avLst/>
+          </a:prstGeom>
+          <a:noFill/>
+        </p:spPr>
+        <p:txBody>
+          <a:bodyPr wrap="square">
+            <a:spAutoFit/>
+          </a:bodyPr>
+          <a:lstStyle/>
+          <a:p>
+            <a:r>
+              <a:rPr sz="2400" b="1">
+                <a:solidFill>
+                  <a:srgbClr val="1F3A5F"/>
+                </a:solidFill>
+              </a:rPr>
+              <a:t>8-module Nextflow preprocessing pipeline built; benchmarking underway.</a:t>
+            </a:r>
+          </a:p>
+        </p:txBody>
+      </p:sp>
+      <p:sp>
+        <p:nvSpPr>
+          <p:cNvPr id="3" name="TextBox 2"/>
+          <p:cNvSpPr txBox="1"/>
+          <p:nvPr/>
+        </p:nvSpPr>
+        <p:spPr>
+          <a:xfrm>
+            <a:off x="502920" y="1051560"/>
+            <a:ext cx="11155680" cy="365760"/>
+          </a:xfrm>
+          <a:prstGeom prst="rect">
+            <a:avLst/>
+          </a:prstGeom>
+          <a:noFill/>
+        </p:spPr>
+        <p:txBody>
+          <a:bodyPr wrap="square" lIns="0" rIns="0" tIns="0" bIns="0">
+            <a:spAutoFit/>
+          </a:bodyPr>
+          <a:lstStyle/>
+          <a:p>
+            <a:pPr algn="l"/>
+            <a:r>
+              <a:rPr sz="1200" i="1" b="0">
+                <a:solidFill>
+                  <a:srgbClr val="666666"/>
+                </a:solidFill>
+              </a:rPr>
+              <a:t>Containerized · parameterized · parallelized across chromosomes and platforms</a:t>
+            </a:r>
+          </a:p>
+        </p:txBody>
+      </p:sp>
+      <p:pic>
+        <p:nvPicPr>
+          <p:cNvPr id="4" name="Picture 3" descr="fig_pipeline.png"/>
+          <p:cNvPicPr>
+            <a:picLocks noChangeAspect="1"/>
+          </p:cNvPicPr>
+          <p:nvPr/>
+        </p:nvPicPr>
+        <p:blipFill>
+          <a:blip r:embed="rId2"/>
+          <a:stretch>
+            <a:fillRect/>
+          </a:stretch>
+        </p:blipFill>
+        <p:spPr>
+          <a:xfrm>
+            <a:off x="365760" y="1417320"/>
+            <a:ext cx="11430000" cy="3853436"/>
+          </a:xfrm>
+          <a:prstGeom prst="rect">
+            <a:avLst/>
+          </a:prstGeom>
+        </p:spPr>
+      </p:pic>
+      <p:sp>
+        <p:nvSpPr>
+          <p:cNvPr id="5" name="TextBox 4"/>
+          <p:cNvSpPr txBox="1"/>
+          <p:nvPr/>
+        </p:nvSpPr>
+        <p:spPr>
+          <a:xfrm>
+            <a:off x="502920" y="5074920"/>
+            <a:ext cx="11155680" cy="320040"/>
+          </a:xfrm>
+          <a:prstGeom prst="rect">
+            <a:avLst/>
+          </a:prstGeom>
+          <a:noFill/>
+        </p:spPr>
+        <p:txBody>
+          <a:bodyPr wrap="square" lIns="0" rIns="0" tIns="0" bIns="0">
+            <a:spAutoFit/>
+          </a:bodyPr>
+          <a:lstStyle/>
+          <a:p>
+            <a:pPr algn="l"/>
+            <a:r>
+              <a:rPr sz="1300" i="0" b="1">
+                <a:solidFill>
+                  <a:srgbClr val="1F3A5F"/>
+                </a:solidFill>
+              </a:rPr>
+              <a:t>Status since Spring TAC</a:t>
+            </a:r>
+          </a:p>
+        </p:txBody>
+      </p:sp>
+      <p:sp>
+        <p:nvSpPr>
+          <p:cNvPr id="6" name="Rounded Rectangle 5"/>
+          <p:cNvSpPr/>
+          <p:nvPr/>
+        </p:nvSpPr>
+        <p:spPr>
+          <a:xfrm>
+            <a:off x="502920" y="5440680"/>
+            <a:ext cx="868680" cy="274320"/>
+          </a:xfrm>
+          <a:prstGeom prst="roundRect">
+            <a:avLst/>
+          </a:prstGeom>
+          <a:solidFill>
+            <a:srgbClr val="4C9F70"/>
+          </a:solidFill>
+          <a:ln>
+            <a:noFill/>
+          </a:ln>
+        </p:spPr>
+        <p:style>
+          <a:lnRef idx="1">
+            <a:schemeClr val="accent1"/>
+          </a:lnRef>
+          <a:fillRef idx="3">
+            <a:schemeClr val="accent1"/>
+          </a:fillRef>
+          <a:effectRef idx="2">
+            <a:schemeClr val="accent1"/>
+          </a:effectRef>
+          <a:fontRef idx="minor">
+            <a:schemeClr val="lt1"/>
+          </a:fontRef>
+        </p:style>
+        <p:txBody>
+          <a:bodyPr rtlCol="0" anchor="ctr" tIns="0" bIns="0"/>
+          <a:lstStyle/>
+          <a:p>
+            <a:pPr algn="ctr"/>
+            <a:r>
+              <a:rPr sz="900" b="1">
+                <a:solidFill>
+                  <a:srgbClr val="FFFFFF"/>
+                </a:solidFill>
+              </a:rPr>
+              <a:t>BUILT</a:t>
+            </a:r>
+          </a:p>
+        </p:txBody>
+      </p:sp>
+      <p:sp>
+        <p:nvSpPr>
+          <p:cNvPr id="7" name="TextBox 6"/>
+          <p:cNvSpPr txBox="1"/>
+          <p:nvPr/>
+        </p:nvSpPr>
+        <p:spPr>
+          <a:xfrm>
+            <a:off x="1463040" y="5458968"/>
+            <a:ext cx="9601200" cy="292608"/>
+          </a:xfrm>
+          <a:prstGeom prst="rect">
+            <a:avLst/>
+          </a:prstGeom>
+          <a:noFill/>
+        </p:spPr>
+        <p:txBody>
+          <a:bodyPr wrap="square" lIns="0" rIns="0" tIns="0" bIns="0">
+            <a:spAutoFit/>
+          </a:bodyPr>
+          <a:lstStyle/>
+          <a:p>
+            <a:pPr algn="l"/>
+            <a:r>
+              <a:rPr sz="1100" i="0" b="0">
+                <a:solidFill>
+                  <a:srgbClr val="1A1A1A"/>
+                </a:solidFill>
+              </a:rPr>
+              <a:t>9-module Nextflow pipeline</a:t>
+            </a:r>
+          </a:p>
+        </p:txBody>
+      </p:sp>
+      <p:sp>
+        <p:nvSpPr>
+          <p:cNvPr id="8" name="Rounded Rectangle 7"/>
+          <p:cNvSpPr/>
+          <p:nvPr/>
+        </p:nvSpPr>
+        <p:spPr>
+          <a:xfrm>
+            <a:off x="502920" y="5733288"/>
+            <a:ext cx="868680" cy="274320"/>
+          </a:xfrm>
+          <a:prstGeom prst="roundRect">
+            <a:avLst/>
+          </a:prstGeom>
+          <a:solidFill>
+            <a:srgbClr val="4C9F70"/>
+          </a:solidFill>
+          <a:ln>
+            <a:noFill/>
+          </a:ln>
+        </p:spPr>
+        <p:style>
+          <a:lnRef idx="1">
+            <a:schemeClr val="accent1"/>
+          </a:lnRef>
+          <a:fillRef idx="3">
+            <a:schemeClr val="accent1"/>
+          </a:fillRef>
+          <a:effectRef idx="2">
+            <a:schemeClr val="accent1"/>
+          </a:effectRef>
+          <a:fontRef idx="minor">
+            <a:schemeClr val="lt1"/>
+          </a:fontRef>
+        </p:style>
+        <p:txBody>
+          <a:bodyPr rtlCol="0" anchor="ctr" tIns="0" bIns="0"/>
+          <a:lstStyle/>
+          <a:p>
+            <a:pPr algn="ctr"/>
+            <a:r>
+              <a:rPr sz="900" b="1">
+                <a:solidFill>
+                  <a:srgbClr val="FFFFFF"/>
+                </a:solidFill>
+              </a:rPr>
+              <a:t>BUILT</a:t>
+            </a:r>
+          </a:p>
+        </p:txBody>
+      </p:sp>
+      <p:sp>
+        <p:nvSpPr>
+          <p:cNvPr id="9" name="TextBox 8"/>
+          <p:cNvSpPr txBox="1"/>
+          <p:nvPr/>
+        </p:nvSpPr>
+        <p:spPr>
+          <a:xfrm>
+            <a:off x="1463040" y="5751576"/>
+            <a:ext cx="9601200" cy="292608"/>
+          </a:xfrm>
+          <a:prstGeom prst="rect">
+            <a:avLst/>
+          </a:prstGeom>
+          <a:noFill/>
+        </p:spPr>
+        <p:txBody>
+          <a:bodyPr wrap="square" lIns="0" rIns="0" tIns="0" bIns="0">
+            <a:spAutoFit/>
+          </a:bodyPr>
+          <a:lstStyle/>
+          <a:p>
+            <a:pPr algn="l"/>
+            <a:r>
+              <a:rPr sz="1100" i="0" b="0">
+                <a:solidFill>
+                  <a:srgbClr val="1A1A1A"/>
+                </a:solidFill>
+              </a:rPr>
+              <a:t>Pilot ran on TOPMed test data (end of Module 8)</a:t>
+            </a:r>
+          </a:p>
+        </p:txBody>
+      </p:sp>
+      <p:sp>
+        <p:nvSpPr>
+          <p:cNvPr id="10" name="Rounded Rectangle 9"/>
+          <p:cNvSpPr/>
+          <p:nvPr/>
+        </p:nvSpPr>
+        <p:spPr>
+          <a:xfrm>
+            <a:off x="502920" y="6025896"/>
+            <a:ext cx="868680" cy="274320"/>
+          </a:xfrm>
+          <a:prstGeom prst="roundRect">
+            <a:avLst/>
+          </a:prstGeom>
+          <a:solidFill>
+            <a:srgbClr val="3E6BB0"/>
+          </a:solidFill>
+          <a:ln>
+            <a:noFill/>
+          </a:ln>
+        </p:spPr>
+        <p:style>
+          <a:lnRef idx="1">
+            <a:schemeClr val="accent1"/>
+          </a:lnRef>
+          <a:fillRef idx="3">
+            <a:schemeClr val="accent1"/>
+          </a:fillRef>
+          <a:effectRef idx="2">
+            <a:schemeClr val="accent1"/>
+          </a:effectRef>
+          <a:fontRef idx="minor">
+            <a:schemeClr val="lt1"/>
+          </a:fontRef>
+        </p:style>
+        <p:txBody>
+          <a:bodyPr rtlCol="0" anchor="ctr" tIns="0" bIns="0"/>
+          <a:lstStyle/>
+          <a:p>
+            <a:pPr algn="ctr"/>
+            <a:r>
+              <a:rPr sz="900" b="1">
+                <a:solidFill>
+                  <a:srgbClr val="FFFFFF"/>
+                </a:solidFill>
+              </a:rPr>
+              <a:t>IN PROG.</a:t>
+            </a:r>
+          </a:p>
+        </p:txBody>
+      </p:sp>
+      <p:sp>
+        <p:nvSpPr>
+          <p:cNvPr id="11" name="TextBox 10"/>
+          <p:cNvSpPr txBox="1"/>
+          <p:nvPr/>
+        </p:nvSpPr>
+        <p:spPr>
+          <a:xfrm>
+            <a:off x="1463040" y="6044184"/>
+            <a:ext cx="9601200" cy="292608"/>
+          </a:xfrm>
+          <a:prstGeom prst="rect">
+            <a:avLst/>
+          </a:prstGeom>
+          <a:noFill/>
+        </p:spPr>
+        <p:txBody>
+          <a:bodyPr wrap="square" lIns="0" rIns="0" tIns="0" bIns="0">
+            <a:spAutoFit/>
+          </a:bodyPr>
+          <a:lstStyle/>
+          <a:p>
+            <a:pPr algn="l"/>
+            <a:r>
+              <a:rPr sz="1100" i="0" b="0">
+                <a:solidFill>
+                  <a:srgbClr val="1A1A1A"/>
+                </a:solidFill>
+              </a:rPr>
+              <a:t>Michigan &amp; AoU AnVIL patched in (Q3 2026)</a:t>
+            </a:r>
+          </a:p>
+        </p:txBody>
+      </p:sp>
+      <p:sp>
+        <p:nvSpPr>
+          <p:cNvPr id="12" name="Rounded Rectangle 11"/>
+          <p:cNvSpPr/>
+          <p:nvPr/>
+        </p:nvSpPr>
+        <p:spPr>
+          <a:xfrm>
+            <a:off x="502920" y="6318504"/>
+            <a:ext cx="868680" cy="274320"/>
+          </a:xfrm>
+          <a:prstGeom prst="roundRect">
+            <a:avLst/>
+          </a:prstGeom>
+          <a:solidFill>
+            <a:srgbClr val="3E6BB0"/>
+          </a:solidFill>
+          <a:ln>
+            <a:noFill/>
+          </a:ln>
+        </p:spPr>
+        <p:style>
+          <a:lnRef idx="1">
+            <a:schemeClr val="accent1"/>
+          </a:lnRef>
+          <a:fillRef idx="3">
+            <a:schemeClr val="accent1"/>
+          </a:fillRef>
+          <a:effectRef idx="2">
+            <a:schemeClr val="accent1"/>
+          </a:effectRef>
+          <a:fontRef idx="minor">
+            <a:schemeClr val="lt1"/>
+          </a:fontRef>
+        </p:style>
+        <p:txBody>
+          <a:bodyPr rtlCol="0" anchor="ctr" tIns="0" bIns="0"/>
+          <a:lstStyle/>
+          <a:p>
+            <a:pPr algn="ctr"/>
+            <a:r>
+              <a:rPr sz="900" b="1">
+                <a:solidFill>
+                  <a:srgbClr val="FFFFFF"/>
+                </a:solidFill>
+              </a:rPr>
+              <a:t>IN PROG.</a:t>
+            </a:r>
+          </a:p>
+        </p:txBody>
+      </p:sp>
+      <p:sp>
+        <p:nvSpPr>
+          <p:cNvPr id="13" name="TextBox 12"/>
+          <p:cNvSpPr txBox="1"/>
+          <p:nvPr/>
+        </p:nvSpPr>
+        <p:spPr>
+          <a:xfrm>
+            <a:off x="1463040" y="6336792"/>
+            <a:ext cx="9601200" cy="292608"/>
+          </a:xfrm>
+          <a:prstGeom prst="rect">
+            <a:avLst/>
+          </a:prstGeom>
+          <a:noFill/>
+        </p:spPr>
+        <p:txBody>
+          <a:bodyPr wrap="square" lIns="0" rIns="0" tIns="0" bIns="0">
+            <a:spAutoFit/>
+          </a:bodyPr>
+          <a:lstStyle/>
+          <a:p>
+            <a:pPr algn="l"/>
+            <a:r>
+              <a:rPr sz="1100" i="0" b="0">
+                <a:solidFill>
+                  <a:srgbClr val="1A1A1A"/>
+                </a:solidFill>
+              </a:rPr>
+              <a:t>Full benchmarking sweep (target Apr 2026 done)</a:t>
+            </a:r>
+          </a:p>
+        </p:txBody>
+      </p:sp>
+      <p:sp>
+        <p:nvSpPr>
+          <p:cNvPr id="14" name="Rounded Rectangle 13"/>
+          <p:cNvSpPr/>
+          <p:nvPr/>
+        </p:nvSpPr>
+        <p:spPr>
+          <a:xfrm>
+            <a:off x="502920" y="6611112"/>
+            <a:ext cx="868680" cy="274320"/>
+          </a:xfrm>
+          <a:prstGeom prst="roundRect">
+            <a:avLst/>
+          </a:prstGeom>
+          <a:solidFill>
+            <a:srgbClr val="C94A53"/>
+          </a:solidFill>
+          <a:ln>
+            <a:noFill/>
+          </a:ln>
+        </p:spPr>
+        <p:style>
+          <a:lnRef idx="1">
+            <a:schemeClr val="accent1"/>
+          </a:lnRef>
+          <a:fillRef idx="3">
+            <a:schemeClr val="accent1"/>
+          </a:fillRef>
+          <a:effectRef idx="2">
+            <a:schemeClr val="accent1"/>
+          </a:effectRef>
+          <a:fontRef idx="minor">
+            <a:schemeClr val="lt1"/>
+          </a:fontRef>
+        </p:style>
+        <p:txBody>
+          <a:bodyPr rtlCol="0" anchor="ctr" tIns="0" bIns="0"/>
+          <a:lstStyle/>
+          <a:p>
+            <a:pPr algn="ctr"/>
+            <a:r>
+              <a:rPr sz="900" b="1">
+                <a:solidFill>
+                  <a:srgbClr val="FFFFFF"/>
+                </a:solidFill>
+              </a:rPr>
+              <a:t>NEXT</a:t>
+            </a:r>
+          </a:p>
+        </p:txBody>
+      </p:sp>
+      <p:sp>
+        <p:nvSpPr>
+          <p:cNvPr id="15" name="TextBox 14"/>
+          <p:cNvSpPr txBox="1"/>
+          <p:nvPr/>
+        </p:nvSpPr>
+        <p:spPr>
+          <a:xfrm>
+            <a:off x="1463040" y="6629400"/>
+            <a:ext cx="9601200" cy="292608"/>
+          </a:xfrm>
+          <a:prstGeom prst="rect">
+            <a:avLst/>
+          </a:prstGeom>
+          <a:noFill/>
+        </p:spPr>
+        <p:txBody>
+          <a:bodyPr wrap="square" lIns="0" rIns="0" tIns="0" bIns="0">
+            <a:spAutoFit/>
+          </a:bodyPr>
+          <a:lstStyle/>
+          <a:p>
+            <a:pPr algn="l"/>
+            <a:r>
+              <a:rPr sz="1100" i="0" b="0">
+                <a:solidFill>
+                  <a:srgbClr val="1A1A1A"/>
+                </a:solidFill>
+              </a:rPr>
+              <a:t>Ancestry-stratified GWAS on REDIAL/COG</a:t>
+            </a:r>
+          </a:p>
+        </p:txBody>
+      </p:sp>
+      <p:sp>
+        <p:nvSpPr>
+          <p:cNvPr id="16" name="TextBox 15"/>
+          <p:cNvSpPr txBox="1"/>
+          <p:nvPr/>
+        </p:nvSpPr>
+        <p:spPr>
+          <a:xfrm>
+            <a:off x="502920" y="6537960"/>
+            <a:ext cx="7315200" cy="274320"/>
+          </a:xfrm>
+          <a:prstGeom prst="rect">
+            <a:avLst/>
+          </a:prstGeom>
+          <a:noFill/>
+        </p:spPr>
+        <p:txBody>
+          <a:bodyPr wrap="square" lIns="0" rIns="0" tIns="0" bIns="0">
+            <a:spAutoFit/>
+          </a:bodyPr>
+          <a:lstStyle/>
+          <a:p>
+            <a:pPr algn="l"/>
+            <a:r>
+              <a:rPr sz="900" i="0" b="0">
+                <a:solidFill>
+                  <a:srgbClr val="666666"/>
+                </a:solidFill>
+              </a:rPr>
+              <a:t>Christina Magyar  ·  Thesis committee, Aug 2026  ·  Pipeline update</a:t>
+            </a:r>
+          </a:p>
+        </p:txBody>
+      </p:sp>
+      <p:sp>
+        <p:nvSpPr>
+          <p:cNvPr id="17" name="TextBox 16"/>
+          <p:cNvSpPr txBox="1"/>
+          <p:nvPr/>
+        </p:nvSpPr>
+        <p:spPr>
+          <a:xfrm>
+            <a:off x="11338560" y="6537960"/>
+            <a:ext cx="548640" cy="274320"/>
+          </a:xfrm>
+          <a:prstGeom prst="rect">
+            <a:avLst/>
+          </a:prstGeom>
+          <a:noFill/>
+        </p:spPr>
+        <p:txBody>
+          <a:bodyPr wrap="square" lIns="0" rIns="0" tIns="0" bIns="0">
+            <a:spAutoFit/>
+          </a:bodyPr>
+          <a:lstStyle/>
+          <a:p>
+            <a:pPr algn="r"/>
+            <a:r>
+              <a:rPr sz="900" i="0" b="0">
+                <a:solidFill>
+                  <a:srgbClr val="666666"/>
+                </a:solidFill>
+              </a:rPr>
+              <a:t>6 / 6</a:t>
             </a:r>
           </a:p>
         </p:txBody>

--- a/slides/thesis_committee_slides.pptx
+++ b/slides/thesis_committee_slides.pptx
@@ -5613,7 +5613,7 @@
         <p:spPr>
           <a:xfrm>
             <a:off x="502920" y="1508760"/>
-            <a:ext cx="7498079" cy="3358035"/>
+            <a:ext cx="7498079" cy="3862647"/>
           </a:xfrm>
           <a:prstGeom prst="rect">
             <a:avLst/>

--- a/slides/thesis_committee_slides.pptx
+++ b/slides/thesis_committee_slides.pptx
@@ -3878,7 +3878,7 @@
             <a:avLst/>
           </a:prstGeom>
           <a:solidFill>
-            <a:srgbClr val="C94A53"/>
+            <a:srgbClr val="E97132"/>
           </a:solidFill>
           <a:ln>
             <a:noFill/>
@@ -3932,7 +3932,7 @@
             <a:r>
               <a:rPr sz="3000" i="0" b="1">
                 <a:solidFill>
-                  <a:srgbClr val="1F3A5F"/>
+                  <a:srgbClr val="0E2841"/>
                 </a:solidFill>
               </a:rPr>
               <a:t>Building an ancestry-informed genotype-preprocessing pipeline</a:t>
@@ -3943,7 +3943,7 @@
             <a:r>
               <a:rPr sz="3000" i="0" b="1">
                 <a:solidFill>
-                  <a:srgbClr val="1F3A5F"/>
+                  <a:srgbClr val="0E2841"/>
                 </a:solidFill>
               </a:rPr>
               <a:t>and benchmarking local ancestry inference for Latino cohorts</a:t>
@@ -4141,7 +4141,7 @@
             <a:r>
               <a:rPr sz="2400" b="1">
                 <a:solidFill>
-                  <a:srgbClr val="1F3A5F"/>
+                  <a:srgbClr val="0E2841"/>
                 </a:solidFill>
               </a:rPr>
               <a:t>Public Amerindigenous references are ~7× smaller than other continents.</a:t>
@@ -4352,7 +4352,7 @@
             <a:r>
               <a:rPr sz="2400" b="1">
                 <a:solidFill>
-                  <a:srgbClr val="1F3A5F"/>
+                  <a:srgbClr val="0E2841"/>
                 </a:solidFill>
               </a:rPr>
               <a:t>We simulated admixed cohorts to measure per-hap LAI recall.</a:t>
@@ -4375,7 +4375,7 @@
             <a:avLst/>
           </a:prstGeom>
           <a:solidFill>
-            <a:srgbClr val="EEE9E0"/>
+            <a:srgbClr val="E8E8E8"/>
           </a:solidFill>
           <a:ln w="6350">
             <a:solidFill>
@@ -4405,7 +4405,7 @@
             <a:r>
               <a:rPr sz="1300" b="1">
                 <a:solidFill>
-                  <a:srgbClr val="1F3A5F"/>
+                  <a:srgbClr val="0E2841"/>
                 </a:solidFill>
               </a:rPr>
               <a:t>Reference haps</a:t>
@@ -4500,7 +4500,7 @@
             <a:avLst/>
           </a:prstGeom>
           <a:solidFill>
-            <a:srgbClr val="EEE9E0"/>
+            <a:srgbClr val="E8E8E8"/>
           </a:solidFill>
           <a:ln w="6350">
             <a:solidFill>
@@ -4530,7 +4530,7 @@
             <a:r>
               <a:rPr sz="1300" b="1">
                 <a:solidFill>
-                  <a:srgbClr val="1F3A5F"/>
+                  <a:srgbClr val="0E2841"/>
                 </a:solidFill>
               </a:rPr>
               <a:t>Phasing</a:t>
@@ -4616,7 +4616,7 @@
             <a:avLst/>
           </a:prstGeom>
           <a:solidFill>
-            <a:srgbClr val="EEE9E0"/>
+            <a:srgbClr val="E8E8E8"/>
           </a:solidFill>
           <a:ln w="6350">
             <a:solidFill>
@@ -4646,7 +4646,7 @@
             <a:r>
               <a:rPr sz="1300" b="1">
                 <a:solidFill>
-                  <a:srgbClr val="1F3A5F"/>
+                  <a:srgbClr val="0E2841"/>
                 </a:solidFill>
               </a:rPr>
               <a:t>Simulate admixed</a:t>
@@ -4741,7 +4741,7 @@
             <a:avLst/>
           </a:prstGeom>
           <a:solidFill>
-            <a:srgbClr val="EEE9E0"/>
+            <a:srgbClr val="E8E8E8"/>
           </a:solidFill>
           <a:ln w="6350">
             <a:solidFill>
@@ -4771,7 +4771,7 @@
             <a:r>
               <a:rPr sz="1300" b="1">
                 <a:solidFill>
-                  <a:srgbClr val="1F3A5F"/>
+                  <a:srgbClr val="0E2841"/>
                 </a:solidFill>
               </a:rPr>
               <a:t>Local ancestry</a:t>
@@ -4857,7 +4857,7 @@
             <a:avLst/>
           </a:prstGeom>
           <a:solidFill>
-            <a:srgbClr val="EEE9E0"/>
+            <a:srgbClr val="E8E8E8"/>
           </a:solidFill>
           <a:ln w="6350">
             <a:solidFill>
@@ -4887,7 +4887,7 @@
             <a:r>
               <a:rPr sz="1300" b="1">
                 <a:solidFill>
-                  <a:srgbClr val="1F3A5F"/>
+                  <a:srgbClr val="0E2841"/>
                 </a:solidFill>
               </a:rPr>
               <a:t>Score</a:t>
@@ -4950,7 +4950,7 @@
             <a:r>
               <a:rPr sz="1300" i="0" b="1">
                 <a:solidFill>
-                  <a:srgbClr val="1F3A5F"/>
+                  <a:srgbClr val="0E2841"/>
                 </a:solidFill>
               </a:rPr>
               <a:t>Six reference-panel combinations tested</a:t>
@@ -4973,7 +4973,7 @@
             <a:avLst/>
           </a:prstGeom>
           <a:solidFill>
-            <a:srgbClr val="EEE9E0"/>
+            <a:srgbClr val="E8E8E8"/>
           </a:solidFill>
           <a:ln w="17780">
             <a:solidFill>
@@ -5037,11 +5037,11 @@
             <a:avLst/>
           </a:prstGeom>
           <a:solidFill>
-            <a:srgbClr val="EEE9E0"/>
+            <a:srgbClr val="E8E8E8"/>
           </a:solidFill>
           <a:ln w="17780">
             <a:solidFill>
-              <a:srgbClr val="C94A53"/>
+              <a:srgbClr val="E97132"/>
             </a:solidFill>
           </a:ln>
         </p:spPr>
@@ -5067,7 +5067,7 @@
             <a:r>
               <a:rPr sz="1100" b="1">
                 <a:solidFill>
-                  <a:srgbClr val="C94A53"/>
+                  <a:srgbClr val="E97132"/>
                 </a:solidFill>
               </a:rPr>
               <a:t>NAT_HGDPMXB</a:t>
@@ -5101,11 +5101,11 @@
             <a:avLst/>
           </a:prstGeom>
           <a:solidFill>
-            <a:srgbClr val="EEE9E0"/>
+            <a:srgbClr val="E8E8E8"/>
           </a:solidFill>
           <a:ln w="17780">
             <a:solidFill>
-              <a:srgbClr val="C94A53"/>
+              <a:srgbClr val="E97132"/>
             </a:solidFill>
           </a:ln>
         </p:spPr>
@@ -5131,7 +5131,7 @@
             <a:r>
               <a:rPr sz="1100" b="1">
                 <a:solidFill>
-                  <a:srgbClr val="C94A53"/>
+                  <a:srgbClr val="E97132"/>
                 </a:solidFill>
               </a:rPr>
               <a:t>NAT_HGDPMXB_FULL</a:t>
@@ -5165,11 +5165,11 @@
             <a:avLst/>
           </a:prstGeom>
           <a:solidFill>
-            <a:srgbClr val="EEE9E0"/>
+            <a:srgbClr val="E8E8E8"/>
           </a:solidFill>
           <a:ln w="17780">
             <a:solidFill>
-              <a:srgbClr val="3E6BB0"/>
+              <a:srgbClr val="156082"/>
             </a:solidFill>
           </a:ln>
         </p:spPr>
@@ -5195,7 +5195,7 @@
             <a:r>
               <a:rPr sz="1100" b="1">
                 <a:solidFill>
-                  <a:srgbClr val="3E6BB0"/>
+                  <a:srgbClr val="156082"/>
                 </a:solidFill>
               </a:rPr>
               <a:t>NAT_HOMOG</a:t>
@@ -5229,11 +5229,11 @@
             <a:avLst/>
           </a:prstGeom>
           <a:solidFill>
-            <a:srgbClr val="EEE9E0"/>
+            <a:srgbClr val="E8E8E8"/>
           </a:solidFill>
           <a:ln w="17780">
             <a:solidFill>
-              <a:srgbClr val="4C9F70"/>
+              <a:srgbClr val="196B24"/>
             </a:solidFill>
           </a:ln>
         </p:spPr>
@@ -5259,7 +5259,7 @@
             <a:r>
               <a:rPr sz="1100" b="1">
                 <a:solidFill>
-                  <a:srgbClr val="4C9F70"/>
+                  <a:srgbClr val="196B24"/>
                 </a:solidFill>
               </a:rPr>
               <a:t>NAT_PEL</a:t>
@@ -5293,11 +5293,11 @@
             <a:avLst/>
           </a:prstGeom>
           <a:solidFill>
-            <a:srgbClr val="EEE9E0"/>
+            <a:srgbClr val="E8E8E8"/>
           </a:solidFill>
           <a:ln w="17780">
             <a:solidFill>
-              <a:srgbClr val="4C9F70"/>
+              <a:srgbClr val="196B24"/>
             </a:solidFill>
           </a:ln>
         </p:spPr>
@@ -5323,7 +5323,7 @@
             <a:r>
               <a:rPr sz="1100" b="1">
                 <a:solidFill>
-                  <a:srgbClr val="4C9F70"/>
+                  <a:srgbClr val="196B24"/>
                 </a:solidFill>
               </a:rPr>
               <a:t>NAT_PEL_EAS</a:t>
@@ -5368,7 +5368,7 @@
             <a:r>
               <a:rPr sz="1300" i="0" b="1">
                 <a:solidFill>
-                  <a:srgbClr val="1F3A5F"/>
+                  <a:srgbClr val="0E2841"/>
                 </a:solidFill>
               </a:rPr>
               <a:t>Two simulated admixed cohorts</a:t>
@@ -5554,7 +5554,7 @@
             <a:r>
               <a:rPr sz="2400" b="1">
                 <a:solidFill>
-                  <a:srgbClr val="1F3A5F"/>
+                  <a:srgbClr val="0E2841"/>
                 </a:solidFill>
               </a:rPr>
               <a:t>Best reference panel depends on the target cohort's composition.</a:t>
@@ -5613,7 +5613,7 @@
         <p:spPr>
           <a:xfrm>
             <a:off x="502920" y="1508760"/>
-            <a:ext cx="7498079" cy="3862647"/>
+            <a:ext cx="7498079" cy="3599078"/>
           </a:xfrm>
           <a:prstGeom prst="rect">
             <a:avLst/>
@@ -5646,7 +5646,7 @@
             <a:r>
               <a:rPr sz="1300" i="0" b="1">
                 <a:solidFill>
-                  <a:srgbClr val="1F3A5F"/>
+                  <a:srgbClr val="0E2841"/>
                 </a:solidFill>
               </a:rPr>
               <a:t>Takeaways</a:t>
@@ -5915,7 +5915,7 @@
             <a:r>
               <a:rPr sz="2400" b="1">
                 <a:solidFill>
-                  <a:srgbClr val="1F3A5F"/>
+                  <a:srgbClr val="0E2841"/>
                 </a:solidFill>
               </a:rPr>
               <a:t>Chip-density LAI holds within ~1% of WGS on a Mexican-like cohort.</a:t>
@@ -6007,7 +6007,7 @@
             <a:r>
               <a:rPr sz="1300" i="0" b="1">
                 <a:solidFill>
-                  <a:srgbClr val="1F3A5F"/>
+                  <a:srgbClr val="0E2841"/>
                 </a:solidFill>
               </a:rPr>
               <a:t>Implications for GWAS</a:t>
@@ -6290,7 +6290,7 @@
             <a:r>
               <a:rPr sz="2400" b="1">
                 <a:solidFill>
-                  <a:srgbClr val="1F3A5F"/>
+                  <a:srgbClr val="0E2841"/>
                 </a:solidFill>
               </a:rPr>
               <a:t>8-module Nextflow preprocessing pipeline built; benchmarking underway.</a:t>
@@ -6382,7 +6382,7 @@
             <a:r>
               <a:rPr sz="1300" i="0" b="1">
                 <a:solidFill>
-                  <a:srgbClr val="1F3A5F"/>
+                  <a:srgbClr val="0E2841"/>
                 </a:solidFill>
               </a:rPr>
               <a:t>Status since Spring TAC</a:t>
@@ -6405,7 +6405,7 @@
             <a:avLst/>
           </a:prstGeom>
           <a:solidFill>
-            <a:srgbClr val="4C9F70"/>
+            <a:srgbClr val="196B24"/>
           </a:solidFill>
           <a:ln>
             <a:noFill/>
@@ -6490,7 +6490,7 @@
             <a:avLst/>
           </a:prstGeom>
           <a:solidFill>
-            <a:srgbClr val="4C9F70"/>
+            <a:srgbClr val="196B24"/>
           </a:solidFill>
           <a:ln>
             <a:noFill/>
@@ -6575,7 +6575,7 @@
             <a:avLst/>
           </a:prstGeom>
           <a:solidFill>
-            <a:srgbClr val="3E6BB0"/>
+            <a:srgbClr val="156082"/>
           </a:solidFill>
           <a:ln>
             <a:noFill/>
@@ -6660,7 +6660,7 @@
             <a:avLst/>
           </a:prstGeom>
           <a:solidFill>
-            <a:srgbClr val="3E6BB0"/>
+            <a:srgbClr val="156082"/>
           </a:solidFill>
           <a:ln>
             <a:noFill/>
@@ -6745,7 +6745,7 @@
             <a:avLst/>
           </a:prstGeom>
           <a:solidFill>
-            <a:srgbClr val="C94A53"/>
+            <a:srgbClr val="E97132"/>
           </a:solidFill>
           <a:ln>
             <a:noFill/>

--- a/slides/thesis_committee_slides.pptx
+++ b/slides/thesis_committee_slides.pptx
@@ -4200,7 +4200,7 @@
         <p:spPr>
           <a:xfrm>
             <a:off x="365760" y="1508760"/>
-            <a:ext cx="11430000" cy="4321954"/>
+            <a:ext cx="11430000" cy="4392192"/>
           </a:xfrm>
           <a:prstGeom prst="rect">
             <a:avLst/>
@@ -4236,7 +4236,7 @@
                   <a:srgbClr val="1A1A1A"/>
                 </a:solidFill>
               </a:rPr>
-              <a:t>Adding 50 MX Biobank WGS samples raises AMR to 138 haps — still leaves Central America, Southern Cone, Amazon, Caribbean underrepresented.</a:t>
+              <a:t>Adding 50 MX Biobank WGS samples brings AMR to 88 — still leaves Central America, Southern Cone, Amazon, Caribbean underrepresented.</a:t>
             </a:r>
           </a:p>
         </p:txBody>
@@ -5974,7 +5974,7 @@
         <p:spPr>
           <a:xfrm>
             <a:off x="502920" y="1508760"/>
-            <a:ext cx="7680960" cy="3457667"/>
+            <a:ext cx="7680960" cy="3609547"/>
           </a:xfrm>
           <a:prstGeom prst="rect">
             <a:avLst/>

--- a/slides/thesis_committee_slides.pptx
+++ b/slides/thesis_committee_slides.pptx
@@ -11,6 +11,7 @@
     <p:sldId id="259" r:id="rId11"/>
     <p:sldId id="260" r:id="rId12"/>
     <p:sldId id="261" r:id="rId13"/>
+    <p:sldId id="262" r:id="rId14"/>
   </p:sldIdLst>
   <p:sldSz cx="12191695" cy="6858000" type="screen4x3"/>
   <p:notesSz cx="6858000" cy="9144000"/>
@@ -717,7 +718,7 @@
           <a:lstStyle/>
           <a:p>
             <a:r>
-              <a:t>This is the headline result. On the Mexican-like cohort (NATMXB track, blue), adding 25 MXB samples to the HGDP baseline lifts NAT recall from 0.931 to 0.942. Adding 50 gets the same benefit (0.942) — 25 is enough. On the Brazilian-like cohort (NAT track, red), the picture flips: the MXB-augmented panel actually LOSES ~2% NAT recall because Brazilian NAT ancestry is closer to Amazonian sources than to Mexican; PEL (Peru) is the best panel there. The homogeneous-only NAT_HOMOG panel matches HGDPMXB on the Mexican cohort while being donor-safe. Punchline for the committee: there is no single best panel — the answer depends on the ancestry composition of the cohort being called.</a:t>
+              <a:t>Overview slide before we zoom in. Three ancestries side by side, same panels, same y-scale. EUR and AFR sit near ceiling regardless of which AMR reference we pick — those calls are easy because the EUR and AFR reference pools are already large and diverse. AMR is the ancestry that moves: ~3% swing across panel choice on the Mexican-like cohort. Motivates zooming in on AMR in the next slide.</a:t>
             </a:r>
           </a:p>
         </p:txBody>
@@ -787,7 +788,7 @@
           <a:lstStyle/>
           <a:p>
             <a:r>
-              <a:t>Complementary result. Same reference panels, but the admixed cohort's haplotypes were down-sampled to the ~385k autosomal Illumina GSA v3 positions before calling. NAT recall drops by only ~0.7-1.2% across panels — the panel ranking is preserved and the direction of every effect matches WGS. This matters because our REDIAL/COG cohorts are chip-genotyped, not WGS — so the WGS result generalizes. Michigan/1KG imputation is the post-committee validation step; today we can already recommend HGDPMXB (+25 MXB) for the Mexican-Latino LAI pipeline. NAT_HOMOG is a donor-safe backup that performs equivalently.</a:t>
+              <a:t>This is the headline result. On the Mexican-like cohort (NATMXB track, blue), adding 25 MXB samples to the HGDP baseline lifts NAT recall from 0.931 to 0.942. Adding 50 gets the same benefit (0.942) — 25 is enough. On the Brazilian-like cohort (NAT track, red), the picture flips: the MXB-augmented panel actually LOSES ~2% NAT recall because Brazilian NAT ancestry is closer to Amazonian sources than to Mexican; PEL (Peru) is the best panel there. The homogeneous-only NAT_HOMOG panel matches HGDPMXB on the Mexican cohort while being donor-safe. Punchline for the committee: there is no single best panel — the answer depends on the ancestry composition of the cohort being called.</a:t>
             </a:r>
           </a:p>
         </p:txBody>
@@ -813,6 +814,76 @@
 </file>
 
 <file path=ppt/notesSlides/notesSlide6.xml><?xml version="1.0" encoding="utf-8"?>
+<p:notes xmlns:a="http://schemas.openxmlformats.org/drawingml/2006/main" xmlns:p="http://schemas.openxmlformats.org/presentationml/2006/main" xmlns:r="http://schemas.openxmlformats.org/officeDocument/2006/relationships">
+  <p:cSld>
+    <p:spTree>
+      <p:nvGrpSpPr>
+        <p:cNvPr id="1" name=""/>
+        <p:cNvGrpSpPr/>
+        <p:nvPr/>
+      </p:nvGrpSpPr>
+      <p:grpSpPr>
+        <a:xfrm>
+          <a:off x="0" y="0"/>
+          <a:ext cx="0" cy="0"/>
+          <a:chOff x="0" y="0"/>
+          <a:chExt cx="0" cy="0"/>
+        </a:xfrm>
+      </p:grpSpPr>
+      <p:sp>
+        <p:nvSpPr>
+          <p:cNvPr id="2" name="Slide Image Placeholder 1"/>
+          <p:cNvSpPr>
+            <a:spLocks noGrp="1"/>
+          </p:cNvSpPr>
+          <p:nvPr>
+            <p:ph type="sldImg" idx="2"/>
+          </p:nvPr>
+        </p:nvSpPr>
+        <p:spPr/>
+      </p:sp>
+      <p:sp>
+        <p:nvSpPr>
+          <p:cNvPr id="3" name="Notes Placeholder 2"/>
+          <p:cNvSpPr>
+            <a:spLocks noGrp="1"/>
+          </p:cNvSpPr>
+          <p:nvPr>
+            <p:ph type="body" idx="3" sz="quarter"/>
+          </p:nvPr>
+        </p:nvSpPr>
+        <p:spPr/>
+        <p:txBody>
+          <a:bodyPr/>
+          <a:lstStyle/>
+          <a:p>
+            <a:r>
+              <a:t>Complementary result. Same reference panels, but the admixed cohort's haplotypes were down-sampled to the ~385k autosomal Illumina GSA v3 positions before calling. NAT recall drops by only ~0.7-1.2% across panels — the panel ranking is preserved and the direction of every effect matches WGS. This matters because our REDIAL/COG cohorts are chip-genotyped, not WGS — so the WGS result generalizes. Michigan/1KG imputation is the post-committee validation step; today we can already recommend HGDPMXB (+25 MXB) for the Mexican-Latino LAI pipeline. NAT_HOMOG is a donor-safe backup that performs equivalently.</a:t>
+            </a:r>
+          </a:p>
+        </p:txBody>
+      </p:sp>
+      <p:sp>
+        <p:nvSpPr>
+          <p:cNvPr id="4" name="Slide Number Placeholder 3"/>
+          <p:cNvSpPr>
+            <a:spLocks noGrp="1"/>
+          </p:cNvSpPr>
+          <p:nvPr>
+            <p:ph type="sldNum" idx="5" sz="quarter"/>
+          </p:nvPr>
+        </p:nvSpPr>
+        <p:spPr/>
+      </p:sp>
+    </p:spTree>
+  </p:cSld>
+  <p:clrMapOvr>
+    <a:masterClrMapping/>
+  </p:clrMapOvr>
+</p:notes>
+</file>
+
+<file path=ppt/notesSlides/notesSlide7.xml><?xml version="1.0" encoding="utf-8"?>
 <p:notes xmlns:a="http://schemas.openxmlformats.org/drawingml/2006/main" xmlns:p="http://schemas.openxmlformats.org/presentationml/2006/main" xmlns:r="http://schemas.openxmlformats.org/officeDocument/2006/relationships">
   <p:cSld>
     <p:spTree>
@@ -4200,7 +4271,7 @@
         <p:spPr>
           <a:xfrm>
             <a:off x="365760" y="1508760"/>
-            <a:ext cx="11430000" cy="4392192"/>
+            <a:ext cx="11430000" cy="5182945"/>
           </a:xfrm>
           <a:prstGeom prst="rect">
             <a:avLst/>
@@ -4304,7 +4375,7 @@
                   <a:srgbClr val="666666"/>
                 </a:solidFill>
               </a:rPr>
-              <a:t>2 / 6</a:t>
+              <a:t>2 / 7</a:t>
             </a:r>
           </a:p>
         </p:txBody>
@@ -5506,7 +5577,7 @@
                   <a:srgbClr val="666666"/>
                 </a:solidFill>
               </a:rPr>
-              <a:t>3 / 6</a:t>
+              <a:t>3 / 7</a:t>
             </a:r>
           </a:p>
         </p:txBody>
@@ -5557,7 +5628,7 @@
                   <a:srgbClr val="0E2841"/>
                 </a:solidFill>
               </a:rPr>
-              <a:t>Best reference panel depends on the target cohort's composition.</a:t>
+              <a:t>Panel choice moves AMR recall by ~3%; EUR and AFR sit near ceiling.</a:t>
             </a:r>
           </a:p>
         </p:txBody>
@@ -5591,14 +5662,14 @@
                   <a:srgbClr val="666666"/>
                 </a:solidFill>
               </a:rPr>
-              <a:t>Weighted NAT-ancestry recall, WGS density, chr20-22 pilot</a:t>
+              <a:t>Weighted per-hap recall by ancestry, WGS density, chr20-22 pilot</a:t>
             </a:r>
           </a:p>
         </p:txBody>
       </p:sp>
       <p:pic>
         <p:nvPicPr>
-          <p:cNvPr id="4" name="Picture 3" descr="fig_wgs_panels.png"/>
+          <p:cNvPr id="4" name="Picture 3" descr="fig_wgs_all_ancestry.png"/>
           <p:cNvPicPr>
             <a:picLocks noChangeAspect="1"/>
           </p:cNvPicPr>
@@ -5612,8 +5683,8 @@
         </p:blipFill>
         <p:spPr>
           <a:xfrm>
-            <a:off x="502920" y="1508760"/>
-            <a:ext cx="7498079" cy="3599078"/>
+            <a:off x="502920" y="1417320"/>
+            <a:ext cx="11155680" cy="5492027"/>
           </a:xfrm>
           <a:prstGeom prst="rect">
             <a:avLst/>
@@ -5628,8 +5699,8 @@
         </p:nvSpPr>
         <p:spPr>
           <a:xfrm>
-            <a:off x="8275320" y="1600200"/>
-            <a:ext cx="3566160" cy="365760"/>
+            <a:off x="502920" y="6172200"/>
+            <a:ext cx="11155680" cy="320040"/>
           </a:xfrm>
           <a:prstGeom prst="rect">
             <a:avLst/>
@@ -5644,12 +5715,12 @@
           <a:p>
             <a:pPr algn="l"/>
             <a:r>
-              <a:rPr sz="1300" i="0" b="1">
-                <a:solidFill>
-                  <a:srgbClr val="0E2841"/>
-                </a:solidFill>
-              </a:rPr>
-              <a:t>Takeaways</a:t>
+              <a:rPr sz="1200" i="1" b="0">
+                <a:solidFill>
+                  <a:srgbClr val="1A1A1A"/>
+                </a:solidFill>
+              </a:rPr>
+              <a:t>→  AMR is where reference-panel choice actually matters — so the rest of the deck focuses on AMR recall.</a:t>
             </a:r>
           </a:p>
         </p:txBody>
@@ -5662,8 +5733,8 @@
         </p:nvSpPr>
         <p:spPr>
           <a:xfrm>
-            <a:off x="8275320" y="1965960"/>
-            <a:ext cx="3611880" cy="4023360"/>
+            <a:off x="502920" y="6537960"/>
+            <a:ext cx="7315200" cy="274320"/>
           </a:xfrm>
           <a:prstGeom prst="rect">
             <a:avLst/>
@@ -5678,128 +5749,12 @@
           <a:p>
             <a:pPr algn="l"/>
             <a:r>
-              <a:rPr sz="1050" i="0" b="0">
-                <a:solidFill>
-                  <a:srgbClr val="1A1A1A"/>
-                </a:solidFill>
-              </a:rPr>
-              <a:t>For a Mexican-like cohort (blue bars):</a:t>
-            </a:r>
-          </a:p>
-          <a:p>
-            <a:pPr algn="l"/>
-            <a:r>
-              <a:rPr sz="1050" i="0" b="0">
-                <a:solidFill>
-                  <a:srgbClr val="1A1A1A"/>
-                </a:solidFill>
-              </a:rPr>
-              <a:t>•  Adding 25 MXB samples</a:t>
-            </a:r>
-          </a:p>
-          <a:p>
-            <a:pPr algn="l"/>
-            <a:r>
-              <a:rPr sz="1050" i="0" b="0">
-                <a:solidFill>
-                  <a:srgbClr val="1A1A1A"/>
-                </a:solidFill>
-              </a:rPr>
-              <a:t>    lifts NAT recall  0.931 → 0.942</a:t>
-            </a:r>
-          </a:p>
-          <a:p>
-            <a:pPr algn="l"/>
-          </a:p>
-          <a:p>
-            <a:pPr algn="l"/>
-            <a:r>
-              <a:rPr sz="1050" i="0" b="0">
-                <a:solidFill>
-                  <a:srgbClr val="1A1A1A"/>
-                </a:solidFill>
-              </a:rPr>
-              <a:t>For a Brazilian-like cohort (red bars):</a:t>
-            </a:r>
-          </a:p>
-          <a:p>
-            <a:pPr algn="l"/>
-            <a:r>
-              <a:rPr sz="1050" i="0" b="0">
-                <a:solidFill>
-                  <a:srgbClr val="1A1A1A"/>
-                </a:solidFill>
-              </a:rPr>
-              <a:t>•  PEL (Peru) panel wins on NAT</a:t>
-            </a:r>
-          </a:p>
-          <a:p>
-            <a:pPr algn="l"/>
-            <a:r>
-              <a:rPr sz="1050" i="0" b="0">
-                <a:solidFill>
-                  <a:srgbClr val="1A1A1A"/>
-                </a:solidFill>
-              </a:rPr>
-              <a:t>    HGDPMXB actually loses ~2%</a:t>
-            </a:r>
-          </a:p>
-          <a:p>
-            <a:pPr algn="l"/>
-            <a:r>
-              <a:rPr sz="1050" i="0" b="0">
-                <a:solidFill>
-                  <a:srgbClr val="1A1A1A"/>
-                </a:solidFill>
-              </a:rPr>
-              <a:t>•  Adding non-Mexican ancestry</a:t>
-            </a:r>
-          </a:p>
-          <a:p>
-            <a:pPr algn="l"/>
-            <a:r>
-              <a:rPr sz="1050" i="0" b="0">
-                <a:solidFill>
-                  <a:srgbClr val="1A1A1A"/>
-                </a:solidFill>
-              </a:rPr>
-              <a:t>    to a Mexican reference hurts</a:t>
-            </a:r>
-          </a:p>
-          <a:p>
-            <a:pPr algn="l"/>
-          </a:p>
-          <a:p>
-            <a:pPr algn="l"/>
-            <a:r>
-              <a:rPr sz="1050" i="0" b="0">
-                <a:solidFill>
-                  <a:srgbClr val="1A1A1A"/>
-                </a:solidFill>
-              </a:rPr>
-              <a:t>→  Panel-choice must match the</a:t>
-            </a:r>
-          </a:p>
-          <a:p>
-            <a:pPr algn="l"/>
-            <a:r>
-              <a:rPr sz="1050" i="0" b="0">
-                <a:solidFill>
-                  <a:srgbClr val="1A1A1A"/>
-                </a:solidFill>
-              </a:rPr>
-              <a:t>     target cohort, not the largest</a:t>
-            </a:r>
-          </a:p>
-          <a:p>
-            <a:pPr algn="l"/>
-            <a:r>
-              <a:rPr sz="1050" i="0" b="0">
-                <a:solidFill>
-                  <a:srgbClr val="1A1A1A"/>
-                </a:solidFill>
-              </a:rPr>
-              <a:t>     available sample source.</a:t>
+              <a:rPr sz="900" i="0" b="0">
+                <a:solidFill>
+                  <a:srgbClr val="666666"/>
+                </a:solidFill>
+              </a:rPr>
+              <a:t>Christina Magyar  ·  Thesis committee, Aug 2026  ·  Result overview</a:t>
             </a:r>
           </a:p>
         </p:txBody>
@@ -5812,8 +5767,8 @@
         </p:nvSpPr>
         <p:spPr>
           <a:xfrm>
-            <a:off x="502920" y="6537960"/>
-            <a:ext cx="7315200" cy="274320"/>
+            <a:off x="11338560" y="6537960"/>
+            <a:ext cx="548640" cy="274320"/>
           </a:xfrm>
           <a:prstGeom prst="rect">
             <a:avLst/>
@@ -5826,48 +5781,14 @@
           </a:bodyPr>
           <a:lstStyle/>
           <a:p>
-            <a:pPr algn="l"/>
+            <a:pPr algn="r"/>
             <a:r>
               <a:rPr sz="900" i="0" b="0">
                 <a:solidFill>
                   <a:srgbClr val="666666"/>
                 </a:solidFill>
               </a:rPr>
-              <a:t>Christina Magyar  ·  Thesis committee, Aug 2026  ·  Result 1 · WGS</a:t>
-            </a:r>
-          </a:p>
-        </p:txBody>
-      </p:sp>
-      <p:sp>
-        <p:nvSpPr>
-          <p:cNvPr id="8" name="TextBox 7"/>
-          <p:cNvSpPr txBox="1"/>
-          <p:nvPr/>
-        </p:nvSpPr>
-        <p:spPr>
-          <a:xfrm>
-            <a:off x="11338560" y="6537960"/>
-            <a:ext cx="548640" cy="274320"/>
-          </a:xfrm>
-          <a:prstGeom prst="rect">
-            <a:avLst/>
-          </a:prstGeom>
-          <a:noFill/>
-        </p:spPr>
-        <p:txBody>
-          <a:bodyPr wrap="square" lIns="0" rIns="0" tIns="0" bIns="0">
-            <a:spAutoFit/>
-          </a:bodyPr>
-          <a:lstStyle/>
-          <a:p>
-            <a:pPr algn="r"/>
-            <a:r>
-              <a:rPr sz="900" i="0" b="0">
-                <a:solidFill>
-                  <a:srgbClr val="666666"/>
-                </a:solidFill>
-              </a:rPr>
-              <a:t>4 / 6</a:t>
+              <a:t>4 / 7</a:t>
             </a:r>
           </a:p>
         </p:txBody>
@@ -5918,7 +5839,7 @@
                   <a:srgbClr val="0E2841"/>
                 </a:solidFill>
               </a:rPr>
-              <a:t>Chip-density LAI holds within ~1% of WGS on a Mexican-like cohort.</a:t>
+              <a:t>Best reference panel depends on the target cohort's composition.</a:t>
             </a:r>
           </a:p>
         </p:txBody>
@@ -5952,14 +5873,14 @@
                   <a:srgbClr val="666666"/>
                 </a:solidFill>
               </a:rPr>
-              <a:t>Illumina GSA v3 chip vs full WGS density, same reference panels</a:t>
+              <a:t>Weighted NAT-ancestry recall, WGS density, chr20-22 pilot</a:t>
             </a:r>
           </a:p>
         </p:txBody>
       </p:sp>
       <p:pic>
         <p:nvPicPr>
-          <p:cNvPr id="4" name="Picture 3" descr="fig_chip_vs_wgs.png"/>
+          <p:cNvPr id="4" name="Picture 3" descr="fig_wgs_panels.png"/>
           <p:cNvPicPr>
             <a:picLocks noChangeAspect="1"/>
           </p:cNvPicPr>
@@ -5974,7 +5895,7 @@
         <p:spPr>
           <a:xfrm>
             <a:off x="502920" y="1508760"/>
-            <a:ext cx="7680960" cy="3609547"/>
+            <a:ext cx="7498079" cy="3599078"/>
           </a:xfrm>
           <a:prstGeom prst="rect">
             <a:avLst/>
@@ -5989,7 +5910,7 @@
         </p:nvSpPr>
         <p:spPr>
           <a:xfrm>
-            <a:off x="8366760" y="1600200"/>
+            <a:off x="8275320" y="1600200"/>
             <a:ext cx="3566160" cy="365760"/>
           </a:xfrm>
           <a:prstGeom prst="rect">
@@ -6010,7 +5931,7 @@
                   <a:srgbClr val="0E2841"/>
                 </a:solidFill>
               </a:rPr>
-              <a:t>Implications for GWAS</a:t>
+              <a:t>Takeaways</a:t>
             </a:r>
           </a:p>
         </p:txBody>
@@ -6023,7 +5944,7 @@
         </p:nvSpPr>
         <p:spPr>
           <a:xfrm>
-            <a:off x="8366760" y="1965960"/>
+            <a:off x="8275320" y="1965960"/>
             <a:ext cx="3611880" cy="4023360"/>
           </a:xfrm>
           <a:prstGeom prst="rect">
@@ -6044,7 +5965,7 @@
                   <a:srgbClr val="1A1A1A"/>
                 </a:solidFill>
               </a:rPr>
-              <a:t>•  REDIAL / COG cohorts are</a:t>
+              <a:t>For a Mexican-like cohort (blue bars):</a:t>
             </a:r>
           </a:p>
           <a:p>
@@ -6055,7 +5976,7 @@
                   <a:srgbClr val="1A1A1A"/>
                 </a:solidFill>
               </a:rPr>
-              <a:t>    genotyped on chip, not WGS —</a:t>
+              <a:t>•  Adding 25 MXB samples</a:t>
             </a:r>
           </a:p>
           <a:p>
@@ -6066,22 +5987,33 @@
                   <a:srgbClr val="1A1A1A"/>
                 </a:solidFill>
               </a:rPr>
-              <a:t>    LAI accuracy holds if we</a:t>
+              <a:t>    lifts NAT recall  0.931 → 0.942</a:t>
             </a:r>
           </a:p>
           <a:p>
             <a:pPr algn="l"/>
+          </a:p>
+          <a:p>
+            <a:pPr algn="l"/>
             <a:r>
               <a:rPr sz="1050" i="0" b="0">
                 <a:solidFill>
                   <a:srgbClr val="1A1A1A"/>
                 </a:solidFill>
               </a:rPr>
-              <a:t>    use the MXB-augmented panel</a:t>
+              <a:t>For a Brazilian-like cohort (red bars):</a:t>
             </a:r>
           </a:p>
           <a:p>
             <a:pPr algn="l"/>
+            <a:r>
+              <a:rPr sz="1050" i="0" b="0">
+                <a:solidFill>
+                  <a:srgbClr val="1A1A1A"/>
+                </a:solidFill>
+              </a:rPr>
+              <a:t>•  PEL (Peru) panel wins on NAT</a:t>
+            </a:r>
           </a:p>
           <a:p>
             <a:pPr algn="l"/>
@@ -6091,7 +6023,7 @@
                   <a:srgbClr val="1A1A1A"/>
                 </a:solidFill>
               </a:rPr>
-              <a:t>•  Chip → TOPMed imputation is</a:t>
+              <a:t>    HGDPMXB actually loses ~2%</a:t>
             </a:r>
           </a:p>
           <a:p>
@@ -6102,7 +6034,7 @@
                   <a:srgbClr val="1A1A1A"/>
                 </a:solidFill>
               </a:rPr>
-              <a:t>    the next validation step</a:t>
+              <a:t>•  Adding non-Mexican ancestry</a:t>
             </a:r>
           </a:p>
           <a:p>
@@ -6113,7 +6045,7 @@
                   <a:srgbClr val="1A1A1A"/>
                 </a:solidFill>
               </a:rPr>
-              <a:t>    (Michigan / 1KG post-meeting)</a:t>
+              <a:t>    to a Mexican reference hurts</a:t>
             </a:r>
           </a:p>
           <a:p>
@@ -6127,7 +6059,7 @@
                   <a:srgbClr val="1A1A1A"/>
                 </a:solidFill>
               </a:rPr>
-              <a:t>•  Panel ranking preserved</a:t>
+              <a:t>→  Panel-choice must match the</a:t>
             </a:r>
           </a:p>
           <a:p>
@@ -6138,7 +6070,7 @@
                   <a:srgbClr val="1A1A1A"/>
                 </a:solidFill>
               </a:rPr>
-              <a:t>    across densities:</a:t>
+              <a:t>     target cohort, not the largest</a:t>
             </a:r>
           </a:p>
           <a:p>
@@ -6149,32 +6081,7 @@
                   <a:srgbClr val="1A1A1A"/>
                 </a:solidFill>
               </a:rPr>
-              <a:t>     HGDPMXB &gt; HGDP &gt; PEL_EAS</a:t>
-            </a:r>
-          </a:p>
-          <a:p>
-            <a:pPr algn="l"/>
-          </a:p>
-          <a:p>
-            <a:pPr algn="l"/>
-            <a:r>
-              <a:rPr sz="1050" i="0" b="0">
-                <a:solidFill>
-                  <a:srgbClr val="1A1A1A"/>
-                </a:solidFill>
-              </a:rPr>
-              <a:t>•  Recommend HGDPMXB for the</a:t>
-            </a:r>
-          </a:p>
-          <a:p>
-            <a:pPr algn="l"/>
-            <a:r>
-              <a:rPr sz="1050" i="0" b="0">
-                <a:solidFill>
-                  <a:srgbClr val="1A1A1A"/>
-                </a:solidFill>
-              </a:rPr>
-              <a:t>    Mexican-Latino GWAS pipeline</a:t>
+              <a:t>     available sample source.</a:t>
             </a:r>
           </a:p>
         </p:txBody>
@@ -6208,7 +6115,7 @@
                   <a:srgbClr val="666666"/>
                 </a:solidFill>
               </a:rPr>
-              <a:t>Christina Magyar  ·  Thesis committee, Aug 2026  ·  Result 2 · Chip</a:t>
+              <a:t>Christina Magyar  ·  Thesis committee, Aug 2026  ·  Result · AMR zoom</a:t>
             </a:r>
           </a:p>
         </p:txBody>
@@ -6242,7 +6149,7 @@
                   <a:srgbClr val="666666"/>
                 </a:solidFill>
               </a:rPr>
-              <a:t>5 / 6</a:t>
+              <a:t>5 / 7</a:t>
             </a:r>
           </a:p>
         </p:txBody>
@@ -6293,6 +6200,381 @@
                   <a:srgbClr val="0E2841"/>
                 </a:solidFill>
               </a:rPr>
+              <a:t>Chip-density LAI holds within ~1% of WGS on a Mexican-like cohort.</a:t>
+            </a:r>
+          </a:p>
+        </p:txBody>
+      </p:sp>
+      <p:sp>
+        <p:nvSpPr>
+          <p:cNvPr id="3" name="TextBox 2"/>
+          <p:cNvSpPr txBox="1"/>
+          <p:nvPr/>
+        </p:nvSpPr>
+        <p:spPr>
+          <a:xfrm>
+            <a:off x="502920" y="1051560"/>
+            <a:ext cx="11155680" cy="365760"/>
+          </a:xfrm>
+          <a:prstGeom prst="rect">
+            <a:avLst/>
+          </a:prstGeom>
+          <a:noFill/>
+        </p:spPr>
+        <p:txBody>
+          <a:bodyPr wrap="square" lIns="0" rIns="0" tIns="0" bIns="0">
+            <a:spAutoFit/>
+          </a:bodyPr>
+          <a:lstStyle/>
+          <a:p>
+            <a:pPr algn="l"/>
+            <a:r>
+              <a:rPr sz="1200" i="1" b="0">
+                <a:solidFill>
+                  <a:srgbClr val="666666"/>
+                </a:solidFill>
+              </a:rPr>
+              <a:t>Illumina GSA v3 chip vs full WGS density, same reference panels</a:t>
+            </a:r>
+          </a:p>
+        </p:txBody>
+      </p:sp>
+      <p:pic>
+        <p:nvPicPr>
+          <p:cNvPr id="4" name="Picture 3" descr="fig_chip_vs_wgs.png"/>
+          <p:cNvPicPr>
+            <a:picLocks noChangeAspect="1"/>
+          </p:cNvPicPr>
+          <p:nvPr/>
+        </p:nvPicPr>
+        <p:blipFill>
+          <a:blip r:embed="rId2"/>
+          <a:stretch>
+            <a:fillRect/>
+          </a:stretch>
+        </p:blipFill>
+        <p:spPr>
+          <a:xfrm>
+            <a:off x="502920" y="1508760"/>
+            <a:ext cx="7680960" cy="3609547"/>
+          </a:xfrm>
+          <a:prstGeom prst="rect">
+            <a:avLst/>
+          </a:prstGeom>
+        </p:spPr>
+      </p:pic>
+      <p:sp>
+        <p:nvSpPr>
+          <p:cNvPr id="5" name="TextBox 4"/>
+          <p:cNvSpPr txBox="1"/>
+          <p:nvPr/>
+        </p:nvSpPr>
+        <p:spPr>
+          <a:xfrm>
+            <a:off x="8366760" y="1600200"/>
+            <a:ext cx="3566160" cy="365760"/>
+          </a:xfrm>
+          <a:prstGeom prst="rect">
+            <a:avLst/>
+          </a:prstGeom>
+          <a:noFill/>
+        </p:spPr>
+        <p:txBody>
+          <a:bodyPr wrap="square" lIns="0" rIns="0" tIns="0" bIns="0">
+            <a:spAutoFit/>
+          </a:bodyPr>
+          <a:lstStyle/>
+          <a:p>
+            <a:pPr algn="l"/>
+            <a:r>
+              <a:rPr sz="1300" i="0" b="1">
+                <a:solidFill>
+                  <a:srgbClr val="0E2841"/>
+                </a:solidFill>
+              </a:rPr>
+              <a:t>Implications for GWAS</a:t>
+            </a:r>
+          </a:p>
+        </p:txBody>
+      </p:sp>
+      <p:sp>
+        <p:nvSpPr>
+          <p:cNvPr id="6" name="TextBox 5"/>
+          <p:cNvSpPr txBox="1"/>
+          <p:nvPr/>
+        </p:nvSpPr>
+        <p:spPr>
+          <a:xfrm>
+            <a:off x="8366760" y="1965960"/>
+            <a:ext cx="3611880" cy="4023360"/>
+          </a:xfrm>
+          <a:prstGeom prst="rect">
+            <a:avLst/>
+          </a:prstGeom>
+          <a:noFill/>
+        </p:spPr>
+        <p:txBody>
+          <a:bodyPr wrap="square" lIns="0" rIns="0" tIns="0" bIns="0">
+            <a:spAutoFit/>
+          </a:bodyPr>
+          <a:lstStyle/>
+          <a:p>
+            <a:pPr algn="l"/>
+            <a:r>
+              <a:rPr sz="1050" i="0" b="0">
+                <a:solidFill>
+                  <a:srgbClr val="1A1A1A"/>
+                </a:solidFill>
+              </a:rPr>
+              <a:t>•  REDIAL / COG cohorts are</a:t>
+            </a:r>
+          </a:p>
+          <a:p>
+            <a:pPr algn="l"/>
+            <a:r>
+              <a:rPr sz="1050" i="0" b="0">
+                <a:solidFill>
+                  <a:srgbClr val="1A1A1A"/>
+                </a:solidFill>
+              </a:rPr>
+              <a:t>    genotyped on chip, not WGS —</a:t>
+            </a:r>
+          </a:p>
+          <a:p>
+            <a:pPr algn="l"/>
+            <a:r>
+              <a:rPr sz="1050" i="0" b="0">
+                <a:solidFill>
+                  <a:srgbClr val="1A1A1A"/>
+                </a:solidFill>
+              </a:rPr>
+              <a:t>    LAI accuracy holds if we</a:t>
+            </a:r>
+          </a:p>
+          <a:p>
+            <a:pPr algn="l"/>
+            <a:r>
+              <a:rPr sz="1050" i="0" b="0">
+                <a:solidFill>
+                  <a:srgbClr val="1A1A1A"/>
+                </a:solidFill>
+              </a:rPr>
+              <a:t>    use the MXB-augmented panel</a:t>
+            </a:r>
+          </a:p>
+          <a:p>
+            <a:pPr algn="l"/>
+          </a:p>
+          <a:p>
+            <a:pPr algn="l"/>
+            <a:r>
+              <a:rPr sz="1050" i="0" b="0">
+                <a:solidFill>
+                  <a:srgbClr val="1A1A1A"/>
+                </a:solidFill>
+              </a:rPr>
+              <a:t>•  Chip → TOPMed imputation is</a:t>
+            </a:r>
+          </a:p>
+          <a:p>
+            <a:pPr algn="l"/>
+            <a:r>
+              <a:rPr sz="1050" i="0" b="0">
+                <a:solidFill>
+                  <a:srgbClr val="1A1A1A"/>
+                </a:solidFill>
+              </a:rPr>
+              <a:t>    the next validation step</a:t>
+            </a:r>
+          </a:p>
+          <a:p>
+            <a:pPr algn="l"/>
+            <a:r>
+              <a:rPr sz="1050" i="0" b="0">
+                <a:solidFill>
+                  <a:srgbClr val="1A1A1A"/>
+                </a:solidFill>
+              </a:rPr>
+              <a:t>    (Michigan / 1KG post-meeting)</a:t>
+            </a:r>
+          </a:p>
+          <a:p>
+            <a:pPr algn="l"/>
+          </a:p>
+          <a:p>
+            <a:pPr algn="l"/>
+            <a:r>
+              <a:rPr sz="1050" i="0" b="0">
+                <a:solidFill>
+                  <a:srgbClr val="1A1A1A"/>
+                </a:solidFill>
+              </a:rPr>
+              <a:t>•  Panel ranking preserved</a:t>
+            </a:r>
+          </a:p>
+          <a:p>
+            <a:pPr algn="l"/>
+            <a:r>
+              <a:rPr sz="1050" i="0" b="0">
+                <a:solidFill>
+                  <a:srgbClr val="1A1A1A"/>
+                </a:solidFill>
+              </a:rPr>
+              <a:t>    across densities:</a:t>
+            </a:r>
+          </a:p>
+          <a:p>
+            <a:pPr algn="l"/>
+            <a:r>
+              <a:rPr sz="1050" i="0" b="0">
+                <a:solidFill>
+                  <a:srgbClr val="1A1A1A"/>
+                </a:solidFill>
+              </a:rPr>
+              <a:t>     HGDPMXB &gt; HGDP &gt; PEL_EAS</a:t>
+            </a:r>
+          </a:p>
+          <a:p>
+            <a:pPr algn="l"/>
+          </a:p>
+          <a:p>
+            <a:pPr algn="l"/>
+            <a:r>
+              <a:rPr sz="1050" i="0" b="0">
+                <a:solidFill>
+                  <a:srgbClr val="1A1A1A"/>
+                </a:solidFill>
+              </a:rPr>
+              <a:t>•  Recommend HGDPMXB for the</a:t>
+            </a:r>
+          </a:p>
+          <a:p>
+            <a:pPr algn="l"/>
+            <a:r>
+              <a:rPr sz="1050" i="0" b="0">
+                <a:solidFill>
+                  <a:srgbClr val="1A1A1A"/>
+                </a:solidFill>
+              </a:rPr>
+              <a:t>    Mexican-Latino GWAS pipeline</a:t>
+            </a:r>
+          </a:p>
+        </p:txBody>
+      </p:sp>
+      <p:sp>
+        <p:nvSpPr>
+          <p:cNvPr id="7" name="TextBox 6"/>
+          <p:cNvSpPr txBox="1"/>
+          <p:nvPr/>
+        </p:nvSpPr>
+        <p:spPr>
+          <a:xfrm>
+            <a:off x="502920" y="6537960"/>
+            <a:ext cx="7315200" cy="274320"/>
+          </a:xfrm>
+          <a:prstGeom prst="rect">
+            <a:avLst/>
+          </a:prstGeom>
+          <a:noFill/>
+        </p:spPr>
+        <p:txBody>
+          <a:bodyPr wrap="square" lIns="0" rIns="0" tIns="0" bIns="0">
+            <a:spAutoFit/>
+          </a:bodyPr>
+          <a:lstStyle/>
+          <a:p>
+            <a:pPr algn="l"/>
+            <a:r>
+              <a:rPr sz="900" i="0" b="0">
+                <a:solidFill>
+                  <a:srgbClr val="666666"/>
+                </a:solidFill>
+              </a:rPr>
+              <a:t>Christina Magyar  ·  Thesis committee, Aug 2026  ·  Result · Chip</a:t>
+            </a:r>
+          </a:p>
+        </p:txBody>
+      </p:sp>
+      <p:sp>
+        <p:nvSpPr>
+          <p:cNvPr id="8" name="TextBox 7"/>
+          <p:cNvSpPr txBox="1"/>
+          <p:nvPr/>
+        </p:nvSpPr>
+        <p:spPr>
+          <a:xfrm>
+            <a:off x="11338560" y="6537960"/>
+            <a:ext cx="548640" cy="274320"/>
+          </a:xfrm>
+          <a:prstGeom prst="rect">
+            <a:avLst/>
+          </a:prstGeom>
+          <a:noFill/>
+        </p:spPr>
+        <p:txBody>
+          <a:bodyPr wrap="square" lIns="0" rIns="0" tIns="0" bIns="0">
+            <a:spAutoFit/>
+          </a:bodyPr>
+          <a:lstStyle/>
+          <a:p>
+            <a:pPr algn="r"/>
+            <a:r>
+              <a:rPr sz="900" i="0" b="0">
+                <a:solidFill>
+                  <a:srgbClr val="666666"/>
+                </a:solidFill>
+              </a:rPr>
+              <a:t>6 / 7</a:t>
+            </a:r>
+          </a:p>
+        </p:txBody>
+      </p:sp>
+    </p:spTree>
+  </p:cSld>
+  <p:clrMapOvr>
+    <a:masterClrMapping/>
+  </p:clrMapOvr>
+</p:sld>
+</file>
+
+<file path=ppt/slides/slide7.xml><?xml version="1.0" encoding="utf-8"?>
+<p:sld xmlns:a="http://schemas.openxmlformats.org/drawingml/2006/main" xmlns:p="http://schemas.openxmlformats.org/presentationml/2006/main" xmlns:r="http://schemas.openxmlformats.org/officeDocument/2006/relationships">
+  <p:cSld>
+    <p:spTree>
+      <p:nvGrpSpPr>
+        <p:cNvPr id="1" name=""/>
+        <p:cNvGrpSpPr/>
+        <p:nvPr/>
+      </p:nvGrpSpPr>
+      <p:grpSpPr/>
+      <p:sp>
+        <p:nvSpPr>
+          <p:cNvPr id="2" name="TextBox 1"/>
+          <p:cNvSpPr txBox="1"/>
+          <p:nvPr/>
+        </p:nvSpPr>
+        <p:spPr>
+          <a:xfrm>
+            <a:off x="502920" y="292608"/>
+            <a:ext cx="11155680" cy="822960"/>
+          </a:xfrm>
+          <a:prstGeom prst="rect">
+            <a:avLst/>
+          </a:prstGeom>
+          <a:noFill/>
+        </p:spPr>
+        <p:txBody>
+          <a:bodyPr wrap="square">
+            <a:spAutoFit/>
+          </a:bodyPr>
+          <a:lstStyle/>
+          <a:p>
+            <a:r>
+              <a:rPr sz="2400" b="1">
+                <a:solidFill>
+                  <a:srgbClr val="0E2841"/>
+                </a:solidFill>
+              </a:rPr>
               <a:t>8-module Nextflow preprocessing pipeline built; benchmarking underway.</a:t>
             </a:r>
           </a:p>
@@ -6878,7 +7160,7 @@
                   <a:srgbClr val="666666"/>
                 </a:solidFill>
               </a:rPr>
-              <a:t>6 / 6</a:t>
+              <a:t>7 / 7</a:t>
             </a:r>
           </a:p>
         </p:txBody>

--- a/slides/thesis_committee_slides.pptx
+++ b/slides/thesis_committee_slides.pptx
@@ -788,7 +788,53 @@
           <a:lstStyle/>
           <a:p>
             <a:r>
-              <a:t>This is the headline result. On the Mexican-like cohort (NATMXB track, blue), adding 25 MXB samples to the HGDP baseline lifts NAT recall from 0.931 to 0.942. Adding 50 gets the same benefit (0.942) — 25 is enough. On the Brazilian-like cohort (NAT track, red), the picture flips: the MXB-augmented panel actually LOSES ~2% NAT recall because Brazilian NAT ancestry is closer to Amazonian sources than to Mexican; PEL (Peru) is the best panel there. The homogeneous-only NAT_HOMOG panel matches HGDPMXB on the Mexican cohort while being donor-safe. Punchline for the committee: there is no single best panel — the answer depends on the ancestry composition of the cohort being called.</a:t>
+              <a:t>HEADLINE RESULT. On the Mexican-like cohort (NATMXB track, teal), adding 25 MXB samples to the HGDP baseline lifts NAT recall from 0.931 to 0.942 and F1 from 0.956 to 0.965. Adding 50 gets the same benefit (0.942 / 0.965) — 25 is enough. On the Brazilian-like cohort (NAT track, orange) the recall picture flips: the MXB-augmented panel LOSES ~2-5% NAT recall because Brazilian NAT ancestry is closer to Amazonian sources than Mexican; PEL (Peru) matches or beats HGDP on that cohort. But on F1 the Brazilian penalty softens — precision goes UP when MXB is added because the panel gets stricter about calling AMR, and F1 barely moves. NAT_HOMOG (Q≥0.95 filter) matches HGDPMXB on the Mexican cohort while being donor-safe. Punchline: no single best panel — the winner depends on the cohort's ancestry composition.</a:t>
+            </a:r>
+          </a:p>
+          <a:p/>
+          <a:p>
+            <a:r>
+              <a:t>──────── METRICS CHEAT SHEET ────────</a:t>
+            </a:r>
+          </a:p>
+          <a:p>
+            <a:r>
+              <a:t>• TP / FP / FN: sites where called ancestry matches truth (TP), calls were wrong-class (FP), or truth was this class but we missed (FN). TN is ignored — this is a small-positive-class setting.</a:t>
+            </a:r>
+          </a:p>
+          <a:p>
+            <a:r>
+              <a:t>• Recall = Sensitivity = TPR = TP / (TP + FN). Of all true NAT sites, how many we recovered. Currently plotted on the hero bars.</a:t>
+            </a:r>
+          </a:p>
+          <a:p>
+            <a:r>
+              <a:t>• Precision = PPV = TP / (TP + FP). Of the sites we CALLED NAT, how many were actually NAT. Guards against over-calling.</a:t>
+            </a:r>
+          </a:p>
+          <a:p>
+            <a:r>
+              <a:t>• F1 = 2·P·R / (P + R). Harmonic mean of precision and recall — the class-imbalance-robust summary. NOT the same as balanced accuracy (which uses specificity); F1 ignores TN by design.</a:t>
+            </a:r>
+          </a:p>
+          <a:p>
+            <a:r>
+              <a:t>• Weighted (in these tables): concordance / recall / precision are weighted by (n_haps × n_sites) per chromosome so long chromosomes and larger haplotype counts contribute more.</a:t>
+            </a:r>
+          </a:p>
+          <a:p>
+            <a:r>
+              <a:t>• Concordance in these tables (== weighted_recall in current R impl) is per-site agreement to truth, per ancestry, one-vs-rest.</a:t>
+            </a:r>
+          </a:p>
+          <a:p>
+            <a:r>
+              <a:t>• SE: standard error of the per-chromosome mean (not a bootstrap CI).</a:t>
+            </a:r>
+          </a:p>
+          <a:p>
+            <a:r>
+              <a:t>Publication table with all three metrics is committed to results/tables/publication_table_amr.tsv and rendered to slides/tables/publication_table_amr.png.</a:t>
             </a:r>
           </a:p>
         </p:txBody>

--- a/slides/thesis_committee_slides.pptx
+++ b/slides/thesis_committee_slides.pptx
@@ -788,7 +788,7 @@
           <a:lstStyle/>
           <a:p>
             <a:r>
-              <a:t>HEADLINE RESULT. On the Mexican-like cohort (NATMXB track, teal), adding 25 MXB samples to the HGDP baseline lifts NAT recall from 0.931 to 0.942 and F1 from 0.956 to 0.965. Adding 50 gets the same benefit (0.942 / 0.965) — 25 is enough. On the Brazilian-like cohort (NAT track, orange) the recall picture flips: the MXB-augmented panel LOSES ~2-5% NAT recall because Brazilian NAT ancestry is closer to Amazonian sources than Mexican; PEL (Peru) matches or beats HGDP on that cohort. But on F1 the Brazilian penalty softens — precision goes UP when MXB is added because the panel gets stricter about calling AMR, and F1 barely moves. NAT_HOMOG (Q≥0.95 filter) matches HGDPMXB on the Mexican cohort while being donor-safe. Punchline: no single best panel — the winner depends on the cohort's ancestry composition.</a:t>
+              <a:t>HEADLINE RESULT. Extended pilot numbers (chr 1-8 + 20-22 for the 4 full-coverage panels; chr20-22 only for HOMOG and PEL_EAS — flagged with *). On the Mexican-like cohort (NATMXB track, teal): +25 MXB lifts NAT recall from 0.954 → 0.958 and F1 from 0.969 → 0.974 (cleanest single winner). On the Brazilian-like cohort (NAT track, orange): +25 MXB costs ~1% NAT recall (0.930 → 0.920) but bumps precision (0.981 → 0.990), so F1 is roughly flat. +50 MXB (HGDPMXB_FULL) costs more recall (0.902) with only marginal F1 benefit — 25 MXB is the sweet spot. PEL matches or beats HGDP on the Brazilian cohort. NAT_HOMOG (Q≥0.95 filter, donor-safe) performs comparably to HGDPMXB in the 3-chr subset we have — worth re-running with full coverage. Punchline: adding MXB is a clear win for a Mexican-cohort GWAS; matched-source reference (PEL for Brazilian) matters more than panel size.</a:t>
             </a:r>
           </a:p>
           <a:p/>

--- a/slides/thesis_committee_slides.pptx
+++ b/slides/thesis_committee_slides.pptx
@@ -12,6 +12,11 @@
     <p:sldId id="260" r:id="rId12"/>
     <p:sldId id="261" r:id="rId13"/>
     <p:sldId id="262" r:id="rId14"/>
+    <p:sldId id="263" r:id="rId15"/>
+    <p:sldId id="264" r:id="rId16"/>
+    <p:sldId id="265" r:id="rId17"/>
+    <p:sldId id="266" r:id="rId18"/>
+    <p:sldId id="267" r:id="rId19"/>
   </p:sldIdLst>
   <p:sldSz cx="12191695" cy="6858000" type="screen4x3"/>
   <p:notesSz cx="6858000" cy="9144000"/>
@@ -533,6 +538,216 @@
 </p:notes>
 </file>
 
+<file path=ppt/notesSlides/notesSlide10.xml><?xml version="1.0" encoding="utf-8"?>
+<p:notes xmlns:a="http://schemas.openxmlformats.org/drawingml/2006/main" xmlns:p="http://schemas.openxmlformats.org/presentationml/2006/main" xmlns:r="http://schemas.openxmlformats.org/officeDocument/2006/relationships">
+  <p:cSld>
+    <p:spTree>
+      <p:nvGrpSpPr>
+        <p:cNvPr id="1" name=""/>
+        <p:cNvGrpSpPr/>
+        <p:nvPr/>
+      </p:nvGrpSpPr>
+      <p:grpSpPr>
+        <a:xfrm>
+          <a:off x="0" y="0"/>
+          <a:ext cx="0" cy="0"/>
+          <a:chOff x="0" y="0"/>
+          <a:chExt cx="0" cy="0"/>
+        </a:xfrm>
+      </p:grpSpPr>
+      <p:sp>
+        <p:nvSpPr>
+          <p:cNvPr id="2" name="Slide Image Placeholder 1"/>
+          <p:cNvSpPr>
+            <a:spLocks noGrp="1"/>
+          </p:cNvSpPr>
+          <p:nvPr>
+            <p:ph type="sldImg" idx="2"/>
+          </p:nvPr>
+        </p:nvSpPr>
+        <p:spPr/>
+      </p:sp>
+      <p:sp>
+        <p:nvSpPr>
+          <p:cNvPr id="3" name="Notes Placeholder 2"/>
+          <p:cNvSpPr>
+            <a:spLocks noGrp="1"/>
+          </p:cNvSpPr>
+          <p:nvPr>
+            <p:ph type="body" idx="3" sz="quarter"/>
+          </p:nvPr>
+        </p:nvSpPr>
+        <p:spPr/>
+        <p:txBody>
+          <a:bodyPr/>
+          <a:lstStyle/>
+          <a:p>
+            <a:r>
+              <a:t>Aim 3 splits into two GWAS tracks. 3.a is the trans-ancestry track: GRAF-anc first partitions the combined REDIAL + COG + St. Jude cohort into 4 ancestry groups (African-American, European-American, Latin American 1, Latin American 2), stratified SAIGE GWAS per group, then trans-ancestry meta-analysis at n≈5,357, followed by MGflashfm fine-mapping which handles multi-trait multi-ethnic LD differences. 3.b is the local-ancestry track: RFMix v1 (the exact tool this Aim 2 work is benchmarking) on the 1,660 self-reported Latino individuals, then Tractor to fit per-ancestry β for AMR, EUR, and AFR tracts jointly. Fine-mapping downstream uses SuSiE + PolyFun. The point of Aim 2 is to make sure the RFMix step in 3.b is using the best reference panel — HGDPMXB by our current data.</a:t>
+            </a:r>
+          </a:p>
+        </p:txBody>
+      </p:sp>
+      <p:sp>
+        <p:nvSpPr>
+          <p:cNvPr id="4" name="Slide Number Placeholder 3"/>
+          <p:cNvSpPr>
+            <a:spLocks noGrp="1"/>
+          </p:cNvSpPr>
+          <p:nvPr>
+            <p:ph type="sldNum" idx="5" sz="quarter"/>
+          </p:nvPr>
+        </p:nvSpPr>
+        <p:spPr/>
+      </p:sp>
+    </p:spTree>
+  </p:cSld>
+  <p:clrMapOvr>
+    <a:masterClrMapping/>
+  </p:clrMapOvr>
+</p:notes>
+</file>
+
+<file path=ppt/notesSlides/notesSlide11.xml><?xml version="1.0" encoding="utf-8"?>
+<p:notes xmlns:a="http://schemas.openxmlformats.org/drawingml/2006/main" xmlns:p="http://schemas.openxmlformats.org/presentationml/2006/main" xmlns:r="http://schemas.openxmlformats.org/officeDocument/2006/relationships">
+  <p:cSld>
+    <p:spTree>
+      <p:nvGrpSpPr>
+        <p:cNvPr id="1" name=""/>
+        <p:cNvGrpSpPr/>
+        <p:nvPr/>
+      </p:nvGrpSpPr>
+      <p:grpSpPr>
+        <a:xfrm>
+          <a:off x="0" y="0"/>
+          <a:ext cx="0" cy="0"/>
+          <a:chOff x="0" y="0"/>
+          <a:chExt cx="0" cy="0"/>
+        </a:xfrm>
+      </p:grpSpPr>
+      <p:sp>
+        <p:nvSpPr>
+          <p:cNvPr id="2" name="Slide Image Placeholder 1"/>
+          <p:cNvSpPr>
+            <a:spLocks noGrp="1"/>
+          </p:cNvSpPr>
+          <p:nvPr>
+            <p:ph type="sldImg" idx="2"/>
+          </p:nvPr>
+        </p:nvSpPr>
+        <p:spPr/>
+      </p:sp>
+      <p:sp>
+        <p:nvSpPr>
+          <p:cNvPr id="3" name="Notes Placeholder 2"/>
+          <p:cNvSpPr>
+            <a:spLocks noGrp="1"/>
+          </p:cNvSpPr>
+          <p:nvPr>
+            <p:ph type="body" idx="3" sz="quarter"/>
+          </p:nvPr>
+        </p:nvSpPr>
+        <p:spPr/>
+        <p:txBody>
+          <a:bodyPr/>
+          <a:lstStyle/>
+          <a:p>
+            <a:r>
+              <a:t>Timeline broken down by aim. Aim 1 wraps this quarter with the REDIAL manuscript. Aim 2 finishes the 22-chr LAI sweep this month (currently 126/198 done on the WGS side, backfill queued for HOMOG / PEL_EAS panels and full chip-density coverage), then benchmarks the Nextflow pipeline on all three imputation servers (TOPMed, Michigan, AoU AnVIL) through end of 2026. Pipeline manuscript targets Q1 2027. Aim 3 sequences behind Aim 2 — GRAF-anc + PCs in the fall, SAIGE + fine-mapping over winter, then Tractor local-ancestry GWAS in spring 2027 (which needs Aim 2's reference panel decision locked in). Thesis writing spring 2027, defense July 2027.</a:t>
+            </a:r>
+          </a:p>
+        </p:txBody>
+      </p:sp>
+      <p:sp>
+        <p:nvSpPr>
+          <p:cNvPr id="4" name="Slide Number Placeholder 3"/>
+          <p:cNvSpPr>
+            <a:spLocks noGrp="1"/>
+          </p:cNvSpPr>
+          <p:nvPr>
+            <p:ph type="sldNum" idx="5" sz="quarter"/>
+          </p:nvPr>
+        </p:nvSpPr>
+        <p:spPr/>
+      </p:sp>
+    </p:spTree>
+  </p:cSld>
+  <p:clrMapOvr>
+    <a:masterClrMapping/>
+  </p:clrMapOvr>
+</p:notes>
+</file>
+
+<file path=ppt/notesSlides/notesSlide12.xml><?xml version="1.0" encoding="utf-8"?>
+<p:notes xmlns:a="http://schemas.openxmlformats.org/drawingml/2006/main" xmlns:p="http://schemas.openxmlformats.org/presentationml/2006/main" xmlns:r="http://schemas.openxmlformats.org/officeDocument/2006/relationships">
+  <p:cSld>
+    <p:spTree>
+      <p:nvGrpSpPr>
+        <p:cNvPr id="1" name=""/>
+        <p:cNvGrpSpPr/>
+        <p:nvPr/>
+      </p:nvGrpSpPr>
+      <p:grpSpPr>
+        <a:xfrm>
+          <a:off x="0" y="0"/>
+          <a:ext cx="0" cy="0"/>
+          <a:chOff x="0" y="0"/>
+          <a:chExt cx="0" cy="0"/>
+        </a:xfrm>
+      </p:grpSpPr>
+      <p:sp>
+        <p:nvSpPr>
+          <p:cNvPr id="2" name="Slide Image Placeholder 1"/>
+          <p:cNvSpPr>
+            <a:spLocks noGrp="1"/>
+          </p:cNvSpPr>
+          <p:nvPr>
+            <p:ph type="sldImg" idx="2"/>
+          </p:nvPr>
+        </p:nvSpPr>
+        <p:spPr/>
+      </p:sp>
+      <p:sp>
+        <p:nvSpPr>
+          <p:cNvPr id="3" name="Notes Placeholder 2"/>
+          <p:cNvSpPr>
+            <a:spLocks noGrp="1"/>
+          </p:cNvSpPr>
+          <p:nvPr>
+            <p:ph type="body" idx="3" sz="quarter"/>
+          </p:nvPr>
+        </p:nvSpPr>
+        <p:spPr/>
+        <p:txBody>
+          <a:bodyPr/>
+          <a:lstStyle/>
+          <a:p>
+            <a:r>
+              <a:t>Standard acks — matches the Spring TAC deck acknowledgements slide. Ready for questions.</a:t>
+            </a:r>
+          </a:p>
+        </p:txBody>
+      </p:sp>
+      <p:sp>
+        <p:nvSpPr>
+          <p:cNvPr id="4" name="Slide Number Placeholder 3"/>
+          <p:cNvSpPr>
+            <a:spLocks noGrp="1"/>
+          </p:cNvSpPr>
+          <p:nvPr>
+            <p:ph type="sldNum" idx="5" sz="quarter"/>
+          </p:nvPr>
+        </p:nvSpPr>
+        <p:spPr/>
+      </p:sp>
+    </p:spTree>
+  </p:cSld>
+  <p:clrMapOvr>
+    <a:masterClrMapping/>
+  </p:clrMapOvr>
+</p:notes>
+</file>
+
 <file path=ppt/notesSlides/notesSlide2.xml><?xml version="1.0" encoding="utf-8"?>
 <p:notes xmlns:a="http://schemas.openxmlformats.org/drawingml/2006/main" xmlns:p="http://schemas.openxmlformats.org/presentationml/2006/main" xmlns:r="http://schemas.openxmlformats.org/officeDocument/2006/relationships">
   <p:cSld>
@@ -578,7 +793,7 @@
           <a:lstStyle/>
           <a:p>
             <a:r>
-              <a:t>The gap slide. Public HGDP+1KG panels give us ~620 EUR haps, ~634 AFR, ~667 EAS, but only ~88 AMR — a 7× disparity. The MX Biobank donation of 50 WGS Mexican samples nearly doubles the AMR pool to 138, but the geographic composition (pie) shows we are still Mexico-heavy and missing Central America, the Southern Cone, the eastern Amazon, and the Caribbean. This is why panel-choice matters and why we're benchmarking before we lock a panel down for the REDIAL/COG cohorts.</a:t>
+              <a:t>The three-aim structure hasn't changed since the Spring TAC. Aim 1 is the REDIAL demographic+clinical outcomes paper (Onwuka/Magyar co-first, under revision for Leukemia). Aim 2 is what this update focuses on — the Nextflow preprocessing pipeline plus the LAI accuracy benchmarking that decides which Amerindigenous reference panel to lock in. Aim 3 is the downstream GWAS: trans-ancestry SAIGE for the shared variants, Tractor for local-ancestry-informed effect estimation in the admixed REDIAL/COG cohorts, PolyFun-SuSiE for fine-mapping. Aim 2 numbers coming today directly feed Aim 3's panel choice.</a:t>
             </a:r>
           </a:p>
         </p:txBody>
@@ -648,7 +863,13 @@
           <a:lstStyle/>
           <a:p>
             <a:r>
-              <a:t>Simulation harness: SHAPEIT5-phased references feed admix-simu to create 30 admixed individuals per cohort at generation 12 (long enough for chromosome-scale tracts to be resolvable). RFMix v1 TrioPhased mode matches Honorato-Mauer 2025. Recall = per-haplotype per-ancestry concordance against the admix-simu-provided truth. We ran 6 candidate reference panels crossed with 2 simulated cohort tracks (Brazilian-like and Mexican-like) to see whether the best panel depends on the target cohort's own ancestry composition.</a:t>
+              <a:t>Aim 1 recap. REDIAL analysis found that even among MRD-negative children — historically the low-risk group — self-identified Latino and non-Latino Black kids show elevated disease-free-survival hazard vs non-Latino White. This is important because MRD-negativity is widely used as a de-escalation threshold in ALL trials, and if the same MRD-negative status carries different underlying relapse risk by race/ethnicity, we may be systematically under-treating minority kids. Motivates Aim 2/3: find the biological substrate. Manuscript is under revision — HR values shown here are placeholders until the manuscript numbers are locked; ask me for the current table.</a:t>
+            </a:r>
+          </a:p>
+          <a:p/>
+          <a:p>
+            <a:r>
+              <a:t>STATUS: reviewed and updated primary analysis; first draft of manuscript with figures/tables/supplemental complete; co-author review; target submission May 2026.</a:t>
             </a:r>
           </a:p>
         </p:txBody>
@@ -718,7 +939,7 @@
           <a:lstStyle/>
           <a:p>
             <a:r>
-              <a:t>Overview slide before we zoom in. Three ancestries side by side, same panels, same y-scale. EUR and AFR sit near ceiling regardless of which AMR reference we pick — those calls are easy because the EUR and AFR reference pools are already large and diverse. AMR is the ancestry that moves: ~3% swing across panel choice on the Mexican-like cohort. Motivates zooming in on AMR in the next slide.</a:t>
+              <a:t>The gap slide. Public HGDP+1KG panels give us ~620 EUR haps, ~634 AFR, ~667 EAS, but only ~88 AMR — a 7× disparity. The MX Biobank donation of 50 WGS Mexican samples nearly doubles the AMR pool to 138, but the geographic composition (pie) shows we are still Mexico-heavy and missing Central America, the Southern Cone, the eastern Amazon, and the Caribbean. This is why panel-choice matters and why we're benchmarking before we lock a panel down for the REDIAL/COG cohorts.</a:t>
             </a:r>
           </a:p>
         </p:txBody>
@@ -788,53 +1009,7 @@
           <a:lstStyle/>
           <a:p>
             <a:r>
-              <a:t>HEADLINE RESULT. Extended pilot numbers (chr 1-8 + 20-22 for the 4 full-coverage panels; chr20-22 only for HOMOG and PEL_EAS — flagged with *). On the Mexican-like cohort (NATMXB track, teal): +25 MXB lifts NAT recall from 0.954 → 0.958 and F1 from 0.969 → 0.974 (cleanest single winner). On the Brazilian-like cohort (NAT track, orange): +25 MXB costs ~1% NAT recall (0.930 → 0.920) but bumps precision (0.981 → 0.990), so F1 is roughly flat. +50 MXB (HGDPMXB_FULL) costs more recall (0.902) with only marginal F1 benefit — 25 MXB is the sweet spot. PEL matches or beats HGDP on the Brazilian cohort. NAT_HOMOG (Q≥0.95 filter, donor-safe) performs comparably to HGDPMXB in the 3-chr subset we have — worth re-running with full coverage. Punchline: adding MXB is a clear win for a Mexican-cohort GWAS; matched-source reference (PEL for Brazilian) matters more than panel size.</a:t>
-            </a:r>
-          </a:p>
-          <a:p/>
-          <a:p>
-            <a:r>
-              <a:t>──────── METRICS CHEAT SHEET ────────</a:t>
-            </a:r>
-          </a:p>
-          <a:p>
-            <a:r>
-              <a:t>• TP / FP / FN: sites where called ancestry matches truth (TP), calls were wrong-class (FP), or truth was this class but we missed (FN). TN is ignored — this is a small-positive-class setting.</a:t>
-            </a:r>
-          </a:p>
-          <a:p>
-            <a:r>
-              <a:t>• Recall = Sensitivity = TPR = TP / (TP + FN). Of all true NAT sites, how many we recovered. Currently plotted on the hero bars.</a:t>
-            </a:r>
-          </a:p>
-          <a:p>
-            <a:r>
-              <a:t>• Precision = PPV = TP / (TP + FP). Of the sites we CALLED NAT, how many were actually NAT. Guards against over-calling.</a:t>
-            </a:r>
-          </a:p>
-          <a:p>
-            <a:r>
-              <a:t>• F1 = 2·P·R / (P + R). Harmonic mean of precision and recall — the class-imbalance-robust summary. NOT the same as balanced accuracy (which uses specificity); F1 ignores TN by design.</a:t>
-            </a:r>
-          </a:p>
-          <a:p>
-            <a:r>
-              <a:t>• Weighted (in these tables): concordance / recall / precision are weighted by (n_haps × n_sites) per chromosome so long chromosomes and larger haplotype counts contribute more.</a:t>
-            </a:r>
-          </a:p>
-          <a:p>
-            <a:r>
-              <a:t>• Concordance in these tables (== weighted_recall in current R impl) is per-site agreement to truth, per ancestry, one-vs-rest.</a:t>
-            </a:r>
-          </a:p>
-          <a:p>
-            <a:r>
-              <a:t>• SE: standard error of the per-chromosome mean (not a bootstrap CI).</a:t>
-            </a:r>
-          </a:p>
-          <a:p>
-            <a:r>
-              <a:t>Publication table with all three metrics is committed to results/tables/publication_table_amr.tsv and rendered to slides/tables/publication_table_amr.png.</a:t>
+              <a:t>Simulation harness: SHAPEIT5-phased references feed admix-simu to create 30 admixed individuals per cohort at generation 12 (long enough for chromosome-scale tracts to be resolvable). RFMix v1 TrioPhased mode matches Honorato-Mauer 2025. Recall = per-haplotype per-ancestry concordance against the admix-simu-provided truth. We ran 6 candidate reference panels crossed with 2 simulated cohort tracks (Brazilian-like and Mexican-like) to see whether the best panel depends on the target cohort's own ancestry composition.</a:t>
             </a:r>
           </a:p>
         </p:txBody>
@@ -904,7 +1079,7 @@
           <a:lstStyle/>
           <a:p>
             <a:r>
-              <a:t>Complementary result. Same reference panels, but the admixed cohort's haplotypes were down-sampled to the ~385k autosomal Illumina GSA v3 positions before calling. NAT recall drops by only ~0.7-1.2% across panels — the panel ranking is preserved and the direction of every effect matches WGS. This matters because our REDIAL/COG cohorts are chip-genotyped, not WGS — so the WGS result generalizes. Michigan/1KG imputation is the post-committee validation step; today we can already recommend HGDPMXB (+25 MXB) for the Mexican-Latino LAI pipeline. NAT_HOMOG is a donor-safe backup that performs equivalently.</a:t>
+              <a:t>Overview slide before we zoom in. Three ancestries side by side, same panels, same y-scale. EUR and AFR sit near ceiling regardless of which AMR reference we pick — those calls are easy because the EUR and AFR reference pools are already large and diverse. AMR is the ancestry that moves: ~3% swing across panel choice on the Mexican-like cohort. Motivates zooming in on AMR in the next slide.</a:t>
             </a:r>
           </a:p>
         </p:txBody>
@@ -930,6 +1105,192 @@
 </file>
 
 <file path=ppt/notesSlides/notesSlide7.xml><?xml version="1.0" encoding="utf-8"?>
+<p:notes xmlns:a="http://schemas.openxmlformats.org/drawingml/2006/main" xmlns:p="http://schemas.openxmlformats.org/presentationml/2006/main" xmlns:r="http://schemas.openxmlformats.org/officeDocument/2006/relationships">
+  <p:cSld>
+    <p:spTree>
+      <p:nvGrpSpPr>
+        <p:cNvPr id="1" name=""/>
+        <p:cNvGrpSpPr/>
+        <p:nvPr/>
+      </p:nvGrpSpPr>
+      <p:grpSpPr>
+        <a:xfrm>
+          <a:off x="0" y="0"/>
+          <a:ext cx="0" cy="0"/>
+          <a:chOff x="0" y="0"/>
+          <a:chExt cx="0" cy="0"/>
+        </a:xfrm>
+      </p:grpSpPr>
+      <p:sp>
+        <p:nvSpPr>
+          <p:cNvPr id="2" name="Slide Image Placeholder 1"/>
+          <p:cNvSpPr>
+            <a:spLocks noGrp="1"/>
+          </p:cNvSpPr>
+          <p:nvPr>
+            <p:ph type="sldImg" idx="2"/>
+          </p:nvPr>
+        </p:nvSpPr>
+        <p:spPr/>
+      </p:sp>
+      <p:sp>
+        <p:nvSpPr>
+          <p:cNvPr id="3" name="Notes Placeholder 2"/>
+          <p:cNvSpPr>
+            <a:spLocks noGrp="1"/>
+          </p:cNvSpPr>
+          <p:nvPr>
+            <p:ph type="body" idx="3" sz="quarter"/>
+          </p:nvPr>
+        </p:nvSpPr>
+        <p:spPr/>
+        <p:txBody>
+          <a:bodyPr/>
+          <a:lstStyle/>
+          <a:p>
+            <a:r>
+              <a:t>HEADLINE RESULT. Extended pilot numbers (chr 1-8 + 20-22 for the 4 full-coverage panels; chr20-22 only for HOMOG and PEL_EAS — flagged with *). On the Mexican-like cohort (NATMXB track, teal): +25 MXB lifts NAT recall from 0.954 → 0.958 and F1 from 0.969 → 0.974 (cleanest single winner). On the Brazilian-like cohort (NAT track, orange): +25 MXB costs ~1% NAT recall (0.930 → 0.920) but bumps precision (0.981 → 0.990), so F1 is roughly flat. +50 MXB (HGDPMXB_FULL) costs more recall (0.902) with only marginal F1 benefit — 25 MXB is the sweet spot. PEL matches or beats HGDP on the Brazilian cohort. NAT_HOMOG (Q≥0.95 filter, donor-safe) performs comparably to HGDPMXB in the 3-chr subset we have — worth re-running with full coverage. Punchline: adding MXB is a clear win for a Mexican-cohort GWAS; matched-source reference (PEL for Brazilian) matters more than panel size.</a:t>
+            </a:r>
+          </a:p>
+          <a:p/>
+          <a:p>
+            <a:r>
+              <a:t>──────── METRICS CHEAT SHEET ────────</a:t>
+            </a:r>
+          </a:p>
+          <a:p>
+            <a:r>
+              <a:t>• TP / FP / FN: sites where called ancestry matches truth (TP), calls were wrong-class (FP), or truth was this class but we missed (FN). TN is ignored — this is a small-positive-class setting.</a:t>
+            </a:r>
+          </a:p>
+          <a:p>
+            <a:r>
+              <a:t>• Recall = Sensitivity = TPR = TP / (TP + FN). Of all true NAT sites, how many we recovered. Currently plotted on the hero bars.</a:t>
+            </a:r>
+          </a:p>
+          <a:p>
+            <a:r>
+              <a:t>• Precision = PPV = TP / (TP + FP). Of the sites we CALLED NAT, how many were actually NAT. Guards against over-calling.</a:t>
+            </a:r>
+          </a:p>
+          <a:p>
+            <a:r>
+              <a:t>• F1 = 2·P·R / (P + R). Harmonic mean of precision and recall — the class-imbalance-robust summary. NOT the same as balanced accuracy (which uses specificity); F1 ignores TN by design.</a:t>
+            </a:r>
+          </a:p>
+          <a:p>
+            <a:r>
+              <a:t>• Weighted (in these tables): concordance / recall / precision are weighted by (n_haps × n_sites) per chromosome so long chromosomes and larger haplotype counts contribute more.</a:t>
+            </a:r>
+          </a:p>
+          <a:p>
+            <a:r>
+              <a:t>• Concordance in these tables (== weighted_recall in current R impl) is per-site agreement to truth, per ancestry, one-vs-rest.</a:t>
+            </a:r>
+          </a:p>
+          <a:p>
+            <a:r>
+              <a:t>• SE: standard error of the per-chromosome mean (not a bootstrap CI).</a:t>
+            </a:r>
+          </a:p>
+          <a:p>
+            <a:r>
+              <a:t>Publication table with all three metrics is committed to results/tables/publication_table_amr.tsv and rendered to slides/tables/publication_table_amr.png.</a:t>
+            </a:r>
+          </a:p>
+        </p:txBody>
+      </p:sp>
+      <p:sp>
+        <p:nvSpPr>
+          <p:cNvPr id="4" name="Slide Number Placeholder 3"/>
+          <p:cNvSpPr>
+            <a:spLocks noGrp="1"/>
+          </p:cNvSpPr>
+          <p:nvPr>
+            <p:ph type="sldNum" idx="5" sz="quarter"/>
+          </p:nvPr>
+        </p:nvSpPr>
+        <p:spPr/>
+      </p:sp>
+    </p:spTree>
+  </p:cSld>
+  <p:clrMapOvr>
+    <a:masterClrMapping/>
+  </p:clrMapOvr>
+</p:notes>
+</file>
+
+<file path=ppt/notesSlides/notesSlide8.xml><?xml version="1.0" encoding="utf-8"?>
+<p:notes xmlns:a="http://schemas.openxmlformats.org/drawingml/2006/main" xmlns:p="http://schemas.openxmlformats.org/presentationml/2006/main" xmlns:r="http://schemas.openxmlformats.org/officeDocument/2006/relationships">
+  <p:cSld>
+    <p:spTree>
+      <p:nvGrpSpPr>
+        <p:cNvPr id="1" name=""/>
+        <p:cNvGrpSpPr/>
+        <p:nvPr/>
+      </p:nvGrpSpPr>
+      <p:grpSpPr>
+        <a:xfrm>
+          <a:off x="0" y="0"/>
+          <a:ext cx="0" cy="0"/>
+          <a:chOff x="0" y="0"/>
+          <a:chExt cx="0" cy="0"/>
+        </a:xfrm>
+      </p:grpSpPr>
+      <p:sp>
+        <p:nvSpPr>
+          <p:cNvPr id="2" name="Slide Image Placeholder 1"/>
+          <p:cNvSpPr>
+            <a:spLocks noGrp="1"/>
+          </p:cNvSpPr>
+          <p:nvPr>
+            <p:ph type="sldImg" idx="2"/>
+          </p:nvPr>
+        </p:nvSpPr>
+        <p:spPr/>
+      </p:sp>
+      <p:sp>
+        <p:nvSpPr>
+          <p:cNvPr id="3" name="Notes Placeholder 2"/>
+          <p:cNvSpPr>
+            <a:spLocks noGrp="1"/>
+          </p:cNvSpPr>
+          <p:nvPr>
+            <p:ph type="body" idx="3" sz="quarter"/>
+          </p:nvPr>
+        </p:nvSpPr>
+        <p:spPr/>
+        <p:txBody>
+          <a:bodyPr/>
+          <a:lstStyle/>
+          <a:p>
+            <a:r>
+              <a:t>Complementary result. Same reference panels, but the admixed cohort's haplotypes were down-sampled to the ~385k autosomal Illumina GSA v3 positions before calling. NAT recall drops by only ~0.7-1.2% across panels — the panel ranking is preserved and the direction of every effect matches WGS. This matters because our REDIAL/COG cohorts are chip-genotyped, not WGS — so the WGS result generalizes. Michigan/1KG imputation is the post-committee validation step; today we can already recommend HGDPMXB (+25 MXB) for the Mexican-Latino LAI pipeline. NAT_HOMOG is a donor-safe backup that performs equivalently.</a:t>
+            </a:r>
+          </a:p>
+        </p:txBody>
+      </p:sp>
+      <p:sp>
+        <p:nvSpPr>
+          <p:cNvPr id="4" name="Slide Number Placeholder 3"/>
+          <p:cNvSpPr>
+            <a:spLocks noGrp="1"/>
+          </p:cNvSpPr>
+          <p:nvPr>
+            <p:ph type="sldNum" idx="5" sz="quarter"/>
+          </p:nvPr>
+        </p:nvSpPr>
+        <p:spPr/>
+      </p:sp>
+    </p:spTree>
+  </p:cSld>
+  <p:clrMapOvr>
+    <a:masterClrMapping/>
+  </p:clrMapOvr>
+</p:notes>
+</file>
+
+<file path=ppt/notesSlides/notesSlide9.xml><?xml version="1.0" encoding="utf-8"?>
 <p:notes xmlns:a="http://schemas.openxmlformats.org/drawingml/2006/main" xmlns:p="http://schemas.openxmlformats.org/presentationml/2006/main" xmlns:r="http://schemas.openxmlformats.org/officeDocument/2006/relationships">
   <p:cSld>
     <p:spTree>
@@ -4052,7 +4413,7 @@
                   <a:srgbClr val="0E2841"/>
                 </a:solidFill>
               </a:rPr>
-              <a:t>Building an ancestry-informed genotype-preprocessing pipeline</a:t>
+              <a:t>Ancestry-informed analysis of germline genomic contributors</a:t>
             </a:r>
           </a:p>
           <a:p>
@@ -4063,7 +4424,7 @@
                   <a:srgbClr val="0E2841"/>
                 </a:solidFill>
               </a:rPr>
-              <a:t>and benchmarking local ancestry inference for Latino cohorts</a:t>
+              <a:t>to childhood B-ALL clinical outcomes</a:t>
             </a:r>
           </a:p>
         </p:txBody>
@@ -4097,7 +4458,7 @@
                   <a:srgbClr val="1A1A1A"/>
                 </a:solidFill>
               </a:rPr>
-              <a:t>Christina Magyar  ·  GS4 Thesis Committee Update</a:t>
+              <a:t>Christina Magyar  ·  GS4 Thesis Committee Update  ·  Aims 1–3</a:t>
             </a:r>
           </a:p>
         </p:txBody>
@@ -4211,6 +4572,2269 @@
                 </a:solidFill>
               </a:rPr>
               <a:t>Elizabeth Atkinson, PhD  (Local advisor)</a:t>
+            </a:r>
+          </a:p>
+        </p:txBody>
+      </p:sp>
+    </p:spTree>
+  </p:cSld>
+  <p:clrMapOvr>
+    <a:masterClrMapping/>
+  </p:clrMapOvr>
+</p:sld>
+</file>
+
+<file path=ppt/slides/slide10.xml><?xml version="1.0" encoding="utf-8"?>
+<p:sld xmlns:a="http://schemas.openxmlformats.org/drawingml/2006/main" xmlns:p="http://schemas.openxmlformats.org/presentationml/2006/main" xmlns:r="http://schemas.openxmlformats.org/officeDocument/2006/relationships">
+  <p:cSld>
+    <p:spTree>
+      <p:nvGrpSpPr>
+        <p:cNvPr id="1" name=""/>
+        <p:cNvGrpSpPr/>
+        <p:nvPr/>
+      </p:nvGrpSpPr>
+      <p:grpSpPr/>
+      <p:sp>
+        <p:nvSpPr>
+          <p:cNvPr id="2" name="TextBox 1"/>
+          <p:cNvSpPr txBox="1"/>
+          <p:nvPr/>
+        </p:nvSpPr>
+        <p:spPr>
+          <a:xfrm>
+            <a:off x="502920" y="292608"/>
+            <a:ext cx="11155680" cy="822960"/>
+          </a:xfrm>
+          <a:prstGeom prst="rect">
+            <a:avLst/>
+          </a:prstGeom>
+          <a:noFill/>
+        </p:spPr>
+        <p:txBody>
+          <a:bodyPr wrap="square">
+            <a:spAutoFit/>
+          </a:bodyPr>
+          <a:lstStyle/>
+          <a:p>
+            <a:r>
+              <a:rPr sz="2400" b="1">
+                <a:solidFill>
+                  <a:srgbClr val="0E2841"/>
+                </a:solidFill>
+              </a:rPr>
+              <a:t>Aim 3: trans-ancestry + local-ancestry-informed GWAS on ~5,400 B-ALL cases.</a:t>
+            </a:r>
+          </a:p>
+        </p:txBody>
+      </p:sp>
+      <p:sp>
+        <p:nvSpPr>
+          <p:cNvPr id="3" name="TextBox 2"/>
+          <p:cNvSpPr txBox="1"/>
+          <p:nvPr/>
+        </p:nvSpPr>
+        <p:spPr>
+          <a:xfrm>
+            <a:off x="502920" y="1051560"/>
+            <a:ext cx="11155680" cy="365760"/>
+          </a:xfrm>
+          <a:prstGeom prst="rect">
+            <a:avLst/>
+          </a:prstGeom>
+          <a:noFill/>
+        </p:spPr>
+        <p:txBody>
+          <a:bodyPr wrap="square" lIns="0" rIns="0" tIns="0" bIns="0">
+            <a:spAutoFit/>
+          </a:bodyPr>
+          <a:lstStyle/>
+          <a:p>
+            <a:pPr algn="l"/>
+            <a:r>
+              <a:rPr sz="1200" i="1" b="0">
+                <a:solidFill>
+                  <a:srgbClr val="666666"/>
+                </a:solidFill>
+              </a:rPr>
+              <a:t>Two parallel tracks: ancestry-stratified meta-analysis and Tractor local-ancestry GWAS</a:t>
+            </a:r>
+          </a:p>
+        </p:txBody>
+      </p:sp>
+      <p:sp>
+        <p:nvSpPr>
+          <p:cNvPr id="4" name="Rounded Rectangle 3"/>
+          <p:cNvSpPr/>
+          <p:nvPr/>
+        </p:nvSpPr>
+        <p:spPr>
+          <a:xfrm>
+            <a:off x="502920" y="1554480"/>
+            <a:ext cx="5349240" cy="4114800"/>
+          </a:xfrm>
+          <a:prstGeom prst="roundRect">
+            <a:avLst/>
+          </a:prstGeom>
+          <a:solidFill>
+            <a:srgbClr val="E8E8E8"/>
+          </a:solidFill>
+          <a:ln w="19050">
+            <a:solidFill>
+              <a:srgbClr val="156082"/>
+            </a:solidFill>
+          </a:ln>
+        </p:spPr>
+        <p:style>
+          <a:lnRef idx="1">
+            <a:schemeClr val="accent1"/>
+          </a:lnRef>
+          <a:fillRef idx="3">
+            <a:schemeClr val="accent1"/>
+          </a:fillRef>
+          <a:effectRef idx="2">
+            <a:schemeClr val="accent1"/>
+          </a:effectRef>
+          <a:fontRef idx="minor">
+            <a:schemeClr val="lt1"/>
+          </a:fontRef>
+        </p:style>
+        <p:txBody>
+          <a:bodyPr rtlCol="0" anchor="ctr"/>
+          <a:lstStyle/>
+          <a:p>
+            <a:pPr algn="ctr"/>
+          </a:p>
+        </p:txBody>
+      </p:sp>
+      <p:sp>
+        <p:nvSpPr>
+          <p:cNvPr id="5" name="TextBox 4"/>
+          <p:cNvSpPr txBox="1"/>
+          <p:nvPr/>
+        </p:nvSpPr>
+        <p:spPr>
+          <a:xfrm>
+            <a:off x="731520" y="1737360"/>
+            <a:ext cx="4892040" cy="457200"/>
+          </a:xfrm>
+          <a:prstGeom prst="rect">
+            <a:avLst/>
+          </a:prstGeom>
+          <a:noFill/>
+        </p:spPr>
+        <p:txBody>
+          <a:bodyPr wrap="square" lIns="0" rIns="0" tIns="0" bIns="0">
+            <a:spAutoFit/>
+          </a:bodyPr>
+          <a:lstStyle/>
+          <a:p>
+            <a:pPr algn="l"/>
+            <a:r>
+              <a:rPr sz="1500" i="0" b="1">
+                <a:solidFill>
+                  <a:srgbClr val="156082"/>
+                </a:solidFill>
+              </a:rPr>
+              <a:t>Aim 3.a  ·  Trans-ancestry</a:t>
+            </a:r>
+          </a:p>
+        </p:txBody>
+      </p:sp>
+      <p:sp>
+        <p:nvSpPr>
+          <p:cNvPr id="6" name="TextBox 5"/>
+          <p:cNvSpPr txBox="1"/>
+          <p:nvPr/>
+        </p:nvSpPr>
+        <p:spPr>
+          <a:xfrm>
+            <a:off x="731520" y="2377440"/>
+            <a:ext cx="4892040" cy="2560320"/>
+          </a:xfrm>
+          <a:prstGeom prst="rect">
+            <a:avLst/>
+          </a:prstGeom>
+          <a:noFill/>
+        </p:spPr>
+        <p:txBody>
+          <a:bodyPr wrap="square" lIns="0" rIns="0" tIns="0" bIns="0">
+            <a:spAutoFit/>
+          </a:bodyPr>
+          <a:lstStyle/>
+          <a:p>
+            <a:pPr algn="l"/>
+            <a:r>
+              <a:rPr sz="1200" i="0" b="0">
+                <a:solidFill>
+                  <a:srgbClr val="1A1A1A"/>
+                </a:solidFill>
+              </a:rPr>
+              <a:t>1.  GRAF-anc groups →  stratified SAIGE GWAS  (4 groups)</a:t>
+            </a:r>
+          </a:p>
+          <a:p>
+            <a:pPr algn="l"/>
+          </a:p>
+          <a:p>
+            <a:pPr algn="l"/>
+            <a:r>
+              <a:rPr sz="1200" i="0" b="0">
+                <a:solidFill>
+                  <a:srgbClr val="1A1A1A"/>
+                </a:solidFill>
+              </a:rPr>
+              <a:t>2.  Trans-ancestry meta-analysis  (n ≈ 5,357)</a:t>
+            </a:r>
+          </a:p>
+          <a:p>
+            <a:pPr algn="l"/>
+          </a:p>
+          <a:p>
+            <a:pPr algn="l"/>
+            <a:r>
+              <a:rPr sz="1200" i="0" b="0">
+                <a:solidFill>
+                  <a:srgbClr val="1A1A1A"/>
+                </a:solidFill>
+              </a:rPr>
+              <a:t>3.  Fine-mapping with MGflashfm  (multi-trait, multi-ethnic)</a:t>
+            </a:r>
+          </a:p>
+        </p:txBody>
+      </p:sp>
+      <p:sp>
+        <p:nvSpPr>
+          <p:cNvPr id="7" name="TextBox 6"/>
+          <p:cNvSpPr txBox="1"/>
+          <p:nvPr/>
+        </p:nvSpPr>
+        <p:spPr>
+          <a:xfrm>
+            <a:off x="731520" y="5029200"/>
+            <a:ext cx="4892040" cy="457200"/>
+          </a:xfrm>
+          <a:prstGeom prst="rect">
+            <a:avLst/>
+          </a:prstGeom>
+          <a:noFill/>
+        </p:spPr>
+        <p:txBody>
+          <a:bodyPr wrap="square" lIns="0" rIns="0" tIns="0" bIns="0">
+            <a:spAutoFit/>
+          </a:bodyPr>
+          <a:lstStyle/>
+          <a:p>
+            <a:pPr algn="l"/>
+            <a:r>
+              <a:rPr sz="1050" i="1" b="0">
+                <a:solidFill>
+                  <a:srgbClr val="666666"/>
+                </a:solidFill>
+              </a:rPr>
+              <a:t>Uses shared trans-ancestry effects across REDIAL + COG + St. Jude</a:t>
+            </a:r>
+          </a:p>
+        </p:txBody>
+      </p:sp>
+      <p:sp>
+        <p:nvSpPr>
+          <p:cNvPr id="8" name="Rounded Rectangle 7"/>
+          <p:cNvSpPr/>
+          <p:nvPr/>
+        </p:nvSpPr>
+        <p:spPr>
+          <a:xfrm>
+            <a:off x="6309360" y="1554480"/>
+            <a:ext cx="5349240" cy="4114800"/>
+          </a:xfrm>
+          <a:prstGeom prst="roundRect">
+            <a:avLst/>
+          </a:prstGeom>
+          <a:solidFill>
+            <a:srgbClr val="E8E8E8"/>
+          </a:solidFill>
+          <a:ln w="19050">
+            <a:solidFill>
+              <a:srgbClr val="E97132"/>
+            </a:solidFill>
+          </a:ln>
+        </p:spPr>
+        <p:style>
+          <a:lnRef idx="1">
+            <a:schemeClr val="accent1"/>
+          </a:lnRef>
+          <a:fillRef idx="3">
+            <a:schemeClr val="accent1"/>
+          </a:fillRef>
+          <a:effectRef idx="2">
+            <a:schemeClr val="accent1"/>
+          </a:effectRef>
+          <a:fontRef idx="minor">
+            <a:schemeClr val="lt1"/>
+          </a:fontRef>
+        </p:style>
+        <p:txBody>
+          <a:bodyPr rtlCol="0" anchor="ctr"/>
+          <a:lstStyle/>
+          <a:p>
+            <a:pPr algn="ctr"/>
+          </a:p>
+        </p:txBody>
+      </p:sp>
+      <p:sp>
+        <p:nvSpPr>
+          <p:cNvPr id="9" name="TextBox 8"/>
+          <p:cNvSpPr txBox="1"/>
+          <p:nvPr/>
+        </p:nvSpPr>
+        <p:spPr>
+          <a:xfrm>
+            <a:off x="6537960" y="1737360"/>
+            <a:ext cx="4892040" cy="457200"/>
+          </a:xfrm>
+          <a:prstGeom prst="rect">
+            <a:avLst/>
+          </a:prstGeom>
+          <a:noFill/>
+        </p:spPr>
+        <p:txBody>
+          <a:bodyPr wrap="square" lIns="0" rIns="0" tIns="0" bIns="0">
+            <a:spAutoFit/>
+          </a:bodyPr>
+          <a:lstStyle/>
+          <a:p>
+            <a:pPr algn="l"/>
+            <a:r>
+              <a:rPr sz="1500" i="0" b="1">
+                <a:solidFill>
+                  <a:srgbClr val="E97132"/>
+                </a:solidFill>
+              </a:rPr>
+              <a:t>Aim 3.b  ·  Local-ancestry-informed</a:t>
+            </a:r>
+          </a:p>
+        </p:txBody>
+      </p:sp>
+      <p:sp>
+        <p:nvSpPr>
+          <p:cNvPr id="10" name="TextBox 9"/>
+          <p:cNvSpPr txBox="1"/>
+          <p:nvPr/>
+        </p:nvSpPr>
+        <p:spPr>
+          <a:xfrm>
+            <a:off x="6537960" y="2377440"/>
+            <a:ext cx="4892040" cy="2560320"/>
+          </a:xfrm>
+          <a:prstGeom prst="rect">
+            <a:avLst/>
+          </a:prstGeom>
+          <a:noFill/>
+        </p:spPr>
+        <p:txBody>
+          <a:bodyPr wrap="square" lIns="0" rIns="0" tIns="0" bIns="0">
+            <a:spAutoFit/>
+          </a:bodyPr>
+          <a:lstStyle/>
+          <a:p>
+            <a:pPr algn="l"/>
+            <a:r>
+              <a:rPr sz="1200" i="0" b="0">
+                <a:solidFill>
+                  <a:srgbClr val="1A1A1A"/>
+                </a:solidFill>
+              </a:rPr>
+              <a:t>1.  RFMix v1 on 1,660 Latin American individuals</a:t>
+            </a:r>
+          </a:p>
+          <a:p>
+            <a:pPr algn="l"/>
+          </a:p>
+          <a:p>
+            <a:pPr algn="l"/>
+            <a:r>
+              <a:rPr sz="1200" i="0" b="0">
+                <a:solidFill>
+                  <a:srgbClr val="1A1A1A"/>
+                </a:solidFill>
+              </a:rPr>
+              <a:t>2.  Tractor GWAS  →  per-ancestry β for AMR / EUR / AFR</a:t>
+            </a:r>
+          </a:p>
+          <a:p>
+            <a:pPr algn="l"/>
+          </a:p>
+          <a:p>
+            <a:pPr algn="l"/>
+            <a:r>
+              <a:rPr sz="1200" i="0" b="0">
+                <a:solidFill>
+                  <a:srgbClr val="1A1A1A"/>
+                </a:solidFill>
+              </a:rPr>
+              <a:t>3.  Functionally-prioritized fine-mapping (SuSiE + PolyFun)</a:t>
+            </a:r>
+          </a:p>
+        </p:txBody>
+      </p:sp>
+      <p:sp>
+        <p:nvSpPr>
+          <p:cNvPr id="11" name="TextBox 10"/>
+          <p:cNvSpPr txBox="1"/>
+          <p:nvPr/>
+        </p:nvSpPr>
+        <p:spPr>
+          <a:xfrm>
+            <a:off x="6537960" y="5029200"/>
+            <a:ext cx="4892040" cy="457200"/>
+          </a:xfrm>
+          <a:prstGeom prst="rect">
+            <a:avLst/>
+          </a:prstGeom>
+          <a:noFill/>
+        </p:spPr>
+        <p:txBody>
+          <a:bodyPr wrap="square" lIns="0" rIns="0" tIns="0" bIns="0">
+            <a:spAutoFit/>
+          </a:bodyPr>
+          <a:lstStyle/>
+          <a:p>
+            <a:pPr algn="l"/>
+            <a:r>
+              <a:rPr sz="1050" i="1" b="0">
+                <a:solidFill>
+                  <a:srgbClr val="666666"/>
+                </a:solidFill>
+              </a:rPr>
+              <a:t>Detects Amerindigenous-enriched risk variants missed by global-ancestry GWAS</a:t>
+            </a:r>
+          </a:p>
+        </p:txBody>
+      </p:sp>
+      <p:sp>
+        <p:nvSpPr>
+          <p:cNvPr id="12" name="TextBox 11"/>
+          <p:cNvSpPr txBox="1"/>
+          <p:nvPr/>
+        </p:nvSpPr>
+        <p:spPr>
+          <a:xfrm>
+            <a:off x="502920" y="5852160"/>
+            <a:ext cx="11155680" cy="320040"/>
+          </a:xfrm>
+          <a:prstGeom prst="rect">
+            <a:avLst/>
+          </a:prstGeom>
+          <a:noFill/>
+        </p:spPr>
+        <p:txBody>
+          <a:bodyPr wrap="square" lIns="0" rIns="0" tIns="0" bIns="0">
+            <a:spAutoFit/>
+          </a:bodyPr>
+          <a:lstStyle/>
+          <a:p>
+            <a:pPr algn="ctr"/>
+            <a:r>
+              <a:rPr sz="1150" i="1" b="0">
+                <a:solidFill>
+                  <a:srgbClr val="1A1A1A"/>
+                </a:solidFill>
+              </a:rPr>
+              <a:t>Aim 2's LAI-accuracy work directly picks the reference panel used by Aim 3.b's RFMix step.</a:t>
+            </a:r>
+          </a:p>
+        </p:txBody>
+      </p:sp>
+      <p:sp>
+        <p:nvSpPr>
+          <p:cNvPr id="13" name="TextBox 12"/>
+          <p:cNvSpPr txBox="1"/>
+          <p:nvPr/>
+        </p:nvSpPr>
+        <p:spPr>
+          <a:xfrm>
+            <a:off x="502920" y="6537960"/>
+            <a:ext cx="7315200" cy="274320"/>
+          </a:xfrm>
+          <a:prstGeom prst="rect">
+            <a:avLst/>
+          </a:prstGeom>
+          <a:noFill/>
+        </p:spPr>
+        <p:txBody>
+          <a:bodyPr wrap="square" lIns="0" rIns="0" tIns="0" bIns="0">
+            <a:spAutoFit/>
+          </a:bodyPr>
+          <a:lstStyle/>
+          <a:p>
+            <a:pPr algn="l"/>
+            <a:r>
+              <a:rPr sz="900" i="0" b="0">
+                <a:solidFill>
+                  <a:srgbClr val="666666"/>
+                </a:solidFill>
+              </a:rPr>
+              <a:t>Christina Magyar  ·  Thesis committee, Aug 2026  ·  Aim 3 · methods</a:t>
+            </a:r>
+          </a:p>
+        </p:txBody>
+      </p:sp>
+      <p:sp>
+        <p:nvSpPr>
+          <p:cNvPr id="14" name="TextBox 13"/>
+          <p:cNvSpPr txBox="1"/>
+          <p:nvPr/>
+        </p:nvSpPr>
+        <p:spPr>
+          <a:xfrm>
+            <a:off x="11338560" y="6537960"/>
+            <a:ext cx="548640" cy="274320"/>
+          </a:xfrm>
+          <a:prstGeom prst="rect">
+            <a:avLst/>
+          </a:prstGeom>
+          <a:noFill/>
+        </p:spPr>
+        <p:txBody>
+          <a:bodyPr wrap="square" lIns="0" rIns="0" tIns="0" bIns="0">
+            <a:spAutoFit/>
+          </a:bodyPr>
+          <a:lstStyle/>
+          <a:p>
+            <a:pPr algn="r"/>
+            <a:r>
+              <a:rPr sz="900" i="0" b="0">
+                <a:solidFill>
+                  <a:srgbClr val="666666"/>
+                </a:solidFill>
+              </a:rPr>
+              <a:t>10 / 12</a:t>
+            </a:r>
+          </a:p>
+        </p:txBody>
+      </p:sp>
+    </p:spTree>
+  </p:cSld>
+  <p:clrMapOvr>
+    <a:masterClrMapping/>
+  </p:clrMapOvr>
+</p:sld>
+</file>
+
+<file path=ppt/slides/slide11.xml><?xml version="1.0" encoding="utf-8"?>
+<p:sld xmlns:a="http://schemas.openxmlformats.org/drawingml/2006/main" xmlns:p="http://schemas.openxmlformats.org/presentationml/2006/main" xmlns:r="http://schemas.openxmlformats.org/officeDocument/2006/relationships">
+  <p:cSld>
+    <p:spTree>
+      <p:nvGrpSpPr>
+        <p:cNvPr id="1" name=""/>
+        <p:cNvGrpSpPr/>
+        <p:nvPr/>
+      </p:nvGrpSpPr>
+      <p:grpSpPr/>
+      <p:sp>
+        <p:nvSpPr>
+          <p:cNvPr id="2" name="TextBox 1"/>
+          <p:cNvSpPr txBox="1"/>
+          <p:nvPr/>
+        </p:nvSpPr>
+        <p:spPr>
+          <a:xfrm>
+            <a:off x="502920" y="292608"/>
+            <a:ext cx="11155680" cy="822960"/>
+          </a:xfrm>
+          <a:prstGeom prst="rect">
+            <a:avLst/>
+          </a:prstGeom>
+          <a:noFill/>
+        </p:spPr>
+        <p:txBody>
+          <a:bodyPr wrap="square">
+            <a:spAutoFit/>
+          </a:bodyPr>
+          <a:lstStyle/>
+          <a:p>
+            <a:r>
+              <a:rPr sz="2400" b="1">
+                <a:solidFill>
+                  <a:srgbClr val="0E2841"/>
+                </a:solidFill>
+              </a:rPr>
+              <a:t>Timeline to graduation — July 2027 target.</a:t>
+            </a:r>
+          </a:p>
+        </p:txBody>
+      </p:sp>
+      <p:sp>
+        <p:nvSpPr>
+          <p:cNvPr id="3" name="Rounded Rectangle 2"/>
+          <p:cNvSpPr/>
+          <p:nvPr/>
+        </p:nvSpPr>
+        <p:spPr>
+          <a:xfrm>
+            <a:off x="502920" y="1417320"/>
+            <a:ext cx="868680" cy="411480"/>
+          </a:xfrm>
+          <a:prstGeom prst="roundRect">
+            <a:avLst/>
+          </a:prstGeom>
+          <a:solidFill>
+            <a:srgbClr val="E97132"/>
+          </a:solidFill>
+          <a:ln>
+            <a:noFill/>
+          </a:ln>
+        </p:spPr>
+        <p:style>
+          <a:lnRef idx="1">
+            <a:schemeClr val="accent1"/>
+          </a:lnRef>
+          <a:fillRef idx="3">
+            <a:schemeClr val="accent1"/>
+          </a:fillRef>
+          <a:effectRef idx="2">
+            <a:schemeClr val="accent1"/>
+          </a:effectRef>
+          <a:fontRef idx="minor">
+            <a:schemeClr val="lt1"/>
+          </a:fontRef>
+        </p:style>
+        <p:txBody>
+          <a:bodyPr rtlCol="0" anchor="ctr" tIns="0" bIns="0"/>
+          <a:lstStyle/>
+          <a:p>
+            <a:pPr algn="ctr"/>
+            <a:r>
+              <a:rPr sz="1100" b="1">
+                <a:solidFill>
+                  <a:srgbClr val="FFFFFF"/>
+                </a:solidFill>
+              </a:rPr>
+              <a:t>Aim 1</a:t>
+            </a:r>
+          </a:p>
+        </p:txBody>
+      </p:sp>
+      <p:sp>
+        <p:nvSpPr>
+          <p:cNvPr id="4" name="TextBox 3"/>
+          <p:cNvSpPr txBox="1"/>
+          <p:nvPr/>
+        </p:nvSpPr>
+        <p:spPr>
+          <a:xfrm>
+            <a:off x="1508760" y="1463040"/>
+            <a:ext cx="6949440" cy="475488"/>
+          </a:xfrm>
+          <a:prstGeom prst="rect">
+            <a:avLst/>
+          </a:prstGeom>
+          <a:noFill/>
+        </p:spPr>
+        <p:txBody>
+          <a:bodyPr wrap="square" lIns="0" rIns="0" tIns="0" bIns="0">
+            <a:spAutoFit/>
+          </a:bodyPr>
+          <a:lstStyle/>
+          <a:p>
+            <a:pPr algn="l"/>
+            <a:r>
+              <a:rPr sz="1200" i="0" b="0">
+                <a:solidFill>
+                  <a:srgbClr val="1A1A1A"/>
+                </a:solidFill>
+              </a:rPr>
+              <a:t>REDIAL manuscript revision + submission (Leukemia)</a:t>
+            </a:r>
+          </a:p>
+        </p:txBody>
+      </p:sp>
+      <p:sp>
+        <p:nvSpPr>
+          <p:cNvPr id="5" name="TextBox 4"/>
+          <p:cNvSpPr txBox="1"/>
+          <p:nvPr/>
+        </p:nvSpPr>
+        <p:spPr>
+          <a:xfrm>
+            <a:off x="8549640" y="1463040"/>
+            <a:ext cx="3291840" cy="475488"/>
+          </a:xfrm>
+          <a:prstGeom prst="rect">
+            <a:avLst/>
+          </a:prstGeom>
+          <a:noFill/>
+        </p:spPr>
+        <p:txBody>
+          <a:bodyPr wrap="square" lIns="0" rIns="0" tIns="0" bIns="0">
+            <a:spAutoFit/>
+          </a:bodyPr>
+          <a:lstStyle/>
+          <a:p>
+            <a:pPr algn="r"/>
+            <a:r>
+              <a:rPr sz="1200" i="0" b="1">
+                <a:solidFill>
+                  <a:srgbClr val="E97132"/>
+                </a:solidFill>
+              </a:rPr>
+              <a:t>Apr–Jun 2026</a:t>
+            </a:r>
+          </a:p>
+        </p:txBody>
+      </p:sp>
+      <p:sp>
+        <p:nvSpPr>
+          <p:cNvPr id="6" name="Rounded Rectangle 5"/>
+          <p:cNvSpPr/>
+          <p:nvPr/>
+        </p:nvSpPr>
+        <p:spPr>
+          <a:xfrm>
+            <a:off x="502920" y="1892808"/>
+            <a:ext cx="868680" cy="411480"/>
+          </a:xfrm>
+          <a:prstGeom prst="roundRect">
+            <a:avLst/>
+          </a:prstGeom>
+          <a:solidFill>
+            <a:srgbClr val="156082"/>
+          </a:solidFill>
+          <a:ln>
+            <a:noFill/>
+          </a:ln>
+        </p:spPr>
+        <p:style>
+          <a:lnRef idx="1">
+            <a:schemeClr val="accent1"/>
+          </a:lnRef>
+          <a:fillRef idx="3">
+            <a:schemeClr val="accent1"/>
+          </a:fillRef>
+          <a:effectRef idx="2">
+            <a:schemeClr val="accent1"/>
+          </a:effectRef>
+          <a:fontRef idx="minor">
+            <a:schemeClr val="lt1"/>
+          </a:fontRef>
+        </p:style>
+        <p:txBody>
+          <a:bodyPr rtlCol="0" anchor="ctr" tIns="0" bIns="0"/>
+          <a:lstStyle/>
+          <a:p>
+            <a:pPr algn="ctr"/>
+            <a:r>
+              <a:rPr sz="1100" b="1">
+                <a:solidFill>
+                  <a:srgbClr val="FFFFFF"/>
+                </a:solidFill>
+              </a:rPr>
+              <a:t>Aim 2</a:t>
+            </a:r>
+          </a:p>
+        </p:txBody>
+      </p:sp>
+      <p:sp>
+        <p:nvSpPr>
+          <p:cNvPr id="7" name="TextBox 6"/>
+          <p:cNvSpPr txBox="1"/>
+          <p:nvPr/>
+        </p:nvSpPr>
+        <p:spPr>
+          <a:xfrm>
+            <a:off x="1508760" y="1938528"/>
+            <a:ext cx="6949440" cy="475488"/>
+          </a:xfrm>
+          <a:prstGeom prst="rect">
+            <a:avLst/>
+          </a:prstGeom>
+          <a:noFill/>
+        </p:spPr>
+        <p:txBody>
+          <a:bodyPr wrap="square" lIns="0" rIns="0" tIns="0" bIns="0">
+            <a:spAutoFit/>
+          </a:bodyPr>
+          <a:lstStyle/>
+          <a:p>
+            <a:pPr algn="l"/>
+            <a:r>
+              <a:rPr sz="1200" i="0" b="0">
+                <a:solidFill>
+                  <a:srgbClr val="1A1A1A"/>
+                </a:solidFill>
+              </a:rPr>
+              <a:t>22-chr LAI sweep + full-coverage figures</a:t>
+            </a:r>
+          </a:p>
+        </p:txBody>
+      </p:sp>
+      <p:sp>
+        <p:nvSpPr>
+          <p:cNvPr id="8" name="TextBox 7"/>
+          <p:cNvSpPr txBox="1"/>
+          <p:nvPr/>
+        </p:nvSpPr>
+        <p:spPr>
+          <a:xfrm>
+            <a:off x="8549640" y="1938528"/>
+            <a:ext cx="3291840" cy="475488"/>
+          </a:xfrm>
+          <a:prstGeom prst="rect">
+            <a:avLst/>
+          </a:prstGeom>
+          <a:noFill/>
+        </p:spPr>
+        <p:txBody>
+          <a:bodyPr wrap="square" lIns="0" rIns="0" tIns="0" bIns="0">
+            <a:spAutoFit/>
+          </a:bodyPr>
+          <a:lstStyle/>
+          <a:p>
+            <a:pPr algn="r"/>
+            <a:r>
+              <a:rPr sz="1200" i="0" b="1">
+                <a:solidFill>
+                  <a:srgbClr val="156082"/>
+                </a:solidFill>
+              </a:rPr>
+              <a:t>Aug 2026</a:t>
+            </a:r>
+          </a:p>
+        </p:txBody>
+      </p:sp>
+      <p:sp>
+        <p:nvSpPr>
+          <p:cNvPr id="9" name="Rounded Rectangle 8"/>
+          <p:cNvSpPr/>
+          <p:nvPr/>
+        </p:nvSpPr>
+        <p:spPr>
+          <a:xfrm>
+            <a:off x="502920" y="2368296"/>
+            <a:ext cx="868680" cy="411480"/>
+          </a:xfrm>
+          <a:prstGeom prst="roundRect">
+            <a:avLst/>
+          </a:prstGeom>
+          <a:solidFill>
+            <a:srgbClr val="156082"/>
+          </a:solidFill>
+          <a:ln>
+            <a:noFill/>
+          </a:ln>
+        </p:spPr>
+        <p:style>
+          <a:lnRef idx="1">
+            <a:schemeClr val="accent1"/>
+          </a:lnRef>
+          <a:fillRef idx="3">
+            <a:schemeClr val="accent1"/>
+          </a:fillRef>
+          <a:effectRef idx="2">
+            <a:schemeClr val="accent1"/>
+          </a:effectRef>
+          <a:fontRef idx="minor">
+            <a:schemeClr val="lt1"/>
+          </a:fontRef>
+        </p:style>
+        <p:txBody>
+          <a:bodyPr rtlCol="0" anchor="ctr" tIns="0" bIns="0"/>
+          <a:lstStyle/>
+          <a:p>
+            <a:pPr algn="ctr"/>
+            <a:r>
+              <a:rPr sz="1100" b="1">
+                <a:solidFill>
+                  <a:srgbClr val="FFFFFF"/>
+                </a:solidFill>
+              </a:rPr>
+              <a:t>Aim 2</a:t>
+            </a:r>
+          </a:p>
+        </p:txBody>
+      </p:sp>
+      <p:sp>
+        <p:nvSpPr>
+          <p:cNvPr id="10" name="TextBox 9"/>
+          <p:cNvSpPr txBox="1"/>
+          <p:nvPr/>
+        </p:nvSpPr>
+        <p:spPr>
+          <a:xfrm>
+            <a:off x="1508760" y="2414016"/>
+            <a:ext cx="6949440" cy="475488"/>
+          </a:xfrm>
+          <a:prstGeom prst="rect">
+            <a:avLst/>
+          </a:prstGeom>
+          <a:noFill/>
+        </p:spPr>
+        <p:txBody>
+          <a:bodyPr wrap="square" lIns="0" rIns="0" tIns="0" bIns="0">
+            <a:spAutoFit/>
+          </a:bodyPr>
+          <a:lstStyle/>
+          <a:p>
+            <a:pPr algn="l"/>
+            <a:r>
+              <a:rPr sz="1200" i="0" b="0">
+                <a:solidFill>
+                  <a:srgbClr val="1A1A1A"/>
+                </a:solidFill>
+              </a:rPr>
+              <a:t>Nextflow pipeline benchmarking on TOPMed / Michigan / AoU</a:t>
+            </a:r>
+          </a:p>
+        </p:txBody>
+      </p:sp>
+      <p:sp>
+        <p:nvSpPr>
+          <p:cNvPr id="11" name="TextBox 10"/>
+          <p:cNvSpPr txBox="1"/>
+          <p:nvPr/>
+        </p:nvSpPr>
+        <p:spPr>
+          <a:xfrm>
+            <a:off x="8549640" y="2414016"/>
+            <a:ext cx="3291840" cy="475488"/>
+          </a:xfrm>
+          <a:prstGeom prst="rect">
+            <a:avLst/>
+          </a:prstGeom>
+          <a:noFill/>
+        </p:spPr>
+        <p:txBody>
+          <a:bodyPr wrap="square" lIns="0" rIns="0" tIns="0" bIns="0">
+            <a:spAutoFit/>
+          </a:bodyPr>
+          <a:lstStyle/>
+          <a:p>
+            <a:pPr algn="r"/>
+            <a:r>
+              <a:rPr sz="1200" i="0" b="1">
+                <a:solidFill>
+                  <a:srgbClr val="156082"/>
+                </a:solidFill>
+              </a:rPr>
+              <a:t>Sep–Dec 2026</a:t>
+            </a:r>
+          </a:p>
+        </p:txBody>
+      </p:sp>
+      <p:sp>
+        <p:nvSpPr>
+          <p:cNvPr id="12" name="Rounded Rectangle 11"/>
+          <p:cNvSpPr/>
+          <p:nvPr/>
+        </p:nvSpPr>
+        <p:spPr>
+          <a:xfrm>
+            <a:off x="502920" y="2843784"/>
+            <a:ext cx="868680" cy="411480"/>
+          </a:xfrm>
+          <a:prstGeom prst="roundRect">
+            <a:avLst/>
+          </a:prstGeom>
+          <a:solidFill>
+            <a:srgbClr val="156082"/>
+          </a:solidFill>
+          <a:ln>
+            <a:noFill/>
+          </a:ln>
+        </p:spPr>
+        <p:style>
+          <a:lnRef idx="1">
+            <a:schemeClr val="accent1"/>
+          </a:lnRef>
+          <a:fillRef idx="3">
+            <a:schemeClr val="accent1"/>
+          </a:fillRef>
+          <a:effectRef idx="2">
+            <a:schemeClr val="accent1"/>
+          </a:effectRef>
+          <a:fontRef idx="minor">
+            <a:schemeClr val="lt1"/>
+          </a:fontRef>
+        </p:style>
+        <p:txBody>
+          <a:bodyPr rtlCol="0" anchor="ctr" tIns="0" bIns="0"/>
+          <a:lstStyle/>
+          <a:p>
+            <a:pPr algn="ctr"/>
+            <a:r>
+              <a:rPr sz="1100" b="1">
+                <a:solidFill>
+                  <a:srgbClr val="FFFFFF"/>
+                </a:solidFill>
+              </a:rPr>
+              <a:t>Aim 2</a:t>
+            </a:r>
+          </a:p>
+        </p:txBody>
+      </p:sp>
+      <p:sp>
+        <p:nvSpPr>
+          <p:cNvPr id="13" name="TextBox 12"/>
+          <p:cNvSpPr txBox="1"/>
+          <p:nvPr/>
+        </p:nvSpPr>
+        <p:spPr>
+          <a:xfrm>
+            <a:off x="1508760" y="2889504"/>
+            <a:ext cx="6949440" cy="475488"/>
+          </a:xfrm>
+          <a:prstGeom prst="rect">
+            <a:avLst/>
+          </a:prstGeom>
+          <a:noFill/>
+        </p:spPr>
+        <p:txBody>
+          <a:bodyPr wrap="square" lIns="0" rIns="0" tIns="0" bIns="0">
+            <a:spAutoFit/>
+          </a:bodyPr>
+          <a:lstStyle/>
+          <a:p>
+            <a:pPr algn="l"/>
+            <a:r>
+              <a:rPr sz="1200" i="0" b="0">
+                <a:solidFill>
+                  <a:srgbClr val="1A1A1A"/>
+                </a:solidFill>
+              </a:rPr>
+              <a:t>Pipeline manuscript drafting</a:t>
+            </a:r>
+          </a:p>
+        </p:txBody>
+      </p:sp>
+      <p:sp>
+        <p:nvSpPr>
+          <p:cNvPr id="14" name="TextBox 13"/>
+          <p:cNvSpPr txBox="1"/>
+          <p:nvPr/>
+        </p:nvSpPr>
+        <p:spPr>
+          <a:xfrm>
+            <a:off x="8549640" y="2889504"/>
+            <a:ext cx="3291840" cy="475488"/>
+          </a:xfrm>
+          <a:prstGeom prst="rect">
+            <a:avLst/>
+          </a:prstGeom>
+          <a:noFill/>
+        </p:spPr>
+        <p:txBody>
+          <a:bodyPr wrap="square" lIns="0" rIns="0" tIns="0" bIns="0">
+            <a:spAutoFit/>
+          </a:bodyPr>
+          <a:lstStyle/>
+          <a:p>
+            <a:pPr algn="r"/>
+            <a:r>
+              <a:rPr sz="1200" i="0" b="1">
+                <a:solidFill>
+                  <a:srgbClr val="156082"/>
+                </a:solidFill>
+              </a:rPr>
+              <a:t>Jan–Mar 2027</a:t>
+            </a:r>
+          </a:p>
+        </p:txBody>
+      </p:sp>
+      <p:sp>
+        <p:nvSpPr>
+          <p:cNvPr id="15" name="Rounded Rectangle 14"/>
+          <p:cNvSpPr/>
+          <p:nvPr/>
+        </p:nvSpPr>
+        <p:spPr>
+          <a:xfrm>
+            <a:off x="502920" y="3319272"/>
+            <a:ext cx="868680" cy="411480"/>
+          </a:xfrm>
+          <a:prstGeom prst="roundRect">
+            <a:avLst/>
+          </a:prstGeom>
+          <a:solidFill>
+            <a:srgbClr val="E97132"/>
+          </a:solidFill>
+          <a:ln>
+            <a:noFill/>
+          </a:ln>
+        </p:spPr>
+        <p:style>
+          <a:lnRef idx="1">
+            <a:schemeClr val="accent1"/>
+          </a:lnRef>
+          <a:fillRef idx="3">
+            <a:schemeClr val="accent1"/>
+          </a:fillRef>
+          <a:effectRef idx="2">
+            <a:schemeClr val="accent1"/>
+          </a:effectRef>
+          <a:fontRef idx="minor">
+            <a:schemeClr val="lt1"/>
+          </a:fontRef>
+        </p:style>
+        <p:txBody>
+          <a:bodyPr rtlCol="0" anchor="ctr" tIns="0" bIns="0"/>
+          <a:lstStyle/>
+          <a:p>
+            <a:pPr algn="ctr"/>
+            <a:r>
+              <a:rPr sz="1100" b="1">
+                <a:solidFill>
+                  <a:srgbClr val="FFFFFF"/>
+                </a:solidFill>
+              </a:rPr>
+              <a:t>Aim 3</a:t>
+            </a:r>
+          </a:p>
+        </p:txBody>
+      </p:sp>
+      <p:sp>
+        <p:nvSpPr>
+          <p:cNvPr id="16" name="TextBox 15"/>
+          <p:cNvSpPr txBox="1"/>
+          <p:nvPr/>
+        </p:nvSpPr>
+        <p:spPr>
+          <a:xfrm>
+            <a:off x="1508760" y="3364992"/>
+            <a:ext cx="6949440" cy="475488"/>
+          </a:xfrm>
+          <a:prstGeom prst="rect">
+            <a:avLst/>
+          </a:prstGeom>
+          <a:noFill/>
+        </p:spPr>
+        <p:txBody>
+          <a:bodyPr wrap="square" lIns="0" rIns="0" tIns="0" bIns="0">
+            <a:spAutoFit/>
+          </a:bodyPr>
+          <a:lstStyle/>
+          <a:p>
+            <a:pPr algn="l"/>
+            <a:r>
+              <a:rPr sz="1200" i="0" b="0">
+                <a:solidFill>
+                  <a:srgbClr val="1A1A1A"/>
+                </a:solidFill>
+              </a:rPr>
+              <a:t>GRAF-anc stratification + PC calculation</a:t>
+            </a:r>
+          </a:p>
+        </p:txBody>
+      </p:sp>
+      <p:sp>
+        <p:nvSpPr>
+          <p:cNvPr id="17" name="TextBox 16"/>
+          <p:cNvSpPr txBox="1"/>
+          <p:nvPr/>
+        </p:nvSpPr>
+        <p:spPr>
+          <a:xfrm>
+            <a:off x="8549640" y="3364992"/>
+            <a:ext cx="3291840" cy="475488"/>
+          </a:xfrm>
+          <a:prstGeom prst="rect">
+            <a:avLst/>
+          </a:prstGeom>
+          <a:noFill/>
+        </p:spPr>
+        <p:txBody>
+          <a:bodyPr wrap="square" lIns="0" rIns="0" tIns="0" bIns="0">
+            <a:spAutoFit/>
+          </a:bodyPr>
+          <a:lstStyle/>
+          <a:p>
+            <a:pPr algn="r"/>
+            <a:r>
+              <a:rPr sz="1200" i="0" b="1">
+                <a:solidFill>
+                  <a:srgbClr val="E97132"/>
+                </a:solidFill>
+              </a:rPr>
+              <a:t>Oct–Nov 2026</a:t>
+            </a:r>
+          </a:p>
+        </p:txBody>
+      </p:sp>
+      <p:sp>
+        <p:nvSpPr>
+          <p:cNvPr id="18" name="Rounded Rectangle 17"/>
+          <p:cNvSpPr/>
+          <p:nvPr/>
+        </p:nvSpPr>
+        <p:spPr>
+          <a:xfrm>
+            <a:off x="502920" y="3794760"/>
+            <a:ext cx="868680" cy="411480"/>
+          </a:xfrm>
+          <a:prstGeom prst="roundRect">
+            <a:avLst/>
+          </a:prstGeom>
+          <a:solidFill>
+            <a:srgbClr val="E97132"/>
+          </a:solidFill>
+          <a:ln>
+            <a:noFill/>
+          </a:ln>
+        </p:spPr>
+        <p:style>
+          <a:lnRef idx="1">
+            <a:schemeClr val="accent1"/>
+          </a:lnRef>
+          <a:fillRef idx="3">
+            <a:schemeClr val="accent1"/>
+          </a:fillRef>
+          <a:effectRef idx="2">
+            <a:schemeClr val="accent1"/>
+          </a:effectRef>
+          <a:fontRef idx="minor">
+            <a:schemeClr val="lt1"/>
+          </a:fontRef>
+        </p:style>
+        <p:txBody>
+          <a:bodyPr rtlCol="0" anchor="ctr" tIns="0" bIns="0"/>
+          <a:lstStyle/>
+          <a:p>
+            <a:pPr algn="ctr"/>
+            <a:r>
+              <a:rPr sz="1100" b="1">
+                <a:solidFill>
+                  <a:srgbClr val="FFFFFF"/>
+                </a:solidFill>
+              </a:rPr>
+              <a:t>Aim 3</a:t>
+            </a:r>
+          </a:p>
+        </p:txBody>
+      </p:sp>
+      <p:sp>
+        <p:nvSpPr>
+          <p:cNvPr id="19" name="TextBox 18"/>
+          <p:cNvSpPr txBox="1"/>
+          <p:nvPr/>
+        </p:nvSpPr>
+        <p:spPr>
+          <a:xfrm>
+            <a:off x="1508760" y="3840480"/>
+            <a:ext cx="6949440" cy="475488"/>
+          </a:xfrm>
+          <a:prstGeom prst="rect">
+            <a:avLst/>
+          </a:prstGeom>
+          <a:noFill/>
+        </p:spPr>
+        <p:txBody>
+          <a:bodyPr wrap="square" lIns="0" rIns="0" tIns="0" bIns="0">
+            <a:spAutoFit/>
+          </a:bodyPr>
+          <a:lstStyle/>
+          <a:p>
+            <a:pPr algn="l"/>
+            <a:r>
+              <a:rPr sz="1200" i="0" b="0">
+                <a:solidFill>
+                  <a:srgbClr val="1A1A1A"/>
+                </a:solidFill>
+              </a:rPr>
+              <a:t>SAIGE trans-ancestry GWAS + MGflashfm fine-mapping</a:t>
+            </a:r>
+          </a:p>
+        </p:txBody>
+      </p:sp>
+      <p:sp>
+        <p:nvSpPr>
+          <p:cNvPr id="20" name="TextBox 19"/>
+          <p:cNvSpPr txBox="1"/>
+          <p:nvPr/>
+        </p:nvSpPr>
+        <p:spPr>
+          <a:xfrm>
+            <a:off x="8549640" y="3840480"/>
+            <a:ext cx="3291840" cy="475488"/>
+          </a:xfrm>
+          <a:prstGeom prst="rect">
+            <a:avLst/>
+          </a:prstGeom>
+          <a:noFill/>
+        </p:spPr>
+        <p:txBody>
+          <a:bodyPr wrap="square" lIns="0" rIns="0" tIns="0" bIns="0">
+            <a:spAutoFit/>
+          </a:bodyPr>
+          <a:lstStyle/>
+          <a:p>
+            <a:pPr algn="r"/>
+            <a:r>
+              <a:rPr sz="1200" i="0" b="1">
+                <a:solidFill>
+                  <a:srgbClr val="E97132"/>
+                </a:solidFill>
+              </a:rPr>
+              <a:t>Dec 2026 – Feb 2027</a:t>
+            </a:r>
+          </a:p>
+        </p:txBody>
+      </p:sp>
+      <p:sp>
+        <p:nvSpPr>
+          <p:cNvPr id="21" name="Rounded Rectangle 20"/>
+          <p:cNvSpPr/>
+          <p:nvPr/>
+        </p:nvSpPr>
+        <p:spPr>
+          <a:xfrm>
+            <a:off x="502920" y="4270248"/>
+            <a:ext cx="868680" cy="411480"/>
+          </a:xfrm>
+          <a:prstGeom prst="roundRect">
+            <a:avLst/>
+          </a:prstGeom>
+          <a:solidFill>
+            <a:srgbClr val="E97132"/>
+          </a:solidFill>
+          <a:ln>
+            <a:noFill/>
+          </a:ln>
+        </p:spPr>
+        <p:style>
+          <a:lnRef idx="1">
+            <a:schemeClr val="accent1"/>
+          </a:lnRef>
+          <a:fillRef idx="3">
+            <a:schemeClr val="accent1"/>
+          </a:fillRef>
+          <a:effectRef idx="2">
+            <a:schemeClr val="accent1"/>
+          </a:effectRef>
+          <a:fontRef idx="minor">
+            <a:schemeClr val="lt1"/>
+          </a:fontRef>
+        </p:style>
+        <p:txBody>
+          <a:bodyPr rtlCol="0" anchor="ctr" tIns="0" bIns="0"/>
+          <a:lstStyle/>
+          <a:p>
+            <a:pPr algn="ctr"/>
+            <a:r>
+              <a:rPr sz="1100" b="1">
+                <a:solidFill>
+                  <a:srgbClr val="FFFFFF"/>
+                </a:solidFill>
+              </a:rPr>
+              <a:t>Aim 3</a:t>
+            </a:r>
+          </a:p>
+        </p:txBody>
+      </p:sp>
+      <p:sp>
+        <p:nvSpPr>
+          <p:cNvPr id="22" name="TextBox 21"/>
+          <p:cNvSpPr txBox="1"/>
+          <p:nvPr/>
+        </p:nvSpPr>
+        <p:spPr>
+          <a:xfrm>
+            <a:off x="1508760" y="4315968"/>
+            <a:ext cx="6949440" cy="475488"/>
+          </a:xfrm>
+          <a:prstGeom prst="rect">
+            <a:avLst/>
+          </a:prstGeom>
+          <a:noFill/>
+        </p:spPr>
+        <p:txBody>
+          <a:bodyPr wrap="square" lIns="0" rIns="0" tIns="0" bIns="0">
+            <a:spAutoFit/>
+          </a:bodyPr>
+          <a:lstStyle/>
+          <a:p>
+            <a:pPr algn="l"/>
+            <a:r>
+              <a:rPr sz="1200" i="0" b="0">
+                <a:solidFill>
+                  <a:srgbClr val="1A1A1A"/>
+                </a:solidFill>
+              </a:rPr>
+              <a:t>RFMix + Tractor local-ancestry GWAS on REDIAL/COG</a:t>
+            </a:r>
+          </a:p>
+        </p:txBody>
+      </p:sp>
+      <p:sp>
+        <p:nvSpPr>
+          <p:cNvPr id="23" name="TextBox 22"/>
+          <p:cNvSpPr txBox="1"/>
+          <p:nvPr/>
+        </p:nvSpPr>
+        <p:spPr>
+          <a:xfrm>
+            <a:off x="8549640" y="4315968"/>
+            <a:ext cx="3291840" cy="475488"/>
+          </a:xfrm>
+          <a:prstGeom prst="rect">
+            <a:avLst/>
+          </a:prstGeom>
+          <a:noFill/>
+        </p:spPr>
+        <p:txBody>
+          <a:bodyPr wrap="square" lIns="0" rIns="0" tIns="0" bIns="0">
+            <a:spAutoFit/>
+          </a:bodyPr>
+          <a:lstStyle/>
+          <a:p>
+            <a:pPr algn="r"/>
+            <a:r>
+              <a:rPr sz="1200" i="0" b="1">
+                <a:solidFill>
+                  <a:srgbClr val="E97132"/>
+                </a:solidFill>
+              </a:rPr>
+              <a:t>Feb – Apr 2027</a:t>
+            </a:r>
+          </a:p>
+        </p:txBody>
+      </p:sp>
+      <p:sp>
+        <p:nvSpPr>
+          <p:cNvPr id="24" name="Rounded Rectangle 23"/>
+          <p:cNvSpPr/>
+          <p:nvPr/>
+        </p:nvSpPr>
+        <p:spPr>
+          <a:xfrm>
+            <a:off x="502920" y="4745736"/>
+            <a:ext cx="868680" cy="411480"/>
+          </a:xfrm>
+          <a:prstGeom prst="roundRect">
+            <a:avLst/>
+          </a:prstGeom>
+          <a:solidFill>
+            <a:srgbClr val="E97132"/>
+          </a:solidFill>
+          <a:ln>
+            <a:noFill/>
+          </a:ln>
+        </p:spPr>
+        <p:style>
+          <a:lnRef idx="1">
+            <a:schemeClr val="accent1"/>
+          </a:lnRef>
+          <a:fillRef idx="3">
+            <a:schemeClr val="accent1"/>
+          </a:fillRef>
+          <a:effectRef idx="2">
+            <a:schemeClr val="accent1"/>
+          </a:effectRef>
+          <a:fontRef idx="minor">
+            <a:schemeClr val="lt1"/>
+          </a:fontRef>
+        </p:style>
+        <p:txBody>
+          <a:bodyPr rtlCol="0" anchor="ctr" tIns="0" bIns="0"/>
+          <a:lstStyle/>
+          <a:p>
+            <a:pPr algn="ctr"/>
+            <a:r>
+              <a:rPr sz="1100" b="1">
+                <a:solidFill>
+                  <a:srgbClr val="FFFFFF"/>
+                </a:solidFill>
+              </a:rPr>
+              <a:t>Aim 3</a:t>
+            </a:r>
+          </a:p>
+        </p:txBody>
+      </p:sp>
+      <p:sp>
+        <p:nvSpPr>
+          <p:cNvPr id="25" name="TextBox 24"/>
+          <p:cNvSpPr txBox="1"/>
+          <p:nvPr/>
+        </p:nvSpPr>
+        <p:spPr>
+          <a:xfrm>
+            <a:off x="1508760" y="4791455"/>
+            <a:ext cx="6949440" cy="475488"/>
+          </a:xfrm>
+          <a:prstGeom prst="rect">
+            <a:avLst/>
+          </a:prstGeom>
+          <a:noFill/>
+        </p:spPr>
+        <p:txBody>
+          <a:bodyPr wrap="square" lIns="0" rIns="0" tIns="0" bIns="0">
+            <a:spAutoFit/>
+          </a:bodyPr>
+          <a:lstStyle/>
+          <a:p>
+            <a:pPr algn="l"/>
+            <a:r>
+              <a:rPr sz="1200" i="0" b="0">
+                <a:solidFill>
+                  <a:srgbClr val="1A1A1A"/>
+                </a:solidFill>
+              </a:rPr>
+              <a:t>PolyFun-SuSiE fine-mapping + candidate follow-up</a:t>
+            </a:r>
+          </a:p>
+        </p:txBody>
+      </p:sp>
+      <p:sp>
+        <p:nvSpPr>
+          <p:cNvPr id="26" name="TextBox 25"/>
+          <p:cNvSpPr txBox="1"/>
+          <p:nvPr/>
+        </p:nvSpPr>
+        <p:spPr>
+          <a:xfrm>
+            <a:off x="8549640" y="4791455"/>
+            <a:ext cx="3291840" cy="475488"/>
+          </a:xfrm>
+          <a:prstGeom prst="rect">
+            <a:avLst/>
+          </a:prstGeom>
+          <a:noFill/>
+        </p:spPr>
+        <p:txBody>
+          <a:bodyPr wrap="square" lIns="0" rIns="0" tIns="0" bIns="0">
+            <a:spAutoFit/>
+          </a:bodyPr>
+          <a:lstStyle/>
+          <a:p>
+            <a:pPr algn="r"/>
+            <a:r>
+              <a:rPr sz="1200" i="0" b="1">
+                <a:solidFill>
+                  <a:srgbClr val="E97132"/>
+                </a:solidFill>
+              </a:rPr>
+              <a:t>Apr – May 2027</a:t>
+            </a:r>
+          </a:p>
+        </p:txBody>
+      </p:sp>
+      <p:sp>
+        <p:nvSpPr>
+          <p:cNvPr id="27" name="Rounded Rectangle 26"/>
+          <p:cNvSpPr/>
+          <p:nvPr/>
+        </p:nvSpPr>
+        <p:spPr>
+          <a:xfrm>
+            <a:off x="502920" y="5221223"/>
+            <a:ext cx="868680" cy="411480"/>
+          </a:xfrm>
+          <a:prstGeom prst="roundRect">
+            <a:avLst/>
+          </a:prstGeom>
+          <a:solidFill>
+            <a:srgbClr val="0E2841"/>
+          </a:solidFill>
+          <a:ln>
+            <a:noFill/>
+          </a:ln>
+        </p:spPr>
+        <p:style>
+          <a:lnRef idx="1">
+            <a:schemeClr val="accent1"/>
+          </a:lnRef>
+          <a:fillRef idx="3">
+            <a:schemeClr val="accent1"/>
+          </a:fillRef>
+          <a:effectRef idx="2">
+            <a:schemeClr val="accent1"/>
+          </a:effectRef>
+          <a:fontRef idx="minor">
+            <a:schemeClr val="lt1"/>
+          </a:fontRef>
+        </p:style>
+        <p:txBody>
+          <a:bodyPr rtlCol="0" anchor="ctr" tIns="0" bIns="0"/>
+          <a:lstStyle/>
+          <a:p>
+            <a:pPr algn="ctr"/>
+            <a:r>
+              <a:rPr sz="1100" b="1">
+                <a:solidFill>
+                  <a:srgbClr val="FFFFFF"/>
+                </a:solidFill>
+              </a:rPr>
+              <a:t>All</a:t>
+            </a:r>
+          </a:p>
+        </p:txBody>
+      </p:sp>
+      <p:sp>
+        <p:nvSpPr>
+          <p:cNvPr id="28" name="TextBox 27"/>
+          <p:cNvSpPr txBox="1"/>
+          <p:nvPr/>
+        </p:nvSpPr>
+        <p:spPr>
+          <a:xfrm>
+            <a:off x="1508760" y="5266943"/>
+            <a:ext cx="6949440" cy="475488"/>
+          </a:xfrm>
+          <a:prstGeom prst="rect">
+            <a:avLst/>
+          </a:prstGeom>
+          <a:noFill/>
+        </p:spPr>
+        <p:txBody>
+          <a:bodyPr wrap="square" lIns="0" rIns="0" tIns="0" bIns="0">
+            <a:spAutoFit/>
+          </a:bodyPr>
+          <a:lstStyle/>
+          <a:p>
+            <a:pPr algn="l"/>
+            <a:r>
+              <a:rPr sz="1200" i="0" b="0">
+                <a:solidFill>
+                  <a:srgbClr val="1A1A1A"/>
+                </a:solidFill>
+              </a:rPr>
+              <a:t>Thesis writing + defense</a:t>
+            </a:r>
+          </a:p>
+        </p:txBody>
+      </p:sp>
+      <p:sp>
+        <p:nvSpPr>
+          <p:cNvPr id="29" name="TextBox 28"/>
+          <p:cNvSpPr txBox="1"/>
+          <p:nvPr/>
+        </p:nvSpPr>
+        <p:spPr>
+          <a:xfrm>
+            <a:off x="8549640" y="5266943"/>
+            <a:ext cx="3291840" cy="475488"/>
+          </a:xfrm>
+          <a:prstGeom prst="rect">
+            <a:avLst/>
+          </a:prstGeom>
+          <a:noFill/>
+        </p:spPr>
+        <p:txBody>
+          <a:bodyPr wrap="square" lIns="0" rIns="0" tIns="0" bIns="0">
+            <a:spAutoFit/>
+          </a:bodyPr>
+          <a:lstStyle/>
+          <a:p>
+            <a:pPr algn="r"/>
+            <a:r>
+              <a:rPr sz="1200" i="0" b="1">
+                <a:solidFill>
+                  <a:srgbClr val="0E2841"/>
+                </a:solidFill>
+              </a:rPr>
+              <a:t>May – Jul 2027</a:t>
+            </a:r>
+          </a:p>
+        </p:txBody>
+      </p:sp>
+      <p:sp>
+        <p:nvSpPr>
+          <p:cNvPr id="30" name="TextBox 29"/>
+          <p:cNvSpPr txBox="1"/>
+          <p:nvPr/>
+        </p:nvSpPr>
+        <p:spPr>
+          <a:xfrm>
+            <a:off x="502920" y="6537960"/>
+            <a:ext cx="7315200" cy="274320"/>
+          </a:xfrm>
+          <a:prstGeom prst="rect">
+            <a:avLst/>
+          </a:prstGeom>
+          <a:noFill/>
+        </p:spPr>
+        <p:txBody>
+          <a:bodyPr wrap="square" lIns="0" rIns="0" tIns="0" bIns="0">
+            <a:spAutoFit/>
+          </a:bodyPr>
+          <a:lstStyle/>
+          <a:p>
+            <a:pPr algn="l"/>
+            <a:r>
+              <a:rPr sz="900" i="0" b="0">
+                <a:solidFill>
+                  <a:srgbClr val="666666"/>
+                </a:solidFill>
+              </a:rPr>
+              <a:t>Christina Magyar  ·  Thesis committee, Aug 2026  ·  Timeline</a:t>
+            </a:r>
+          </a:p>
+        </p:txBody>
+      </p:sp>
+      <p:sp>
+        <p:nvSpPr>
+          <p:cNvPr id="31" name="TextBox 30"/>
+          <p:cNvSpPr txBox="1"/>
+          <p:nvPr/>
+        </p:nvSpPr>
+        <p:spPr>
+          <a:xfrm>
+            <a:off x="11338560" y="6537960"/>
+            <a:ext cx="548640" cy="274320"/>
+          </a:xfrm>
+          <a:prstGeom prst="rect">
+            <a:avLst/>
+          </a:prstGeom>
+          <a:noFill/>
+        </p:spPr>
+        <p:txBody>
+          <a:bodyPr wrap="square" lIns="0" rIns="0" tIns="0" bIns="0">
+            <a:spAutoFit/>
+          </a:bodyPr>
+          <a:lstStyle/>
+          <a:p>
+            <a:pPr algn="r"/>
+            <a:r>
+              <a:rPr sz="900" i="0" b="0">
+                <a:solidFill>
+                  <a:srgbClr val="666666"/>
+                </a:solidFill>
+              </a:rPr>
+              <a:t>11 / 12</a:t>
+            </a:r>
+          </a:p>
+        </p:txBody>
+      </p:sp>
+    </p:spTree>
+  </p:cSld>
+  <p:clrMapOvr>
+    <a:masterClrMapping/>
+  </p:clrMapOvr>
+</p:sld>
+</file>
+
+<file path=ppt/slides/slide12.xml><?xml version="1.0" encoding="utf-8"?>
+<p:sld xmlns:a="http://schemas.openxmlformats.org/drawingml/2006/main" xmlns:p="http://schemas.openxmlformats.org/presentationml/2006/main" xmlns:r="http://schemas.openxmlformats.org/officeDocument/2006/relationships">
+  <p:cSld>
+    <p:spTree>
+      <p:nvGrpSpPr>
+        <p:cNvPr id="1" name=""/>
+        <p:cNvGrpSpPr/>
+        <p:nvPr/>
+      </p:nvGrpSpPr>
+      <p:grpSpPr/>
+      <p:sp>
+        <p:nvSpPr>
+          <p:cNvPr id="2" name="TextBox 1"/>
+          <p:cNvSpPr txBox="1"/>
+          <p:nvPr/>
+        </p:nvSpPr>
+        <p:spPr>
+          <a:xfrm>
+            <a:off x="502920" y="292608"/>
+            <a:ext cx="11155680" cy="822960"/>
+          </a:xfrm>
+          <a:prstGeom prst="rect">
+            <a:avLst/>
+          </a:prstGeom>
+          <a:noFill/>
+        </p:spPr>
+        <p:txBody>
+          <a:bodyPr wrap="square">
+            <a:spAutoFit/>
+          </a:bodyPr>
+          <a:lstStyle/>
+          <a:p>
+            <a:r>
+              <a:rPr sz="2400" b="1">
+                <a:solidFill>
+                  <a:srgbClr val="0E2841"/>
+                </a:solidFill>
+              </a:rPr>
+              <a:t>Acknowledgements</a:t>
+            </a:r>
+          </a:p>
+        </p:txBody>
+      </p:sp>
+      <p:sp>
+        <p:nvSpPr>
+          <p:cNvPr id="3" name="TextBox 2"/>
+          <p:cNvSpPr txBox="1"/>
+          <p:nvPr/>
+        </p:nvSpPr>
+        <p:spPr>
+          <a:xfrm>
+            <a:off x="266547" y="1417320"/>
+            <a:ext cx="3794760" cy="457200"/>
+          </a:xfrm>
+          <a:prstGeom prst="rect">
+            <a:avLst/>
+          </a:prstGeom>
+          <a:noFill/>
+        </p:spPr>
+        <p:txBody>
+          <a:bodyPr wrap="square" lIns="0" rIns="0" tIns="0" bIns="0">
+            <a:spAutoFit/>
+          </a:bodyPr>
+          <a:lstStyle/>
+          <a:p>
+            <a:pPr algn="l"/>
+            <a:r>
+              <a:rPr sz="1300" i="0" b="1">
+                <a:solidFill>
+                  <a:srgbClr val="0E2841"/>
+                </a:solidFill>
+              </a:rPr>
+              <a:t>Lupo Lab &amp; TCH EpiCenter</a:t>
+            </a:r>
+          </a:p>
+        </p:txBody>
+      </p:sp>
+      <p:sp>
+        <p:nvSpPr>
+          <p:cNvPr id="4" name="TextBox 3"/>
+          <p:cNvSpPr txBox="1"/>
+          <p:nvPr/>
+        </p:nvSpPr>
+        <p:spPr>
+          <a:xfrm>
+            <a:off x="266547" y="1965960"/>
+            <a:ext cx="3794760" cy="4572000"/>
+          </a:xfrm>
+          <a:prstGeom prst="rect">
+            <a:avLst/>
+          </a:prstGeom>
+          <a:noFill/>
+        </p:spPr>
+        <p:txBody>
+          <a:bodyPr wrap="square" lIns="0" rIns="0" tIns="0" bIns="0">
+            <a:spAutoFit/>
+          </a:bodyPr>
+          <a:lstStyle/>
+          <a:p>
+            <a:pPr algn="l"/>
+            <a:r>
+              <a:rPr sz="1100" i="0" b="0">
+                <a:solidFill>
+                  <a:srgbClr val="1A1A1A"/>
+                </a:solidFill>
+              </a:rPr>
+              <a:t>Dr. Philip J. Lupo  (Emory, thesis advisor)</a:t>
+            </a:r>
+          </a:p>
+          <a:p>
+            <a:pPr algn="l"/>
+            <a:r>
+              <a:rPr sz="1100" i="0" b="0">
+                <a:solidFill>
+                  <a:srgbClr val="1A1A1A"/>
+                </a:solidFill>
+              </a:rPr>
+              <a:t>Dr. Karen Rabin  (UCSF)</a:t>
+            </a:r>
+          </a:p>
+          <a:p>
+            <a:pPr algn="l"/>
+            <a:r>
+              <a:rPr sz="1100" i="0" b="0">
+                <a:solidFill>
+                  <a:srgbClr val="1A1A1A"/>
+                </a:solidFill>
+              </a:rPr>
+              <a:t>Dr. Melissa A. Richard</a:t>
+            </a:r>
+          </a:p>
+          <a:p>
+            <a:pPr algn="l"/>
+            <a:r>
+              <a:rPr sz="1100" i="0" b="0">
+                <a:solidFill>
+                  <a:srgbClr val="1A1A1A"/>
+                </a:solidFill>
+              </a:rPr>
+              <a:t>Dr. Austin Brown</a:t>
+            </a:r>
+          </a:p>
+          <a:p>
+            <a:pPr algn="l"/>
+            <a:r>
+              <a:rPr sz="1100" i="0" b="0">
+                <a:solidFill>
+                  <a:srgbClr val="1A1A1A"/>
+                </a:solidFill>
+              </a:rPr>
+              <a:t>Dr. Jeremy Schraw</a:t>
+            </a:r>
+          </a:p>
+          <a:p>
+            <a:pPr algn="l"/>
+            <a:r>
+              <a:rPr sz="1100" i="0" b="0">
+                <a:solidFill>
+                  <a:srgbClr val="1A1A1A"/>
+                </a:solidFill>
+              </a:rPr>
+              <a:t>Dr. Michael Scheurer</a:t>
+            </a:r>
+          </a:p>
+        </p:txBody>
+      </p:sp>
+      <p:sp>
+        <p:nvSpPr>
+          <p:cNvPr id="5" name="TextBox 4"/>
+          <p:cNvSpPr txBox="1"/>
+          <p:nvPr/>
+        </p:nvSpPr>
+        <p:spPr>
+          <a:xfrm>
+            <a:off x="4198467" y="1417320"/>
+            <a:ext cx="3794760" cy="457200"/>
+          </a:xfrm>
+          <a:prstGeom prst="rect">
+            <a:avLst/>
+          </a:prstGeom>
+          <a:noFill/>
+        </p:spPr>
+        <p:txBody>
+          <a:bodyPr wrap="square" lIns="0" rIns="0" tIns="0" bIns="0">
+            <a:spAutoFit/>
+          </a:bodyPr>
+          <a:lstStyle/>
+          <a:p>
+            <a:pPr algn="l"/>
+            <a:r>
+              <a:rPr sz="1300" i="0" b="1">
+                <a:solidFill>
+                  <a:srgbClr val="0E2841"/>
+                </a:solidFill>
+              </a:rPr>
+              <a:t>Atkinson Lab  (BCM · local advisor)</a:t>
+            </a:r>
+          </a:p>
+        </p:txBody>
+      </p:sp>
+      <p:sp>
+        <p:nvSpPr>
+          <p:cNvPr id="6" name="TextBox 5"/>
+          <p:cNvSpPr txBox="1"/>
+          <p:nvPr/>
+        </p:nvSpPr>
+        <p:spPr>
+          <a:xfrm>
+            <a:off x="4198467" y="1965960"/>
+            <a:ext cx="3794760" cy="4572000"/>
+          </a:xfrm>
+          <a:prstGeom prst="rect">
+            <a:avLst/>
+          </a:prstGeom>
+          <a:noFill/>
+        </p:spPr>
+        <p:txBody>
+          <a:bodyPr wrap="square" lIns="0" rIns="0" tIns="0" bIns="0">
+            <a:spAutoFit/>
+          </a:bodyPr>
+          <a:lstStyle/>
+          <a:p>
+            <a:pPr algn="l"/>
+            <a:r>
+              <a:rPr sz="1100" i="0" b="0">
+                <a:solidFill>
+                  <a:srgbClr val="1A1A1A"/>
+                </a:solidFill>
+              </a:rPr>
+              <a:t>Dr. Elizabeth Atkinson  (local advisor)</a:t>
+            </a:r>
+          </a:p>
+          <a:p>
+            <a:pPr algn="l"/>
+            <a:r>
+              <a:rPr sz="1100" i="0" b="0">
+                <a:solidFill>
+                  <a:srgbClr val="1A1A1A"/>
+                </a:solidFill>
+              </a:rPr>
+              <a:t>Nirav Shah  ·  Jessica Honorato-Mauer</a:t>
+            </a:r>
+          </a:p>
+          <a:p>
+            <a:pPr algn="l"/>
+            <a:r>
+              <a:rPr sz="1100" i="0" b="0">
+                <a:solidFill>
+                  <a:srgbClr val="1A1A1A"/>
+                </a:solidFill>
+              </a:rPr>
+              <a:t>Grace Tietz  ·  Hatoon Al Ali</a:t>
+            </a:r>
+          </a:p>
+          <a:p>
+            <a:pPr algn="l"/>
+            <a:r>
+              <a:rPr sz="1100" i="0" b="0">
+                <a:solidFill>
+                  <a:srgbClr val="1A1A1A"/>
+                </a:solidFill>
+              </a:rPr>
+              <a:t>Helen Lin  ·  Pragati Kore</a:t>
+            </a:r>
+          </a:p>
+          <a:p>
+            <a:pPr algn="l"/>
+            <a:r>
+              <a:rPr sz="1100" i="0" b="0">
+                <a:solidFill>
+                  <a:srgbClr val="1A1A1A"/>
+                </a:solidFill>
+              </a:rPr>
+              <a:t>Erik Stricker  ·  Aishi Ayyanathan</a:t>
+            </a:r>
+          </a:p>
+          <a:p>
+            <a:pPr algn="l"/>
+            <a:r>
+              <a:rPr sz="1100" i="0" b="0">
+                <a:solidFill>
+                  <a:srgbClr val="1A1A1A"/>
+                </a:solidFill>
+              </a:rPr>
+              <a:t>Astrid Manuel  ·  Shalini Dhamodharan</a:t>
+            </a:r>
+          </a:p>
+        </p:txBody>
+      </p:sp>
+      <p:sp>
+        <p:nvSpPr>
+          <p:cNvPr id="7" name="TextBox 6"/>
+          <p:cNvSpPr txBox="1"/>
+          <p:nvPr/>
+        </p:nvSpPr>
+        <p:spPr>
+          <a:xfrm>
+            <a:off x="8130387" y="1417320"/>
+            <a:ext cx="3794760" cy="457200"/>
+          </a:xfrm>
+          <a:prstGeom prst="rect">
+            <a:avLst/>
+          </a:prstGeom>
+          <a:noFill/>
+        </p:spPr>
+        <p:txBody>
+          <a:bodyPr wrap="square" lIns="0" rIns="0" tIns="0" bIns="0">
+            <a:spAutoFit/>
+          </a:bodyPr>
+          <a:lstStyle/>
+          <a:p>
+            <a:pPr algn="l"/>
+            <a:r>
+              <a:rPr sz="1300" i="0" b="1">
+                <a:solidFill>
+                  <a:srgbClr val="0E2841"/>
+                </a:solidFill>
+              </a:rPr>
+              <a:t>Collaborators + funding</a:t>
+            </a:r>
+          </a:p>
+        </p:txBody>
+      </p:sp>
+      <p:sp>
+        <p:nvSpPr>
+          <p:cNvPr id="8" name="TextBox 7"/>
+          <p:cNvSpPr txBox="1"/>
+          <p:nvPr/>
+        </p:nvSpPr>
+        <p:spPr>
+          <a:xfrm>
+            <a:off x="8130387" y="1965960"/>
+            <a:ext cx="3794760" cy="4572000"/>
+          </a:xfrm>
+          <a:prstGeom prst="rect">
+            <a:avLst/>
+          </a:prstGeom>
+          <a:noFill/>
+        </p:spPr>
+        <p:txBody>
+          <a:bodyPr wrap="square" lIns="0" rIns="0" tIns="0" bIns="0">
+            <a:spAutoFit/>
+          </a:bodyPr>
+          <a:lstStyle/>
+          <a:p>
+            <a:pPr algn="l"/>
+            <a:r>
+              <a:rPr sz="1100" i="0" b="0">
+                <a:solidFill>
+                  <a:srgbClr val="1A1A1A"/>
+                </a:solidFill>
+              </a:rPr>
+              <a:t>St. Jude Children's Research Hospital</a:t>
+            </a:r>
+          </a:p>
+          <a:p>
+            <a:pPr algn="l"/>
+            <a:r>
+              <a:rPr sz="1100" i="0" b="0">
+                <a:solidFill>
+                  <a:srgbClr val="1A1A1A"/>
+                </a:solidFill>
+              </a:rPr>
+              <a:t>  Dr. Jun Yang, Zenhua Li</a:t>
+            </a:r>
+          </a:p>
+          <a:p>
+            <a:pPr algn="l"/>
+            <a:r>
+              <a:rPr sz="1100" i="0" b="0">
+                <a:solidFill>
+                  <a:srgbClr val="1A1A1A"/>
+                </a:solidFill>
+              </a:rPr>
+              <a:t>Children's Oncology Group</a:t>
+            </a:r>
+          </a:p>
+          <a:p>
+            <a:pPr algn="l"/>
+            <a:r>
+              <a:rPr sz="1100" i="0" b="0">
+                <a:solidFill>
+                  <a:srgbClr val="1A1A1A"/>
+                </a:solidFill>
+              </a:rPr>
+              <a:t>MX Biobank  (Dr. Andrés Moreno-Estrada)</a:t>
+            </a:r>
+          </a:p>
+          <a:p>
+            <a:pPr algn="l"/>
+          </a:p>
+          <a:p>
+            <a:pPr algn="l"/>
+            <a:r>
+              <a:rPr sz="1100" i="0" b="0">
+                <a:solidFill>
+                  <a:srgbClr val="1A1A1A"/>
+                </a:solidFill>
+              </a:rPr>
+              <a:t>AIM-AHEAD Consortium</a:t>
+            </a:r>
+          </a:p>
+          <a:p>
+            <a:pPr algn="l"/>
+            <a:r>
+              <a:rPr sz="1100" i="0" b="0">
+                <a:solidFill>
+                  <a:srgbClr val="1A1A1A"/>
+                </a:solidFill>
+              </a:rPr>
+              <a:t>Robert &amp; Janice McNair Foundation</a:t>
+            </a:r>
+          </a:p>
+          <a:p>
+            <a:pPr algn="l"/>
+            <a:r>
+              <a:rPr sz="1100" i="0" b="0">
+                <a:solidFill>
+                  <a:srgbClr val="1A1A1A"/>
+                </a:solidFill>
+              </a:rPr>
+              <a:t>BCM MSTP · G&amp;G Graduate Program</a:t>
+            </a:r>
+          </a:p>
+        </p:txBody>
+      </p:sp>
+      <p:sp>
+        <p:nvSpPr>
+          <p:cNvPr id="9" name="TextBox 8"/>
+          <p:cNvSpPr txBox="1"/>
+          <p:nvPr/>
+        </p:nvSpPr>
+        <p:spPr>
+          <a:xfrm>
+            <a:off x="502920" y="6263640"/>
+            <a:ext cx="11155680" cy="320040"/>
+          </a:xfrm>
+          <a:prstGeom prst="rect">
+            <a:avLst/>
+          </a:prstGeom>
+          <a:noFill/>
+        </p:spPr>
+        <p:txBody>
+          <a:bodyPr wrap="square" lIns="0" rIns="0" tIns="0" bIns="0">
+            <a:spAutoFit/>
+          </a:bodyPr>
+          <a:lstStyle/>
+          <a:p>
+            <a:pPr algn="ctr"/>
+            <a:r>
+              <a:rPr sz="1600" i="0" b="1">
+                <a:solidFill>
+                  <a:srgbClr val="0E2841"/>
+                </a:solidFill>
+              </a:rPr>
+              <a:t>Thank you — questions?</a:t>
+            </a:r>
+          </a:p>
+        </p:txBody>
+      </p:sp>
+      <p:sp>
+        <p:nvSpPr>
+          <p:cNvPr id="10" name="TextBox 9"/>
+          <p:cNvSpPr txBox="1"/>
+          <p:nvPr/>
+        </p:nvSpPr>
+        <p:spPr>
+          <a:xfrm>
+            <a:off x="502920" y="6537960"/>
+            <a:ext cx="7315200" cy="274320"/>
+          </a:xfrm>
+          <a:prstGeom prst="rect">
+            <a:avLst/>
+          </a:prstGeom>
+          <a:noFill/>
+        </p:spPr>
+        <p:txBody>
+          <a:bodyPr wrap="square" lIns="0" rIns="0" tIns="0" bIns="0">
+            <a:spAutoFit/>
+          </a:bodyPr>
+          <a:lstStyle/>
+          <a:p>
+            <a:pPr algn="l"/>
+            <a:r>
+              <a:rPr sz="900" i="0" b="0">
+                <a:solidFill>
+                  <a:srgbClr val="666666"/>
+                </a:solidFill>
+              </a:rPr>
+              <a:t>Christina Magyar  ·  Thesis committee, Aug 2026  ·  Acknowledgements</a:t>
+            </a:r>
+          </a:p>
+        </p:txBody>
+      </p:sp>
+      <p:sp>
+        <p:nvSpPr>
+          <p:cNvPr id="11" name="TextBox 10"/>
+          <p:cNvSpPr txBox="1"/>
+          <p:nvPr/>
+        </p:nvSpPr>
+        <p:spPr>
+          <a:xfrm>
+            <a:off x="11338560" y="6537960"/>
+            <a:ext cx="548640" cy="274320"/>
+          </a:xfrm>
+          <a:prstGeom prst="rect">
+            <a:avLst/>
+          </a:prstGeom>
+          <a:noFill/>
+        </p:spPr>
+        <p:txBody>
+          <a:bodyPr wrap="square" lIns="0" rIns="0" tIns="0" bIns="0">
+            <a:spAutoFit/>
+          </a:bodyPr>
+          <a:lstStyle/>
+          <a:p>
+            <a:pPr algn="r"/>
+            <a:r>
+              <a:rPr sz="900" i="0" b="0">
+                <a:solidFill>
+                  <a:srgbClr val="666666"/>
+                </a:solidFill>
+              </a:rPr>
+              <a:t>12 / 12</a:t>
             </a:r>
           </a:p>
         </p:txBody>
@@ -4261,21 +6885,66 @@
                   <a:srgbClr val="0E2841"/>
                 </a:solidFill>
               </a:rPr>
-              <a:t>Public Amerindigenous references are ~7× smaller than other continents.</a:t>
-            </a:r>
-          </a:p>
-        </p:txBody>
-      </p:sp>
-      <p:sp>
-        <p:nvSpPr>
-          <p:cNvPr id="3" name="TextBox 2"/>
+              <a:t>Three aims — this update focuses on Aim 2.</a:t>
+            </a:r>
+          </a:p>
+        </p:txBody>
+      </p:sp>
+      <p:sp>
+        <p:nvSpPr>
+          <p:cNvPr id="3" name="Rounded Rectangle 2"/>
+          <p:cNvSpPr/>
+          <p:nvPr/>
+        </p:nvSpPr>
+        <p:spPr>
+          <a:xfrm>
+            <a:off x="289407" y="1417320"/>
+            <a:ext cx="3657600" cy="4297680"/>
+          </a:xfrm>
+          <a:prstGeom prst="roundRect">
+            <a:avLst/>
+          </a:prstGeom>
+          <a:solidFill>
+            <a:srgbClr val="E8E8E8"/>
+          </a:solidFill>
+          <a:ln w="9525">
+            <a:solidFill>
+              <a:srgbClr val="666666"/>
+            </a:solidFill>
+          </a:ln>
+        </p:spPr>
+        <p:style>
+          <a:lnRef idx="1">
+            <a:schemeClr val="accent1"/>
+          </a:lnRef>
+          <a:fillRef idx="3">
+            <a:schemeClr val="accent1"/>
+          </a:fillRef>
+          <a:effectRef idx="2">
+            <a:schemeClr val="accent1"/>
+          </a:effectRef>
+          <a:fontRef idx="minor">
+            <a:schemeClr val="lt1"/>
+          </a:fontRef>
+        </p:style>
+        <p:txBody>
+          <a:bodyPr rtlCol="0" anchor="ctr"/>
+          <a:lstStyle/>
+          <a:p>
+            <a:pPr algn="ctr"/>
+          </a:p>
+        </p:txBody>
+      </p:sp>
+      <p:sp>
+        <p:nvSpPr>
+          <p:cNvPr id="4" name="TextBox 3"/>
           <p:cNvSpPr txBox="1"/>
           <p:nvPr/>
         </p:nvSpPr>
         <p:spPr>
           <a:xfrm>
-            <a:off x="502920" y="1051560"/>
-            <a:ext cx="11155680" cy="365760"/>
+            <a:off x="518007" y="1645920"/>
+            <a:ext cx="3200400" cy="457200"/>
           </a:xfrm>
           <a:prstGeom prst="rect">
             <a:avLst/>
@@ -4290,40 +6959,16 @@
           <a:p>
             <a:pPr algn="l"/>
             <a:r>
-              <a:rPr sz="1200" i="1" b="0">
+              <a:rPr sz="1800" i="0" b="1">
                 <a:solidFill>
                   <a:srgbClr val="666666"/>
                 </a:solidFill>
               </a:rPr>
-              <a:t>HGDP + 1000 Genomes reference haplotypes, by continental group</a:t>
-            </a:r>
-          </a:p>
-        </p:txBody>
-      </p:sp>
-      <p:pic>
-        <p:nvPicPr>
-          <p:cNvPr id="4" name="Picture 3" descr="fig_amr_disparity.png"/>
-          <p:cNvPicPr>
-            <a:picLocks noChangeAspect="1"/>
-          </p:cNvPicPr>
-          <p:nvPr/>
-        </p:nvPicPr>
-        <p:blipFill>
-          <a:blip r:embed="rId2"/>
-          <a:stretch>
-            <a:fillRect/>
-          </a:stretch>
-        </p:blipFill>
-        <p:spPr>
-          <a:xfrm>
-            <a:off x="365760" y="1508760"/>
-            <a:ext cx="11430000" cy="5182945"/>
-          </a:xfrm>
-          <a:prstGeom prst="rect">
-            <a:avLst/>
-          </a:prstGeom>
-        </p:spPr>
-      </p:pic>
+              <a:t>Aim 1</a:t>
+            </a:r>
+          </a:p>
+        </p:txBody>
+      </p:sp>
       <p:sp>
         <p:nvSpPr>
           <p:cNvPr id="5" name="TextBox 4"/>
@@ -4332,8 +6977,8 @@
         </p:nvSpPr>
         <p:spPr>
           <a:xfrm>
-            <a:off x="502920" y="6080760"/>
-            <a:ext cx="11155680" cy="411480"/>
+            <a:off x="518007" y="2286000"/>
+            <a:ext cx="3200400" cy="1280160"/>
           </a:xfrm>
           <a:prstGeom prst="rect">
             <a:avLst/>
@@ -4348,12 +6993,23 @@
           <a:p>
             <a:pPr algn="l"/>
             <a:r>
-              <a:rPr sz="1100" i="0" b="0">
-                <a:solidFill>
-                  <a:srgbClr val="1A1A1A"/>
-                </a:solidFill>
-              </a:rPr>
-              <a:t>Adding 50 MX Biobank WGS samples brings AMR to 88 — still leaves Central America, Southern Cone, Amazon, Caribbean underrepresented.</a:t>
+              <a:rPr sz="1500" i="0" b="1">
+                <a:solidFill>
+                  <a:srgbClr val="0E2841"/>
+                </a:solidFill>
+              </a:rPr>
+              <a:t>Demographic &amp; clinical</a:t>
+            </a:r>
+          </a:p>
+          <a:p>
+            <a:pPr algn="l"/>
+            <a:r>
+              <a:rPr sz="1500" i="0" b="1">
+                <a:solidFill>
+                  <a:srgbClr val="0E2841"/>
+                </a:solidFill>
+              </a:rPr>
+              <a:t>predictors of B-ALL outcomes</a:t>
             </a:r>
           </a:p>
         </p:txBody>
@@ -4366,8 +7022,8 @@
         </p:nvSpPr>
         <p:spPr>
           <a:xfrm>
-            <a:off x="502920" y="6537960"/>
-            <a:ext cx="7315200" cy="274320"/>
+            <a:off x="518007" y="3611880"/>
+            <a:ext cx="3200400" cy="1554480"/>
           </a:xfrm>
           <a:prstGeom prst="rect">
             <a:avLst/>
@@ -4382,12 +7038,12 @@
           <a:p>
             <a:pPr algn="l"/>
             <a:r>
-              <a:rPr sz="900" i="0" b="0">
-                <a:solidFill>
-                  <a:srgbClr val="666666"/>
-                </a:solidFill>
-              </a:rPr>
-              <a:t>Christina Magyar  ·  Thesis committee, Aug 2026  ·  Motivation</a:t>
+              <a:rPr sz="1100" i="0" b="0">
+                <a:solidFill>
+                  <a:srgbClr val="1A1A1A"/>
+                </a:solidFill>
+              </a:rPr>
+              <a:t>REDIAL cohort · MRD-stratified survival · manuscript to Leukemia</a:t>
             </a:r>
           </a:p>
         </p:txBody>
@@ -4400,8 +7056,8 @@
         </p:nvSpPr>
         <p:spPr>
           <a:xfrm>
-            <a:off x="11338560" y="6537960"/>
-            <a:ext cx="548640" cy="274320"/>
+            <a:off x="518007" y="5074920"/>
+            <a:ext cx="3200400" cy="457200"/>
           </a:xfrm>
           <a:prstGeom prst="rect">
             <a:avLst/>
@@ -4414,6 +7070,492 @@
           </a:bodyPr>
           <a:lstStyle/>
           <a:p>
+            <a:pPr algn="l"/>
+            <a:r>
+              <a:rPr sz="1100" i="1" b="1">
+                <a:solidFill>
+                  <a:srgbClr val="666666"/>
+                </a:solidFill>
+              </a:rPr>
+              <a:t>Submitted / under revision</a:t>
+            </a:r>
+          </a:p>
+        </p:txBody>
+      </p:sp>
+      <p:sp>
+        <p:nvSpPr>
+          <p:cNvPr id="8" name="Rounded Rectangle 7"/>
+          <p:cNvSpPr/>
+          <p:nvPr/>
+        </p:nvSpPr>
+        <p:spPr>
+          <a:xfrm>
+            <a:off x="4267047" y="1417320"/>
+            <a:ext cx="3657600" cy="4297680"/>
+          </a:xfrm>
+          <a:prstGeom prst="roundRect">
+            <a:avLst/>
+          </a:prstGeom>
+          <a:solidFill>
+            <a:srgbClr val="FFF1E4"/>
+          </a:solidFill>
+          <a:ln w="25400">
+            <a:solidFill>
+              <a:srgbClr val="E97132"/>
+            </a:solidFill>
+          </a:ln>
+        </p:spPr>
+        <p:style>
+          <a:lnRef idx="1">
+            <a:schemeClr val="accent1"/>
+          </a:lnRef>
+          <a:fillRef idx="3">
+            <a:schemeClr val="accent1"/>
+          </a:fillRef>
+          <a:effectRef idx="2">
+            <a:schemeClr val="accent1"/>
+          </a:effectRef>
+          <a:fontRef idx="minor">
+            <a:schemeClr val="lt1"/>
+          </a:fontRef>
+        </p:style>
+        <p:txBody>
+          <a:bodyPr rtlCol="0" anchor="ctr"/>
+          <a:lstStyle/>
+          <a:p>
+            <a:pPr algn="ctr"/>
+          </a:p>
+        </p:txBody>
+      </p:sp>
+      <p:sp>
+        <p:nvSpPr>
+          <p:cNvPr id="9" name="TextBox 8"/>
+          <p:cNvSpPr txBox="1"/>
+          <p:nvPr/>
+        </p:nvSpPr>
+        <p:spPr>
+          <a:xfrm>
+            <a:off x="4495647" y="1645920"/>
+            <a:ext cx="3200400" cy="457200"/>
+          </a:xfrm>
+          <a:prstGeom prst="rect">
+            <a:avLst/>
+          </a:prstGeom>
+          <a:noFill/>
+        </p:spPr>
+        <p:txBody>
+          <a:bodyPr wrap="square" lIns="0" rIns="0" tIns="0" bIns="0">
+            <a:spAutoFit/>
+          </a:bodyPr>
+          <a:lstStyle/>
+          <a:p>
+            <a:pPr algn="l"/>
+            <a:r>
+              <a:rPr sz="1800" i="0" b="1">
+                <a:solidFill>
+                  <a:srgbClr val="E97132"/>
+                </a:solidFill>
+              </a:rPr>
+              <a:t>Aim 2</a:t>
+            </a:r>
+          </a:p>
+        </p:txBody>
+      </p:sp>
+      <p:sp>
+        <p:nvSpPr>
+          <p:cNvPr id="10" name="TextBox 9"/>
+          <p:cNvSpPr txBox="1"/>
+          <p:nvPr/>
+        </p:nvSpPr>
+        <p:spPr>
+          <a:xfrm>
+            <a:off x="4495647" y="2286000"/>
+            <a:ext cx="3200400" cy="1280160"/>
+          </a:xfrm>
+          <a:prstGeom prst="rect">
+            <a:avLst/>
+          </a:prstGeom>
+          <a:noFill/>
+        </p:spPr>
+        <p:txBody>
+          <a:bodyPr wrap="square" lIns="0" rIns="0" tIns="0" bIns="0">
+            <a:spAutoFit/>
+          </a:bodyPr>
+          <a:lstStyle/>
+          <a:p>
+            <a:pPr algn="l"/>
+            <a:r>
+              <a:rPr sz="1500" i="0" b="1">
+                <a:solidFill>
+                  <a:srgbClr val="0E2841"/>
+                </a:solidFill>
+              </a:rPr>
+              <a:t>Building the preprocessing</a:t>
+            </a:r>
+          </a:p>
+          <a:p>
+            <a:pPr algn="l"/>
+            <a:r>
+              <a:rPr sz="1500" i="0" b="1">
+                <a:solidFill>
+                  <a:srgbClr val="0E2841"/>
+                </a:solidFill>
+              </a:rPr>
+              <a:t>+ LAI pipeline</a:t>
+            </a:r>
+          </a:p>
+        </p:txBody>
+      </p:sp>
+      <p:sp>
+        <p:nvSpPr>
+          <p:cNvPr id="11" name="TextBox 10"/>
+          <p:cNvSpPr txBox="1"/>
+          <p:nvPr/>
+        </p:nvSpPr>
+        <p:spPr>
+          <a:xfrm>
+            <a:off x="4495647" y="3611880"/>
+            <a:ext cx="3200400" cy="1554480"/>
+          </a:xfrm>
+          <a:prstGeom prst="rect">
+            <a:avLst/>
+          </a:prstGeom>
+          <a:noFill/>
+        </p:spPr>
+        <p:txBody>
+          <a:bodyPr wrap="square" lIns="0" rIns="0" tIns="0" bIns="0">
+            <a:spAutoFit/>
+          </a:bodyPr>
+          <a:lstStyle/>
+          <a:p>
+            <a:pPr algn="l"/>
+            <a:r>
+              <a:rPr sz="1100" i="0" b="0">
+                <a:solidFill>
+                  <a:srgbClr val="1A1A1A"/>
+                </a:solidFill>
+              </a:rPr>
+              <a:t>Nextflow · MXB reference · LAI accuracy benchmarking · manuscript-ready</a:t>
+            </a:r>
+          </a:p>
+        </p:txBody>
+      </p:sp>
+      <p:sp>
+        <p:nvSpPr>
+          <p:cNvPr id="12" name="TextBox 11"/>
+          <p:cNvSpPr txBox="1"/>
+          <p:nvPr/>
+        </p:nvSpPr>
+        <p:spPr>
+          <a:xfrm>
+            <a:off x="4495647" y="5074920"/>
+            <a:ext cx="3200400" cy="457200"/>
+          </a:xfrm>
+          <a:prstGeom prst="rect">
+            <a:avLst/>
+          </a:prstGeom>
+          <a:noFill/>
+        </p:spPr>
+        <p:txBody>
+          <a:bodyPr wrap="square" lIns="0" rIns="0" tIns="0" bIns="0">
+            <a:spAutoFit/>
+          </a:bodyPr>
+          <a:lstStyle/>
+          <a:p>
+            <a:pPr algn="l"/>
+            <a:r>
+              <a:rPr sz="1100" i="1" b="1">
+                <a:solidFill>
+                  <a:srgbClr val="E97132"/>
+                </a:solidFill>
+              </a:rPr>
+              <a:t>Focus of today's update</a:t>
+            </a:r>
+          </a:p>
+        </p:txBody>
+      </p:sp>
+      <p:sp>
+        <p:nvSpPr>
+          <p:cNvPr id="13" name="Rounded Rectangle 12"/>
+          <p:cNvSpPr/>
+          <p:nvPr/>
+        </p:nvSpPr>
+        <p:spPr>
+          <a:xfrm>
+            <a:off x="8244687" y="1417320"/>
+            <a:ext cx="3657600" cy="4297680"/>
+          </a:xfrm>
+          <a:prstGeom prst="roundRect">
+            <a:avLst/>
+          </a:prstGeom>
+          <a:solidFill>
+            <a:srgbClr val="E8E8E8"/>
+          </a:solidFill>
+          <a:ln w="9525">
+            <a:solidFill>
+              <a:srgbClr val="666666"/>
+            </a:solidFill>
+          </a:ln>
+        </p:spPr>
+        <p:style>
+          <a:lnRef idx="1">
+            <a:schemeClr val="accent1"/>
+          </a:lnRef>
+          <a:fillRef idx="3">
+            <a:schemeClr val="accent1"/>
+          </a:fillRef>
+          <a:effectRef idx="2">
+            <a:schemeClr val="accent1"/>
+          </a:effectRef>
+          <a:fontRef idx="minor">
+            <a:schemeClr val="lt1"/>
+          </a:fontRef>
+        </p:style>
+        <p:txBody>
+          <a:bodyPr rtlCol="0" anchor="ctr"/>
+          <a:lstStyle/>
+          <a:p>
+            <a:pPr algn="ctr"/>
+          </a:p>
+        </p:txBody>
+      </p:sp>
+      <p:sp>
+        <p:nvSpPr>
+          <p:cNvPr id="14" name="TextBox 13"/>
+          <p:cNvSpPr txBox="1"/>
+          <p:nvPr/>
+        </p:nvSpPr>
+        <p:spPr>
+          <a:xfrm>
+            <a:off x="8473287" y="1645920"/>
+            <a:ext cx="3200400" cy="457200"/>
+          </a:xfrm>
+          <a:prstGeom prst="rect">
+            <a:avLst/>
+          </a:prstGeom>
+          <a:noFill/>
+        </p:spPr>
+        <p:txBody>
+          <a:bodyPr wrap="square" lIns="0" rIns="0" tIns="0" bIns="0">
+            <a:spAutoFit/>
+          </a:bodyPr>
+          <a:lstStyle/>
+          <a:p>
+            <a:pPr algn="l"/>
+            <a:r>
+              <a:rPr sz="1800" i="0" b="1">
+                <a:solidFill>
+                  <a:srgbClr val="666666"/>
+                </a:solidFill>
+              </a:rPr>
+              <a:t>Aim 3</a:t>
+            </a:r>
+          </a:p>
+        </p:txBody>
+      </p:sp>
+      <p:sp>
+        <p:nvSpPr>
+          <p:cNvPr id="15" name="TextBox 14"/>
+          <p:cNvSpPr txBox="1"/>
+          <p:nvPr/>
+        </p:nvSpPr>
+        <p:spPr>
+          <a:xfrm>
+            <a:off x="8473287" y="2286000"/>
+            <a:ext cx="3200400" cy="1280160"/>
+          </a:xfrm>
+          <a:prstGeom prst="rect">
+            <a:avLst/>
+          </a:prstGeom>
+          <a:noFill/>
+        </p:spPr>
+        <p:txBody>
+          <a:bodyPr wrap="square" lIns="0" rIns="0" tIns="0" bIns="0">
+            <a:spAutoFit/>
+          </a:bodyPr>
+          <a:lstStyle/>
+          <a:p>
+            <a:pPr algn="l"/>
+            <a:r>
+              <a:rPr sz="1500" i="0" b="1">
+                <a:solidFill>
+                  <a:srgbClr val="0E2841"/>
+                </a:solidFill>
+              </a:rPr>
+              <a:t>Genetic association study</a:t>
+            </a:r>
+          </a:p>
+          <a:p>
+            <a:pPr algn="l"/>
+            <a:r>
+              <a:rPr sz="1500" i="0" b="1">
+                <a:solidFill>
+                  <a:srgbClr val="0E2841"/>
+                </a:solidFill>
+              </a:rPr>
+              <a:t>of B-ALL outcomes</a:t>
+            </a:r>
+          </a:p>
+        </p:txBody>
+      </p:sp>
+      <p:sp>
+        <p:nvSpPr>
+          <p:cNvPr id="16" name="TextBox 15"/>
+          <p:cNvSpPr txBox="1"/>
+          <p:nvPr/>
+        </p:nvSpPr>
+        <p:spPr>
+          <a:xfrm>
+            <a:off x="8473287" y="3611880"/>
+            <a:ext cx="3200400" cy="1554480"/>
+          </a:xfrm>
+          <a:prstGeom prst="rect">
+            <a:avLst/>
+          </a:prstGeom>
+          <a:noFill/>
+        </p:spPr>
+        <p:txBody>
+          <a:bodyPr wrap="square" lIns="0" rIns="0" tIns="0" bIns="0">
+            <a:spAutoFit/>
+          </a:bodyPr>
+          <a:lstStyle/>
+          <a:p>
+            <a:pPr algn="l"/>
+            <a:r>
+              <a:rPr sz="1100" i="0" b="0">
+                <a:solidFill>
+                  <a:srgbClr val="1A1A1A"/>
+                </a:solidFill>
+              </a:rPr>
+              <a:t>Trans-ancestry GWAS · Tractor local-ancestry-informed · PolyFun-SuSiE fine-mapping</a:t>
+            </a:r>
+          </a:p>
+        </p:txBody>
+      </p:sp>
+      <p:sp>
+        <p:nvSpPr>
+          <p:cNvPr id="17" name="TextBox 16"/>
+          <p:cNvSpPr txBox="1"/>
+          <p:nvPr/>
+        </p:nvSpPr>
+        <p:spPr>
+          <a:xfrm>
+            <a:off x="8473287" y="5074920"/>
+            <a:ext cx="3200400" cy="457200"/>
+          </a:xfrm>
+          <a:prstGeom prst="rect">
+            <a:avLst/>
+          </a:prstGeom>
+          <a:noFill/>
+        </p:spPr>
+        <p:txBody>
+          <a:bodyPr wrap="square" lIns="0" rIns="0" tIns="0" bIns="0">
+            <a:spAutoFit/>
+          </a:bodyPr>
+          <a:lstStyle/>
+          <a:p>
+            <a:pPr algn="l"/>
+            <a:r>
+              <a:rPr sz="1100" i="1" b="1">
+                <a:solidFill>
+                  <a:srgbClr val="666666"/>
+                </a:solidFill>
+              </a:rPr>
+              <a:t>Next 6-12 months</a:t>
+            </a:r>
+          </a:p>
+        </p:txBody>
+      </p:sp>
+      <p:sp>
+        <p:nvSpPr>
+          <p:cNvPr id="18" name="TextBox 17"/>
+          <p:cNvSpPr txBox="1"/>
+          <p:nvPr/>
+        </p:nvSpPr>
+        <p:spPr>
+          <a:xfrm>
+            <a:off x="502920" y="6080760"/>
+            <a:ext cx="11155680" cy="320040"/>
+          </a:xfrm>
+          <a:prstGeom prst="rect">
+            <a:avLst/>
+          </a:prstGeom>
+          <a:noFill/>
+        </p:spPr>
+        <p:txBody>
+          <a:bodyPr wrap="square" lIns="0" rIns="0" tIns="0" bIns="0">
+            <a:spAutoFit/>
+          </a:bodyPr>
+          <a:lstStyle/>
+          <a:p>
+            <a:pPr algn="ctr"/>
+            <a:r>
+              <a:rPr sz="1200" i="1" b="0">
+                <a:solidFill>
+                  <a:srgbClr val="1A1A1A"/>
+                </a:solidFill>
+              </a:rPr>
+              <a:t>Aim 2 is the technical bridge — the LAI accuracy work picks the reference panel that Aim 3's local-ancestry GWAS will use.</a:t>
+            </a:r>
+          </a:p>
+        </p:txBody>
+      </p:sp>
+      <p:sp>
+        <p:nvSpPr>
+          <p:cNvPr id="19" name="TextBox 18"/>
+          <p:cNvSpPr txBox="1"/>
+          <p:nvPr/>
+        </p:nvSpPr>
+        <p:spPr>
+          <a:xfrm>
+            <a:off x="502920" y="6537960"/>
+            <a:ext cx="7315200" cy="274320"/>
+          </a:xfrm>
+          <a:prstGeom prst="rect">
+            <a:avLst/>
+          </a:prstGeom>
+          <a:noFill/>
+        </p:spPr>
+        <p:txBody>
+          <a:bodyPr wrap="square" lIns="0" rIns="0" tIns="0" bIns="0">
+            <a:spAutoFit/>
+          </a:bodyPr>
+          <a:lstStyle/>
+          <a:p>
+            <a:pPr algn="l"/>
+            <a:r>
+              <a:rPr sz="900" i="0" b="0">
+                <a:solidFill>
+                  <a:srgbClr val="666666"/>
+                </a:solidFill>
+              </a:rPr>
+              <a:t>Christina Magyar  ·  Thesis committee, Aug 2026  ·  Aims overview</a:t>
+            </a:r>
+          </a:p>
+        </p:txBody>
+      </p:sp>
+      <p:sp>
+        <p:nvSpPr>
+          <p:cNvPr id="20" name="TextBox 19"/>
+          <p:cNvSpPr txBox="1"/>
+          <p:nvPr/>
+        </p:nvSpPr>
+        <p:spPr>
+          <a:xfrm>
+            <a:off x="11338560" y="6537960"/>
+            <a:ext cx="548640" cy="274320"/>
+          </a:xfrm>
+          <a:prstGeom prst="rect">
+            <a:avLst/>
+          </a:prstGeom>
+          <a:noFill/>
+        </p:spPr>
+        <p:txBody>
+          <a:bodyPr wrap="square" lIns="0" rIns="0" tIns="0" bIns="0">
+            <a:spAutoFit/>
+          </a:bodyPr>
+          <a:lstStyle/>
+          <a:p>
             <a:pPr algn="r"/>
             <a:r>
               <a:rPr sz="900" i="0" b="0">
@@ -4421,7 +7563,7 @@
                   <a:srgbClr val="666666"/>
                 </a:solidFill>
               </a:rPr>
-              <a:t>2 / 7</a:t>
+              <a:t>2 / 12</a:t>
             </a:r>
           </a:p>
         </p:txBody>
@@ -4472,21 +7614,55 @@
                   <a:srgbClr val="0E2841"/>
                 </a:solidFill>
               </a:rPr>
-              <a:t>We simulated admixed cohorts to measure per-hap LAI recall.</a:t>
-            </a:r>
-          </a:p>
-        </p:txBody>
-      </p:sp>
-      <p:sp>
-        <p:nvSpPr>
-          <p:cNvPr id="3" name="Rounded Rectangle 2"/>
+              <a:t>Aim 1: MRD-negative Latino &amp; NL-Black children still relapse more than NL-White.</a:t>
+            </a:r>
+          </a:p>
+        </p:txBody>
+      </p:sp>
+      <p:sp>
+        <p:nvSpPr>
+          <p:cNvPr id="3" name="TextBox 2"/>
+          <p:cNvSpPr txBox="1"/>
+          <p:nvPr/>
+        </p:nvSpPr>
+        <p:spPr>
+          <a:xfrm>
+            <a:off x="502920" y="1051560"/>
+            <a:ext cx="11155680" cy="365760"/>
+          </a:xfrm>
+          <a:prstGeom prst="rect">
+            <a:avLst/>
+          </a:prstGeom>
+          <a:noFill/>
+        </p:spPr>
+        <p:txBody>
+          <a:bodyPr wrap="square" lIns="0" rIns="0" tIns="0" bIns="0">
+            <a:spAutoFit/>
+          </a:bodyPr>
+          <a:lstStyle/>
+          <a:p>
+            <a:pPr algn="l"/>
+            <a:r>
+              <a:rPr sz="1200" i="1" b="0">
+                <a:solidFill>
+                  <a:srgbClr val="666666"/>
+                </a:solidFill>
+              </a:rPr>
+              <a:t>REDIAL cohort · Cox PH adjusted for age, sex, WBC, cytogenetics, CNS, trial</a:t>
+            </a:r>
+          </a:p>
+        </p:txBody>
+      </p:sp>
+      <p:sp>
+        <p:nvSpPr>
+          <p:cNvPr id="4" name="Rounded Rectangle 3"/>
           <p:cNvSpPr/>
           <p:nvPr/>
         </p:nvSpPr>
         <p:spPr>
           <a:xfrm>
-            <a:off x="449427" y="1920240"/>
-            <a:ext cx="2148840" cy="1920240"/>
+            <a:off x="502920" y="1600200"/>
+            <a:ext cx="5394960" cy="3931920"/>
           </a:xfrm>
           <a:prstGeom prst="roundRect">
             <a:avLst/>
@@ -4494,9 +7670,9 @@
           <a:solidFill>
             <a:srgbClr val="E8E8E8"/>
           </a:solidFill>
-          <a:ln w="6350">
+          <a:ln w="19050">
             <a:solidFill>
-              <a:srgbClr val="666666"/>
+              <a:srgbClr val="E97132"/>
             </a:solidFill>
           </a:ln>
         </p:spPr>
@@ -4515,69 +7691,147 @@
           </a:fontRef>
         </p:style>
         <p:txBody>
-          <a:bodyPr rtlCol="0" anchor="ctr" wrap="square" tIns="80000" lIns="60000" rIns="60000"/>
+          <a:bodyPr rtlCol="0" anchor="ctr"/>
           <a:lstStyle/>
           <a:p>
             <a:pPr algn="ctr"/>
-            <a:r>
-              <a:rPr sz="1300" b="1">
-                <a:solidFill>
-                  <a:srgbClr val="0E2841"/>
-                </a:solidFill>
-              </a:rPr>
-              <a:t>Reference haps</a:t>
-            </a:r>
-          </a:p>
-          <a:p>
-            <a:pPr algn="ctr"/>
-            <a:r>
-              <a:rPr sz="1000">
+          </a:p>
+        </p:txBody>
+      </p:sp>
+      <p:sp>
+        <p:nvSpPr>
+          <p:cNvPr id="5" name="TextBox 4"/>
+          <p:cNvSpPr txBox="1"/>
+          <p:nvPr/>
+        </p:nvSpPr>
+        <p:spPr>
+          <a:xfrm>
+            <a:off x="777240" y="1828800"/>
+            <a:ext cx="4846320" cy="457200"/>
+          </a:xfrm>
+          <a:prstGeom prst="rect">
+            <a:avLst/>
+          </a:prstGeom>
+          <a:noFill/>
+        </p:spPr>
+        <p:txBody>
+          <a:bodyPr wrap="square" lIns="0" rIns="0" tIns="0" bIns="0">
+            <a:spAutoFit/>
+          </a:bodyPr>
+          <a:lstStyle/>
+          <a:p>
+            <a:pPr algn="l"/>
+            <a:r>
+              <a:rPr sz="1500" i="0" b="1">
+                <a:solidFill>
+                  <a:srgbClr val="E97132"/>
+                </a:solidFill>
+              </a:rPr>
+              <a:t>MRD-negative B-ALL cases</a:t>
+            </a:r>
+          </a:p>
+        </p:txBody>
+      </p:sp>
+      <p:sp>
+        <p:nvSpPr>
+          <p:cNvPr id="6" name="TextBox 5"/>
+          <p:cNvSpPr txBox="1"/>
+          <p:nvPr/>
+        </p:nvSpPr>
+        <p:spPr>
+          <a:xfrm>
+            <a:off x="777240" y="2468880"/>
+            <a:ext cx="4846320" cy="2011680"/>
+          </a:xfrm>
+          <a:prstGeom prst="rect">
+            <a:avLst/>
+          </a:prstGeom>
+          <a:noFill/>
+        </p:spPr>
+        <p:txBody>
+          <a:bodyPr wrap="square" lIns="0" rIns="0" tIns="0" bIns="0">
+            <a:spAutoFit/>
+          </a:bodyPr>
+          <a:lstStyle/>
+          <a:p>
+            <a:pPr algn="l"/>
+            <a:r>
+              <a:rPr sz="1200" i="0" b="0">
                 <a:solidFill>
                   <a:srgbClr val="1A1A1A"/>
                 </a:solidFill>
               </a:rPr>
-              <a:t>HGDP + 1KG</a:t>
-            </a:r>
-            <a:br/>
-            <a:r>
-              <a:rPr sz="1000">
+              <a:t>•  Latino:      HR ~1.4 for disease-free survival vs NL-White</a:t>
+            </a:r>
+          </a:p>
+          <a:p>
+            <a:pPr algn="l"/>
+            <a:r>
+              <a:rPr sz="1200" i="0" b="0">
                 <a:solidFill>
                   <a:srgbClr val="1A1A1A"/>
                 </a:solidFill>
               </a:rPr>
-              <a:t>+ 50 MXB WGS</a:t>
-            </a:r>
-            <a:br/>
-            <a:r>
-              <a:rPr sz="1000">
-                <a:solidFill>
-                  <a:srgbClr val="1A1A1A"/>
-                </a:solidFill>
-              </a:rPr>
-              <a:t>(6 panel combos)</a:t>
-            </a:r>
-          </a:p>
-        </p:txBody>
-      </p:sp>
-      <p:sp>
-        <p:nvSpPr>
-          <p:cNvPr id="4" name="Right Arrow 3"/>
+              <a:t>•  NL-Black:  HR ~1.6 for disease-free survival vs NL-White</a:t>
+            </a:r>
+          </a:p>
+        </p:txBody>
+      </p:sp>
+      <p:sp>
+        <p:nvSpPr>
+          <p:cNvPr id="7" name="TextBox 6"/>
+          <p:cNvSpPr txBox="1"/>
+          <p:nvPr/>
+        </p:nvSpPr>
+        <p:spPr>
+          <a:xfrm>
+            <a:off x="777240" y="4617720"/>
+            <a:ext cx="4846320" cy="822960"/>
+          </a:xfrm>
+          <a:prstGeom prst="rect">
+            <a:avLst/>
+          </a:prstGeom>
+          <a:noFill/>
+        </p:spPr>
+        <p:txBody>
+          <a:bodyPr wrap="square" lIns="0" rIns="0" tIns="0" bIns="0">
+            <a:spAutoFit/>
+          </a:bodyPr>
+          <a:lstStyle/>
+          <a:p>
+            <a:pPr algn="l"/>
+            <a:r>
+              <a:rPr sz="1150" i="1" b="0">
+                <a:solidFill>
+                  <a:srgbClr val="666666"/>
+                </a:solidFill>
+              </a:rPr>
+              <a:t>Despite the same favorable MRD status, disparity persists.</a:t>
+            </a:r>
+          </a:p>
+        </p:txBody>
+      </p:sp>
+      <p:sp>
+        <p:nvSpPr>
+          <p:cNvPr id="8" name="Rounded Rectangle 7"/>
           <p:cNvSpPr/>
           <p:nvPr/>
         </p:nvSpPr>
         <p:spPr>
           <a:xfrm>
-            <a:off x="2602839" y="2761488"/>
-            <a:ext cx="128015" cy="256032"/>
-          </a:xfrm>
-          <a:prstGeom prst="rightArrow">
+            <a:off x="6263640" y="1600200"/>
+            <a:ext cx="5394960" cy="3931920"/>
+          </a:xfrm>
+          <a:prstGeom prst="roundRect">
             <a:avLst/>
           </a:prstGeom>
           <a:solidFill>
-            <a:srgbClr val="666666"/>
+            <a:srgbClr val="E8E8E8"/>
           </a:solidFill>
-          <a:ln>
-            <a:noFill/>
+          <a:ln w="19050">
+            <a:solidFill>
+              <a:srgbClr val="156082"/>
+            </a:solidFill>
           </a:ln>
         </p:spPr>
         <p:style>
@@ -4604,453 +7858,14 @@
       </p:sp>
       <p:sp>
         <p:nvSpPr>
-          <p:cNvPr id="5" name="Rounded Rectangle 4"/>
-          <p:cNvSpPr/>
-          <p:nvPr/>
-        </p:nvSpPr>
-        <p:spPr>
-          <a:xfrm>
-            <a:off x="2735427" y="1920240"/>
-            <a:ext cx="2148840" cy="1920240"/>
-          </a:xfrm>
-          <a:prstGeom prst="roundRect">
-            <a:avLst/>
-          </a:prstGeom>
-          <a:solidFill>
-            <a:srgbClr val="E8E8E8"/>
-          </a:solidFill>
-          <a:ln w="6350">
-            <a:solidFill>
-              <a:srgbClr val="666666"/>
-            </a:solidFill>
-          </a:ln>
-        </p:spPr>
-        <p:style>
-          <a:lnRef idx="1">
-            <a:schemeClr val="accent1"/>
-          </a:lnRef>
-          <a:fillRef idx="3">
-            <a:schemeClr val="accent1"/>
-          </a:fillRef>
-          <a:effectRef idx="2">
-            <a:schemeClr val="accent1"/>
-          </a:effectRef>
-          <a:fontRef idx="minor">
-            <a:schemeClr val="lt1"/>
-          </a:fontRef>
-        </p:style>
-        <p:txBody>
-          <a:bodyPr rtlCol="0" anchor="ctr" wrap="square" tIns="80000" lIns="60000" rIns="60000"/>
-          <a:lstStyle/>
-          <a:p>
-            <a:pPr algn="ctr"/>
-            <a:r>
-              <a:rPr sz="1300" b="1">
-                <a:solidFill>
-                  <a:srgbClr val="0E2841"/>
-                </a:solidFill>
-              </a:rPr>
-              <a:t>Phasing</a:t>
-            </a:r>
-          </a:p>
-          <a:p>
-            <a:pPr algn="ctr"/>
-            <a:r>
-              <a:rPr sz="1000">
-                <a:solidFill>
-                  <a:srgbClr val="1A1A1A"/>
-                </a:solidFill>
-              </a:rPr>
-              <a:t>SHAPEIT5</a:t>
-            </a:r>
-            <a:br/>
-            <a:r>
-              <a:rPr sz="1000">
-                <a:solidFill>
-                  <a:srgbClr val="1A1A1A"/>
-                </a:solidFill>
-              </a:rPr>
-              <a:t>population phasing</a:t>
-            </a:r>
-          </a:p>
-        </p:txBody>
-      </p:sp>
-      <p:sp>
-        <p:nvSpPr>
-          <p:cNvPr id="6" name="Right Arrow 5"/>
-          <p:cNvSpPr/>
-          <p:nvPr/>
-        </p:nvSpPr>
-        <p:spPr>
-          <a:xfrm>
-            <a:off x="4888839" y="2761488"/>
-            <a:ext cx="128015" cy="256032"/>
-          </a:xfrm>
-          <a:prstGeom prst="rightArrow">
-            <a:avLst/>
-          </a:prstGeom>
-          <a:solidFill>
-            <a:srgbClr val="666666"/>
-          </a:solidFill>
-          <a:ln>
-            <a:noFill/>
-          </a:ln>
-        </p:spPr>
-        <p:style>
-          <a:lnRef idx="1">
-            <a:schemeClr val="accent1"/>
-          </a:lnRef>
-          <a:fillRef idx="3">
-            <a:schemeClr val="accent1"/>
-          </a:fillRef>
-          <a:effectRef idx="2">
-            <a:schemeClr val="accent1"/>
-          </a:effectRef>
-          <a:fontRef idx="minor">
-            <a:schemeClr val="lt1"/>
-          </a:fontRef>
-        </p:style>
-        <p:txBody>
-          <a:bodyPr rtlCol="0" anchor="ctr"/>
-          <a:lstStyle/>
-          <a:p>
-            <a:pPr algn="ctr"/>
-          </a:p>
-        </p:txBody>
-      </p:sp>
-      <p:sp>
-        <p:nvSpPr>
-          <p:cNvPr id="7" name="Rounded Rectangle 6"/>
-          <p:cNvSpPr/>
-          <p:nvPr/>
-        </p:nvSpPr>
-        <p:spPr>
-          <a:xfrm>
-            <a:off x="5021427" y="1920240"/>
-            <a:ext cx="2148840" cy="1920240"/>
-          </a:xfrm>
-          <a:prstGeom prst="roundRect">
-            <a:avLst/>
-          </a:prstGeom>
-          <a:solidFill>
-            <a:srgbClr val="E8E8E8"/>
-          </a:solidFill>
-          <a:ln w="6350">
-            <a:solidFill>
-              <a:srgbClr val="666666"/>
-            </a:solidFill>
-          </a:ln>
-        </p:spPr>
-        <p:style>
-          <a:lnRef idx="1">
-            <a:schemeClr val="accent1"/>
-          </a:lnRef>
-          <a:fillRef idx="3">
-            <a:schemeClr val="accent1"/>
-          </a:fillRef>
-          <a:effectRef idx="2">
-            <a:schemeClr val="accent1"/>
-          </a:effectRef>
-          <a:fontRef idx="minor">
-            <a:schemeClr val="lt1"/>
-          </a:fontRef>
-        </p:style>
-        <p:txBody>
-          <a:bodyPr rtlCol="0" anchor="ctr" wrap="square" tIns="80000" lIns="60000" rIns="60000"/>
-          <a:lstStyle/>
-          <a:p>
-            <a:pPr algn="ctr"/>
-            <a:r>
-              <a:rPr sz="1300" b="1">
-                <a:solidFill>
-                  <a:srgbClr val="0E2841"/>
-                </a:solidFill>
-              </a:rPr>
-              <a:t>Simulate admixed</a:t>
-            </a:r>
-          </a:p>
-          <a:p>
-            <a:pPr algn="ctr"/>
-            <a:r>
-              <a:rPr sz="1000">
-                <a:solidFill>
-                  <a:srgbClr val="1A1A1A"/>
-                </a:solidFill>
-              </a:rPr>
-              <a:t>admix-simu</a:t>
-            </a:r>
-            <a:br/>
-            <a:r>
-              <a:rPr sz="1000">
-                <a:solidFill>
-                  <a:srgbClr val="1A1A1A"/>
-                </a:solidFill>
-              </a:rPr>
-              <a:t>gen=12, n=30</a:t>
-            </a:r>
-            <a:br/>
-            <a:r>
-              <a:rPr sz="1000">
-                <a:solidFill>
-                  <a:srgbClr val="1A1A1A"/>
-                </a:solidFill>
-              </a:rPr>
-              <a:t>Brasa &amp; MXB tracks</a:t>
-            </a:r>
-          </a:p>
-        </p:txBody>
-      </p:sp>
-      <p:sp>
-        <p:nvSpPr>
-          <p:cNvPr id="8" name="Right Arrow 7"/>
-          <p:cNvSpPr/>
-          <p:nvPr/>
-        </p:nvSpPr>
-        <p:spPr>
-          <a:xfrm>
-            <a:off x="7174839" y="2761488"/>
-            <a:ext cx="128015" cy="256032"/>
-          </a:xfrm>
-          <a:prstGeom prst="rightArrow">
-            <a:avLst/>
-          </a:prstGeom>
-          <a:solidFill>
-            <a:srgbClr val="666666"/>
-          </a:solidFill>
-          <a:ln>
-            <a:noFill/>
-          </a:ln>
-        </p:spPr>
-        <p:style>
-          <a:lnRef idx="1">
-            <a:schemeClr val="accent1"/>
-          </a:lnRef>
-          <a:fillRef idx="3">
-            <a:schemeClr val="accent1"/>
-          </a:fillRef>
-          <a:effectRef idx="2">
-            <a:schemeClr val="accent1"/>
-          </a:effectRef>
-          <a:fontRef idx="minor">
-            <a:schemeClr val="lt1"/>
-          </a:fontRef>
-        </p:style>
-        <p:txBody>
-          <a:bodyPr rtlCol="0" anchor="ctr"/>
-          <a:lstStyle/>
-          <a:p>
-            <a:pPr algn="ctr"/>
-          </a:p>
-        </p:txBody>
-      </p:sp>
-      <p:sp>
-        <p:nvSpPr>
-          <p:cNvPr id="9" name="Rounded Rectangle 8"/>
-          <p:cNvSpPr/>
-          <p:nvPr/>
-        </p:nvSpPr>
-        <p:spPr>
-          <a:xfrm>
-            <a:off x="7307427" y="1920240"/>
-            <a:ext cx="2148840" cy="1920240"/>
-          </a:xfrm>
-          <a:prstGeom prst="roundRect">
-            <a:avLst/>
-          </a:prstGeom>
-          <a:solidFill>
-            <a:srgbClr val="E8E8E8"/>
-          </a:solidFill>
-          <a:ln w="6350">
-            <a:solidFill>
-              <a:srgbClr val="666666"/>
-            </a:solidFill>
-          </a:ln>
-        </p:spPr>
-        <p:style>
-          <a:lnRef idx="1">
-            <a:schemeClr val="accent1"/>
-          </a:lnRef>
-          <a:fillRef idx="3">
-            <a:schemeClr val="accent1"/>
-          </a:fillRef>
-          <a:effectRef idx="2">
-            <a:schemeClr val="accent1"/>
-          </a:effectRef>
-          <a:fontRef idx="minor">
-            <a:schemeClr val="lt1"/>
-          </a:fontRef>
-        </p:style>
-        <p:txBody>
-          <a:bodyPr rtlCol="0" anchor="ctr" wrap="square" tIns="80000" lIns="60000" rIns="60000"/>
-          <a:lstStyle/>
-          <a:p>
-            <a:pPr algn="ctr"/>
-            <a:r>
-              <a:rPr sz="1300" b="1">
-                <a:solidFill>
-                  <a:srgbClr val="0E2841"/>
-                </a:solidFill>
-              </a:rPr>
-              <a:t>Local ancestry</a:t>
-            </a:r>
-          </a:p>
-          <a:p>
-            <a:pPr algn="ctr"/>
-            <a:r>
-              <a:rPr sz="1000">
-                <a:solidFill>
-                  <a:srgbClr val="1A1A1A"/>
-                </a:solidFill>
-              </a:rPr>
-              <a:t>RFMix v1 TrioPhased</a:t>
-            </a:r>
-            <a:br/>
-            <a:r>
-              <a:rPr sz="1000">
-                <a:solidFill>
-                  <a:srgbClr val="1A1A1A"/>
-                </a:solidFill>
-              </a:rPr>
-              <a:t>22 chromosomes</a:t>
-            </a:r>
-          </a:p>
-        </p:txBody>
-      </p:sp>
-      <p:sp>
-        <p:nvSpPr>
-          <p:cNvPr id="10" name="Right Arrow 9"/>
-          <p:cNvSpPr/>
-          <p:nvPr/>
-        </p:nvSpPr>
-        <p:spPr>
-          <a:xfrm>
-            <a:off x="9460839" y="2761488"/>
-            <a:ext cx="128015" cy="256032"/>
-          </a:xfrm>
-          <a:prstGeom prst="rightArrow">
-            <a:avLst/>
-          </a:prstGeom>
-          <a:solidFill>
-            <a:srgbClr val="666666"/>
-          </a:solidFill>
-          <a:ln>
-            <a:noFill/>
-          </a:ln>
-        </p:spPr>
-        <p:style>
-          <a:lnRef idx="1">
-            <a:schemeClr val="accent1"/>
-          </a:lnRef>
-          <a:fillRef idx="3">
-            <a:schemeClr val="accent1"/>
-          </a:fillRef>
-          <a:effectRef idx="2">
-            <a:schemeClr val="accent1"/>
-          </a:effectRef>
-          <a:fontRef idx="minor">
-            <a:schemeClr val="lt1"/>
-          </a:fontRef>
-        </p:style>
-        <p:txBody>
-          <a:bodyPr rtlCol="0" anchor="ctr"/>
-          <a:lstStyle/>
-          <a:p>
-            <a:pPr algn="ctr"/>
-          </a:p>
-        </p:txBody>
-      </p:sp>
-      <p:sp>
-        <p:nvSpPr>
-          <p:cNvPr id="11" name="Rounded Rectangle 10"/>
-          <p:cNvSpPr/>
-          <p:nvPr/>
-        </p:nvSpPr>
-        <p:spPr>
-          <a:xfrm>
-            <a:off x="9593427" y="1920240"/>
-            <a:ext cx="2148840" cy="1920240"/>
-          </a:xfrm>
-          <a:prstGeom prst="roundRect">
-            <a:avLst/>
-          </a:prstGeom>
-          <a:solidFill>
-            <a:srgbClr val="E8E8E8"/>
-          </a:solidFill>
-          <a:ln w="6350">
-            <a:solidFill>
-              <a:srgbClr val="666666"/>
-            </a:solidFill>
-          </a:ln>
-        </p:spPr>
-        <p:style>
-          <a:lnRef idx="1">
-            <a:schemeClr val="accent1"/>
-          </a:lnRef>
-          <a:fillRef idx="3">
-            <a:schemeClr val="accent1"/>
-          </a:fillRef>
-          <a:effectRef idx="2">
-            <a:schemeClr val="accent1"/>
-          </a:effectRef>
-          <a:fontRef idx="minor">
-            <a:schemeClr val="lt1"/>
-          </a:fontRef>
-        </p:style>
-        <p:txBody>
-          <a:bodyPr rtlCol="0" anchor="ctr" wrap="square" tIns="80000" lIns="60000" rIns="60000"/>
-          <a:lstStyle/>
-          <a:p>
-            <a:pPr algn="ctr"/>
-            <a:r>
-              <a:rPr sz="1300" b="1">
-                <a:solidFill>
-                  <a:srgbClr val="0E2841"/>
-                </a:solidFill>
-              </a:rPr>
-              <a:t>Score</a:t>
-            </a:r>
-          </a:p>
-          <a:p>
-            <a:pPr algn="ctr"/>
-            <a:r>
-              <a:rPr sz="1000">
-                <a:solidFill>
-                  <a:srgbClr val="1A1A1A"/>
-                </a:solidFill>
-              </a:rPr>
-              <a:t>per-hap recall</a:t>
-            </a:r>
-            <a:br/>
-            <a:r>
-              <a:rPr sz="1000">
-                <a:solidFill>
-                  <a:srgbClr val="1A1A1A"/>
-                </a:solidFill>
-              </a:rPr>
-              <a:t>vs known truth</a:t>
-            </a:r>
-            <a:br/>
-            <a:r>
-              <a:rPr sz="1000">
-                <a:solidFill>
-                  <a:srgbClr val="1A1A1A"/>
-                </a:solidFill>
-              </a:rPr>
-              <a:t>weighted concordance / F1</a:t>
-            </a:r>
-          </a:p>
-        </p:txBody>
-      </p:sp>
-      <p:sp>
-        <p:nvSpPr>
-          <p:cNvPr id="12" name="TextBox 11"/>
+          <p:cNvPr id="9" name="TextBox 8"/>
           <p:cNvSpPr txBox="1"/>
           <p:nvPr/>
         </p:nvSpPr>
         <p:spPr>
           <a:xfrm>
-            <a:off x="502920" y="4160520"/>
-            <a:ext cx="11155680" cy="320040"/>
+            <a:off x="6537960" y="1828800"/>
+            <a:ext cx="4846320" cy="457200"/>
           </a:xfrm>
           <a:prstGeom prst="rect">
             <a:avLst/>
@@ -5065,410 +7880,26 @@
           <a:p>
             <a:pPr algn="l"/>
             <a:r>
-              <a:rPr sz="1300" i="0" b="1">
-                <a:solidFill>
-                  <a:srgbClr val="0E2841"/>
-                </a:solidFill>
-              </a:rPr>
-              <a:t>Six reference-panel combinations tested</a:t>
-            </a:r>
-          </a:p>
-        </p:txBody>
-      </p:sp>
-      <p:sp>
-        <p:nvSpPr>
-          <p:cNvPr id="13" name="Rounded Rectangle 12"/>
-          <p:cNvSpPr/>
-          <p:nvPr/>
-        </p:nvSpPr>
-        <p:spPr>
-          <a:xfrm>
-            <a:off x="502920" y="4572000"/>
-            <a:ext cx="1874519" cy="960120"/>
-          </a:xfrm>
-          <a:prstGeom prst="roundRect">
-            <a:avLst/>
-          </a:prstGeom>
-          <a:solidFill>
-            <a:srgbClr val="E8E8E8"/>
-          </a:solidFill>
-          <a:ln w="17780">
-            <a:solidFill>
-              <a:srgbClr val="666666"/>
-            </a:solidFill>
-          </a:ln>
-        </p:spPr>
-        <p:style>
-          <a:lnRef idx="1">
-            <a:schemeClr val="accent1"/>
-          </a:lnRef>
-          <a:fillRef idx="3">
-            <a:schemeClr val="accent1"/>
-          </a:fillRef>
-          <a:effectRef idx="2">
-            <a:schemeClr val="accent1"/>
-          </a:effectRef>
-          <a:fontRef idx="minor">
-            <a:schemeClr val="lt1"/>
-          </a:fontRef>
-        </p:style>
-        <p:txBody>
-          <a:bodyPr rtlCol="0" anchor="ctr" tIns="50000" lIns="80000" rIns="60000"/>
-          <a:lstStyle/>
-          <a:p>
-            <a:pPr algn="l"/>
-            <a:r>
-              <a:rPr sz="1100" b="1">
-                <a:solidFill>
-                  <a:srgbClr val="666666"/>
-                </a:solidFill>
-              </a:rPr>
-              <a:t>NAT_HGDP</a:t>
-            </a:r>
-          </a:p>
-          <a:p>
-            <a:pPr algn="l"/>
-            <a:r>
-              <a:rPr sz="950">
-                <a:solidFill>
-                  <a:srgbClr val="1A1A1A"/>
-                </a:solidFill>
-              </a:rPr>
-              <a:t>26 HGDP + 5 LP</a:t>
-            </a:r>
-          </a:p>
-        </p:txBody>
-      </p:sp>
-      <p:sp>
-        <p:nvSpPr>
-          <p:cNvPr id="14" name="Rounded Rectangle 13"/>
-          <p:cNvSpPr/>
-          <p:nvPr/>
-        </p:nvSpPr>
-        <p:spPr>
-          <a:xfrm>
-            <a:off x="2514600" y="4572000"/>
-            <a:ext cx="1874519" cy="960120"/>
-          </a:xfrm>
-          <a:prstGeom prst="roundRect">
-            <a:avLst/>
-          </a:prstGeom>
-          <a:solidFill>
-            <a:srgbClr val="E8E8E8"/>
-          </a:solidFill>
-          <a:ln w="17780">
-            <a:solidFill>
-              <a:srgbClr val="E97132"/>
-            </a:solidFill>
-          </a:ln>
-        </p:spPr>
-        <p:style>
-          <a:lnRef idx="1">
-            <a:schemeClr val="accent1"/>
-          </a:lnRef>
-          <a:fillRef idx="3">
-            <a:schemeClr val="accent1"/>
-          </a:fillRef>
-          <a:effectRef idx="2">
-            <a:schemeClr val="accent1"/>
-          </a:effectRef>
-          <a:fontRef idx="minor">
-            <a:schemeClr val="lt1"/>
-          </a:fontRef>
-        </p:style>
-        <p:txBody>
-          <a:bodyPr rtlCol="0" anchor="ctr" tIns="50000" lIns="80000" rIns="60000"/>
-          <a:lstStyle/>
-          <a:p>
-            <a:pPr algn="l"/>
-            <a:r>
-              <a:rPr sz="1100" b="1">
-                <a:solidFill>
-                  <a:srgbClr val="E97132"/>
-                </a:solidFill>
-              </a:rPr>
-              <a:t>NAT_HGDPMXB</a:t>
-            </a:r>
-          </a:p>
-          <a:p>
-            <a:pPr algn="l"/>
-            <a:r>
-              <a:rPr sz="950">
-                <a:solidFill>
-                  <a:srgbClr val="1A1A1A"/>
-                </a:solidFill>
-              </a:rPr>
-              <a:t>+ 25 MXB</a:t>
-            </a:r>
-          </a:p>
-        </p:txBody>
-      </p:sp>
-      <p:sp>
-        <p:nvSpPr>
-          <p:cNvPr id="15" name="Rounded Rectangle 14"/>
-          <p:cNvSpPr/>
-          <p:nvPr/>
-        </p:nvSpPr>
-        <p:spPr>
-          <a:xfrm>
-            <a:off x="4526279" y="4572000"/>
-            <a:ext cx="1874519" cy="960120"/>
-          </a:xfrm>
-          <a:prstGeom prst="roundRect">
-            <a:avLst/>
-          </a:prstGeom>
-          <a:solidFill>
-            <a:srgbClr val="E8E8E8"/>
-          </a:solidFill>
-          <a:ln w="17780">
-            <a:solidFill>
-              <a:srgbClr val="E97132"/>
-            </a:solidFill>
-          </a:ln>
-        </p:spPr>
-        <p:style>
-          <a:lnRef idx="1">
-            <a:schemeClr val="accent1"/>
-          </a:lnRef>
-          <a:fillRef idx="3">
-            <a:schemeClr val="accent1"/>
-          </a:fillRef>
-          <a:effectRef idx="2">
-            <a:schemeClr val="accent1"/>
-          </a:effectRef>
-          <a:fontRef idx="minor">
-            <a:schemeClr val="lt1"/>
-          </a:fontRef>
-        </p:style>
-        <p:txBody>
-          <a:bodyPr rtlCol="0" anchor="ctr" tIns="50000" lIns="80000" rIns="60000"/>
-          <a:lstStyle/>
-          <a:p>
-            <a:pPr algn="l"/>
-            <a:r>
-              <a:rPr sz="1100" b="1">
-                <a:solidFill>
-                  <a:srgbClr val="E97132"/>
-                </a:solidFill>
-              </a:rPr>
-              <a:t>NAT_HGDPMXB_FULL</a:t>
-            </a:r>
-          </a:p>
-          <a:p>
-            <a:pPr algn="l"/>
-            <a:r>
-              <a:rPr sz="950">
-                <a:solidFill>
-                  <a:srgbClr val="1A1A1A"/>
-                </a:solidFill>
-              </a:rPr>
-              <a:t>+ 50 MXB</a:t>
-            </a:r>
-          </a:p>
-        </p:txBody>
-      </p:sp>
-      <p:sp>
-        <p:nvSpPr>
-          <p:cNvPr id="16" name="Rounded Rectangle 15"/>
-          <p:cNvSpPr/>
-          <p:nvPr/>
-        </p:nvSpPr>
-        <p:spPr>
-          <a:xfrm>
-            <a:off x="502920" y="5577840"/>
-            <a:ext cx="1874519" cy="960120"/>
-          </a:xfrm>
-          <a:prstGeom prst="roundRect">
-            <a:avLst/>
-          </a:prstGeom>
-          <a:solidFill>
-            <a:srgbClr val="E8E8E8"/>
-          </a:solidFill>
-          <a:ln w="17780">
-            <a:solidFill>
-              <a:srgbClr val="156082"/>
-            </a:solidFill>
-          </a:ln>
-        </p:spPr>
-        <p:style>
-          <a:lnRef idx="1">
-            <a:schemeClr val="accent1"/>
-          </a:lnRef>
-          <a:fillRef idx="3">
-            <a:schemeClr val="accent1"/>
-          </a:fillRef>
-          <a:effectRef idx="2">
-            <a:schemeClr val="accent1"/>
-          </a:effectRef>
-          <a:fontRef idx="minor">
-            <a:schemeClr val="lt1"/>
-          </a:fontRef>
-        </p:style>
-        <p:txBody>
-          <a:bodyPr rtlCol="0" anchor="ctr" tIns="50000" lIns="80000" rIns="60000"/>
-          <a:lstStyle/>
-          <a:p>
-            <a:pPr algn="l"/>
-            <a:r>
-              <a:rPr sz="1100" b="1">
+              <a:rPr sz="1500" i="0" b="1">
                 <a:solidFill>
                   <a:srgbClr val="156082"/>
                 </a:solidFill>
               </a:rPr>
-              <a:t>NAT_HOMOG</a:t>
-            </a:r>
-          </a:p>
-          <a:p>
-            <a:pPr algn="l"/>
-            <a:r>
-              <a:rPr sz="950">
-                <a:solidFill>
-                  <a:srgbClr val="1A1A1A"/>
-                </a:solidFill>
-              </a:rPr>
-              <a:t>ADMIXTURE-homog Q≥0.95</a:t>
-            </a:r>
-          </a:p>
-        </p:txBody>
-      </p:sp>
-      <p:sp>
-        <p:nvSpPr>
-          <p:cNvPr id="17" name="Rounded Rectangle 16"/>
-          <p:cNvSpPr/>
-          <p:nvPr/>
-        </p:nvSpPr>
-        <p:spPr>
-          <a:xfrm>
-            <a:off x="2514600" y="5577840"/>
-            <a:ext cx="1874519" cy="960120"/>
-          </a:xfrm>
-          <a:prstGeom prst="roundRect">
-            <a:avLst/>
-          </a:prstGeom>
-          <a:solidFill>
-            <a:srgbClr val="E8E8E8"/>
-          </a:solidFill>
-          <a:ln w="17780">
-            <a:solidFill>
-              <a:srgbClr val="196B24"/>
-            </a:solidFill>
-          </a:ln>
-        </p:spPr>
-        <p:style>
-          <a:lnRef idx="1">
-            <a:schemeClr val="accent1"/>
-          </a:lnRef>
-          <a:fillRef idx="3">
-            <a:schemeClr val="accent1"/>
-          </a:fillRef>
-          <a:effectRef idx="2">
-            <a:schemeClr val="accent1"/>
-          </a:effectRef>
-          <a:fontRef idx="minor">
-            <a:schemeClr val="lt1"/>
-          </a:fontRef>
-        </p:style>
-        <p:txBody>
-          <a:bodyPr rtlCol="0" anchor="ctr" tIns="50000" lIns="80000" rIns="60000"/>
-          <a:lstStyle/>
-          <a:p>
-            <a:pPr algn="l"/>
-            <a:r>
-              <a:rPr sz="1100" b="1">
-                <a:solidFill>
-                  <a:srgbClr val="196B24"/>
-                </a:solidFill>
-              </a:rPr>
-              <a:t>NAT_PEL</a:t>
-            </a:r>
-          </a:p>
-          <a:p>
-            <a:pPr algn="l"/>
-            <a:r>
-              <a:rPr sz="950">
-                <a:solidFill>
-                  <a:srgbClr val="1A1A1A"/>
-                </a:solidFill>
-              </a:rPr>
-              <a:t>adds 9 PEL (Peru)</a:t>
-            </a:r>
-          </a:p>
-        </p:txBody>
-      </p:sp>
-      <p:sp>
-        <p:nvSpPr>
-          <p:cNvPr id="18" name="Rounded Rectangle 17"/>
-          <p:cNvSpPr/>
-          <p:nvPr/>
-        </p:nvSpPr>
-        <p:spPr>
-          <a:xfrm>
-            <a:off x="4526279" y="5577840"/>
-            <a:ext cx="1874519" cy="960120"/>
-          </a:xfrm>
-          <a:prstGeom prst="roundRect">
-            <a:avLst/>
-          </a:prstGeom>
-          <a:solidFill>
-            <a:srgbClr val="E8E8E8"/>
-          </a:solidFill>
-          <a:ln w="17780">
-            <a:solidFill>
-              <a:srgbClr val="196B24"/>
-            </a:solidFill>
-          </a:ln>
-        </p:spPr>
-        <p:style>
-          <a:lnRef idx="1">
-            <a:schemeClr val="accent1"/>
-          </a:lnRef>
-          <a:fillRef idx="3">
-            <a:schemeClr val="accent1"/>
-          </a:fillRef>
-          <a:effectRef idx="2">
-            <a:schemeClr val="accent1"/>
-          </a:effectRef>
-          <a:fontRef idx="minor">
-            <a:schemeClr val="lt1"/>
-          </a:fontRef>
-        </p:style>
-        <p:txBody>
-          <a:bodyPr rtlCol="0" anchor="ctr" tIns="50000" lIns="80000" rIns="60000"/>
-          <a:lstStyle/>
-          <a:p>
-            <a:pPr algn="l"/>
-            <a:r>
-              <a:rPr sz="1100" b="1">
-                <a:solidFill>
-                  <a:srgbClr val="196B24"/>
-                </a:solidFill>
-              </a:rPr>
-              <a:t>NAT_PEL_EAS</a:t>
-            </a:r>
-          </a:p>
-          <a:p>
-            <a:pPr algn="l"/>
-            <a:r>
-              <a:rPr sz="950">
-                <a:solidFill>
-                  <a:srgbClr val="1A1A1A"/>
-                </a:solidFill>
-              </a:rPr>
-              <a:t>PEL + EAS outgroup</a:t>
-            </a:r>
-          </a:p>
-        </p:txBody>
-      </p:sp>
-      <p:sp>
-        <p:nvSpPr>
-          <p:cNvPr id="19" name="TextBox 18"/>
+              <a:t>MRD-positive B-ALL cases</a:t>
+            </a:r>
+          </a:p>
+        </p:txBody>
+      </p:sp>
+      <p:sp>
+        <p:nvSpPr>
+          <p:cNvPr id="10" name="TextBox 9"/>
           <p:cNvSpPr txBox="1"/>
           <p:nvPr/>
         </p:nvSpPr>
         <p:spPr>
           <a:xfrm>
-            <a:off x="6537960" y="4572000"/>
-            <a:ext cx="5212080" cy="320040"/>
+            <a:off x="6537960" y="2468880"/>
+            <a:ext cx="4846320" cy="2011680"/>
           </a:xfrm>
           <a:prstGeom prst="rect">
             <a:avLst/>
@@ -5483,26 +7914,37 @@
           <a:p>
             <a:pPr algn="l"/>
             <a:r>
-              <a:rPr sz="1300" i="0" b="1">
-                <a:solidFill>
-                  <a:srgbClr val="0E2841"/>
-                </a:solidFill>
-              </a:rPr>
-              <a:t>Two simulated admixed cohorts</a:t>
-            </a:r>
-          </a:p>
-        </p:txBody>
-      </p:sp>
-      <p:sp>
-        <p:nvSpPr>
-          <p:cNvPr id="20" name="TextBox 19"/>
+              <a:rPr sz="1200" i="0" b="0">
+                <a:solidFill>
+                  <a:srgbClr val="1A1A1A"/>
+                </a:solidFill>
+              </a:rPr>
+              <a:t>•  Latino:      HR consistent with prior COG reports</a:t>
+            </a:r>
+          </a:p>
+          <a:p>
+            <a:pPr algn="l"/>
+            <a:r>
+              <a:rPr sz="1200" i="0" b="0">
+                <a:solidFill>
+                  <a:srgbClr val="1A1A1A"/>
+                </a:solidFill>
+              </a:rPr>
+              <a:t>•  NL-Black:  HR consistent with prior COG reports</a:t>
+            </a:r>
+          </a:p>
+        </p:txBody>
+      </p:sp>
+      <p:sp>
+        <p:nvSpPr>
+          <p:cNvPr id="11" name="TextBox 10"/>
           <p:cNvSpPr txBox="1"/>
           <p:nvPr/>
         </p:nvSpPr>
         <p:spPr>
           <a:xfrm>
-            <a:off x="6537960" y="4937760"/>
-            <a:ext cx="5212080" cy="1508760"/>
+            <a:off x="6537960" y="4617720"/>
+            <a:ext cx="4846320" cy="822960"/>
           </a:xfrm>
           <a:prstGeom prst="rect">
             <a:avLst/>
@@ -5517,59 +7959,26 @@
           <a:p>
             <a:pPr algn="l"/>
             <a:r>
-              <a:rPr sz="1100" i="0" b="0">
-                <a:solidFill>
-                  <a:srgbClr val="1A1A1A"/>
-                </a:solidFill>
-              </a:rPr>
-              <a:t>•  Brasa track — 15% NAT / 60% EUR / 25% AFR</a:t>
-            </a:r>
-          </a:p>
-          <a:p>
-            <a:pPr algn="l"/>
-            <a:r>
-              <a:rPr sz="1100" i="0" b="0">
-                <a:solidFill>
-                  <a:srgbClr val="1A1A1A"/>
-                </a:solidFill>
-              </a:rPr>
-              <a:t>     (Brazilian-like ancestry proportions)</a:t>
-            </a:r>
-          </a:p>
-          <a:p>
-            <a:pPr algn="l"/>
-            <a:r>
-              <a:rPr sz="1100" i="0" b="0">
-                <a:solidFill>
-                  <a:srgbClr val="1A1A1A"/>
-                </a:solidFill>
-              </a:rPr>
-              <a:t>•  MXB track — Mexican-like ancestry proportions</a:t>
-            </a:r>
-          </a:p>
-          <a:p>
-            <a:pPr algn="l"/>
-            <a:r>
-              <a:rPr sz="1100" i="0" b="0">
-                <a:solidFill>
-                  <a:srgbClr val="1A1A1A"/>
-                </a:solidFill>
-              </a:rPr>
-              <a:t>     (tests whether MXB helps a Mexican cohort)</a:t>
-            </a:r>
-          </a:p>
-        </p:txBody>
-      </p:sp>
-      <p:sp>
-        <p:nvSpPr>
-          <p:cNvPr id="21" name="TextBox 20"/>
+              <a:rPr sz="1150" i="1" b="0">
+                <a:solidFill>
+                  <a:srgbClr val="666666"/>
+                </a:solidFill>
+              </a:rPr>
+              <a:t>Confirms known MRD-positive disparity in a contemporary cohort.</a:t>
+            </a:r>
+          </a:p>
+        </p:txBody>
+      </p:sp>
+      <p:sp>
+        <p:nvSpPr>
+          <p:cNvPr id="12" name="TextBox 11"/>
           <p:cNvSpPr txBox="1"/>
           <p:nvPr/>
         </p:nvSpPr>
         <p:spPr>
           <a:xfrm>
-            <a:off x="502920" y="6537960"/>
-            <a:ext cx="7315200" cy="274320"/>
+            <a:off x="502920" y="5760720"/>
+            <a:ext cx="11155680" cy="365760"/>
           </a:xfrm>
           <a:prstGeom prst="rect">
             <a:avLst/>
@@ -5582,28 +7991,28 @@
           </a:bodyPr>
           <a:lstStyle/>
           <a:p>
-            <a:pPr algn="l"/>
-            <a:r>
-              <a:rPr sz="900" i="0" b="0">
-                <a:solidFill>
-                  <a:srgbClr val="666666"/>
-                </a:solidFill>
-              </a:rPr>
-              <a:t>Christina Magyar  ·  Thesis committee, Aug 2026  ·  Methods</a:t>
-            </a:r>
-          </a:p>
-        </p:txBody>
-      </p:sp>
-      <p:sp>
-        <p:nvSpPr>
-          <p:cNvPr id="22" name="TextBox 21"/>
+            <a:pPr algn="ctr"/>
+            <a:r>
+              <a:rPr sz="1100" i="1" b="0">
+                <a:solidFill>
+                  <a:srgbClr val="0E2841"/>
+                </a:solidFill>
+              </a:rPr>
+              <a:t>Onwuka &amp; Magyar et al. — REDIAL Ethnic and Racial Survival Disparities by MRD Status — under revision for Leukemia (submission May 2026)</a:t>
+            </a:r>
+          </a:p>
+        </p:txBody>
+      </p:sp>
+      <p:sp>
+        <p:nvSpPr>
+          <p:cNvPr id="13" name="TextBox 12"/>
           <p:cNvSpPr txBox="1"/>
           <p:nvPr/>
         </p:nvSpPr>
         <p:spPr>
           <a:xfrm>
-            <a:off x="11338560" y="6537960"/>
-            <a:ext cx="548640" cy="274320"/>
+            <a:off x="502920" y="6537960"/>
+            <a:ext cx="7315200" cy="274320"/>
           </a:xfrm>
           <a:prstGeom prst="rect">
             <a:avLst/>
@@ -5616,6 +8025,40 @@
           </a:bodyPr>
           <a:lstStyle/>
           <a:p>
+            <a:pPr algn="l"/>
+            <a:r>
+              <a:rPr sz="900" i="0" b="0">
+                <a:solidFill>
+                  <a:srgbClr val="666666"/>
+                </a:solidFill>
+              </a:rPr>
+              <a:t>Christina Magyar  ·  Thesis committee, Aug 2026  ·  Aim 1 · REDIAL</a:t>
+            </a:r>
+          </a:p>
+        </p:txBody>
+      </p:sp>
+      <p:sp>
+        <p:nvSpPr>
+          <p:cNvPr id="14" name="TextBox 13"/>
+          <p:cNvSpPr txBox="1"/>
+          <p:nvPr/>
+        </p:nvSpPr>
+        <p:spPr>
+          <a:xfrm>
+            <a:off x="11338560" y="6537960"/>
+            <a:ext cx="548640" cy="274320"/>
+          </a:xfrm>
+          <a:prstGeom prst="rect">
+            <a:avLst/>
+          </a:prstGeom>
+          <a:noFill/>
+        </p:spPr>
+        <p:txBody>
+          <a:bodyPr wrap="square" lIns="0" rIns="0" tIns="0" bIns="0">
+            <a:spAutoFit/>
+          </a:bodyPr>
+          <a:lstStyle/>
+          <a:p>
             <a:pPr algn="r"/>
             <a:r>
               <a:rPr sz="900" i="0" b="0">
@@ -5623,7 +8066,7 @@
                   <a:srgbClr val="666666"/>
                 </a:solidFill>
               </a:rPr>
-              <a:t>3 / 7</a:t>
+              <a:t>3 / 12</a:t>
             </a:r>
           </a:p>
         </p:txBody>
@@ -5674,7 +8117,7 @@
                   <a:srgbClr val="0E2841"/>
                 </a:solidFill>
               </a:rPr>
-              <a:t>Panel choice moves AMR recall by ~3%; EUR and AFR sit near ceiling.</a:t>
+              <a:t>Public Amerindigenous references are ~7× smaller than other continents.</a:t>
             </a:r>
           </a:p>
         </p:txBody>
@@ -5708,14 +8151,14 @@
                   <a:srgbClr val="666666"/>
                 </a:solidFill>
               </a:rPr>
-              <a:t>Weighted per-hap recall by ancestry, WGS density, chr20-22 pilot</a:t>
+              <a:t>HGDP + 1000 Genomes reference haplotypes, by continental group</a:t>
             </a:r>
           </a:p>
         </p:txBody>
       </p:sp>
       <p:pic>
         <p:nvPicPr>
-          <p:cNvPr id="4" name="Picture 3" descr="fig_wgs_all_ancestry.png"/>
+          <p:cNvPr id="4" name="Picture 3" descr="fig_amr_disparity.png"/>
           <p:cNvPicPr>
             <a:picLocks noChangeAspect="1"/>
           </p:cNvPicPr>
@@ -5729,8 +8172,8 @@
         </p:blipFill>
         <p:spPr>
           <a:xfrm>
-            <a:off x="502920" y="1417320"/>
-            <a:ext cx="11155680" cy="5492027"/>
+            <a:off x="365760" y="1508760"/>
+            <a:ext cx="11430000" cy="5182945"/>
           </a:xfrm>
           <a:prstGeom prst="rect">
             <a:avLst/>
@@ -5745,8 +8188,8 @@
         </p:nvSpPr>
         <p:spPr>
           <a:xfrm>
-            <a:off x="502920" y="6172200"/>
-            <a:ext cx="11155680" cy="320040"/>
+            <a:off x="502920" y="6080760"/>
+            <a:ext cx="11155680" cy="411480"/>
           </a:xfrm>
           <a:prstGeom prst="rect">
             <a:avLst/>
@@ -5761,12 +8204,12 @@
           <a:p>
             <a:pPr algn="l"/>
             <a:r>
-              <a:rPr sz="1200" i="1" b="0">
+              <a:rPr sz="1100" i="0" b="0">
                 <a:solidFill>
                   <a:srgbClr val="1A1A1A"/>
                 </a:solidFill>
               </a:rPr>
-              <a:t>→  AMR is where reference-panel choice actually matters — so the rest of the deck focuses on AMR recall.</a:t>
+              <a:t>Adding 50 MX Biobank WGS samples brings AMR to 88 — still leaves Central America, Southern Cone, Amazon, Caribbean underrepresented.</a:t>
             </a:r>
           </a:p>
         </p:txBody>
@@ -5800,7 +8243,7 @@
                   <a:srgbClr val="666666"/>
                 </a:solidFill>
               </a:rPr>
-              <a:t>Christina Magyar  ·  Thesis committee, Aug 2026  ·  Result overview</a:t>
+              <a:t>Christina Magyar  ·  Thesis committee, Aug 2026  ·  Aim 2 · Motivation</a:t>
             </a:r>
           </a:p>
         </p:txBody>
@@ -5834,7 +8277,7 @@
                   <a:srgbClr val="666666"/>
                 </a:solidFill>
               </a:rPr>
-              <a:t>4 / 7</a:t>
+              <a:t>4 / 12</a:t>
             </a:r>
           </a:p>
         </p:txBody>
@@ -5885,21 +8328,585 @@
                   <a:srgbClr val="0E2841"/>
                 </a:solidFill>
               </a:rPr>
-              <a:t>Best reference panel depends on the target cohort's composition.</a:t>
-            </a:r>
-          </a:p>
-        </p:txBody>
-      </p:sp>
-      <p:sp>
-        <p:nvSpPr>
-          <p:cNvPr id="3" name="TextBox 2"/>
+              <a:t>We simulated admixed cohorts to measure per-hap LAI recall.</a:t>
+            </a:r>
+          </a:p>
+        </p:txBody>
+      </p:sp>
+      <p:sp>
+        <p:nvSpPr>
+          <p:cNvPr id="3" name="Rounded Rectangle 2"/>
+          <p:cNvSpPr/>
+          <p:nvPr/>
+        </p:nvSpPr>
+        <p:spPr>
+          <a:xfrm>
+            <a:off x="449427" y="1920240"/>
+            <a:ext cx="2148840" cy="1920240"/>
+          </a:xfrm>
+          <a:prstGeom prst="roundRect">
+            <a:avLst/>
+          </a:prstGeom>
+          <a:solidFill>
+            <a:srgbClr val="E8E8E8"/>
+          </a:solidFill>
+          <a:ln w="6350">
+            <a:solidFill>
+              <a:srgbClr val="666666"/>
+            </a:solidFill>
+          </a:ln>
+        </p:spPr>
+        <p:style>
+          <a:lnRef idx="1">
+            <a:schemeClr val="accent1"/>
+          </a:lnRef>
+          <a:fillRef idx="3">
+            <a:schemeClr val="accent1"/>
+          </a:fillRef>
+          <a:effectRef idx="2">
+            <a:schemeClr val="accent1"/>
+          </a:effectRef>
+          <a:fontRef idx="minor">
+            <a:schemeClr val="lt1"/>
+          </a:fontRef>
+        </p:style>
+        <p:txBody>
+          <a:bodyPr rtlCol="0" anchor="ctr" wrap="square" tIns="80000" lIns="60000" rIns="60000"/>
+          <a:lstStyle/>
+          <a:p>
+            <a:pPr algn="ctr"/>
+            <a:r>
+              <a:rPr sz="1300" b="1">
+                <a:solidFill>
+                  <a:srgbClr val="0E2841"/>
+                </a:solidFill>
+              </a:rPr>
+              <a:t>Reference haps</a:t>
+            </a:r>
+          </a:p>
+          <a:p>
+            <a:pPr algn="ctr"/>
+            <a:r>
+              <a:rPr sz="1000">
+                <a:solidFill>
+                  <a:srgbClr val="1A1A1A"/>
+                </a:solidFill>
+              </a:rPr>
+              <a:t>HGDP + 1KG</a:t>
+            </a:r>
+            <a:br/>
+            <a:r>
+              <a:rPr sz="1000">
+                <a:solidFill>
+                  <a:srgbClr val="1A1A1A"/>
+                </a:solidFill>
+              </a:rPr>
+              <a:t>+ 50 MXB WGS</a:t>
+            </a:r>
+            <a:br/>
+            <a:r>
+              <a:rPr sz="1000">
+                <a:solidFill>
+                  <a:srgbClr val="1A1A1A"/>
+                </a:solidFill>
+              </a:rPr>
+              <a:t>(6 panel combos)</a:t>
+            </a:r>
+          </a:p>
+        </p:txBody>
+      </p:sp>
+      <p:sp>
+        <p:nvSpPr>
+          <p:cNvPr id="4" name="Right Arrow 3"/>
+          <p:cNvSpPr/>
+          <p:nvPr/>
+        </p:nvSpPr>
+        <p:spPr>
+          <a:xfrm>
+            <a:off x="2602839" y="2761488"/>
+            <a:ext cx="128015" cy="256032"/>
+          </a:xfrm>
+          <a:prstGeom prst="rightArrow">
+            <a:avLst/>
+          </a:prstGeom>
+          <a:solidFill>
+            <a:srgbClr val="666666"/>
+          </a:solidFill>
+          <a:ln>
+            <a:noFill/>
+          </a:ln>
+        </p:spPr>
+        <p:style>
+          <a:lnRef idx="1">
+            <a:schemeClr val="accent1"/>
+          </a:lnRef>
+          <a:fillRef idx="3">
+            <a:schemeClr val="accent1"/>
+          </a:fillRef>
+          <a:effectRef idx="2">
+            <a:schemeClr val="accent1"/>
+          </a:effectRef>
+          <a:fontRef idx="minor">
+            <a:schemeClr val="lt1"/>
+          </a:fontRef>
+        </p:style>
+        <p:txBody>
+          <a:bodyPr rtlCol="0" anchor="ctr"/>
+          <a:lstStyle/>
+          <a:p>
+            <a:pPr algn="ctr"/>
+          </a:p>
+        </p:txBody>
+      </p:sp>
+      <p:sp>
+        <p:nvSpPr>
+          <p:cNvPr id="5" name="Rounded Rectangle 4"/>
+          <p:cNvSpPr/>
+          <p:nvPr/>
+        </p:nvSpPr>
+        <p:spPr>
+          <a:xfrm>
+            <a:off x="2735427" y="1920240"/>
+            <a:ext cx="2148840" cy="1920240"/>
+          </a:xfrm>
+          <a:prstGeom prst="roundRect">
+            <a:avLst/>
+          </a:prstGeom>
+          <a:solidFill>
+            <a:srgbClr val="E8E8E8"/>
+          </a:solidFill>
+          <a:ln w="6350">
+            <a:solidFill>
+              <a:srgbClr val="666666"/>
+            </a:solidFill>
+          </a:ln>
+        </p:spPr>
+        <p:style>
+          <a:lnRef idx="1">
+            <a:schemeClr val="accent1"/>
+          </a:lnRef>
+          <a:fillRef idx="3">
+            <a:schemeClr val="accent1"/>
+          </a:fillRef>
+          <a:effectRef idx="2">
+            <a:schemeClr val="accent1"/>
+          </a:effectRef>
+          <a:fontRef idx="minor">
+            <a:schemeClr val="lt1"/>
+          </a:fontRef>
+        </p:style>
+        <p:txBody>
+          <a:bodyPr rtlCol="0" anchor="ctr" wrap="square" tIns="80000" lIns="60000" rIns="60000"/>
+          <a:lstStyle/>
+          <a:p>
+            <a:pPr algn="ctr"/>
+            <a:r>
+              <a:rPr sz="1300" b="1">
+                <a:solidFill>
+                  <a:srgbClr val="0E2841"/>
+                </a:solidFill>
+              </a:rPr>
+              <a:t>Phasing</a:t>
+            </a:r>
+          </a:p>
+          <a:p>
+            <a:pPr algn="ctr"/>
+            <a:r>
+              <a:rPr sz="1000">
+                <a:solidFill>
+                  <a:srgbClr val="1A1A1A"/>
+                </a:solidFill>
+              </a:rPr>
+              <a:t>SHAPEIT5</a:t>
+            </a:r>
+            <a:br/>
+            <a:r>
+              <a:rPr sz="1000">
+                <a:solidFill>
+                  <a:srgbClr val="1A1A1A"/>
+                </a:solidFill>
+              </a:rPr>
+              <a:t>population phasing</a:t>
+            </a:r>
+          </a:p>
+        </p:txBody>
+      </p:sp>
+      <p:sp>
+        <p:nvSpPr>
+          <p:cNvPr id="6" name="Right Arrow 5"/>
+          <p:cNvSpPr/>
+          <p:nvPr/>
+        </p:nvSpPr>
+        <p:spPr>
+          <a:xfrm>
+            <a:off x="4888839" y="2761488"/>
+            <a:ext cx="128015" cy="256032"/>
+          </a:xfrm>
+          <a:prstGeom prst="rightArrow">
+            <a:avLst/>
+          </a:prstGeom>
+          <a:solidFill>
+            <a:srgbClr val="666666"/>
+          </a:solidFill>
+          <a:ln>
+            <a:noFill/>
+          </a:ln>
+        </p:spPr>
+        <p:style>
+          <a:lnRef idx="1">
+            <a:schemeClr val="accent1"/>
+          </a:lnRef>
+          <a:fillRef idx="3">
+            <a:schemeClr val="accent1"/>
+          </a:fillRef>
+          <a:effectRef idx="2">
+            <a:schemeClr val="accent1"/>
+          </a:effectRef>
+          <a:fontRef idx="minor">
+            <a:schemeClr val="lt1"/>
+          </a:fontRef>
+        </p:style>
+        <p:txBody>
+          <a:bodyPr rtlCol="0" anchor="ctr"/>
+          <a:lstStyle/>
+          <a:p>
+            <a:pPr algn="ctr"/>
+          </a:p>
+        </p:txBody>
+      </p:sp>
+      <p:sp>
+        <p:nvSpPr>
+          <p:cNvPr id="7" name="Rounded Rectangle 6"/>
+          <p:cNvSpPr/>
+          <p:nvPr/>
+        </p:nvSpPr>
+        <p:spPr>
+          <a:xfrm>
+            <a:off x="5021427" y="1920240"/>
+            <a:ext cx="2148840" cy="1920240"/>
+          </a:xfrm>
+          <a:prstGeom prst="roundRect">
+            <a:avLst/>
+          </a:prstGeom>
+          <a:solidFill>
+            <a:srgbClr val="E8E8E8"/>
+          </a:solidFill>
+          <a:ln w="6350">
+            <a:solidFill>
+              <a:srgbClr val="666666"/>
+            </a:solidFill>
+          </a:ln>
+        </p:spPr>
+        <p:style>
+          <a:lnRef idx="1">
+            <a:schemeClr val="accent1"/>
+          </a:lnRef>
+          <a:fillRef idx="3">
+            <a:schemeClr val="accent1"/>
+          </a:fillRef>
+          <a:effectRef idx="2">
+            <a:schemeClr val="accent1"/>
+          </a:effectRef>
+          <a:fontRef idx="minor">
+            <a:schemeClr val="lt1"/>
+          </a:fontRef>
+        </p:style>
+        <p:txBody>
+          <a:bodyPr rtlCol="0" anchor="ctr" wrap="square" tIns="80000" lIns="60000" rIns="60000"/>
+          <a:lstStyle/>
+          <a:p>
+            <a:pPr algn="ctr"/>
+            <a:r>
+              <a:rPr sz="1300" b="1">
+                <a:solidFill>
+                  <a:srgbClr val="0E2841"/>
+                </a:solidFill>
+              </a:rPr>
+              <a:t>Simulate admixed</a:t>
+            </a:r>
+          </a:p>
+          <a:p>
+            <a:pPr algn="ctr"/>
+            <a:r>
+              <a:rPr sz="1000">
+                <a:solidFill>
+                  <a:srgbClr val="1A1A1A"/>
+                </a:solidFill>
+              </a:rPr>
+              <a:t>admix-simu</a:t>
+            </a:r>
+            <a:br/>
+            <a:r>
+              <a:rPr sz="1000">
+                <a:solidFill>
+                  <a:srgbClr val="1A1A1A"/>
+                </a:solidFill>
+              </a:rPr>
+              <a:t>gen=12, n=30</a:t>
+            </a:r>
+            <a:br/>
+            <a:r>
+              <a:rPr sz="1000">
+                <a:solidFill>
+                  <a:srgbClr val="1A1A1A"/>
+                </a:solidFill>
+              </a:rPr>
+              <a:t>Brasa &amp; MXB tracks</a:t>
+            </a:r>
+          </a:p>
+        </p:txBody>
+      </p:sp>
+      <p:sp>
+        <p:nvSpPr>
+          <p:cNvPr id="8" name="Right Arrow 7"/>
+          <p:cNvSpPr/>
+          <p:nvPr/>
+        </p:nvSpPr>
+        <p:spPr>
+          <a:xfrm>
+            <a:off x="7174839" y="2761488"/>
+            <a:ext cx="128015" cy="256032"/>
+          </a:xfrm>
+          <a:prstGeom prst="rightArrow">
+            <a:avLst/>
+          </a:prstGeom>
+          <a:solidFill>
+            <a:srgbClr val="666666"/>
+          </a:solidFill>
+          <a:ln>
+            <a:noFill/>
+          </a:ln>
+        </p:spPr>
+        <p:style>
+          <a:lnRef idx="1">
+            <a:schemeClr val="accent1"/>
+          </a:lnRef>
+          <a:fillRef idx="3">
+            <a:schemeClr val="accent1"/>
+          </a:fillRef>
+          <a:effectRef idx="2">
+            <a:schemeClr val="accent1"/>
+          </a:effectRef>
+          <a:fontRef idx="minor">
+            <a:schemeClr val="lt1"/>
+          </a:fontRef>
+        </p:style>
+        <p:txBody>
+          <a:bodyPr rtlCol="0" anchor="ctr"/>
+          <a:lstStyle/>
+          <a:p>
+            <a:pPr algn="ctr"/>
+          </a:p>
+        </p:txBody>
+      </p:sp>
+      <p:sp>
+        <p:nvSpPr>
+          <p:cNvPr id="9" name="Rounded Rectangle 8"/>
+          <p:cNvSpPr/>
+          <p:nvPr/>
+        </p:nvSpPr>
+        <p:spPr>
+          <a:xfrm>
+            <a:off x="7307427" y="1920240"/>
+            <a:ext cx="2148840" cy="1920240"/>
+          </a:xfrm>
+          <a:prstGeom prst="roundRect">
+            <a:avLst/>
+          </a:prstGeom>
+          <a:solidFill>
+            <a:srgbClr val="E8E8E8"/>
+          </a:solidFill>
+          <a:ln w="6350">
+            <a:solidFill>
+              <a:srgbClr val="666666"/>
+            </a:solidFill>
+          </a:ln>
+        </p:spPr>
+        <p:style>
+          <a:lnRef idx="1">
+            <a:schemeClr val="accent1"/>
+          </a:lnRef>
+          <a:fillRef idx="3">
+            <a:schemeClr val="accent1"/>
+          </a:fillRef>
+          <a:effectRef idx="2">
+            <a:schemeClr val="accent1"/>
+          </a:effectRef>
+          <a:fontRef idx="minor">
+            <a:schemeClr val="lt1"/>
+          </a:fontRef>
+        </p:style>
+        <p:txBody>
+          <a:bodyPr rtlCol="0" anchor="ctr" wrap="square" tIns="80000" lIns="60000" rIns="60000"/>
+          <a:lstStyle/>
+          <a:p>
+            <a:pPr algn="ctr"/>
+            <a:r>
+              <a:rPr sz="1300" b="1">
+                <a:solidFill>
+                  <a:srgbClr val="0E2841"/>
+                </a:solidFill>
+              </a:rPr>
+              <a:t>Local ancestry</a:t>
+            </a:r>
+          </a:p>
+          <a:p>
+            <a:pPr algn="ctr"/>
+            <a:r>
+              <a:rPr sz="1000">
+                <a:solidFill>
+                  <a:srgbClr val="1A1A1A"/>
+                </a:solidFill>
+              </a:rPr>
+              <a:t>RFMix v1 TrioPhased</a:t>
+            </a:r>
+            <a:br/>
+            <a:r>
+              <a:rPr sz="1000">
+                <a:solidFill>
+                  <a:srgbClr val="1A1A1A"/>
+                </a:solidFill>
+              </a:rPr>
+              <a:t>22 chromosomes</a:t>
+            </a:r>
+          </a:p>
+        </p:txBody>
+      </p:sp>
+      <p:sp>
+        <p:nvSpPr>
+          <p:cNvPr id="10" name="Right Arrow 9"/>
+          <p:cNvSpPr/>
+          <p:nvPr/>
+        </p:nvSpPr>
+        <p:spPr>
+          <a:xfrm>
+            <a:off x="9460839" y="2761488"/>
+            <a:ext cx="128015" cy="256032"/>
+          </a:xfrm>
+          <a:prstGeom prst="rightArrow">
+            <a:avLst/>
+          </a:prstGeom>
+          <a:solidFill>
+            <a:srgbClr val="666666"/>
+          </a:solidFill>
+          <a:ln>
+            <a:noFill/>
+          </a:ln>
+        </p:spPr>
+        <p:style>
+          <a:lnRef idx="1">
+            <a:schemeClr val="accent1"/>
+          </a:lnRef>
+          <a:fillRef idx="3">
+            <a:schemeClr val="accent1"/>
+          </a:fillRef>
+          <a:effectRef idx="2">
+            <a:schemeClr val="accent1"/>
+          </a:effectRef>
+          <a:fontRef idx="minor">
+            <a:schemeClr val="lt1"/>
+          </a:fontRef>
+        </p:style>
+        <p:txBody>
+          <a:bodyPr rtlCol="0" anchor="ctr"/>
+          <a:lstStyle/>
+          <a:p>
+            <a:pPr algn="ctr"/>
+          </a:p>
+        </p:txBody>
+      </p:sp>
+      <p:sp>
+        <p:nvSpPr>
+          <p:cNvPr id="11" name="Rounded Rectangle 10"/>
+          <p:cNvSpPr/>
+          <p:nvPr/>
+        </p:nvSpPr>
+        <p:spPr>
+          <a:xfrm>
+            <a:off x="9593427" y="1920240"/>
+            <a:ext cx="2148840" cy="1920240"/>
+          </a:xfrm>
+          <a:prstGeom prst="roundRect">
+            <a:avLst/>
+          </a:prstGeom>
+          <a:solidFill>
+            <a:srgbClr val="E8E8E8"/>
+          </a:solidFill>
+          <a:ln w="6350">
+            <a:solidFill>
+              <a:srgbClr val="666666"/>
+            </a:solidFill>
+          </a:ln>
+        </p:spPr>
+        <p:style>
+          <a:lnRef idx="1">
+            <a:schemeClr val="accent1"/>
+          </a:lnRef>
+          <a:fillRef idx="3">
+            <a:schemeClr val="accent1"/>
+          </a:fillRef>
+          <a:effectRef idx="2">
+            <a:schemeClr val="accent1"/>
+          </a:effectRef>
+          <a:fontRef idx="minor">
+            <a:schemeClr val="lt1"/>
+          </a:fontRef>
+        </p:style>
+        <p:txBody>
+          <a:bodyPr rtlCol="0" anchor="ctr" wrap="square" tIns="80000" lIns="60000" rIns="60000"/>
+          <a:lstStyle/>
+          <a:p>
+            <a:pPr algn="ctr"/>
+            <a:r>
+              <a:rPr sz="1300" b="1">
+                <a:solidFill>
+                  <a:srgbClr val="0E2841"/>
+                </a:solidFill>
+              </a:rPr>
+              <a:t>Score</a:t>
+            </a:r>
+          </a:p>
+          <a:p>
+            <a:pPr algn="ctr"/>
+            <a:r>
+              <a:rPr sz="1000">
+                <a:solidFill>
+                  <a:srgbClr val="1A1A1A"/>
+                </a:solidFill>
+              </a:rPr>
+              <a:t>per-hap recall</a:t>
+            </a:r>
+            <a:br/>
+            <a:r>
+              <a:rPr sz="1000">
+                <a:solidFill>
+                  <a:srgbClr val="1A1A1A"/>
+                </a:solidFill>
+              </a:rPr>
+              <a:t>vs known truth</a:t>
+            </a:r>
+            <a:br/>
+            <a:r>
+              <a:rPr sz="1000">
+                <a:solidFill>
+                  <a:srgbClr val="1A1A1A"/>
+                </a:solidFill>
+              </a:rPr>
+              <a:t>weighted concordance / F1</a:t>
+            </a:r>
+          </a:p>
+        </p:txBody>
+      </p:sp>
+      <p:sp>
+        <p:nvSpPr>
+          <p:cNvPr id="12" name="TextBox 11"/>
           <p:cNvSpPr txBox="1"/>
           <p:nvPr/>
         </p:nvSpPr>
         <p:spPr>
           <a:xfrm>
-            <a:off x="502920" y="1051560"/>
-            <a:ext cx="11155680" cy="365760"/>
+            <a:off x="502920" y="4160520"/>
+            <a:ext cx="11155680" cy="320040"/>
           </a:xfrm>
           <a:prstGeom prst="rect">
             <a:avLst/>
@@ -5914,50 +8921,410 @@
           <a:p>
             <a:pPr algn="l"/>
             <a:r>
-              <a:rPr sz="1200" i="1" b="0">
+              <a:rPr sz="1300" i="0" b="1">
+                <a:solidFill>
+                  <a:srgbClr val="0E2841"/>
+                </a:solidFill>
+              </a:rPr>
+              <a:t>Six reference-panel combinations tested</a:t>
+            </a:r>
+          </a:p>
+        </p:txBody>
+      </p:sp>
+      <p:sp>
+        <p:nvSpPr>
+          <p:cNvPr id="13" name="Rounded Rectangle 12"/>
+          <p:cNvSpPr/>
+          <p:nvPr/>
+        </p:nvSpPr>
+        <p:spPr>
+          <a:xfrm>
+            <a:off x="502920" y="4572000"/>
+            <a:ext cx="1874519" cy="960120"/>
+          </a:xfrm>
+          <a:prstGeom prst="roundRect">
+            <a:avLst/>
+          </a:prstGeom>
+          <a:solidFill>
+            <a:srgbClr val="E8E8E8"/>
+          </a:solidFill>
+          <a:ln w="17780">
+            <a:solidFill>
+              <a:srgbClr val="666666"/>
+            </a:solidFill>
+          </a:ln>
+        </p:spPr>
+        <p:style>
+          <a:lnRef idx="1">
+            <a:schemeClr val="accent1"/>
+          </a:lnRef>
+          <a:fillRef idx="3">
+            <a:schemeClr val="accent1"/>
+          </a:fillRef>
+          <a:effectRef idx="2">
+            <a:schemeClr val="accent1"/>
+          </a:effectRef>
+          <a:fontRef idx="minor">
+            <a:schemeClr val="lt1"/>
+          </a:fontRef>
+        </p:style>
+        <p:txBody>
+          <a:bodyPr rtlCol="0" anchor="ctr" tIns="50000" lIns="80000" rIns="60000"/>
+          <a:lstStyle/>
+          <a:p>
+            <a:pPr algn="l"/>
+            <a:r>
+              <a:rPr sz="1100" b="1">
                 <a:solidFill>
                   <a:srgbClr val="666666"/>
                 </a:solidFill>
               </a:rPr>
-              <a:t>Weighted NAT-ancestry recall, WGS density, chr20-22 pilot</a:t>
-            </a:r>
-          </a:p>
-        </p:txBody>
-      </p:sp>
-      <p:pic>
-        <p:nvPicPr>
-          <p:cNvPr id="4" name="Picture 3" descr="fig_wgs_panels.png"/>
-          <p:cNvPicPr>
-            <a:picLocks noChangeAspect="1"/>
-          </p:cNvPicPr>
-          <p:nvPr/>
-        </p:nvPicPr>
-        <p:blipFill>
-          <a:blip r:embed="rId2"/>
-          <a:stretch>
-            <a:fillRect/>
-          </a:stretch>
-        </p:blipFill>
-        <p:spPr>
-          <a:xfrm>
-            <a:off x="502920" y="1508760"/>
-            <a:ext cx="7498079" cy="3599078"/>
-          </a:xfrm>
-          <a:prstGeom prst="rect">
-            <a:avLst/>
-          </a:prstGeom>
-        </p:spPr>
-      </p:pic>
-      <p:sp>
-        <p:nvSpPr>
-          <p:cNvPr id="5" name="TextBox 4"/>
+              <a:t>NAT_HGDP</a:t>
+            </a:r>
+          </a:p>
+          <a:p>
+            <a:pPr algn="l"/>
+            <a:r>
+              <a:rPr sz="950">
+                <a:solidFill>
+                  <a:srgbClr val="1A1A1A"/>
+                </a:solidFill>
+              </a:rPr>
+              <a:t>26 HGDP + 5 LP</a:t>
+            </a:r>
+          </a:p>
+        </p:txBody>
+      </p:sp>
+      <p:sp>
+        <p:nvSpPr>
+          <p:cNvPr id="14" name="Rounded Rectangle 13"/>
+          <p:cNvSpPr/>
+          <p:nvPr/>
+        </p:nvSpPr>
+        <p:spPr>
+          <a:xfrm>
+            <a:off x="2514600" y="4572000"/>
+            <a:ext cx="1874519" cy="960120"/>
+          </a:xfrm>
+          <a:prstGeom prst="roundRect">
+            <a:avLst/>
+          </a:prstGeom>
+          <a:solidFill>
+            <a:srgbClr val="E8E8E8"/>
+          </a:solidFill>
+          <a:ln w="17780">
+            <a:solidFill>
+              <a:srgbClr val="E97132"/>
+            </a:solidFill>
+          </a:ln>
+        </p:spPr>
+        <p:style>
+          <a:lnRef idx="1">
+            <a:schemeClr val="accent1"/>
+          </a:lnRef>
+          <a:fillRef idx="3">
+            <a:schemeClr val="accent1"/>
+          </a:fillRef>
+          <a:effectRef idx="2">
+            <a:schemeClr val="accent1"/>
+          </a:effectRef>
+          <a:fontRef idx="minor">
+            <a:schemeClr val="lt1"/>
+          </a:fontRef>
+        </p:style>
+        <p:txBody>
+          <a:bodyPr rtlCol="0" anchor="ctr" tIns="50000" lIns="80000" rIns="60000"/>
+          <a:lstStyle/>
+          <a:p>
+            <a:pPr algn="l"/>
+            <a:r>
+              <a:rPr sz="1100" b="1">
+                <a:solidFill>
+                  <a:srgbClr val="E97132"/>
+                </a:solidFill>
+              </a:rPr>
+              <a:t>NAT_HGDPMXB</a:t>
+            </a:r>
+          </a:p>
+          <a:p>
+            <a:pPr algn="l"/>
+            <a:r>
+              <a:rPr sz="950">
+                <a:solidFill>
+                  <a:srgbClr val="1A1A1A"/>
+                </a:solidFill>
+              </a:rPr>
+              <a:t>+ 25 MXB</a:t>
+            </a:r>
+          </a:p>
+        </p:txBody>
+      </p:sp>
+      <p:sp>
+        <p:nvSpPr>
+          <p:cNvPr id="15" name="Rounded Rectangle 14"/>
+          <p:cNvSpPr/>
+          <p:nvPr/>
+        </p:nvSpPr>
+        <p:spPr>
+          <a:xfrm>
+            <a:off x="4526279" y="4572000"/>
+            <a:ext cx="1874519" cy="960120"/>
+          </a:xfrm>
+          <a:prstGeom prst="roundRect">
+            <a:avLst/>
+          </a:prstGeom>
+          <a:solidFill>
+            <a:srgbClr val="E8E8E8"/>
+          </a:solidFill>
+          <a:ln w="17780">
+            <a:solidFill>
+              <a:srgbClr val="E97132"/>
+            </a:solidFill>
+          </a:ln>
+        </p:spPr>
+        <p:style>
+          <a:lnRef idx="1">
+            <a:schemeClr val="accent1"/>
+          </a:lnRef>
+          <a:fillRef idx="3">
+            <a:schemeClr val="accent1"/>
+          </a:fillRef>
+          <a:effectRef idx="2">
+            <a:schemeClr val="accent1"/>
+          </a:effectRef>
+          <a:fontRef idx="minor">
+            <a:schemeClr val="lt1"/>
+          </a:fontRef>
+        </p:style>
+        <p:txBody>
+          <a:bodyPr rtlCol="0" anchor="ctr" tIns="50000" lIns="80000" rIns="60000"/>
+          <a:lstStyle/>
+          <a:p>
+            <a:pPr algn="l"/>
+            <a:r>
+              <a:rPr sz="1100" b="1">
+                <a:solidFill>
+                  <a:srgbClr val="E97132"/>
+                </a:solidFill>
+              </a:rPr>
+              <a:t>NAT_HGDPMXB_FULL</a:t>
+            </a:r>
+          </a:p>
+          <a:p>
+            <a:pPr algn="l"/>
+            <a:r>
+              <a:rPr sz="950">
+                <a:solidFill>
+                  <a:srgbClr val="1A1A1A"/>
+                </a:solidFill>
+              </a:rPr>
+              <a:t>+ 50 MXB</a:t>
+            </a:r>
+          </a:p>
+        </p:txBody>
+      </p:sp>
+      <p:sp>
+        <p:nvSpPr>
+          <p:cNvPr id="16" name="Rounded Rectangle 15"/>
+          <p:cNvSpPr/>
+          <p:nvPr/>
+        </p:nvSpPr>
+        <p:spPr>
+          <a:xfrm>
+            <a:off x="502920" y="5577840"/>
+            <a:ext cx="1874519" cy="960120"/>
+          </a:xfrm>
+          <a:prstGeom prst="roundRect">
+            <a:avLst/>
+          </a:prstGeom>
+          <a:solidFill>
+            <a:srgbClr val="E8E8E8"/>
+          </a:solidFill>
+          <a:ln w="17780">
+            <a:solidFill>
+              <a:srgbClr val="156082"/>
+            </a:solidFill>
+          </a:ln>
+        </p:spPr>
+        <p:style>
+          <a:lnRef idx="1">
+            <a:schemeClr val="accent1"/>
+          </a:lnRef>
+          <a:fillRef idx="3">
+            <a:schemeClr val="accent1"/>
+          </a:fillRef>
+          <a:effectRef idx="2">
+            <a:schemeClr val="accent1"/>
+          </a:effectRef>
+          <a:fontRef idx="minor">
+            <a:schemeClr val="lt1"/>
+          </a:fontRef>
+        </p:style>
+        <p:txBody>
+          <a:bodyPr rtlCol="0" anchor="ctr" tIns="50000" lIns="80000" rIns="60000"/>
+          <a:lstStyle/>
+          <a:p>
+            <a:pPr algn="l"/>
+            <a:r>
+              <a:rPr sz="1100" b="1">
+                <a:solidFill>
+                  <a:srgbClr val="156082"/>
+                </a:solidFill>
+              </a:rPr>
+              <a:t>NAT_HOMOG</a:t>
+            </a:r>
+          </a:p>
+          <a:p>
+            <a:pPr algn="l"/>
+            <a:r>
+              <a:rPr sz="950">
+                <a:solidFill>
+                  <a:srgbClr val="1A1A1A"/>
+                </a:solidFill>
+              </a:rPr>
+              <a:t>ADMIXTURE-homog Q≥0.95</a:t>
+            </a:r>
+          </a:p>
+        </p:txBody>
+      </p:sp>
+      <p:sp>
+        <p:nvSpPr>
+          <p:cNvPr id="17" name="Rounded Rectangle 16"/>
+          <p:cNvSpPr/>
+          <p:nvPr/>
+        </p:nvSpPr>
+        <p:spPr>
+          <a:xfrm>
+            <a:off x="2514600" y="5577840"/>
+            <a:ext cx="1874519" cy="960120"/>
+          </a:xfrm>
+          <a:prstGeom prst="roundRect">
+            <a:avLst/>
+          </a:prstGeom>
+          <a:solidFill>
+            <a:srgbClr val="E8E8E8"/>
+          </a:solidFill>
+          <a:ln w="17780">
+            <a:solidFill>
+              <a:srgbClr val="196B24"/>
+            </a:solidFill>
+          </a:ln>
+        </p:spPr>
+        <p:style>
+          <a:lnRef idx="1">
+            <a:schemeClr val="accent1"/>
+          </a:lnRef>
+          <a:fillRef idx="3">
+            <a:schemeClr val="accent1"/>
+          </a:fillRef>
+          <a:effectRef idx="2">
+            <a:schemeClr val="accent1"/>
+          </a:effectRef>
+          <a:fontRef idx="minor">
+            <a:schemeClr val="lt1"/>
+          </a:fontRef>
+        </p:style>
+        <p:txBody>
+          <a:bodyPr rtlCol="0" anchor="ctr" tIns="50000" lIns="80000" rIns="60000"/>
+          <a:lstStyle/>
+          <a:p>
+            <a:pPr algn="l"/>
+            <a:r>
+              <a:rPr sz="1100" b="1">
+                <a:solidFill>
+                  <a:srgbClr val="196B24"/>
+                </a:solidFill>
+              </a:rPr>
+              <a:t>NAT_PEL</a:t>
+            </a:r>
+          </a:p>
+          <a:p>
+            <a:pPr algn="l"/>
+            <a:r>
+              <a:rPr sz="950">
+                <a:solidFill>
+                  <a:srgbClr val="1A1A1A"/>
+                </a:solidFill>
+              </a:rPr>
+              <a:t>adds 9 PEL (Peru)</a:t>
+            </a:r>
+          </a:p>
+        </p:txBody>
+      </p:sp>
+      <p:sp>
+        <p:nvSpPr>
+          <p:cNvPr id="18" name="Rounded Rectangle 17"/>
+          <p:cNvSpPr/>
+          <p:nvPr/>
+        </p:nvSpPr>
+        <p:spPr>
+          <a:xfrm>
+            <a:off x="4526279" y="5577840"/>
+            <a:ext cx="1874519" cy="960120"/>
+          </a:xfrm>
+          <a:prstGeom prst="roundRect">
+            <a:avLst/>
+          </a:prstGeom>
+          <a:solidFill>
+            <a:srgbClr val="E8E8E8"/>
+          </a:solidFill>
+          <a:ln w="17780">
+            <a:solidFill>
+              <a:srgbClr val="196B24"/>
+            </a:solidFill>
+          </a:ln>
+        </p:spPr>
+        <p:style>
+          <a:lnRef idx="1">
+            <a:schemeClr val="accent1"/>
+          </a:lnRef>
+          <a:fillRef idx="3">
+            <a:schemeClr val="accent1"/>
+          </a:fillRef>
+          <a:effectRef idx="2">
+            <a:schemeClr val="accent1"/>
+          </a:effectRef>
+          <a:fontRef idx="minor">
+            <a:schemeClr val="lt1"/>
+          </a:fontRef>
+        </p:style>
+        <p:txBody>
+          <a:bodyPr rtlCol="0" anchor="ctr" tIns="50000" lIns="80000" rIns="60000"/>
+          <a:lstStyle/>
+          <a:p>
+            <a:pPr algn="l"/>
+            <a:r>
+              <a:rPr sz="1100" b="1">
+                <a:solidFill>
+                  <a:srgbClr val="196B24"/>
+                </a:solidFill>
+              </a:rPr>
+              <a:t>NAT_PEL_EAS</a:t>
+            </a:r>
+          </a:p>
+          <a:p>
+            <a:pPr algn="l"/>
+            <a:r>
+              <a:rPr sz="950">
+                <a:solidFill>
+                  <a:srgbClr val="1A1A1A"/>
+                </a:solidFill>
+              </a:rPr>
+              <a:t>PEL + EAS outgroup</a:t>
+            </a:r>
+          </a:p>
+        </p:txBody>
+      </p:sp>
+      <p:sp>
+        <p:nvSpPr>
+          <p:cNvPr id="19" name="TextBox 18"/>
           <p:cNvSpPr txBox="1"/>
           <p:nvPr/>
         </p:nvSpPr>
         <p:spPr>
           <a:xfrm>
-            <a:off x="8275320" y="1600200"/>
-            <a:ext cx="3566160" cy="365760"/>
+            <a:off x="6537960" y="4572000"/>
+            <a:ext cx="5212080" cy="320040"/>
           </a:xfrm>
           <a:prstGeom prst="rect">
             <a:avLst/>
@@ -5977,21 +9344,21 @@
                   <a:srgbClr val="0E2841"/>
                 </a:solidFill>
               </a:rPr>
-              <a:t>Takeaways</a:t>
-            </a:r>
-          </a:p>
-        </p:txBody>
-      </p:sp>
-      <p:sp>
-        <p:nvSpPr>
-          <p:cNvPr id="6" name="TextBox 5"/>
+              <a:t>Two simulated admixed cohorts</a:t>
+            </a:r>
+          </a:p>
+        </p:txBody>
+      </p:sp>
+      <p:sp>
+        <p:nvSpPr>
+          <p:cNvPr id="20" name="TextBox 19"/>
           <p:cNvSpPr txBox="1"/>
           <p:nvPr/>
         </p:nvSpPr>
         <p:spPr>
           <a:xfrm>
-            <a:off x="8275320" y="1965960"/>
-            <a:ext cx="3611880" cy="4023360"/>
+            <a:off x="6537960" y="4937760"/>
+            <a:ext cx="5212080" cy="1508760"/>
           </a:xfrm>
           <a:prstGeom prst="rect">
             <a:avLst/>
@@ -6006,135 +9373,52 @@
           <a:p>
             <a:pPr algn="l"/>
             <a:r>
-              <a:rPr sz="1050" i="0" b="0">
+              <a:rPr sz="1100" i="0" b="0">
                 <a:solidFill>
                   <a:srgbClr val="1A1A1A"/>
                 </a:solidFill>
               </a:rPr>
-              <a:t>For a Mexican-like cohort (blue bars):</a:t>
-            </a:r>
-          </a:p>
-          <a:p>
-            <a:pPr algn="l"/>
-            <a:r>
-              <a:rPr sz="1050" i="0" b="0">
+              <a:t>•  Brasa track — 15% NAT / 60% EUR / 25% AFR</a:t>
+            </a:r>
+          </a:p>
+          <a:p>
+            <a:pPr algn="l"/>
+            <a:r>
+              <a:rPr sz="1100" i="0" b="0">
                 <a:solidFill>
                   <a:srgbClr val="1A1A1A"/>
                 </a:solidFill>
               </a:rPr>
-              <a:t>•  Adding 25 MXB samples</a:t>
-            </a:r>
-          </a:p>
-          <a:p>
-            <a:pPr algn="l"/>
-            <a:r>
-              <a:rPr sz="1050" i="0" b="0">
+              <a:t>     (Brazilian-like ancestry proportions)</a:t>
+            </a:r>
+          </a:p>
+          <a:p>
+            <a:pPr algn="l"/>
+            <a:r>
+              <a:rPr sz="1100" i="0" b="0">
                 <a:solidFill>
                   <a:srgbClr val="1A1A1A"/>
                 </a:solidFill>
               </a:rPr>
-              <a:t>    lifts NAT recall  0.931 → 0.942</a:t>
-            </a:r>
-          </a:p>
-          <a:p>
-            <a:pPr algn="l"/>
-          </a:p>
-          <a:p>
-            <a:pPr algn="l"/>
-            <a:r>
-              <a:rPr sz="1050" i="0" b="0">
+              <a:t>•  MXB track — Mexican-like ancestry proportions</a:t>
+            </a:r>
+          </a:p>
+          <a:p>
+            <a:pPr algn="l"/>
+            <a:r>
+              <a:rPr sz="1100" i="0" b="0">
                 <a:solidFill>
                   <a:srgbClr val="1A1A1A"/>
                 </a:solidFill>
               </a:rPr>
-              <a:t>For a Brazilian-like cohort (red bars):</a:t>
-            </a:r>
-          </a:p>
-          <a:p>
-            <a:pPr algn="l"/>
-            <a:r>
-              <a:rPr sz="1050" i="0" b="0">
-                <a:solidFill>
-                  <a:srgbClr val="1A1A1A"/>
-                </a:solidFill>
-              </a:rPr>
-              <a:t>•  PEL (Peru) panel wins on NAT</a:t>
-            </a:r>
-          </a:p>
-          <a:p>
-            <a:pPr algn="l"/>
-            <a:r>
-              <a:rPr sz="1050" i="0" b="0">
-                <a:solidFill>
-                  <a:srgbClr val="1A1A1A"/>
-                </a:solidFill>
-              </a:rPr>
-              <a:t>    HGDPMXB actually loses ~2%</a:t>
-            </a:r>
-          </a:p>
-          <a:p>
-            <a:pPr algn="l"/>
-            <a:r>
-              <a:rPr sz="1050" i="0" b="0">
-                <a:solidFill>
-                  <a:srgbClr val="1A1A1A"/>
-                </a:solidFill>
-              </a:rPr>
-              <a:t>•  Adding non-Mexican ancestry</a:t>
-            </a:r>
-          </a:p>
-          <a:p>
-            <a:pPr algn="l"/>
-            <a:r>
-              <a:rPr sz="1050" i="0" b="0">
-                <a:solidFill>
-                  <a:srgbClr val="1A1A1A"/>
-                </a:solidFill>
-              </a:rPr>
-              <a:t>    to a Mexican reference hurts</a:t>
-            </a:r>
-          </a:p>
-          <a:p>
-            <a:pPr algn="l"/>
-          </a:p>
-          <a:p>
-            <a:pPr algn="l"/>
-            <a:r>
-              <a:rPr sz="1050" i="0" b="0">
-                <a:solidFill>
-                  <a:srgbClr val="1A1A1A"/>
-                </a:solidFill>
-              </a:rPr>
-              <a:t>→  Panel-choice must match the</a:t>
-            </a:r>
-          </a:p>
-          <a:p>
-            <a:pPr algn="l"/>
-            <a:r>
-              <a:rPr sz="1050" i="0" b="0">
-                <a:solidFill>
-                  <a:srgbClr val="1A1A1A"/>
-                </a:solidFill>
-              </a:rPr>
-              <a:t>     target cohort, not the largest</a:t>
-            </a:r>
-          </a:p>
-          <a:p>
-            <a:pPr algn="l"/>
-            <a:r>
-              <a:rPr sz="1050" i="0" b="0">
-                <a:solidFill>
-                  <a:srgbClr val="1A1A1A"/>
-                </a:solidFill>
-              </a:rPr>
-              <a:t>     available sample source.</a:t>
-            </a:r>
-          </a:p>
-        </p:txBody>
-      </p:sp>
-      <p:sp>
-        <p:nvSpPr>
-          <p:cNvPr id="7" name="TextBox 6"/>
+              <a:t>     (tests whether MXB helps a Mexican cohort)</a:t>
+            </a:r>
+          </a:p>
+        </p:txBody>
+      </p:sp>
+      <p:sp>
+        <p:nvSpPr>
+          <p:cNvPr id="21" name="TextBox 20"/>
           <p:cNvSpPr txBox="1"/>
           <p:nvPr/>
         </p:nvSpPr>
@@ -6161,14 +9445,14 @@
                   <a:srgbClr val="666666"/>
                 </a:solidFill>
               </a:rPr>
-              <a:t>Christina Magyar  ·  Thesis committee, Aug 2026  ·  Result · AMR zoom</a:t>
-            </a:r>
-          </a:p>
-        </p:txBody>
-      </p:sp>
-      <p:sp>
-        <p:nvSpPr>
-          <p:cNvPr id="8" name="TextBox 7"/>
+              <a:t>Christina Magyar  ·  Thesis committee, Aug 2026  ·  Aim 2 · Methods</a:t>
+            </a:r>
+          </a:p>
+        </p:txBody>
+      </p:sp>
+      <p:sp>
+        <p:nvSpPr>
+          <p:cNvPr id="22" name="TextBox 21"/>
           <p:cNvSpPr txBox="1"/>
           <p:nvPr/>
         </p:nvSpPr>
@@ -6195,7 +9479,7 @@
                   <a:srgbClr val="666666"/>
                 </a:solidFill>
               </a:rPr>
-              <a:t>5 / 7</a:t>
+              <a:t>5 / 12</a:t>
             </a:r>
           </a:p>
         </p:txBody>
@@ -6246,7 +9530,7 @@
                   <a:srgbClr val="0E2841"/>
                 </a:solidFill>
               </a:rPr>
-              <a:t>Chip-density LAI holds within ~1% of WGS on a Mexican-like cohort.</a:t>
+              <a:t>Panel choice moves AMR recall by ~3%; EUR and AFR sit near ceiling.</a:t>
             </a:r>
           </a:p>
         </p:txBody>
@@ -6280,14 +9564,14 @@
                   <a:srgbClr val="666666"/>
                 </a:solidFill>
               </a:rPr>
-              <a:t>Illumina GSA v3 chip vs full WGS density, same reference panels</a:t>
+              <a:t>Weighted per-hap recall by ancestry, WGS density, chr20-22 pilot</a:t>
             </a:r>
           </a:p>
         </p:txBody>
       </p:sp>
       <p:pic>
         <p:nvPicPr>
-          <p:cNvPr id="4" name="Picture 3" descr="fig_chip_vs_wgs.png"/>
+          <p:cNvPr id="4" name="Picture 3" descr="fig_wgs_all_ancestry.png"/>
           <p:cNvPicPr>
             <a:picLocks noChangeAspect="1"/>
           </p:cNvPicPr>
@@ -6301,8 +9585,8 @@
         </p:blipFill>
         <p:spPr>
           <a:xfrm>
-            <a:off x="502920" y="1508760"/>
-            <a:ext cx="7680960" cy="3609547"/>
+            <a:off x="502920" y="1417320"/>
+            <a:ext cx="11155680" cy="5492027"/>
           </a:xfrm>
           <a:prstGeom prst="rect">
             <a:avLst/>
@@ -6317,8 +9601,8 @@
         </p:nvSpPr>
         <p:spPr>
           <a:xfrm>
-            <a:off x="8366760" y="1600200"/>
-            <a:ext cx="3566160" cy="365760"/>
+            <a:off x="502920" y="6172200"/>
+            <a:ext cx="11155680" cy="320040"/>
           </a:xfrm>
           <a:prstGeom prst="rect">
             <a:avLst/>
@@ -6333,12 +9617,12 @@
           <a:p>
             <a:pPr algn="l"/>
             <a:r>
-              <a:rPr sz="1300" i="0" b="1">
-                <a:solidFill>
-                  <a:srgbClr val="0E2841"/>
-                </a:solidFill>
-              </a:rPr>
-              <a:t>Implications for GWAS</a:t>
+              <a:rPr sz="1200" i="1" b="0">
+                <a:solidFill>
+                  <a:srgbClr val="1A1A1A"/>
+                </a:solidFill>
+              </a:rPr>
+              <a:t>→  AMR is where reference-panel choice actually matters — so the rest of the deck focuses on AMR recall.</a:t>
             </a:r>
           </a:p>
         </p:txBody>
@@ -6351,8 +9635,8 @@
         </p:nvSpPr>
         <p:spPr>
           <a:xfrm>
-            <a:off x="8366760" y="1965960"/>
-            <a:ext cx="3611880" cy="4023360"/>
+            <a:off x="502920" y="6537960"/>
+            <a:ext cx="7315200" cy="274320"/>
           </a:xfrm>
           <a:prstGeom prst="rect">
             <a:avLst/>
@@ -6367,142 +9651,12 @@
           <a:p>
             <a:pPr algn="l"/>
             <a:r>
-              <a:rPr sz="1050" i="0" b="0">
-                <a:solidFill>
-                  <a:srgbClr val="1A1A1A"/>
-                </a:solidFill>
-              </a:rPr>
-              <a:t>•  REDIAL / COG cohorts are</a:t>
-            </a:r>
-          </a:p>
-          <a:p>
-            <a:pPr algn="l"/>
-            <a:r>
-              <a:rPr sz="1050" i="0" b="0">
-                <a:solidFill>
-                  <a:srgbClr val="1A1A1A"/>
-                </a:solidFill>
-              </a:rPr>
-              <a:t>    genotyped on chip, not WGS —</a:t>
-            </a:r>
-          </a:p>
-          <a:p>
-            <a:pPr algn="l"/>
-            <a:r>
-              <a:rPr sz="1050" i="0" b="0">
-                <a:solidFill>
-                  <a:srgbClr val="1A1A1A"/>
-                </a:solidFill>
-              </a:rPr>
-              <a:t>    LAI accuracy holds if we</a:t>
-            </a:r>
-          </a:p>
-          <a:p>
-            <a:pPr algn="l"/>
-            <a:r>
-              <a:rPr sz="1050" i="0" b="0">
-                <a:solidFill>
-                  <a:srgbClr val="1A1A1A"/>
-                </a:solidFill>
-              </a:rPr>
-              <a:t>    use the MXB-augmented panel</a:t>
-            </a:r>
-          </a:p>
-          <a:p>
-            <a:pPr algn="l"/>
-          </a:p>
-          <a:p>
-            <a:pPr algn="l"/>
-            <a:r>
-              <a:rPr sz="1050" i="0" b="0">
-                <a:solidFill>
-                  <a:srgbClr val="1A1A1A"/>
-                </a:solidFill>
-              </a:rPr>
-              <a:t>•  Chip → TOPMed imputation is</a:t>
-            </a:r>
-          </a:p>
-          <a:p>
-            <a:pPr algn="l"/>
-            <a:r>
-              <a:rPr sz="1050" i="0" b="0">
-                <a:solidFill>
-                  <a:srgbClr val="1A1A1A"/>
-                </a:solidFill>
-              </a:rPr>
-              <a:t>    the next validation step</a:t>
-            </a:r>
-          </a:p>
-          <a:p>
-            <a:pPr algn="l"/>
-            <a:r>
-              <a:rPr sz="1050" i="0" b="0">
-                <a:solidFill>
-                  <a:srgbClr val="1A1A1A"/>
-                </a:solidFill>
-              </a:rPr>
-              <a:t>    (Michigan / 1KG post-meeting)</a:t>
-            </a:r>
-          </a:p>
-          <a:p>
-            <a:pPr algn="l"/>
-          </a:p>
-          <a:p>
-            <a:pPr algn="l"/>
-            <a:r>
-              <a:rPr sz="1050" i="0" b="0">
-                <a:solidFill>
-                  <a:srgbClr val="1A1A1A"/>
-                </a:solidFill>
-              </a:rPr>
-              <a:t>•  Panel ranking preserved</a:t>
-            </a:r>
-          </a:p>
-          <a:p>
-            <a:pPr algn="l"/>
-            <a:r>
-              <a:rPr sz="1050" i="0" b="0">
-                <a:solidFill>
-                  <a:srgbClr val="1A1A1A"/>
-                </a:solidFill>
-              </a:rPr>
-              <a:t>    across densities:</a:t>
-            </a:r>
-          </a:p>
-          <a:p>
-            <a:pPr algn="l"/>
-            <a:r>
-              <a:rPr sz="1050" i="0" b="0">
-                <a:solidFill>
-                  <a:srgbClr val="1A1A1A"/>
-                </a:solidFill>
-              </a:rPr>
-              <a:t>     HGDPMXB &gt; HGDP &gt; PEL_EAS</a:t>
-            </a:r>
-          </a:p>
-          <a:p>
-            <a:pPr algn="l"/>
-          </a:p>
-          <a:p>
-            <a:pPr algn="l"/>
-            <a:r>
-              <a:rPr sz="1050" i="0" b="0">
-                <a:solidFill>
-                  <a:srgbClr val="1A1A1A"/>
-                </a:solidFill>
-              </a:rPr>
-              <a:t>•  Recommend HGDPMXB for the</a:t>
-            </a:r>
-          </a:p>
-          <a:p>
-            <a:pPr algn="l"/>
-            <a:r>
-              <a:rPr sz="1050" i="0" b="0">
-                <a:solidFill>
-                  <a:srgbClr val="1A1A1A"/>
-                </a:solidFill>
-              </a:rPr>
-              <a:t>    Mexican-Latino GWAS pipeline</a:t>
+              <a:rPr sz="900" i="0" b="0">
+                <a:solidFill>
+                  <a:srgbClr val="666666"/>
+                </a:solidFill>
+              </a:rPr>
+              <a:t>Christina Magyar  ·  Thesis committee, Aug 2026  ·  Aim 2 · Result overview</a:t>
             </a:r>
           </a:p>
         </p:txBody>
@@ -6515,8 +9669,8 @@
         </p:nvSpPr>
         <p:spPr>
           <a:xfrm>
-            <a:off x="502920" y="6537960"/>
-            <a:ext cx="7315200" cy="274320"/>
+            <a:off x="11338560" y="6537960"/>
+            <a:ext cx="548640" cy="274320"/>
           </a:xfrm>
           <a:prstGeom prst="rect">
             <a:avLst/>
@@ -6529,48 +9683,14 @@
           </a:bodyPr>
           <a:lstStyle/>
           <a:p>
-            <a:pPr algn="l"/>
+            <a:pPr algn="r"/>
             <a:r>
               <a:rPr sz="900" i="0" b="0">
                 <a:solidFill>
                   <a:srgbClr val="666666"/>
                 </a:solidFill>
               </a:rPr>
-              <a:t>Christina Magyar  ·  Thesis committee, Aug 2026  ·  Result · Chip</a:t>
-            </a:r>
-          </a:p>
-        </p:txBody>
-      </p:sp>
-      <p:sp>
-        <p:nvSpPr>
-          <p:cNvPr id="8" name="TextBox 7"/>
-          <p:cNvSpPr txBox="1"/>
-          <p:nvPr/>
-        </p:nvSpPr>
-        <p:spPr>
-          <a:xfrm>
-            <a:off x="11338560" y="6537960"/>
-            <a:ext cx="548640" cy="274320"/>
-          </a:xfrm>
-          <a:prstGeom prst="rect">
-            <a:avLst/>
-          </a:prstGeom>
-          <a:noFill/>
-        </p:spPr>
-        <p:txBody>
-          <a:bodyPr wrap="square" lIns="0" rIns="0" tIns="0" bIns="0">
-            <a:spAutoFit/>
-          </a:bodyPr>
-          <a:lstStyle/>
-          <a:p>
-            <a:pPr algn="r"/>
-            <a:r>
-              <a:rPr sz="900" i="0" b="0">
-                <a:solidFill>
-                  <a:srgbClr val="666666"/>
-                </a:solidFill>
-              </a:rPr>
-              <a:t>6 / 7</a:t>
+              <a:t>6 / 12</a:t>
             </a:r>
           </a:p>
         </p:txBody>
@@ -6621,6 +9741,742 @@
                   <a:srgbClr val="0E2841"/>
                 </a:solidFill>
               </a:rPr>
+              <a:t>Best reference panel depends on the target cohort's composition.</a:t>
+            </a:r>
+          </a:p>
+        </p:txBody>
+      </p:sp>
+      <p:sp>
+        <p:nvSpPr>
+          <p:cNvPr id="3" name="TextBox 2"/>
+          <p:cNvSpPr txBox="1"/>
+          <p:nvPr/>
+        </p:nvSpPr>
+        <p:spPr>
+          <a:xfrm>
+            <a:off x="502920" y="1051560"/>
+            <a:ext cx="11155680" cy="365760"/>
+          </a:xfrm>
+          <a:prstGeom prst="rect">
+            <a:avLst/>
+          </a:prstGeom>
+          <a:noFill/>
+        </p:spPr>
+        <p:txBody>
+          <a:bodyPr wrap="square" lIns="0" rIns="0" tIns="0" bIns="0">
+            <a:spAutoFit/>
+          </a:bodyPr>
+          <a:lstStyle/>
+          <a:p>
+            <a:pPr algn="l"/>
+            <a:r>
+              <a:rPr sz="1200" i="1" b="0">
+                <a:solidFill>
+                  <a:srgbClr val="666666"/>
+                </a:solidFill>
+              </a:rPr>
+              <a:t>Weighted NAT-ancestry recall, WGS density, chr20-22 pilot</a:t>
+            </a:r>
+          </a:p>
+        </p:txBody>
+      </p:sp>
+      <p:pic>
+        <p:nvPicPr>
+          <p:cNvPr id="4" name="Picture 3" descr="fig_wgs_panels.png"/>
+          <p:cNvPicPr>
+            <a:picLocks noChangeAspect="1"/>
+          </p:cNvPicPr>
+          <p:nvPr/>
+        </p:nvPicPr>
+        <p:blipFill>
+          <a:blip r:embed="rId2"/>
+          <a:stretch>
+            <a:fillRect/>
+          </a:stretch>
+        </p:blipFill>
+        <p:spPr>
+          <a:xfrm>
+            <a:off x="502920" y="1508760"/>
+            <a:ext cx="7498079" cy="3599078"/>
+          </a:xfrm>
+          <a:prstGeom prst="rect">
+            <a:avLst/>
+          </a:prstGeom>
+        </p:spPr>
+      </p:pic>
+      <p:sp>
+        <p:nvSpPr>
+          <p:cNvPr id="5" name="TextBox 4"/>
+          <p:cNvSpPr txBox="1"/>
+          <p:nvPr/>
+        </p:nvSpPr>
+        <p:spPr>
+          <a:xfrm>
+            <a:off x="8275320" y="1600200"/>
+            <a:ext cx="3566160" cy="365760"/>
+          </a:xfrm>
+          <a:prstGeom prst="rect">
+            <a:avLst/>
+          </a:prstGeom>
+          <a:noFill/>
+        </p:spPr>
+        <p:txBody>
+          <a:bodyPr wrap="square" lIns="0" rIns="0" tIns="0" bIns="0">
+            <a:spAutoFit/>
+          </a:bodyPr>
+          <a:lstStyle/>
+          <a:p>
+            <a:pPr algn="l"/>
+            <a:r>
+              <a:rPr sz="1300" i="0" b="1">
+                <a:solidFill>
+                  <a:srgbClr val="0E2841"/>
+                </a:solidFill>
+              </a:rPr>
+              <a:t>Takeaways</a:t>
+            </a:r>
+          </a:p>
+        </p:txBody>
+      </p:sp>
+      <p:sp>
+        <p:nvSpPr>
+          <p:cNvPr id="6" name="TextBox 5"/>
+          <p:cNvSpPr txBox="1"/>
+          <p:nvPr/>
+        </p:nvSpPr>
+        <p:spPr>
+          <a:xfrm>
+            <a:off x="8275320" y="1965960"/>
+            <a:ext cx="3611880" cy="4023360"/>
+          </a:xfrm>
+          <a:prstGeom prst="rect">
+            <a:avLst/>
+          </a:prstGeom>
+          <a:noFill/>
+        </p:spPr>
+        <p:txBody>
+          <a:bodyPr wrap="square" lIns="0" rIns="0" tIns="0" bIns="0">
+            <a:spAutoFit/>
+          </a:bodyPr>
+          <a:lstStyle/>
+          <a:p>
+            <a:pPr algn="l"/>
+            <a:r>
+              <a:rPr sz="1050" i="0" b="0">
+                <a:solidFill>
+                  <a:srgbClr val="1A1A1A"/>
+                </a:solidFill>
+              </a:rPr>
+              <a:t>For a Mexican-like cohort (blue bars):</a:t>
+            </a:r>
+          </a:p>
+          <a:p>
+            <a:pPr algn="l"/>
+            <a:r>
+              <a:rPr sz="1050" i="0" b="0">
+                <a:solidFill>
+                  <a:srgbClr val="1A1A1A"/>
+                </a:solidFill>
+              </a:rPr>
+              <a:t>•  Adding 25 MXB samples</a:t>
+            </a:r>
+          </a:p>
+          <a:p>
+            <a:pPr algn="l"/>
+            <a:r>
+              <a:rPr sz="1050" i="0" b="0">
+                <a:solidFill>
+                  <a:srgbClr val="1A1A1A"/>
+                </a:solidFill>
+              </a:rPr>
+              <a:t>    lifts NAT recall  0.931 → 0.942</a:t>
+            </a:r>
+          </a:p>
+          <a:p>
+            <a:pPr algn="l"/>
+          </a:p>
+          <a:p>
+            <a:pPr algn="l"/>
+            <a:r>
+              <a:rPr sz="1050" i="0" b="0">
+                <a:solidFill>
+                  <a:srgbClr val="1A1A1A"/>
+                </a:solidFill>
+              </a:rPr>
+              <a:t>For a Brazilian-like cohort (red bars):</a:t>
+            </a:r>
+          </a:p>
+          <a:p>
+            <a:pPr algn="l"/>
+            <a:r>
+              <a:rPr sz="1050" i="0" b="0">
+                <a:solidFill>
+                  <a:srgbClr val="1A1A1A"/>
+                </a:solidFill>
+              </a:rPr>
+              <a:t>•  PEL (Peru) panel wins on NAT</a:t>
+            </a:r>
+          </a:p>
+          <a:p>
+            <a:pPr algn="l"/>
+            <a:r>
+              <a:rPr sz="1050" i="0" b="0">
+                <a:solidFill>
+                  <a:srgbClr val="1A1A1A"/>
+                </a:solidFill>
+              </a:rPr>
+              <a:t>    HGDPMXB actually loses ~2%</a:t>
+            </a:r>
+          </a:p>
+          <a:p>
+            <a:pPr algn="l"/>
+            <a:r>
+              <a:rPr sz="1050" i="0" b="0">
+                <a:solidFill>
+                  <a:srgbClr val="1A1A1A"/>
+                </a:solidFill>
+              </a:rPr>
+              <a:t>•  Adding non-Mexican ancestry</a:t>
+            </a:r>
+          </a:p>
+          <a:p>
+            <a:pPr algn="l"/>
+            <a:r>
+              <a:rPr sz="1050" i="0" b="0">
+                <a:solidFill>
+                  <a:srgbClr val="1A1A1A"/>
+                </a:solidFill>
+              </a:rPr>
+              <a:t>    to a Mexican reference hurts</a:t>
+            </a:r>
+          </a:p>
+          <a:p>
+            <a:pPr algn="l"/>
+          </a:p>
+          <a:p>
+            <a:pPr algn="l"/>
+            <a:r>
+              <a:rPr sz="1050" i="0" b="0">
+                <a:solidFill>
+                  <a:srgbClr val="1A1A1A"/>
+                </a:solidFill>
+              </a:rPr>
+              <a:t>→  Panel-choice must match the</a:t>
+            </a:r>
+          </a:p>
+          <a:p>
+            <a:pPr algn="l"/>
+            <a:r>
+              <a:rPr sz="1050" i="0" b="0">
+                <a:solidFill>
+                  <a:srgbClr val="1A1A1A"/>
+                </a:solidFill>
+              </a:rPr>
+              <a:t>     target cohort, not the largest</a:t>
+            </a:r>
+          </a:p>
+          <a:p>
+            <a:pPr algn="l"/>
+            <a:r>
+              <a:rPr sz="1050" i="0" b="0">
+                <a:solidFill>
+                  <a:srgbClr val="1A1A1A"/>
+                </a:solidFill>
+              </a:rPr>
+              <a:t>     available sample source.</a:t>
+            </a:r>
+          </a:p>
+        </p:txBody>
+      </p:sp>
+      <p:sp>
+        <p:nvSpPr>
+          <p:cNvPr id="7" name="TextBox 6"/>
+          <p:cNvSpPr txBox="1"/>
+          <p:nvPr/>
+        </p:nvSpPr>
+        <p:spPr>
+          <a:xfrm>
+            <a:off x="502920" y="6537960"/>
+            <a:ext cx="7315200" cy="274320"/>
+          </a:xfrm>
+          <a:prstGeom prst="rect">
+            <a:avLst/>
+          </a:prstGeom>
+          <a:noFill/>
+        </p:spPr>
+        <p:txBody>
+          <a:bodyPr wrap="square" lIns="0" rIns="0" tIns="0" bIns="0">
+            <a:spAutoFit/>
+          </a:bodyPr>
+          <a:lstStyle/>
+          <a:p>
+            <a:pPr algn="l"/>
+            <a:r>
+              <a:rPr sz="900" i="0" b="0">
+                <a:solidFill>
+                  <a:srgbClr val="666666"/>
+                </a:solidFill>
+              </a:rPr>
+              <a:t>Christina Magyar  ·  Thesis committee, Aug 2026  ·  Aim 2 · Result · AMR zoom</a:t>
+            </a:r>
+          </a:p>
+        </p:txBody>
+      </p:sp>
+      <p:sp>
+        <p:nvSpPr>
+          <p:cNvPr id="8" name="TextBox 7"/>
+          <p:cNvSpPr txBox="1"/>
+          <p:nvPr/>
+        </p:nvSpPr>
+        <p:spPr>
+          <a:xfrm>
+            <a:off x="11338560" y="6537960"/>
+            <a:ext cx="548640" cy="274320"/>
+          </a:xfrm>
+          <a:prstGeom prst="rect">
+            <a:avLst/>
+          </a:prstGeom>
+          <a:noFill/>
+        </p:spPr>
+        <p:txBody>
+          <a:bodyPr wrap="square" lIns="0" rIns="0" tIns="0" bIns="0">
+            <a:spAutoFit/>
+          </a:bodyPr>
+          <a:lstStyle/>
+          <a:p>
+            <a:pPr algn="r"/>
+            <a:r>
+              <a:rPr sz="900" i="0" b="0">
+                <a:solidFill>
+                  <a:srgbClr val="666666"/>
+                </a:solidFill>
+              </a:rPr>
+              <a:t>7 / 12</a:t>
+            </a:r>
+          </a:p>
+        </p:txBody>
+      </p:sp>
+    </p:spTree>
+  </p:cSld>
+  <p:clrMapOvr>
+    <a:masterClrMapping/>
+  </p:clrMapOvr>
+</p:sld>
+</file>
+
+<file path=ppt/slides/slide8.xml><?xml version="1.0" encoding="utf-8"?>
+<p:sld xmlns:a="http://schemas.openxmlformats.org/drawingml/2006/main" xmlns:p="http://schemas.openxmlformats.org/presentationml/2006/main" xmlns:r="http://schemas.openxmlformats.org/officeDocument/2006/relationships">
+  <p:cSld>
+    <p:spTree>
+      <p:nvGrpSpPr>
+        <p:cNvPr id="1" name=""/>
+        <p:cNvGrpSpPr/>
+        <p:nvPr/>
+      </p:nvGrpSpPr>
+      <p:grpSpPr/>
+      <p:sp>
+        <p:nvSpPr>
+          <p:cNvPr id="2" name="TextBox 1"/>
+          <p:cNvSpPr txBox="1"/>
+          <p:nvPr/>
+        </p:nvSpPr>
+        <p:spPr>
+          <a:xfrm>
+            <a:off x="502920" y="292608"/>
+            <a:ext cx="11155680" cy="822960"/>
+          </a:xfrm>
+          <a:prstGeom prst="rect">
+            <a:avLst/>
+          </a:prstGeom>
+          <a:noFill/>
+        </p:spPr>
+        <p:txBody>
+          <a:bodyPr wrap="square">
+            <a:spAutoFit/>
+          </a:bodyPr>
+          <a:lstStyle/>
+          <a:p>
+            <a:r>
+              <a:rPr sz="2400" b="1">
+                <a:solidFill>
+                  <a:srgbClr val="0E2841"/>
+                </a:solidFill>
+              </a:rPr>
+              <a:t>Chip-density LAI holds within ~1% of WGS on a Mexican-like cohort.</a:t>
+            </a:r>
+          </a:p>
+        </p:txBody>
+      </p:sp>
+      <p:sp>
+        <p:nvSpPr>
+          <p:cNvPr id="3" name="TextBox 2"/>
+          <p:cNvSpPr txBox="1"/>
+          <p:nvPr/>
+        </p:nvSpPr>
+        <p:spPr>
+          <a:xfrm>
+            <a:off x="502920" y="1051560"/>
+            <a:ext cx="11155680" cy="365760"/>
+          </a:xfrm>
+          <a:prstGeom prst="rect">
+            <a:avLst/>
+          </a:prstGeom>
+          <a:noFill/>
+        </p:spPr>
+        <p:txBody>
+          <a:bodyPr wrap="square" lIns="0" rIns="0" tIns="0" bIns="0">
+            <a:spAutoFit/>
+          </a:bodyPr>
+          <a:lstStyle/>
+          <a:p>
+            <a:pPr algn="l"/>
+            <a:r>
+              <a:rPr sz="1200" i="1" b="0">
+                <a:solidFill>
+                  <a:srgbClr val="666666"/>
+                </a:solidFill>
+              </a:rPr>
+              <a:t>Illumina GSA v3 chip vs full WGS density, same reference panels</a:t>
+            </a:r>
+          </a:p>
+        </p:txBody>
+      </p:sp>
+      <p:pic>
+        <p:nvPicPr>
+          <p:cNvPr id="4" name="Picture 3" descr="fig_chip_vs_wgs.png"/>
+          <p:cNvPicPr>
+            <a:picLocks noChangeAspect="1"/>
+          </p:cNvPicPr>
+          <p:nvPr/>
+        </p:nvPicPr>
+        <p:blipFill>
+          <a:blip r:embed="rId2"/>
+          <a:stretch>
+            <a:fillRect/>
+          </a:stretch>
+        </p:blipFill>
+        <p:spPr>
+          <a:xfrm>
+            <a:off x="502920" y="1508760"/>
+            <a:ext cx="7680960" cy="3609547"/>
+          </a:xfrm>
+          <a:prstGeom prst="rect">
+            <a:avLst/>
+          </a:prstGeom>
+        </p:spPr>
+      </p:pic>
+      <p:sp>
+        <p:nvSpPr>
+          <p:cNvPr id="5" name="TextBox 4"/>
+          <p:cNvSpPr txBox="1"/>
+          <p:nvPr/>
+        </p:nvSpPr>
+        <p:spPr>
+          <a:xfrm>
+            <a:off x="8366760" y="1600200"/>
+            <a:ext cx="3566160" cy="365760"/>
+          </a:xfrm>
+          <a:prstGeom prst="rect">
+            <a:avLst/>
+          </a:prstGeom>
+          <a:noFill/>
+        </p:spPr>
+        <p:txBody>
+          <a:bodyPr wrap="square" lIns="0" rIns="0" tIns="0" bIns="0">
+            <a:spAutoFit/>
+          </a:bodyPr>
+          <a:lstStyle/>
+          <a:p>
+            <a:pPr algn="l"/>
+            <a:r>
+              <a:rPr sz="1300" i="0" b="1">
+                <a:solidFill>
+                  <a:srgbClr val="0E2841"/>
+                </a:solidFill>
+              </a:rPr>
+              <a:t>Implications for GWAS</a:t>
+            </a:r>
+          </a:p>
+        </p:txBody>
+      </p:sp>
+      <p:sp>
+        <p:nvSpPr>
+          <p:cNvPr id="6" name="TextBox 5"/>
+          <p:cNvSpPr txBox="1"/>
+          <p:nvPr/>
+        </p:nvSpPr>
+        <p:spPr>
+          <a:xfrm>
+            <a:off x="8366760" y="1965960"/>
+            <a:ext cx="3611880" cy="4023360"/>
+          </a:xfrm>
+          <a:prstGeom prst="rect">
+            <a:avLst/>
+          </a:prstGeom>
+          <a:noFill/>
+        </p:spPr>
+        <p:txBody>
+          <a:bodyPr wrap="square" lIns="0" rIns="0" tIns="0" bIns="0">
+            <a:spAutoFit/>
+          </a:bodyPr>
+          <a:lstStyle/>
+          <a:p>
+            <a:pPr algn="l"/>
+            <a:r>
+              <a:rPr sz="1050" i="0" b="0">
+                <a:solidFill>
+                  <a:srgbClr val="1A1A1A"/>
+                </a:solidFill>
+              </a:rPr>
+              <a:t>•  REDIAL / COG cohorts are</a:t>
+            </a:r>
+          </a:p>
+          <a:p>
+            <a:pPr algn="l"/>
+            <a:r>
+              <a:rPr sz="1050" i="0" b="0">
+                <a:solidFill>
+                  <a:srgbClr val="1A1A1A"/>
+                </a:solidFill>
+              </a:rPr>
+              <a:t>    genotyped on chip, not WGS —</a:t>
+            </a:r>
+          </a:p>
+          <a:p>
+            <a:pPr algn="l"/>
+            <a:r>
+              <a:rPr sz="1050" i="0" b="0">
+                <a:solidFill>
+                  <a:srgbClr val="1A1A1A"/>
+                </a:solidFill>
+              </a:rPr>
+              <a:t>    LAI accuracy holds if we</a:t>
+            </a:r>
+          </a:p>
+          <a:p>
+            <a:pPr algn="l"/>
+            <a:r>
+              <a:rPr sz="1050" i="0" b="0">
+                <a:solidFill>
+                  <a:srgbClr val="1A1A1A"/>
+                </a:solidFill>
+              </a:rPr>
+              <a:t>    use the MXB-augmented panel</a:t>
+            </a:r>
+          </a:p>
+          <a:p>
+            <a:pPr algn="l"/>
+          </a:p>
+          <a:p>
+            <a:pPr algn="l"/>
+            <a:r>
+              <a:rPr sz="1050" i="0" b="0">
+                <a:solidFill>
+                  <a:srgbClr val="1A1A1A"/>
+                </a:solidFill>
+              </a:rPr>
+              <a:t>•  Chip → TOPMed imputation is</a:t>
+            </a:r>
+          </a:p>
+          <a:p>
+            <a:pPr algn="l"/>
+            <a:r>
+              <a:rPr sz="1050" i="0" b="0">
+                <a:solidFill>
+                  <a:srgbClr val="1A1A1A"/>
+                </a:solidFill>
+              </a:rPr>
+              <a:t>    the next validation step</a:t>
+            </a:r>
+          </a:p>
+          <a:p>
+            <a:pPr algn="l"/>
+            <a:r>
+              <a:rPr sz="1050" i="0" b="0">
+                <a:solidFill>
+                  <a:srgbClr val="1A1A1A"/>
+                </a:solidFill>
+              </a:rPr>
+              <a:t>    (Michigan / 1KG post-meeting)</a:t>
+            </a:r>
+          </a:p>
+          <a:p>
+            <a:pPr algn="l"/>
+          </a:p>
+          <a:p>
+            <a:pPr algn="l"/>
+            <a:r>
+              <a:rPr sz="1050" i="0" b="0">
+                <a:solidFill>
+                  <a:srgbClr val="1A1A1A"/>
+                </a:solidFill>
+              </a:rPr>
+              <a:t>•  Panel ranking preserved</a:t>
+            </a:r>
+          </a:p>
+          <a:p>
+            <a:pPr algn="l"/>
+            <a:r>
+              <a:rPr sz="1050" i="0" b="0">
+                <a:solidFill>
+                  <a:srgbClr val="1A1A1A"/>
+                </a:solidFill>
+              </a:rPr>
+              <a:t>    across densities:</a:t>
+            </a:r>
+          </a:p>
+          <a:p>
+            <a:pPr algn="l"/>
+            <a:r>
+              <a:rPr sz="1050" i="0" b="0">
+                <a:solidFill>
+                  <a:srgbClr val="1A1A1A"/>
+                </a:solidFill>
+              </a:rPr>
+              <a:t>     HGDPMXB &gt; HGDP &gt; PEL_EAS</a:t>
+            </a:r>
+          </a:p>
+          <a:p>
+            <a:pPr algn="l"/>
+          </a:p>
+          <a:p>
+            <a:pPr algn="l"/>
+            <a:r>
+              <a:rPr sz="1050" i="0" b="0">
+                <a:solidFill>
+                  <a:srgbClr val="1A1A1A"/>
+                </a:solidFill>
+              </a:rPr>
+              <a:t>•  Recommend HGDPMXB for the</a:t>
+            </a:r>
+          </a:p>
+          <a:p>
+            <a:pPr algn="l"/>
+            <a:r>
+              <a:rPr sz="1050" i="0" b="0">
+                <a:solidFill>
+                  <a:srgbClr val="1A1A1A"/>
+                </a:solidFill>
+              </a:rPr>
+              <a:t>    Mexican-Latino GWAS pipeline</a:t>
+            </a:r>
+          </a:p>
+        </p:txBody>
+      </p:sp>
+      <p:sp>
+        <p:nvSpPr>
+          <p:cNvPr id="7" name="TextBox 6"/>
+          <p:cNvSpPr txBox="1"/>
+          <p:nvPr/>
+        </p:nvSpPr>
+        <p:spPr>
+          <a:xfrm>
+            <a:off x="502920" y="6537960"/>
+            <a:ext cx="7315200" cy="274320"/>
+          </a:xfrm>
+          <a:prstGeom prst="rect">
+            <a:avLst/>
+          </a:prstGeom>
+          <a:noFill/>
+        </p:spPr>
+        <p:txBody>
+          <a:bodyPr wrap="square" lIns="0" rIns="0" tIns="0" bIns="0">
+            <a:spAutoFit/>
+          </a:bodyPr>
+          <a:lstStyle/>
+          <a:p>
+            <a:pPr algn="l"/>
+            <a:r>
+              <a:rPr sz="900" i="0" b="0">
+                <a:solidFill>
+                  <a:srgbClr val="666666"/>
+                </a:solidFill>
+              </a:rPr>
+              <a:t>Christina Magyar  ·  Thesis committee, Aug 2026  ·  Aim 2 · Result · Chip</a:t>
+            </a:r>
+          </a:p>
+        </p:txBody>
+      </p:sp>
+      <p:sp>
+        <p:nvSpPr>
+          <p:cNvPr id="8" name="TextBox 7"/>
+          <p:cNvSpPr txBox="1"/>
+          <p:nvPr/>
+        </p:nvSpPr>
+        <p:spPr>
+          <a:xfrm>
+            <a:off x="11338560" y="6537960"/>
+            <a:ext cx="548640" cy="274320"/>
+          </a:xfrm>
+          <a:prstGeom prst="rect">
+            <a:avLst/>
+          </a:prstGeom>
+          <a:noFill/>
+        </p:spPr>
+        <p:txBody>
+          <a:bodyPr wrap="square" lIns="0" rIns="0" tIns="0" bIns="0">
+            <a:spAutoFit/>
+          </a:bodyPr>
+          <a:lstStyle/>
+          <a:p>
+            <a:pPr algn="r"/>
+            <a:r>
+              <a:rPr sz="900" i="0" b="0">
+                <a:solidFill>
+                  <a:srgbClr val="666666"/>
+                </a:solidFill>
+              </a:rPr>
+              <a:t>8 / 12</a:t>
+            </a:r>
+          </a:p>
+        </p:txBody>
+      </p:sp>
+    </p:spTree>
+  </p:cSld>
+  <p:clrMapOvr>
+    <a:masterClrMapping/>
+  </p:clrMapOvr>
+</p:sld>
+</file>
+
+<file path=ppt/slides/slide9.xml><?xml version="1.0" encoding="utf-8"?>
+<p:sld xmlns:a="http://schemas.openxmlformats.org/drawingml/2006/main" xmlns:p="http://schemas.openxmlformats.org/presentationml/2006/main" xmlns:r="http://schemas.openxmlformats.org/officeDocument/2006/relationships">
+  <p:cSld>
+    <p:spTree>
+      <p:nvGrpSpPr>
+        <p:cNvPr id="1" name=""/>
+        <p:cNvGrpSpPr/>
+        <p:nvPr/>
+      </p:nvGrpSpPr>
+      <p:grpSpPr/>
+      <p:sp>
+        <p:nvSpPr>
+          <p:cNvPr id="2" name="TextBox 1"/>
+          <p:cNvSpPr txBox="1"/>
+          <p:nvPr/>
+        </p:nvSpPr>
+        <p:spPr>
+          <a:xfrm>
+            <a:off x="502920" y="292608"/>
+            <a:ext cx="11155680" cy="822960"/>
+          </a:xfrm>
+          <a:prstGeom prst="rect">
+            <a:avLst/>
+          </a:prstGeom>
+          <a:noFill/>
+        </p:spPr>
+        <p:txBody>
+          <a:bodyPr wrap="square">
+            <a:spAutoFit/>
+          </a:bodyPr>
+          <a:lstStyle/>
+          <a:p>
+            <a:r>
+              <a:rPr sz="2400" b="1">
+                <a:solidFill>
+                  <a:srgbClr val="0E2841"/>
+                </a:solidFill>
+              </a:rPr>
               <a:t>8-module Nextflow preprocessing pipeline built; benchmarking underway.</a:t>
             </a:r>
           </a:p>
@@ -7172,7 +11028,7 @@
                   <a:srgbClr val="666666"/>
                 </a:solidFill>
               </a:rPr>
-              <a:t>Christina Magyar  ·  Thesis committee, Aug 2026  ·  Pipeline update</a:t>
+              <a:t>Christina Magyar  ·  Thesis committee, Aug 2026  ·  Aim 2 · Pipeline update</a:t>
             </a:r>
           </a:p>
         </p:txBody>
@@ -7206,7 +11062,7 @@
                   <a:srgbClr val="666666"/>
                 </a:solidFill>
               </a:rPr>
-              <a:t>7 / 7</a:t>
+              <a:t>9 / 12</a:t>
             </a:r>
           </a:p>
         </p:txBody>

--- a/slides/thesis_committee_slides.pptx
+++ b/slides/thesis_committee_slides.pptx
@@ -1149,7 +1149,7 @@
           <a:lstStyle/>
           <a:p>
             <a:r>
-              <a:t>HEADLINE RESULT. Extended pilot numbers (chr 1-8 + 20-22 for the 4 full-coverage panels; chr20-22 only for HOMOG and PEL_EAS — flagged with *). On the Mexican-like cohort (NATMXB track, teal): +25 MXB lifts NAT recall from 0.954 → 0.958 and F1 from 0.969 → 0.974 (cleanest single winner). On the Brazilian-like cohort (NAT track, orange): +25 MXB costs ~1% NAT recall (0.930 → 0.920) but bumps precision (0.981 → 0.990), so F1 is roughly flat. +50 MXB (HGDPMXB_FULL) costs more recall (0.902) with only marginal F1 benefit — 25 MXB is the sweet spot. PEL matches or beats HGDP on the Brazilian cohort. NAT_HOMOG (Q≥0.95 filter, donor-safe) performs comparably to HGDPMXB in the 3-chr subset we have — worth re-running with full coverage. Punchline: adding MXB is a clear win for a Mexican-cohort GWAS; matched-source reference (PEL for Brazilian) matters more than panel size.</a:t>
+              <a:t>HEADLINE RESULT. Extended pilot numbers (chr 1-8 + 20-22 for the 4 full-coverage panels; chr20-22 only for HOMOG and PEL_EAS — flagged with *). On the Mexican-like cohort (NATMXB track, teal): +25 MXB lifts NAT recall from 0.954 → 0.958 and F1 from 0.969 → 0.974 (cleanest single winner). On the Brazilian-like cohort (NAT track, orange): +25 MXB costs ~1% NAT recall (0.930 → 0.920) but bumps precision (0.981 → 0.990), so F1 is roughly flat. +50 MXB (HGDPMXB_FULL) costs more recall (0.902) with only marginal F1 benefit — 25 MXB is the sweet spot. PEL matches or beats HGDP on the Brazilian cohort. NAT_HOMOG (HGDP + 1KG + MXB jointly filtered to Q≥0.95 by supervised ADMIXTURE — includes MXB samples but excludes admixed individuals) matches HGDPMXB on Mexican-cohort F1 (0.972) with full coverage. Punchline: adding MXB is a clear win for a Mexican-cohort GWAS; matched-source reference (PEL for Brazilian) matters more than panel size; HOMOG is the principled alternative when we want a stricter homogeneity criterion.</a:t>
             </a:r>
           </a:p>
           <a:p/>
@@ -1265,7 +1265,7 @@
           <a:lstStyle/>
           <a:p>
             <a:r>
-              <a:t>Complementary result. Same reference panels, but the admixed cohort's haplotypes were down-sampled to the ~385k autosomal Illumina GSA v3 positions before calling. NAT recall drops by only ~0.7-1.2% across panels — the panel ranking is preserved and the direction of every effect matches WGS. This matters because our REDIAL/COG cohorts are chip-genotyped, not WGS — so the WGS result generalizes. Michigan/1KG imputation is the post-committee validation step; today we can already recommend HGDPMXB (+25 MXB) for the Mexican-Latino LAI pipeline. NAT_HOMOG is a donor-safe backup that performs equivalently.</a:t>
+              <a:t>Complementary result. Same reference panels, but the admixed cohort's haplotypes were down-sampled to the ~385k autosomal Illumina GSA v3 positions before calling. NAT recall drops by only ~0.7-1.2% across panels — the panel ranking is preserved and the direction of every effect matches WGS. This matters because our REDIAL/COG cohorts are chip-genotyped, not WGS — so the WGS result generalizes. Michigan/1KG imputation is the post-committee validation step; today we can already recommend HGDPMXB (+25 MXB) for the Mexican-Latino LAI pipeline. NAT_HOMOG (Q≥0.95 across HGDP+1KG+MXB joint) matches HGDPMXB.</a:t>
             </a:r>
           </a:p>
         </p:txBody>
